--- a/docs/RenderEngine_Project_Overview.pptx
+++ b/docs/RenderEngine_Project_Overview.pptx
@@ -20,9 +20,10 @@
     <p:sldId id="268" r:id="rId14"/>
     <p:sldId id="269" r:id="rId15"/>
     <p:sldId id="270" r:id="rId16"/>
+    <p:sldId id="271" r:id="rId17"/>
   </p:sldIdLst>
   <p:notesMasterIdLst>
-    <p:notesMasterId r:id="rId17"/>
+    <p:notesMasterId r:id="rId18"/>
   </p:notesMasterIdLst>
   <p:sldSz cx="12192000" cy="6858000"/>
   <p:notesSz cx="6858000" cy="12192000"/>
@@ -1086,6 +1087,94 @@
 </p:notes>
 </file>
 
+<file path=ppt/notesSlides/notesSlide16.xml><?xml version="1.0" encoding="utf-8"?>
+<p:notes xmlns:a="http://schemas.openxmlformats.org/drawingml/2006/main" xmlns:r="http://schemas.openxmlformats.org/officeDocument/2006/relationships" xmlns:p="http://schemas.openxmlformats.org/presentationml/2006/main">
+  <p:cSld>
+    <p:spTree>
+      <p:nvGrpSpPr>
+        <p:cNvPr id="1" name=""/>
+        <p:cNvGrpSpPr/>
+        <p:nvPr/>
+      </p:nvGrpSpPr>
+      <p:grpSpPr>
+        <a:xfrm>
+          <a:off x="0" y="0"/>
+          <a:ext cx="0" cy="0"/>
+          <a:chOff x="0" y="0"/>
+          <a:chExt cx="0" cy="0"/>
+        </a:xfrm>
+      </p:grpSpPr>
+      <p:sp>
+        <p:nvSpPr>
+          <p:cNvPr id="2" name="Slide Image Placeholder 1"/>
+          <p:cNvSpPr>
+            <a:spLocks noGrp="1" noRot="1" noChangeAspect="1"/>
+          </p:cNvSpPr>
+          <p:nvPr>
+            <p:ph type="sldImg"/>
+          </p:nvPr>
+        </p:nvSpPr>
+        <p:spPr/>
+      </p:sp>
+      <p:sp>
+        <p:nvSpPr>
+          <p:cNvPr id="3" name="Notes Placeholder 2"/>
+          <p:cNvSpPr>
+            <a:spLocks noGrp="1"/>
+          </p:cNvSpPr>
+          <p:nvPr>
+            <p:ph type="body" idx="1"/>
+          </p:nvPr>
+        </p:nvSpPr>
+        <p:spPr/>
+        <p:txBody>
+          <a:bodyPr/>
+          <a:lstStyle/>
+          <a:p>
+            <a:r>
+              <a:rPr lang="en-US" dirty="0"/>
+              <a:t/>
+            </a:r>
+            <a:endParaRPr lang="en-US" dirty="0"/>
+          </a:p>
+        </p:txBody>
+      </p:sp>
+      <p:sp>
+        <p:nvSpPr>
+          <p:cNvPr id="4" name="Slide Number Placeholder 3"/>
+          <p:cNvSpPr>
+            <a:spLocks noGrp="1"/>
+          </p:cNvSpPr>
+          <p:nvPr>
+            <p:ph type="sldNum" sz="quarter" idx="10"/>
+          </p:nvPr>
+        </p:nvSpPr>
+        <p:spPr/>
+        <p:txBody>
+          <a:bodyPr/>
+          <a:lstStyle/>
+          <a:p>
+            <a:fld id="{F7021451-1387-4CA6-816F-3879F97B5CBC}" type="slidenum">
+              <a:rPr lang="en-US"/>
+              <a:t>16</a:t>
+            </a:fld>
+            <a:endParaRPr lang="en-US"/>
+          </a:p>
+        </p:txBody>
+      </p:sp>
+    </p:spTree>
+    <p:extLst>
+      <p:ext uri="{BB962C8B-B14F-4D97-AF65-F5344CB8AC3E}">
+        <p14:creationId xmlns:p14="http://schemas.microsoft.com/office/powerpoint/2010/main" val="1024086991"/>
+      </p:ext>
+    </p:extLst>
+  </p:cSld>
+  <p:clrMapOvr>
+    <a:masterClrMapping/>
+  </p:clrMapOvr>
+</p:notes>
+</file>
+
 <file path=ppt/notesSlides/notesSlide2.xml><?xml version="1.0" encoding="utf-8"?>
 <p:notes xmlns:a="http://schemas.openxmlformats.org/drawingml/2006/main" xmlns:r="http://schemas.openxmlformats.org/officeDocument/2006/relationships" xmlns:p="http://schemas.openxmlformats.org/presentationml/2006/main">
   <p:cSld>
@@ -5376,7 +5465,7 @@
                   <a:srgbClr val="E9F2FF"/>
                 </a:solidFill>
               </a:rPr>
-              <a:t>11  项目中的 C++ 核心知识点</a:t>
+              <a:t>11  本阶段升级：Bounds 与 RenderQueue</a:t>
             </a:r>
             <a:endParaRPr lang="en-US" sz="2500" dirty="0"/>
           </a:p>
@@ -5412,7 +5501,7 @@
                   <a:srgbClr val="96A9C2"/>
                 </a:solidFill>
               </a:rPr>
-              <a:t>语言特性不是孤立技巧，而是用来表达所有权、依赖和数据边界</a:t>
+              <a:t>把“场景里有什么”转换成“这一帧真正需要画什么”</a:t>
             </a:r>
             <a:endParaRPr lang="en-US" sz="1050" dirty="0"/>
           </a:p>
@@ -5426,15 +5515,520 @@
         </p:nvSpPr>
         <p:spPr>
           <a:xfrm>
-            <a:off x="566928" y="1234440"/>
-            <a:ext cx="3520440" cy="1920240"/>
+            <a:off x="502920" y="1417320"/>
+            <a:ext cx="2103120" cy="822960"/>
           </a:xfrm>
           <a:prstGeom prst="roundRect">
             <a:avLst>
-              <a:gd name="adj" fmla="val 2857"/>
+              <a:gd name="adj" fmla="val 5556"/>
             </a:avLst>
           </a:prstGeom>
           <a:solidFill>
+            <a:srgbClr val="FFB45A">
+              <a:alpha val="17000"/>
+            </a:srgbClr>
+          </a:solidFill>
+          <a:ln w="15240">
+            <a:solidFill>
+              <a:srgbClr val="FFB45A"/>
+            </a:solidFill>
+            <a:prstDash val="solid"/>
+          </a:ln>
+        </p:spPr>
+      </p:sp>
+      <p:sp>
+        <p:nvSpPr>
+          <p:cNvPr id="5" name="Text 3"/>
+          <p:cNvSpPr/>
+          <p:nvPr/>
+        </p:nvSpPr>
+        <p:spPr>
+          <a:xfrm>
+            <a:off x="594360" y="1508760"/>
+            <a:ext cx="1920240" cy="640080"/>
+          </a:xfrm>
+          <a:prstGeom prst="rect">
+            <a:avLst/>
+          </a:prstGeom>
+          <a:noFill/>
+          <a:ln/>
+        </p:spPr>
+        <p:txBody>
+          <a:bodyPr wrap="square" lIns="0" tIns="0" rIns="0" bIns="0" rtlCol="0" anchor="ctr">
+            <a:normAutofit/>
+          </a:bodyPr>
+          <a:lstStyle/>
+          <a:p>
+            <a:pPr algn="ctr" indent="0" marL="0">
+              <a:buNone/>
+            </a:pPr>
+            <a:r>
+              <a:rPr lang="en-US" sz="1050" b="1" dirty="0">
+                <a:solidFill>
+                  <a:srgbClr val="E9F2FF"/>
+                </a:solidFill>
+              </a:rPr>
+              <a:t>MeshAsset</a:t>
+            </a:r>
+            <a:endParaRPr lang="en-US" sz="1050" dirty="0"/>
+          </a:p>
+          <a:p>
+            <a:pPr algn="ctr" indent="0" marL="0">
+              <a:buNone/>
+            </a:pPr>
+            <a:r>
+              <a:rPr lang="en-US" sz="1050" b="1" dirty="0">
+                <a:solidFill>
+                  <a:srgbClr val="E9F2FF"/>
+                </a:solidFill>
+              </a:rPr>
+              <a:t>CPU Geometry + Local Bounds</a:t>
+            </a:r>
+            <a:endParaRPr lang="en-US" sz="1050" dirty="0"/>
+          </a:p>
+        </p:txBody>
+      </p:sp>
+      <p:sp>
+        <p:nvSpPr>
+          <p:cNvPr id="6" name="Shape 4"/>
+          <p:cNvSpPr/>
+          <p:nvPr/>
+        </p:nvSpPr>
+        <p:spPr>
+          <a:xfrm>
+            <a:off x="2971800" y="1417320"/>
+            <a:ext cx="2057400" cy="822960"/>
+          </a:xfrm>
+          <a:prstGeom prst="roundRect">
+            <a:avLst>
+              <a:gd name="adj" fmla="val 5556"/>
+            </a:avLst>
+          </a:prstGeom>
+          <a:solidFill>
+            <a:srgbClr val="5EE2A0">
+              <a:alpha val="17000"/>
+            </a:srgbClr>
+          </a:solidFill>
+          <a:ln w="15240">
+            <a:solidFill>
+              <a:srgbClr val="5EE2A0"/>
+            </a:solidFill>
+            <a:prstDash val="solid"/>
+          </a:ln>
+        </p:spPr>
+      </p:sp>
+      <p:sp>
+        <p:nvSpPr>
+          <p:cNvPr id="7" name="Text 5"/>
+          <p:cNvSpPr/>
+          <p:nvPr/>
+        </p:nvSpPr>
+        <p:spPr>
+          <a:xfrm>
+            <a:off x="3063240" y="1508760"/>
+            <a:ext cx="1874520" cy="640080"/>
+          </a:xfrm>
+          <a:prstGeom prst="rect">
+            <a:avLst/>
+          </a:prstGeom>
+          <a:noFill/>
+          <a:ln/>
+        </p:spPr>
+        <p:txBody>
+          <a:bodyPr wrap="square" lIns="0" tIns="0" rIns="0" bIns="0" rtlCol="0" anchor="ctr">
+            <a:normAutofit/>
+          </a:bodyPr>
+          <a:lstStyle/>
+          <a:p>
+            <a:pPr algn="ctr" indent="0" marL="0">
+              <a:buNone/>
+            </a:pPr>
+            <a:r>
+              <a:rPr lang="en-US" sz="1050" b="1" dirty="0">
+                <a:solidFill>
+                  <a:srgbClr val="E9F2FF"/>
+                </a:solidFill>
+              </a:rPr>
+              <a:t>Mesh Instance</a:t>
+            </a:r>
+            <a:endParaRPr lang="en-US" sz="1050" dirty="0"/>
+          </a:p>
+          <a:p>
+            <a:pPr algn="ctr" indent="0" marL="0">
+              <a:buNone/>
+            </a:pPr>
+            <a:r>
+              <a:rPr lang="en-US" sz="1050" b="1" dirty="0">
+                <a:solidFill>
+                  <a:srgbClr val="E9F2FF"/>
+                </a:solidFill>
+              </a:rPr>
+              <a:t>World Matrix + Resource</a:t>
+            </a:r>
+            <a:endParaRPr lang="en-US" sz="1050" dirty="0"/>
+          </a:p>
+        </p:txBody>
+      </p:sp>
+      <p:sp>
+        <p:nvSpPr>
+          <p:cNvPr id="8" name="Shape 6"/>
+          <p:cNvSpPr/>
+          <p:nvPr/>
+        </p:nvSpPr>
+        <p:spPr>
+          <a:xfrm>
+            <a:off x="5394960" y="1417320"/>
+            <a:ext cx="2103120" cy="822960"/>
+          </a:xfrm>
+          <a:prstGeom prst="roundRect">
+            <a:avLst>
+              <a:gd name="adj" fmla="val 5556"/>
+            </a:avLst>
+          </a:prstGeom>
+          <a:solidFill>
+            <a:srgbClr val="4F8CFF">
+              <a:alpha val="17000"/>
+            </a:srgbClr>
+          </a:solidFill>
+          <a:ln w="15240">
+            <a:solidFill>
+              <a:srgbClr val="4F8CFF"/>
+            </a:solidFill>
+            <a:prstDash val="solid"/>
+          </a:ln>
+        </p:spPr>
+      </p:sp>
+      <p:sp>
+        <p:nvSpPr>
+          <p:cNvPr id="9" name="Text 7"/>
+          <p:cNvSpPr/>
+          <p:nvPr/>
+        </p:nvSpPr>
+        <p:spPr>
+          <a:xfrm>
+            <a:off x="5486400" y="1508760"/>
+            <a:ext cx="1920240" cy="640080"/>
+          </a:xfrm>
+          <a:prstGeom prst="rect">
+            <a:avLst/>
+          </a:prstGeom>
+          <a:noFill/>
+          <a:ln/>
+        </p:spPr>
+        <p:txBody>
+          <a:bodyPr wrap="square" lIns="0" tIns="0" rIns="0" bIns="0" rtlCol="0" anchor="ctr">
+            <a:normAutofit/>
+          </a:bodyPr>
+          <a:lstStyle/>
+          <a:p>
+            <a:pPr algn="ctr" indent="0" marL="0">
+              <a:buNone/>
+            </a:pPr>
+            <a:r>
+              <a:rPr lang="en-US" sz="1050" b="1" dirty="0">
+                <a:solidFill>
+                  <a:srgbClr val="E9F2FF"/>
+                </a:solidFill>
+              </a:rPr>
+              <a:t>RenderQueueBuilder</a:t>
+            </a:r>
+            <a:endParaRPr lang="en-US" sz="1050" dirty="0"/>
+          </a:p>
+          <a:p>
+            <a:pPr algn="ctr" indent="0" marL="0">
+              <a:buNone/>
+            </a:pPr>
+            <a:r>
+              <a:rPr lang="en-US" sz="1050" b="1" dirty="0">
+                <a:solidFill>
+                  <a:srgbClr val="E9F2FF"/>
+                </a:solidFill>
+              </a:rPr>
+              <a:t>World Bounds + Frustum</a:t>
+            </a:r>
+            <a:endParaRPr lang="en-US" sz="1050" dirty="0"/>
+          </a:p>
+        </p:txBody>
+      </p:sp>
+      <p:sp>
+        <p:nvSpPr>
+          <p:cNvPr id="10" name="Shape 8"/>
+          <p:cNvSpPr/>
+          <p:nvPr/>
+        </p:nvSpPr>
+        <p:spPr>
+          <a:xfrm>
+            <a:off x="7863840" y="1417320"/>
+            <a:ext cx="1691640" cy="822960"/>
+          </a:xfrm>
+          <a:prstGeom prst="roundRect">
+            <a:avLst>
+              <a:gd name="adj" fmla="val 5556"/>
+            </a:avLst>
+          </a:prstGeom>
+          <a:solidFill>
+            <a:srgbClr val="21D4FD">
+              <a:alpha val="17000"/>
+            </a:srgbClr>
+          </a:solidFill>
+          <a:ln w="15240">
+            <a:solidFill>
+              <a:srgbClr val="21D4FD"/>
+            </a:solidFill>
+            <a:prstDash val="solid"/>
+          </a:ln>
+        </p:spPr>
+      </p:sp>
+      <p:sp>
+        <p:nvSpPr>
+          <p:cNvPr id="11" name="Text 9"/>
+          <p:cNvSpPr/>
+          <p:nvPr/>
+        </p:nvSpPr>
+        <p:spPr>
+          <a:xfrm>
+            <a:off x="7955280" y="1508760"/>
+            <a:ext cx="1508760" cy="640080"/>
+          </a:xfrm>
+          <a:prstGeom prst="rect">
+            <a:avLst/>
+          </a:prstGeom>
+          <a:noFill/>
+          <a:ln/>
+        </p:spPr>
+        <p:txBody>
+          <a:bodyPr wrap="square" lIns="0" tIns="0" rIns="0" bIns="0" rtlCol="0" anchor="ctr">
+            <a:normAutofit/>
+          </a:bodyPr>
+          <a:lstStyle/>
+          <a:p>
+            <a:pPr algn="ctr" indent="0" marL="0">
+              <a:buNone/>
+            </a:pPr>
+            <a:r>
+              <a:rPr lang="en-US" sz="1050" b="1" dirty="0">
+                <a:solidFill>
+                  <a:srgbClr val="E9F2FF"/>
+                </a:solidFill>
+              </a:rPr>
+              <a:t>RenderItem</a:t>
+            </a:r>
+            <a:endParaRPr lang="en-US" sz="1050" dirty="0"/>
+          </a:p>
+          <a:p>
+            <a:pPr algn="ctr" indent="0" marL="0">
+              <a:buNone/>
+            </a:pPr>
+            <a:r>
+              <a:rPr lang="en-US" sz="1050" b="1" dirty="0">
+                <a:solidFill>
+                  <a:srgbClr val="E9F2FF"/>
+                </a:solidFill>
+              </a:rPr>
+              <a:t>Frame Snapshot</a:t>
+            </a:r>
+            <a:endParaRPr lang="en-US" sz="1050" dirty="0"/>
+          </a:p>
+        </p:txBody>
+      </p:sp>
+      <p:sp>
+        <p:nvSpPr>
+          <p:cNvPr id="12" name="Shape 10"/>
+          <p:cNvSpPr/>
+          <p:nvPr/>
+        </p:nvSpPr>
+        <p:spPr>
+          <a:xfrm>
+            <a:off x="9921240" y="1417320"/>
+            <a:ext cx="1828800" cy="822960"/>
+          </a:xfrm>
+          <a:prstGeom prst="roundRect">
+            <a:avLst>
+              <a:gd name="adj" fmla="val 5556"/>
+            </a:avLst>
+          </a:prstGeom>
+          <a:solidFill>
+            <a:srgbClr val="B78CFF">
+              <a:alpha val="17000"/>
+            </a:srgbClr>
+          </a:solidFill>
+          <a:ln w="15240">
+            <a:solidFill>
+              <a:srgbClr val="B78CFF"/>
+            </a:solidFill>
+            <a:prstDash val="solid"/>
+          </a:ln>
+        </p:spPr>
+      </p:sp>
+      <p:sp>
+        <p:nvSpPr>
+          <p:cNvPr id="13" name="Text 11"/>
+          <p:cNvSpPr/>
+          <p:nvPr/>
+        </p:nvSpPr>
+        <p:spPr>
+          <a:xfrm>
+            <a:off x="10012680" y="1508760"/>
+            <a:ext cx="1645920" cy="640080"/>
+          </a:xfrm>
+          <a:prstGeom prst="rect">
+            <a:avLst/>
+          </a:prstGeom>
+          <a:noFill/>
+          <a:ln/>
+        </p:spPr>
+        <p:txBody>
+          <a:bodyPr wrap="square" lIns="0" tIns="0" rIns="0" bIns="0" rtlCol="0" anchor="ctr">
+            <a:normAutofit/>
+          </a:bodyPr>
+          <a:lstStyle/>
+          <a:p>
+            <a:pPr algn="ctr" indent="0" marL="0">
+              <a:buNone/>
+            </a:pPr>
+            <a:r>
+              <a:rPr lang="en-US" sz="1050" b="1" dirty="0">
+                <a:solidFill>
+                  <a:srgbClr val="E9F2FF"/>
+                </a:solidFill>
+              </a:rPr>
+              <a:t>RenderQueue</a:t>
+            </a:r>
+            <a:endParaRPr lang="en-US" sz="1050" dirty="0"/>
+          </a:p>
+          <a:p>
+            <a:pPr algn="ctr" indent="0" marL="0">
+              <a:buNone/>
+            </a:pPr>
+            <a:r>
+              <a:rPr lang="en-US" sz="1050" b="1" dirty="0">
+                <a:solidFill>
+                  <a:srgbClr val="E9F2FF"/>
+                </a:solidFill>
+              </a:rPr>
+              <a:t>Shadow / Opaque / Transparent</a:t>
+            </a:r>
+            <a:endParaRPr lang="en-US" sz="1050" dirty="0"/>
+          </a:p>
+        </p:txBody>
+      </p:sp>
+      <p:sp>
+        <p:nvSpPr>
+          <p:cNvPr id="14" name="Shape 12"/>
+          <p:cNvSpPr/>
+          <p:nvPr/>
+        </p:nvSpPr>
+        <p:spPr>
+          <a:xfrm>
+            <a:off x="2606040" y="1828800"/>
+            <a:ext cx="320040" cy="0"/>
+          </a:xfrm>
+          <a:prstGeom prst="line">
+            <a:avLst/>
+          </a:prstGeom>
+          <a:noFill/>
+          <a:ln w="17780">
+            <a:solidFill>
+              <a:srgbClr val="96A9C2"/>
+            </a:solidFill>
+            <a:prstDash val="solid"/>
+            <a:headEnd type="none"/>
+            <a:tailEnd type="triangle"/>
+          </a:ln>
+        </p:spPr>
+      </p:sp>
+      <p:sp>
+        <p:nvSpPr>
+          <p:cNvPr id="15" name="Shape 13"/>
+          <p:cNvSpPr/>
+          <p:nvPr/>
+        </p:nvSpPr>
+        <p:spPr>
+          <a:xfrm>
+            <a:off x="5029200" y="1828800"/>
+            <a:ext cx="320040" cy="0"/>
+          </a:xfrm>
+          <a:prstGeom prst="line">
+            <a:avLst/>
+          </a:prstGeom>
+          <a:noFill/>
+          <a:ln w="17780">
+            <a:solidFill>
+              <a:srgbClr val="96A9C2"/>
+            </a:solidFill>
+            <a:prstDash val="solid"/>
+            <a:headEnd type="none"/>
+            <a:tailEnd type="triangle"/>
+          </a:ln>
+        </p:spPr>
+      </p:sp>
+      <p:sp>
+        <p:nvSpPr>
+          <p:cNvPr id="16" name="Shape 14"/>
+          <p:cNvSpPr/>
+          <p:nvPr/>
+        </p:nvSpPr>
+        <p:spPr>
+          <a:xfrm>
+            <a:off x="7498080" y="1828800"/>
+            <a:ext cx="320040" cy="0"/>
+          </a:xfrm>
+          <a:prstGeom prst="line">
+            <a:avLst/>
+          </a:prstGeom>
+          <a:noFill/>
+          <a:ln w="17780">
+            <a:solidFill>
+              <a:srgbClr val="96A9C2"/>
+            </a:solidFill>
+            <a:prstDash val="solid"/>
+            <a:headEnd type="none"/>
+            <a:tailEnd type="triangle"/>
+          </a:ln>
+        </p:spPr>
+      </p:sp>
+      <p:sp>
+        <p:nvSpPr>
+          <p:cNvPr id="17" name="Shape 15"/>
+          <p:cNvSpPr/>
+          <p:nvPr/>
+        </p:nvSpPr>
+        <p:spPr>
+          <a:xfrm>
+            <a:off x="9555480" y="1828800"/>
+            <a:ext cx="320040" cy="0"/>
+          </a:xfrm>
+          <a:prstGeom prst="line">
+            <a:avLst/>
+          </a:prstGeom>
+          <a:noFill/>
+          <a:ln w="17780">
+            <a:solidFill>
+              <a:srgbClr val="96A9C2"/>
+            </a:solidFill>
+            <a:prstDash val="solid"/>
+            <a:headEnd type="none"/>
+            <a:tailEnd type="triangle"/>
+          </a:ln>
+        </p:spPr>
+      </p:sp>
+      <p:sp>
+        <p:nvSpPr>
+          <p:cNvPr id="18" name="Shape 16"/>
+          <p:cNvSpPr/>
+          <p:nvPr/>
+        </p:nvSpPr>
+        <p:spPr>
+          <a:xfrm>
+            <a:off x="594360" y="2788920"/>
+            <a:ext cx="3429000" cy="1965960"/>
+          </a:xfrm>
+          <a:prstGeom prst="roundRect">
+            <a:avLst>
+              <a:gd name="adj" fmla="val 2791"/>
+            </a:avLst>
+          </a:prstGeom>
+          <a:solidFill>
             <a:srgbClr val="0F1C2E"/>
           </a:solidFill>
           <a:ln w="12700">
@@ -5447,39 +6041,39 @@
       </p:sp>
       <p:sp>
         <p:nvSpPr>
-          <p:cNvPr id="5" name="Shape 3"/>
-          <p:cNvSpPr/>
-          <p:nvPr/>
-        </p:nvSpPr>
-        <p:spPr>
-          <a:xfrm>
-            <a:off x="566928" y="1234440"/>
-            <a:ext cx="54864" cy="1920240"/>
-          </a:xfrm>
-          <a:prstGeom prst="rect">
-            <a:avLst/>
-          </a:prstGeom>
-          <a:solidFill>
-            <a:srgbClr val="5EE2A0"/>
+          <p:cNvPr id="19" name="Shape 17"/>
+          <p:cNvSpPr/>
+          <p:nvPr/>
+        </p:nvSpPr>
+        <p:spPr>
+          <a:xfrm>
+            <a:off x="594360" y="2788920"/>
+            <a:ext cx="54864" cy="1965960"/>
+          </a:xfrm>
+          <a:prstGeom prst="rect">
+            <a:avLst/>
+          </a:prstGeom>
+          <a:solidFill>
+            <a:srgbClr val="FFB45A"/>
           </a:solidFill>
           <a:ln w="12700">
             <a:solidFill>
-              <a:srgbClr val="5EE2A0"/>
-            </a:solidFill>
-            <a:prstDash val="solid"/>
-          </a:ln>
-        </p:spPr>
-      </p:sp>
-      <p:sp>
-        <p:nvSpPr>
-          <p:cNvPr id="6" name="Text 4"/>
-          <p:cNvSpPr/>
-          <p:nvPr/>
-        </p:nvSpPr>
-        <p:spPr>
-          <a:xfrm>
-            <a:off x="768096" y="1399032"/>
-            <a:ext cx="3191256" cy="274320"/>
+              <a:srgbClr val="FFB45A"/>
+            </a:solidFill>
+            <a:prstDash val="solid"/>
+          </a:ln>
+        </p:spPr>
+      </p:sp>
+      <p:sp>
+        <p:nvSpPr>
+          <p:cNvPr id="20" name="Text 18"/>
+          <p:cNvSpPr/>
+          <p:nvPr/>
+        </p:nvSpPr>
+        <p:spPr>
+          <a:xfrm>
+            <a:off x="795528" y="2953512"/>
+            <a:ext cx="3099816" cy="274320"/>
           </a:xfrm>
           <a:prstGeom prst="rect">
             <a:avLst/>
@@ -5500,7 +6094,7 @@
                   <a:srgbClr val="E9F2FF"/>
                 </a:solidFill>
               </a:rPr>
-              <a:t>RAII / unique_ptr</a:t>
+              <a:t>Bounds 与内存优化</a:t>
             </a:r>
             <a:endParaRPr lang="en-US" sz="1400" dirty="0"/>
           </a:p>
@@ -5508,14 +6102,14 @@
       </p:sp>
       <p:sp>
         <p:nvSpPr>
-          <p:cNvPr id="7" name="Text 5"/>
-          <p:cNvSpPr/>
-          <p:nvPr/>
-        </p:nvSpPr>
-        <p:spPr>
-          <a:xfrm>
-            <a:off x="768096" y="1801368"/>
-            <a:ext cx="3154680" cy="1225296"/>
+          <p:cNvPr id="21" name="Text 19"/>
+          <p:cNvSpPr/>
+          <p:nvPr/>
+        </p:nvSpPr>
+        <p:spPr>
+          <a:xfrm>
+            <a:off x="795528" y="3355848"/>
+            <a:ext cx="3063240" cy="1271016"/>
           </a:xfrm>
           <a:prstGeom prst="rect">
             <a:avLst/>
@@ -5538,7 +6132,7 @@
                   <a:srgbClr val="96A9C2"/>
                 </a:solidFill>
               </a:rPr>
-              <a:t>RenderTarget 独占 attachment</a:t>
+              <a:t>Assimp 导入时计算 local AABB</a:t>
             </a:r>
             <a:endParaRPr lang="en-US" sz="1050" dirty="0"/>
           </a:p>
@@ -5552,7 +6146,7 @@
                   <a:srgbClr val="96A9C2"/>
                 </a:solidFill>
               </a:rPr>
-              <a:t>Renderer 独占子系统</a:t>
+              <a:t>实例不再复制 vertices / indices</a:t>
             </a:r>
             <a:endParaRPr lang="en-US" sz="1050" dirty="0"/>
           </a:p>
@@ -5566,7 +6160,7 @@
                   <a:srgbClr val="96A9C2"/>
                 </a:solidFill>
               </a:rPr>
-              <a:t>析构自动释放 GPU wrapper</a:t>
+              <a:t>worldBounds = localBounds × worldMatrix</a:t>
             </a:r>
             <a:endParaRPr lang="en-US" sz="1050" dirty="0"/>
           </a:p>
@@ -5580,26 +6174,26 @@
                   <a:srgbClr val="96A9C2"/>
                 </a:solidFill>
               </a:rPr>
-              <a:t>禁止复制表达唯一所有权</a:t>
-            </a:r>
-            <a:endParaRPr lang="en-US" sz="1050" dirty="0"/>
-          </a:p>
-        </p:txBody>
-      </p:sp>
-      <p:sp>
-        <p:nvSpPr>
-          <p:cNvPr id="8" name="Shape 6"/>
-          <p:cNvSpPr/>
-          <p:nvPr/>
-        </p:nvSpPr>
-        <p:spPr>
-          <a:xfrm>
-            <a:off x="4325112" y="1234440"/>
-            <a:ext cx="3520440" cy="1920240"/>
+              <a:t>为裁剪、LOD、调试统一数据来源</a:t>
+            </a:r>
+            <a:endParaRPr lang="en-US" sz="1050" dirty="0"/>
+          </a:p>
+        </p:txBody>
+      </p:sp>
+      <p:sp>
+        <p:nvSpPr>
+          <p:cNvPr id="22" name="Shape 20"/>
+          <p:cNvSpPr/>
+          <p:nvPr/>
+        </p:nvSpPr>
+        <p:spPr>
+          <a:xfrm>
+            <a:off x="4370832" y="2788920"/>
+            <a:ext cx="3429000" cy="1965960"/>
           </a:xfrm>
           <a:prstGeom prst="roundRect">
             <a:avLst>
-              <a:gd name="adj" fmla="val 2857"/>
+              <a:gd name="adj" fmla="val 2791"/>
             </a:avLst>
           </a:prstGeom>
           <a:solidFill>
@@ -5615,39 +6209,39 @@
       </p:sp>
       <p:sp>
         <p:nvSpPr>
-          <p:cNvPr id="9" name="Shape 7"/>
-          <p:cNvSpPr/>
-          <p:nvPr/>
-        </p:nvSpPr>
-        <p:spPr>
-          <a:xfrm>
-            <a:off x="4325112" y="1234440"/>
-            <a:ext cx="54864" cy="1920240"/>
-          </a:xfrm>
-          <a:prstGeom prst="rect">
-            <a:avLst/>
-          </a:prstGeom>
-          <a:solidFill>
-            <a:srgbClr val="4F8CFF"/>
+          <p:cNvPr id="23" name="Shape 21"/>
+          <p:cNvSpPr/>
+          <p:nvPr/>
+        </p:nvSpPr>
+        <p:spPr>
+          <a:xfrm>
+            <a:off x="4370832" y="2788920"/>
+            <a:ext cx="54864" cy="1965960"/>
+          </a:xfrm>
+          <a:prstGeom prst="rect">
+            <a:avLst/>
+          </a:prstGeom>
+          <a:solidFill>
+            <a:srgbClr val="21D4FD"/>
           </a:solidFill>
           <a:ln w="12700">
             <a:solidFill>
-              <a:srgbClr val="4F8CFF"/>
-            </a:solidFill>
-            <a:prstDash val="solid"/>
-          </a:ln>
-        </p:spPr>
-      </p:sp>
-      <p:sp>
-        <p:nvSpPr>
-          <p:cNvPr id="10" name="Text 8"/>
-          <p:cNvSpPr/>
-          <p:nvPr/>
-        </p:nvSpPr>
-        <p:spPr>
-          <a:xfrm>
-            <a:off x="4526280" y="1399032"/>
-            <a:ext cx="3191256" cy="274320"/>
+              <a:srgbClr val="21D4FD"/>
+            </a:solidFill>
+            <a:prstDash val="solid"/>
+          </a:ln>
+        </p:spPr>
+      </p:sp>
+      <p:sp>
+        <p:nvSpPr>
+          <p:cNvPr id="24" name="Text 22"/>
+          <p:cNvSpPr/>
+          <p:nvPr/>
+        </p:nvSpPr>
+        <p:spPr>
+          <a:xfrm>
+            <a:off x="4572000" y="2953512"/>
+            <a:ext cx="3099816" cy="274320"/>
           </a:xfrm>
           <a:prstGeom prst="rect">
             <a:avLst/>
@@ -5668,7 +6262,7 @@
                   <a:srgbClr val="E9F2FF"/>
                 </a:solidFill>
               </a:rPr>
-              <a:t>shared_ptr / Cache</a:t>
+              <a:t>裁剪与排序</a:t>
             </a:r>
             <a:endParaRPr lang="en-US" sz="1400" dirty="0"/>
           </a:p>
@@ -5676,14 +6270,14 @@
       </p:sp>
       <p:sp>
         <p:nvSpPr>
-          <p:cNvPr id="11" name="Text 9"/>
-          <p:cNvSpPr/>
-          <p:nvPr/>
-        </p:nvSpPr>
-        <p:spPr>
-          <a:xfrm>
-            <a:off x="4526280" y="1801368"/>
-            <a:ext cx="3154680" cy="1225296"/>
+          <p:cNvPr id="25" name="Text 23"/>
+          <p:cNvSpPr/>
+          <p:nvPr/>
+        </p:nvSpPr>
+        <p:spPr>
+          <a:xfrm>
+            <a:off x="4572000" y="3355848"/>
+            <a:ext cx="3063240" cy="1271016"/>
           </a:xfrm>
           <a:prstGeom prst="rect">
             <a:avLst/>
@@ -5706,7 +6300,7 @@
                   <a:srgbClr val="96A9C2"/>
                 </a:solidFill>
               </a:rPr>
-              <a:t>ModelAsset、MaterialAsset、Texture2D 跨系统共享</a:t>
+              <a:t>ViewProjection 提取六个平面</a:t>
             </a:r>
             <a:endParaRPr lang="en-US" sz="1050" dirty="0"/>
           </a:p>
@@ -5720,7 +6314,7 @@
                   <a:srgbClr val="96A9C2"/>
                 </a:solidFill>
               </a:rPr>
-              <a:t>AssetManager 保持缓存生命周期</a:t>
+              <a:t>AABB Frustum Culling</a:t>
             </a:r>
             <a:endParaRPr lang="en-US" sz="1050" dirty="0"/>
           </a:p>
@@ -5734,26 +6328,40 @@
                   <a:srgbClr val="96A9C2"/>
                 </a:solidFill>
               </a:rPr>
-              <a:t>实例只保存共享引用</a:t>
-            </a:r>
-            <a:endParaRPr lang="en-US" sz="1050" dirty="0"/>
-          </a:p>
-        </p:txBody>
-      </p:sp>
-      <p:sp>
-        <p:nvSpPr>
-          <p:cNvPr id="12" name="Shape 10"/>
-          <p:cNvSpPr/>
-          <p:nvPr/>
-        </p:nvSpPr>
-        <p:spPr>
-          <a:xfrm>
-            <a:off x="8083296" y="1234440"/>
-            <a:ext cx="3520440" cy="1920240"/>
+              <a:t>Opaque：Shader → Material → Mesh</a:t>
+            </a:r>
+            <a:endParaRPr lang="en-US" sz="1050" dirty="0"/>
+          </a:p>
+          <a:p>
+            <a:pPr indent="0" marL="0">
+              <a:buNone/>
+            </a:pPr>
+            <a:r>
+              <a:rPr lang="en-US" sz="1050" dirty="0">
+                <a:solidFill>
+                  <a:srgbClr val="96A9C2"/>
+                </a:solidFill>
+              </a:rPr>
+              <a:t>Transparent：距离从远到近</a:t>
+            </a:r>
+            <a:endParaRPr lang="en-US" sz="1050" dirty="0"/>
+          </a:p>
+        </p:txBody>
+      </p:sp>
+      <p:sp>
+        <p:nvSpPr>
+          <p:cNvPr id="26" name="Shape 24"/>
+          <p:cNvSpPr/>
+          <p:nvPr/>
+        </p:nvSpPr>
+        <p:spPr>
+          <a:xfrm>
+            <a:off x="8138160" y="2788920"/>
+            <a:ext cx="3429000" cy="1965960"/>
           </a:xfrm>
           <a:prstGeom prst="roundRect">
             <a:avLst>
-              <a:gd name="adj" fmla="val 2857"/>
+              <a:gd name="adj" fmla="val 2791"/>
             </a:avLst>
           </a:prstGeom>
           <a:solidFill>
@@ -5769,39 +6377,39 @@
       </p:sp>
       <p:sp>
         <p:nvSpPr>
-          <p:cNvPr id="13" name="Shape 11"/>
-          <p:cNvSpPr/>
-          <p:nvPr/>
-        </p:nvSpPr>
-        <p:spPr>
-          <a:xfrm>
-            <a:off x="8083296" y="1234440"/>
-            <a:ext cx="54864" cy="1920240"/>
-          </a:xfrm>
-          <a:prstGeom prst="rect">
-            <a:avLst/>
-          </a:prstGeom>
-          <a:solidFill>
-            <a:srgbClr val="21D4FD"/>
+          <p:cNvPr id="27" name="Shape 25"/>
+          <p:cNvSpPr/>
+          <p:nvPr/>
+        </p:nvSpPr>
+        <p:spPr>
+          <a:xfrm>
+            <a:off x="8138160" y="2788920"/>
+            <a:ext cx="54864" cy="1965960"/>
+          </a:xfrm>
+          <a:prstGeom prst="rect">
+            <a:avLst/>
+          </a:prstGeom>
+          <a:solidFill>
+            <a:srgbClr val="5EE2A0"/>
           </a:solidFill>
           <a:ln w="12700">
             <a:solidFill>
-              <a:srgbClr val="21D4FD"/>
-            </a:solidFill>
-            <a:prstDash val="solid"/>
-          </a:ln>
-        </p:spPr>
-      </p:sp>
-      <p:sp>
-        <p:nvSpPr>
-          <p:cNvPr id="14" name="Text 12"/>
-          <p:cNvSpPr/>
-          <p:nvPr/>
-        </p:nvSpPr>
-        <p:spPr>
-          <a:xfrm>
-            <a:off x="8284464" y="1399032"/>
-            <a:ext cx="3191256" cy="274320"/>
+              <a:srgbClr val="5EE2A0"/>
+            </a:solidFill>
+            <a:prstDash val="solid"/>
+          </a:ln>
+        </p:spPr>
+      </p:sp>
+      <p:sp>
+        <p:nvSpPr>
+          <p:cNvPr id="28" name="Text 26"/>
+          <p:cNvSpPr/>
+          <p:nvPr/>
+        </p:nvSpPr>
+        <p:spPr>
+          <a:xfrm>
+            <a:off x="8339328" y="2953512"/>
+            <a:ext cx="3099816" cy="274320"/>
           </a:xfrm>
           <a:prstGeom prst="rect">
             <a:avLst/>
@@ -5822,7 +6430,7 @@
                   <a:srgbClr val="E9F2FF"/>
                 </a:solidFill>
               </a:rPr>
-              <a:t>引用与依赖注入</a:t>
+              <a:t>Pass 消费队列</a:t>
             </a:r>
             <a:endParaRPr lang="en-US" sz="1400" dirty="0"/>
           </a:p>
@@ -5830,14 +6438,14 @@
       </p:sp>
       <p:sp>
         <p:nvSpPr>
-          <p:cNvPr id="15" name="Text 13"/>
-          <p:cNvSpPr/>
-          <p:nvPr/>
-        </p:nvSpPr>
-        <p:spPr>
-          <a:xfrm>
-            <a:off x="8284464" y="1801368"/>
-            <a:ext cx="3154680" cy="1225296"/>
+          <p:cNvPr id="29" name="Text 27"/>
+          <p:cNvSpPr/>
+          <p:nvPr/>
+        </p:nvSpPr>
+        <p:spPr>
+          <a:xfrm>
+            <a:off x="8339328" y="3355848"/>
+            <a:ext cx="3063240" cy="1271016"/>
           </a:xfrm>
           <a:prstGeom prst="rect">
             <a:avLst/>
@@ -5860,7 +6468,7 @@
                   <a:srgbClr val="96A9C2"/>
                 </a:solidFill>
               </a:rPr>
-              <a:t>RenderContext&amp; / AssetManager&amp;</a:t>
+              <a:t>Shadow Pass：shadowCasters</a:t>
             </a:r>
             <a:endParaRPr lang="en-US" sz="1050" dirty="0"/>
           </a:p>
@@ -5874,7 +6482,7 @@
                   <a:srgbClr val="96A9C2"/>
                 </a:solidFill>
               </a:rPr>
-              <a:t>依赖必须存在但不归本对象所有</a:t>
+              <a:t>PBR Pass：opaqueItems</a:t>
             </a:r>
             <a:endParaRPr lang="en-US" sz="1050" dirty="0"/>
           </a:p>
@@ -5888,74 +6496,67 @@
                   <a:srgbClr val="96A9C2"/>
                 </a:solidFill>
               </a:rPr>
-              <a:t>减少 singleton，提升可测试性</a:t>
-            </a:r>
-            <a:endParaRPr lang="en-US" sz="1050" dirty="0"/>
-          </a:p>
-        </p:txBody>
-      </p:sp>
-      <p:sp>
-        <p:nvSpPr>
-          <p:cNvPr id="16" name="Shape 14"/>
-          <p:cNvSpPr/>
-          <p:nvPr/>
-        </p:nvSpPr>
-        <p:spPr>
-          <a:xfrm>
-            <a:off x="566928" y="3474720"/>
-            <a:ext cx="3520440" cy="1920240"/>
+              <a:t>透明阶段关闭深度写入</a:t>
+            </a:r>
+            <a:endParaRPr lang="en-US" sz="1050" dirty="0"/>
+          </a:p>
+          <a:p>
+            <a:pPr indent="0" marL="0">
+              <a:buNone/>
+            </a:pPr>
+            <a:r>
+              <a:rPr lang="en-US" sz="1050" dirty="0">
+                <a:solidFill>
+                  <a:srgbClr val="96A9C2"/>
+                </a:solidFill>
+              </a:rPr>
+              <a:t>无方向光仍执行 IBL / Point / Emissive</a:t>
+            </a:r>
+            <a:endParaRPr lang="en-US" sz="1050" dirty="0"/>
+          </a:p>
+        </p:txBody>
+      </p:sp>
+      <p:sp>
+        <p:nvSpPr>
+          <p:cNvPr id="30" name="Shape 28"/>
+          <p:cNvSpPr/>
+          <p:nvPr/>
+        </p:nvSpPr>
+        <p:spPr>
+          <a:xfrm>
+            <a:off x="914400" y="5230368"/>
+            <a:ext cx="1554480" cy="310896"/>
           </a:xfrm>
           <a:prstGeom prst="roundRect">
             <a:avLst>
-              <a:gd name="adj" fmla="val 2857"/>
+              <a:gd name="adj" fmla="val 23529"/>
             </a:avLst>
           </a:prstGeom>
           <a:solidFill>
-            <a:srgbClr val="0F1C2E"/>
+            <a:srgbClr val="4F8CFF">
+              <a:alpha val="18000"/>
+            </a:srgbClr>
           </a:solidFill>
           <a:ln w="12700">
             <a:solidFill>
-              <a:srgbClr val="29405C"/>
-            </a:solidFill>
-            <a:prstDash val="solid"/>
-          </a:ln>
-        </p:spPr>
-      </p:sp>
-      <p:sp>
-        <p:nvSpPr>
-          <p:cNvPr id="17" name="Shape 15"/>
-          <p:cNvSpPr/>
-          <p:nvPr/>
-        </p:nvSpPr>
-        <p:spPr>
-          <a:xfrm>
-            <a:off x="566928" y="3474720"/>
-            <a:ext cx="54864" cy="1920240"/>
-          </a:xfrm>
-          <a:prstGeom prst="rect">
-            <a:avLst/>
-          </a:prstGeom>
-          <a:solidFill>
-            <a:srgbClr val="B78CFF"/>
-          </a:solidFill>
-          <a:ln w="12700">
-            <a:solidFill>
-              <a:srgbClr val="B78CFF"/>
-            </a:solidFill>
-            <a:prstDash val="solid"/>
-          </a:ln>
-        </p:spPr>
-      </p:sp>
-      <p:sp>
-        <p:nvSpPr>
-          <p:cNvPr id="18" name="Text 16"/>
-          <p:cNvSpPr/>
-          <p:nvPr/>
-        </p:nvSpPr>
-        <p:spPr>
-          <a:xfrm>
-            <a:off x="768096" y="3639312"/>
-            <a:ext cx="3191256" cy="274320"/>
+              <a:srgbClr val="4F8CFF">
+                <a:alpha val="65000"/>
+              </a:srgbClr>
+            </a:solidFill>
+            <a:prstDash val="solid"/>
+          </a:ln>
+        </p:spPr>
+      </p:sp>
+      <p:sp>
+        <p:nvSpPr>
+          <p:cNvPr id="31" name="Text 29"/>
+          <p:cNvSpPr/>
+          <p:nvPr/>
+        </p:nvSpPr>
+        <p:spPr>
+          <a:xfrm>
+            <a:off x="987552" y="5285232"/>
+            <a:ext cx="1408176" cy="155448"/>
           </a:xfrm>
           <a:prstGeom prst="rect">
             <a:avLst/>
@@ -5967,149 +6568,62 @@
           <a:bodyPr wrap="square" lIns="0" tIns="0" rIns="0" bIns="0" rtlCol="0" anchor="ctr"/>
           <a:lstStyle/>
           <a:p>
-            <a:pPr indent="0" marL="0">
-              <a:buNone/>
-            </a:pPr>
-            <a:r>
-              <a:rPr lang="en-US" sz="1400" b="1" dirty="0">
-                <a:solidFill>
-                  <a:srgbClr val="E9F2FF"/>
-                </a:solidFill>
-              </a:rPr>
-              <a:t>模板 + Lambda</a:t>
-            </a:r>
-            <a:endParaRPr lang="en-US" sz="1400" dirty="0"/>
-          </a:p>
-        </p:txBody>
-      </p:sp>
-      <p:sp>
-        <p:nvSpPr>
-          <p:cNvPr id="19" name="Text 17"/>
-          <p:cNvSpPr/>
-          <p:nvPr/>
-        </p:nvSpPr>
-        <p:spPr>
-          <a:xfrm>
-            <a:off x="768096" y="4041648"/>
-            <a:ext cx="3154680" cy="1225296"/>
-          </a:xfrm>
-          <a:prstGeom prst="rect">
-            <a:avLst/>
-          </a:prstGeom>
-          <a:noFill/>
-          <a:ln/>
-        </p:spPr>
-        <p:txBody>
-          <a:bodyPr wrap="square" lIns="254" tIns="254" rIns="254" bIns="254" rtlCol="0" anchor="t">
-            <a:normAutofit/>
-          </a:bodyPr>
-          <a:lstStyle/>
-          <a:p>
-            <a:pPr indent="0" marL="0">
-              <a:buNone/>
-            </a:pPr>
-            <a:r>
-              <a:rPr lang="en-US" sz="1050" dirty="0">
-                <a:solidFill>
-                  <a:srgbClr val="96A9C2"/>
-                </a:solidFill>
-              </a:rPr>
-              <a:t>RenderGraph::addPass&lt;T, Fn&gt;</a:t>
-            </a:r>
-            <a:endParaRPr lang="en-US" sz="1050" dirty="0"/>
-          </a:p>
-          <a:p>
-            <a:pPr indent="0" marL="0">
-              <a:buNone/>
-            </a:pPr>
-            <a:r>
-              <a:rPr lang="en-US" sz="1050" dirty="0">
-                <a:solidFill>
-                  <a:srgbClr val="96A9C2"/>
-                </a:solidFill>
-              </a:rPr>
-              <a:t>保存不同参数和执行函数</a:t>
-            </a:r>
-            <a:endParaRPr lang="en-US" sz="1050" dirty="0"/>
-          </a:p>
-          <a:p>
-            <a:pPr indent="0" marL="0">
-              <a:buNone/>
-            </a:pPr>
-            <a:r>
-              <a:rPr lang="en-US" sz="1050" dirty="0">
-                <a:solidFill>
-                  <a:srgbClr val="96A9C2"/>
-                </a:solidFill>
-              </a:rPr>
-              <a:t>统一通过虚函数 execute 调用</a:t>
-            </a:r>
-            <a:endParaRPr lang="en-US" sz="1050" dirty="0"/>
-          </a:p>
-        </p:txBody>
-      </p:sp>
-      <p:sp>
-        <p:nvSpPr>
-          <p:cNvPr id="20" name="Shape 18"/>
-          <p:cNvSpPr/>
-          <p:nvPr/>
-        </p:nvSpPr>
-        <p:spPr>
-          <a:xfrm>
-            <a:off x="4325112" y="3474720"/>
-            <a:ext cx="3520440" cy="1920240"/>
+            <a:pPr algn="ctr" indent="0" marL="0">
+              <a:buNone/>
+            </a:pPr>
+            <a:r>
+              <a:rPr lang="en-US" sz="900" b="1" dirty="0">
+                <a:solidFill>
+                  <a:srgbClr val="4F8CFF"/>
+                </a:solidFill>
+              </a:rPr>
+              <a:t>submitted = 2</a:t>
+            </a:r>
+            <a:endParaRPr lang="en-US" sz="900" dirty="0"/>
+          </a:p>
+        </p:txBody>
+      </p:sp>
+      <p:sp>
+        <p:nvSpPr>
+          <p:cNvPr id="32" name="Shape 30"/>
+          <p:cNvSpPr/>
+          <p:nvPr/>
+        </p:nvSpPr>
+        <p:spPr>
+          <a:xfrm>
+            <a:off x="2743200" y="5230368"/>
+            <a:ext cx="1417320" cy="310896"/>
           </a:xfrm>
           <a:prstGeom prst="roundRect">
             <a:avLst>
-              <a:gd name="adj" fmla="val 2857"/>
+              <a:gd name="adj" fmla="val 23529"/>
             </a:avLst>
           </a:prstGeom>
           <a:solidFill>
-            <a:srgbClr val="0F1C2E"/>
+            <a:srgbClr val="5EE2A0">
+              <a:alpha val="18000"/>
+            </a:srgbClr>
           </a:solidFill>
           <a:ln w="12700">
             <a:solidFill>
-              <a:srgbClr val="29405C"/>
-            </a:solidFill>
-            <a:prstDash val="solid"/>
-          </a:ln>
-        </p:spPr>
-      </p:sp>
-      <p:sp>
-        <p:nvSpPr>
-          <p:cNvPr id="21" name="Shape 19"/>
-          <p:cNvSpPr/>
-          <p:nvPr/>
-        </p:nvSpPr>
-        <p:spPr>
-          <a:xfrm>
-            <a:off x="4325112" y="3474720"/>
-            <a:ext cx="54864" cy="1920240"/>
-          </a:xfrm>
-          <a:prstGeom prst="rect">
-            <a:avLst/>
-          </a:prstGeom>
-          <a:solidFill>
-            <a:srgbClr val="FFB45A"/>
-          </a:solidFill>
-          <a:ln w="12700">
-            <a:solidFill>
-              <a:srgbClr val="FFB45A"/>
-            </a:solidFill>
-            <a:prstDash val="solid"/>
-          </a:ln>
-        </p:spPr>
-      </p:sp>
-      <p:sp>
-        <p:nvSpPr>
-          <p:cNvPr id="22" name="Text 20"/>
-          <p:cNvSpPr/>
-          <p:nvPr/>
-        </p:nvSpPr>
-        <p:spPr>
-          <a:xfrm>
-            <a:off x="4526280" y="3639312"/>
-            <a:ext cx="3191256" cy="274320"/>
+              <a:srgbClr val="5EE2A0">
+                <a:alpha val="65000"/>
+              </a:srgbClr>
+            </a:solidFill>
+            <a:prstDash val="solid"/>
+          </a:ln>
+        </p:spPr>
+      </p:sp>
+      <p:sp>
+        <p:nvSpPr>
+          <p:cNvPr id="33" name="Text 31"/>
+          <p:cNvSpPr/>
+          <p:nvPr/>
+        </p:nvSpPr>
+        <p:spPr>
+          <a:xfrm>
+            <a:off x="2816352" y="5285232"/>
+            <a:ext cx="1271016" cy="155448"/>
           </a:xfrm>
           <a:prstGeom prst="rect">
             <a:avLst/>
@@ -6121,149 +6635,129 @@
           <a:bodyPr wrap="square" lIns="0" tIns="0" rIns="0" bIns="0" rtlCol="0" anchor="ctr"/>
           <a:lstStyle/>
           <a:p>
-            <a:pPr indent="0" marL="0">
-              <a:buNone/>
-            </a:pPr>
-            <a:r>
-              <a:rPr lang="en-US" sz="1400" b="1" dirty="0">
-                <a:solidFill>
-                  <a:srgbClr val="E9F2FF"/>
-                </a:solidFill>
-              </a:rPr>
-              <a:t>多态与抽象接口</a:t>
-            </a:r>
-            <a:endParaRPr lang="en-US" sz="1400" dirty="0"/>
-          </a:p>
-        </p:txBody>
-      </p:sp>
-      <p:sp>
-        <p:nvSpPr>
-          <p:cNvPr id="23" name="Text 21"/>
-          <p:cNvSpPr/>
-          <p:nvPr/>
-        </p:nvSpPr>
-        <p:spPr>
-          <a:xfrm>
-            <a:off x="4526280" y="4041648"/>
-            <a:ext cx="3154680" cy="1225296"/>
-          </a:xfrm>
-          <a:prstGeom prst="rect">
-            <a:avLst/>
-          </a:prstGeom>
-          <a:noFill/>
-          <a:ln/>
-        </p:spPr>
-        <p:txBody>
-          <a:bodyPr wrap="square" lIns="254" tIns="254" rIns="254" bIns="254" rtlCol="0" anchor="t">
-            <a:normAutofit/>
-          </a:bodyPr>
-          <a:lstStyle/>
-          <a:p>
-            <a:pPr indent="0" marL="0">
-              <a:buNone/>
-            </a:pPr>
-            <a:r>
-              <a:rPr lang="en-US" sz="1050" dirty="0">
-                <a:solidFill>
-                  <a:srgbClr val="96A9C2"/>
-                </a:solidFill>
-              </a:rPr>
-              <a:t>RenderContext → OpenGLRenderContext</a:t>
-            </a:r>
-            <a:endParaRPr lang="en-US" sz="1050" dirty="0"/>
-          </a:p>
-          <a:p>
-            <a:pPr indent="0" marL="0">
-              <a:buNone/>
-            </a:pPr>
-            <a:r>
-              <a:rPr lang="en-US" sz="1050" dirty="0">
-                <a:solidFill>
-                  <a:srgbClr val="96A9C2"/>
-                </a:solidFill>
-              </a:rPr>
-              <a:t>Light → Direction / Point</a:t>
-            </a:r>
-            <a:endParaRPr lang="en-US" sz="1050" dirty="0"/>
-          </a:p>
-          <a:p>
-            <a:pPr indent="0" marL="0">
-              <a:buNone/>
-            </a:pPr>
-            <a:r>
-              <a:rPr lang="en-US" sz="1050" dirty="0">
-                <a:solidFill>
-                  <a:srgbClr val="96A9C2"/>
-                </a:solidFill>
-              </a:rPr>
-              <a:t>为替换后端和扩展类型保留边界</a:t>
-            </a:r>
-            <a:endParaRPr lang="en-US" sz="1050" dirty="0"/>
-          </a:p>
-        </p:txBody>
-      </p:sp>
-      <p:sp>
-        <p:nvSpPr>
-          <p:cNvPr id="24" name="Shape 22"/>
-          <p:cNvSpPr/>
-          <p:nvPr/>
-        </p:nvSpPr>
-        <p:spPr>
-          <a:xfrm>
-            <a:off x="8083296" y="3474720"/>
-            <a:ext cx="3520440" cy="1920240"/>
+            <a:pPr algn="ctr" indent="0" marL="0">
+              <a:buNone/>
+            </a:pPr>
+            <a:r>
+              <a:rPr lang="en-US" sz="900" b="1" dirty="0">
+                <a:solidFill>
+                  <a:srgbClr val="5EE2A0"/>
+                </a:solidFill>
+              </a:rPr>
+              <a:t>visible = 1</a:t>
+            </a:r>
+            <a:endParaRPr lang="en-US" sz="900" dirty="0"/>
+          </a:p>
+        </p:txBody>
+      </p:sp>
+      <p:sp>
+        <p:nvSpPr>
+          <p:cNvPr id="34" name="Shape 32"/>
+          <p:cNvSpPr/>
+          <p:nvPr/>
+        </p:nvSpPr>
+        <p:spPr>
+          <a:xfrm>
+            <a:off x="4434840" y="5230368"/>
+            <a:ext cx="1417320" cy="310896"/>
           </a:xfrm>
           <a:prstGeom prst="roundRect">
             <a:avLst>
-              <a:gd name="adj" fmla="val 2857"/>
+              <a:gd name="adj" fmla="val 23529"/>
             </a:avLst>
           </a:prstGeom>
           <a:solidFill>
-            <a:srgbClr val="0F1C2E"/>
+            <a:srgbClr val="FF6B7A">
+              <a:alpha val="18000"/>
+            </a:srgbClr>
           </a:solidFill>
           <a:ln w="12700">
             <a:solidFill>
-              <a:srgbClr val="29405C"/>
-            </a:solidFill>
-            <a:prstDash val="solid"/>
-          </a:ln>
-        </p:spPr>
-      </p:sp>
-      <p:sp>
-        <p:nvSpPr>
-          <p:cNvPr id="25" name="Shape 23"/>
-          <p:cNvSpPr/>
-          <p:nvPr/>
-        </p:nvSpPr>
-        <p:spPr>
-          <a:xfrm>
-            <a:off x="8083296" y="3474720"/>
-            <a:ext cx="54864" cy="1920240"/>
-          </a:xfrm>
-          <a:prstGeom prst="rect">
-            <a:avLst/>
-          </a:prstGeom>
-          <a:solidFill>
-            <a:srgbClr val="FF6B7A"/>
+              <a:srgbClr val="FF6B7A">
+                <a:alpha val="65000"/>
+              </a:srgbClr>
+            </a:solidFill>
+            <a:prstDash val="solid"/>
+          </a:ln>
+        </p:spPr>
+      </p:sp>
+      <p:sp>
+        <p:nvSpPr>
+          <p:cNvPr id="35" name="Text 33"/>
+          <p:cNvSpPr/>
+          <p:nvPr/>
+        </p:nvSpPr>
+        <p:spPr>
+          <a:xfrm>
+            <a:off x="4507992" y="5285232"/>
+            <a:ext cx="1271016" cy="155448"/>
+          </a:xfrm>
+          <a:prstGeom prst="rect">
+            <a:avLst/>
+          </a:prstGeom>
+          <a:noFill/>
+          <a:ln/>
+        </p:spPr>
+        <p:txBody>
+          <a:bodyPr wrap="square" lIns="0" tIns="0" rIns="0" bIns="0" rtlCol="0" anchor="ctr"/>
+          <a:lstStyle/>
+          <a:p>
+            <a:pPr algn="ctr" indent="0" marL="0">
+              <a:buNone/>
+            </a:pPr>
+            <a:r>
+              <a:rPr lang="en-US" sz="900" b="1" dirty="0">
+                <a:solidFill>
+                  <a:srgbClr val="FF6B7A"/>
+                </a:solidFill>
+              </a:rPr>
+              <a:t>culled = 1</a:t>
+            </a:r>
+            <a:endParaRPr lang="en-US" sz="900" dirty="0"/>
+          </a:p>
+        </p:txBody>
+      </p:sp>
+      <p:sp>
+        <p:nvSpPr>
+          <p:cNvPr id="36" name="Shape 34"/>
+          <p:cNvSpPr/>
+          <p:nvPr/>
+        </p:nvSpPr>
+        <p:spPr>
+          <a:xfrm>
+            <a:off x="6126480" y="5230368"/>
+            <a:ext cx="1691640" cy="310896"/>
+          </a:xfrm>
+          <a:prstGeom prst="roundRect">
+            <a:avLst>
+              <a:gd name="adj" fmla="val 23529"/>
+            </a:avLst>
+          </a:prstGeom>
+          <a:solidFill>
+            <a:srgbClr val="FFB45A">
+              <a:alpha val="18000"/>
+            </a:srgbClr>
           </a:solidFill>
           <a:ln w="12700">
             <a:solidFill>
-              <a:srgbClr val="FF6B7A"/>
-            </a:solidFill>
-            <a:prstDash val="solid"/>
-          </a:ln>
-        </p:spPr>
-      </p:sp>
-      <p:sp>
-        <p:nvSpPr>
-          <p:cNvPr id="26" name="Text 24"/>
-          <p:cNvSpPr/>
-          <p:nvPr/>
-        </p:nvSpPr>
-        <p:spPr>
-          <a:xfrm>
-            <a:off x="8284464" y="3639312"/>
-            <a:ext cx="3191256" cy="274320"/>
+              <a:srgbClr val="FFB45A">
+                <a:alpha val="65000"/>
+              </a:srgbClr>
+            </a:solidFill>
+            <a:prstDash val="solid"/>
+          </a:ln>
+        </p:spPr>
+      </p:sp>
+      <p:sp>
+        <p:nvSpPr>
+          <p:cNvPr id="37" name="Text 35"/>
+          <p:cNvSpPr/>
+          <p:nvPr/>
+        </p:nvSpPr>
+        <p:spPr>
+          <a:xfrm>
+            <a:off x="6199632" y="5285232"/>
+            <a:ext cx="1545336" cy="155448"/>
           </a:xfrm>
           <a:prstGeom prst="rect">
             <a:avLst/>
@@ -6275,98 +6769,85 @@
           <a:bodyPr wrap="square" lIns="0" tIns="0" rIns="0" bIns="0" rtlCol="0" anchor="ctr"/>
           <a:lstStyle/>
           <a:p>
-            <a:pPr indent="0" marL="0">
-              <a:buNone/>
-            </a:pPr>
-            <a:r>
-              <a:rPr lang="en-US" sz="1400" b="1" dirty="0">
-                <a:solidFill>
-                  <a:srgbClr val="E9F2FF"/>
-                </a:solidFill>
-              </a:rPr>
-              <a:t>STL 与数据结构</a:t>
-            </a:r>
-            <a:endParaRPr lang="en-US" sz="1400" dirty="0"/>
-          </a:p>
-        </p:txBody>
-      </p:sp>
-      <p:sp>
-        <p:nvSpPr>
-          <p:cNvPr id="27" name="Text 25"/>
-          <p:cNvSpPr/>
-          <p:nvPr/>
-        </p:nvSpPr>
-        <p:spPr>
-          <a:xfrm>
-            <a:off x="8284464" y="4041648"/>
-            <a:ext cx="3154680" cy="1225296"/>
-          </a:xfrm>
-          <a:prstGeom prst="rect">
-            <a:avLst/>
-          </a:prstGeom>
-          <a:noFill/>
-          <a:ln/>
-        </p:spPr>
-        <p:txBody>
-          <a:bodyPr wrap="square" lIns="254" tIns="254" rIns="254" bIns="254" rtlCol="0" anchor="t">
-            <a:normAutofit/>
-          </a:bodyPr>
-          <a:lstStyle/>
-          <a:p>
-            <a:pPr indent="0" marL="0">
-              <a:buNone/>
-            </a:pPr>
-            <a:r>
-              <a:rPr lang="en-US" sz="1050" dirty="0">
-                <a:solidFill>
-                  <a:srgbClr val="96A9C2"/>
-                </a:solidFill>
-              </a:rPr>
-              <a:t>vector：对象/顶点/pass</a:t>
-            </a:r>
-            <a:endParaRPr lang="en-US" sz="1050" dirty="0"/>
-          </a:p>
-          <a:p>
-            <a:pPr indent="0" marL="0">
-              <a:buNone/>
-            </a:pPr>
-            <a:r>
-              <a:rPr lang="en-US" sz="1050" dirty="0">
-                <a:solidFill>
-                  <a:srgbClr val="96A9C2"/>
-                </a:solidFill>
-              </a:rPr>
-              <a:t>unordered_map：资源缓存</a:t>
-            </a:r>
-            <a:endParaRPr lang="en-US" sz="1050" dirty="0"/>
-          </a:p>
-          <a:p>
-            <a:pPr indent="0" marL="0">
-              <a:buNone/>
-            </a:pPr>
-            <a:r>
-              <a:rPr lang="en-US" sz="1050" dirty="0">
-                <a:solidFill>
-                  <a:srgbClr val="96A9C2"/>
-                </a:solidFill>
-              </a:rPr>
-              <a:t>array：固定 Bloom mip 链</a:t>
-            </a:r>
-            <a:endParaRPr lang="en-US" sz="1050" dirty="0"/>
-          </a:p>
-          <a:p>
-            <a:pPr indent="0" marL="0">
-              <a:buNone/>
-            </a:pPr>
-            <a:r>
-              <a:rPr lang="en-US" sz="1050" dirty="0">
-                <a:solidFill>
-                  <a:srgbClr val="96A9C2"/>
-                </a:solidFill>
-              </a:rPr>
-              <a:t>move：转移资源所有权</a:t>
-            </a:r>
-            <a:endParaRPr lang="en-US" sz="1050" dirty="0"/>
+            <a:pPr algn="ctr" indent="0" marL="0">
+              <a:buNone/>
+            </a:pPr>
+            <a:r>
+              <a:rPr lang="en-US" sz="900" b="1" dirty="0">
+                <a:solidFill>
+                  <a:srgbClr val="FFB45A"/>
+                </a:solidFill>
+              </a:rPr>
+              <a:t>10288 triangles</a:t>
+            </a:r>
+            <a:endParaRPr lang="en-US" sz="900" dirty="0"/>
+          </a:p>
+        </p:txBody>
+      </p:sp>
+      <p:sp>
+        <p:nvSpPr>
+          <p:cNvPr id="38" name="Shape 36"/>
+          <p:cNvSpPr/>
+          <p:nvPr/>
+        </p:nvSpPr>
+        <p:spPr>
+          <a:xfrm>
+            <a:off x="8092440" y="5230368"/>
+            <a:ext cx="1691640" cy="310896"/>
+          </a:xfrm>
+          <a:prstGeom prst="roundRect">
+            <a:avLst>
+              <a:gd name="adj" fmla="val 23529"/>
+            </a:avLst>
+          </a:prstGeom>
+          <a:solidFill>
+            <a:srgbClr val="B78CFF">
+              <a:alpha val="18000"/>
+            </a:srgbClr>
+          </a:solidFill>
+          <a:ln w="12700">
+            <a:solidFill>
+              <a:srgbClr val="B78CFF">
+                <a:alpha val="65000"/>
+              </a:srgbClr>
+            </a:solidFill>
+            <a:prstDash val="solid"/>
+          </a:ln>
+        </p:spPr>
+      </p:sp>
+      <p:sp>
+        <p:nvSpPr>
+          <p:cNvPr id="39" name="Text 37"/>
+          <p:cNvSpPr/>
+          <p:nvPr/>
+        </p:nvSpPr>
+        <p:spPr>
+          <a:xfrm>
+            <a:off x="8165592" y="5285232"/>
+            <a:ext cx="1545336" cy="155448"/>
+          </a:xfrm>
+          <a:prstGeom prst="rect">
+            <a:avLst/>
+          </a:prstGeom>
+          <a:noFill/>
+          <a:ln/>
+        </p:spPr>
+        <p:txBody>
+          <a:bodyPr wrap="square" lIns="0" tIns="0" rIns="0" bIns="0" rtlCol="0" anchor="ctr"/>
+          <a:lstStyle/>
+          <a:p>
+            <a:pPr algn="ctr" indent="0" marL="0">
+              <a:buNone/>
+            </a:pPr>
+            <a:r>
+              <a:rPr lang="en-US" sz="900" b="1" dirty="0">
+                <a:solidFill>
+                  <a:srgbClr val="B78CFF"/>
+                </a:solidFill>
+              </a:rPr>
+              <a:t>1× GPU Upload</a:t>
+            </a:r>
+            <a:endParaRPr lang="en-US" sz="900" dirty="0"/>
           </a:p>
         </p:txBody>
       </p:sp>
@@ -6473,7 +6954,7 @@
                   <a:srgbClr val="E9F2FF"/>
                 </a:solidFill>
               </a:rPr>
-              <a:t>12  可诊断性与验证体系</a:t>
+              <a:t>12  项目中的 C++ 核心知识点</a:t>
             </a:r>
             <a:endParaRPr lang="en-US" sz="2500" dirty="0"/>
           </a:p>
@@ -6509,7 +6990,7 @@
                   <a:srgbClr val="96A9C2"/>
                 </a:solidFill>
               </a:rPr>
-              <a:t>目标：程序失败时直接看到原因，而不是只得到黑屏</a:t>
+              <a:t>语言特性不是孤立技巧，而是用来表达所有权、依赖和数据边界</a:t>
             </a:r>
             <a:endParaRPr lang="en-US" sz="1050" dirty="0"/>
           </a:p>
@@ -6523,12 +7004,12 @@
         </p:nvSpPr>
         <p:spPr>
           <a:xfrm>
-            <a:off x="594360" y="1325880"/>
-            <a:ext cx="3383280" cy="1965960"/>
+            <a:off x="566928" y="1234440"/>
+            <a:ext cx="3520440" cy="1920240"/>
           </a:xfrm>
           <a:prstGeom prst="roundRect">
             <a:avLst>
-              <a:gd name="adj" fmla="val 2791"/>
+              <a:gd name="adj" fmla="val 2857"/>
             </a:avLst>
           </a:prstGeom>
           <a:solidFill>
@@ -6550,18 +7031,18 @@
         </p:nvSpPr>
         <p:spPr>
           <a:xfrm>
-            <a:off x="594360" y="1325880"/>
-            <a:ext cx="54864" cy="1965960"/>
-          </a:xfrm>
-          <a:prstGeom prst="rect">
-            <a:avLst/>
-          </a:prstGeom>
-          <a:solidFill>
-            <a:srgbClr val="21D4FD"/>
+            <a:off x="566928" y="1234440"/>
+            <a:ext cx="54864" cy="1920240"/>
+          </a:xfrm>
+          <a:prstGeom prst="rect">
+            <a:avLst/>
+          </a:prstGeom>
+          <a:solidFill>
+            <a:srgbClr val="5EE2A0"/>
           </a:solidFill>
           <a:ln w="12700">
             <a:solidFill>
-              <a:srgbClr val="21D4FD"/>
+              <a:srgbClr val="5EE2A0"/>
             </a:solidFill>
             <a:prstDash val="solid"/>
           </a:ln>
@@ -6575,8 +7056,8 @@
         </p:nvSpPr>
         <p:spPr>
           <a:xfrm>
-            <a:off x="795528" y="1490472"/>
-            <a:ext cx="3054096" cy="274320"/>
+            <a:off x="768096" y="1399032"/>
+            <a:ext cx="3191256" cy="274320"/>
           </a:xfrm>
           <a:prstGeom prst="rect">
             <a:avLst/>
@@ -6597,7 +7078,7 @@
                   <a:srgbClr val="E9F2FF"/>
                 </a:solidFill>
               </a:rPr>
-              <a:t>日志系统</a:t>
+              <a:t>RAII / unique_ptr</a:t>
             </a:r>
             <a:endParaRPr lang="en-US" sz="1400" dirty="0"/>
           </a:p>
@@ -6611,8 +7092,8 @@
         </p:nvSpPr>
         <p:spPr>
           <a:xfrm>
-            <a:off x="795528" y="1892808"/>
-            <a:ext cx="3017520" cy="1271016"/>
+            <a:off x="768096" y="1801368"/>
+            <a:ext cx="3154680" cy="1225296"/>
           </a:xfrm>
           <a:prstGeom prst="rect">
             <a:avLst/>
@@ -6635,7 +7116,7 @@
                   <a:srgbClr val="96A9C2"/>
                 </a:solidFill>
               </a:rPr>
-              <a:t>控制台 + logs/engine.log</a:t>
+              <a:t>RenderTarget 独占 attachment</a:t>
             </a:r>
             <a:endParaRPr lang="en-US" sz="1050" dirty="0"/>
           </a:p>
@@ -6649,7 +7130,7 @@
                   <a:srgbClr val="96A9C2"/>
                 </a:solidFill>
               </a:rPr>
-              <a:t>INFO / WARN / ERROR</a:t>
+              <a:t>Renderer 独占子系统</a:t>
             </a:r>
             <a:endParaRPr lang="en-US" sz="1050" dirty="0"/>
           </a:p>
@@ -6663,7 +7144,7 @@
                   <a:srgbClr val="96A9C2"/>
                 </a:solidFill>
               </a:rPr>
-              <a:t>资源路径、缓存命中、模型统计</a:t>
+              <a:t>析构自动释放 GPU wrapper</a:t>
             </a:r>
             <a:endParaRPr lang="en-US" sz="1050" dirty="0"/>
           </a:p>
@@ -6677,7 +7158,7 @@
                   <a:srgbClr val="96A9C2"/>
                 </a:solidFill>
               </a:rPr>
-              <a:t>启动与关闭生命周期</a:t>
+              <a:t>禁止复制表达唯一所有权</a:t>
             </a:r>
             <a:endParaRPr lang="en-US" sz="1050" dirty="0"/>
           </a:p>
@@ -6691,12 +7172,12 @@
         </p:nvSpPr>
         <p:spPr>
           <a:xfrm>
-            <a:off x="4407408" y="1325880"/>
-            <a:ext cx="3383280" cy="1965960"/>
+            <a:off x="4325112" y="1234440"/>
+            <a:ext cx="3520440" cy="1920240"/>
           </a:xfrm>
           <a:prstGeom prst="roundRect">
             <a:avLst>
-              <a:gd name="adj" fmla="val 2791"/>
+              <a:gd name="adj" fmla="val 2857"/>
             </a:avLst>
           </a:prstGeom>
           <a:solidFill>
@@ -6718,18 +7199,18 @@
         </p:nvSpPr>
         <p:spPr>
           <a:xfrm>
-            <a:off x="4407408" y="1325880"/>
-            <a:ext cx="54864" cy="1965960"/>
-          </a:xfrm>
-          <a:prstGeom prst="rect">
-            <a:avLst/>
-          </a:prstGeom>
-          <a:solidFill>
-            <a:srgbClr val="FF6B7A"/>
+            <a:off x="4325112" y="1234440"/>
+            <a:ext cx="54864" cy="1920240"/>
+          </a:xfrm>
+          <a:prstGeom prst="rect">
+            <a:avLst/>
+          </a:prstGeom>
+          <a:solidFill>
+            <a:srgbClr val="4F8CFF"/>
           </a:solidFill>
           <a:ln w="12700">
             <a:solidFill>
-              <a:srgbClr val="FF6B7A"/>
+              <a:srgbClr val="4F8CFF"/>
             </a:solidFill>
             <a:prstDash val="solid"/>
           </a:ln>
@@ -6743,8 +7224,8 @@
         </p:nvSpPr>
         <p:spPr>
           <a:xfrm>
-            <a:off x="4608576" y="1490472"/>
-            <a:ext cx="3054096" cy="274320"/>
+            <a:off x="4526280" y="1399032"/>
+            <a:ext cx="3191256" cy="274320"/>
           </a:xfrm>
           <a:prstGeom prst="rect">
             <a:avLst/>
@@ -6765,7 +7246,7 @@
                   <a:srgbClr val="E9F2FF"/>
                 </a:solidFill>
               </a:rPr>
-              <a:t>GPU 错误定位</a:t>
+              <a:t>shared_ptr / Cache</a:t>
             </a:r>
             <a:endParaRPr lang="en-US" sz="1400" dirty="0"/>
           </a:p>
@@ -6779,8 +7260,8 @@
         </p:nvSpPr>
         <p:spPr>
           <a:xfrm>
-            <a:off x="4608576" y="1892808"/>
-            <a:ext cx="3017520" cy="1271016"/>
+            <a:off x="4526280" y="1801368"/>
+            <a:ext cx="3154680" cy="1225296"/>
           </a:xfrm>
           <a:prstGeom prst="rect">
             <a:avLst/>
@@ -6803,7 +7284,7 @@
                   <a:srgbClr val="96A9C2"/>
                 </a:solidFill>
               </a:rPr>
-              <a:t>Shader 编译/链接 info log</a:t>
+              <a:t>ModelAsset、MaterialAsset、Texture2D 跨系统共享</a:t>
             </a:r>
             <a:endParaRPr lang="en-US" sz="1050" dirty="0"/>
           </a:p>
@@ -6817,7 +7298,7 @@
                   <a:srgbClr val="96A9C2"/>
                 </a:solidFill>
               </a:rPr>
-              <a:t>源代码行号预览</a:t>
+              <a:t>AssetManager 保持缓存生命周期</a:t>
             </a:r>
             <a:endParaRPr lang="en-US" sz="1050" dirty="0"/>
           </a:p>
@@ -6831,21 +7312,7 @@
                   <a:srgbClr val="96A9C2"/>
                 </a:solidFill>
               </a:rPr>
-              <a:t>Framebuffer completeness</a:t>
-            </a:r>
-            <a:endParaRPr lang="en-US" sz="1050" dirty="0"/>
-          </a:p>
-          <a:p>
-            <a:pPr indent="0" marL="0">
-              <a:buNone/>
-            </a:pPr>
-            <a:r>
-              <a:rPr lang="en-US" sz="1050" dirty="0">
-                <a:solidFill>
-                  <a:srgbClr val="96A9C2"/>
-                </a:solidFill>
-              </a:rPr>
-              <a:t>OpenGL Debug Callback</a:t>
+              <a:t>实例只保存共享引用</a:t>
             </a:r>
             <a:endParaRPr lang="en-US" sz="1050" dirty="0"/>
           </a:p>
@@ -6859,12 +7326,12 @@
         </p:nvSpPr>
         <p:spPr>
           <a:xfrm>
-            <a:off x="8211312" y="1325880"/>
-            <a:ext cx="3383280" cy="1965960"/>
+            <a:off x="8083296" y="1234440"/>
+            <a:ext cx="3520440" cy="1920240"/>
           </a:xfrm>
           <a:prstGeom prst="roundRect">
             <a:avLst>
-              <a:gd name="adj" fmla="val 2791"/>
+              <a:gd name="adj" fmla="val 2857"/>
             </a:avLst>
           </a:prstGeom>
           <a:solidFill>
@@ -6886,18 +7353,18 @@
         </p:nvSpPr>
         <p:spPr>
           <a:xfrm>
-            <a:off x="8211312" y="1325880"/>
-            <a:ext cx="54864" cy="1965960"/>
-          </a:xfrm>
-          <a:prstGeom prst="rect">
-            <a:avLst/>
-          </a:prstGeom>
-          <a:solidFill>
-            <a:srgbClr val="5EE2A0"/>
+            <a:off x="8083296" y="1234440"/>
+            <a:ext cx="54864" cy="1920240"/>
+          </a:xfrm>
+          <a:prstGeom prst="rect">
+            <a:avLst/>
+          </a:prstGeom>
+          <a:solidFill>
+            <a:srgbClr val="21D4FD"/>
           </a:solidFill>
           <a:ln w="12700">
             <a:solidFill>
-              <a:srgbClr val="5EE2A0"/>
+              <a:srgbClr val="21D4FD"/>
             </a:solidFill>
             <a:prstDash val="solid"/>
           </a:ln>
@@ -6911,8 +7378,8 @@
         </p:nvSpPr>
         <p:spPr>
           <a:xfrm>
-            <a:off x="8412480" y="1490472"/>
-            <a:ext cx="3054096" cy="274320"/>
+            <a:off x="8284464" y="1399032"/>
+            <a:ext cx="3191256" cy="274320"/>
           </a:xfrm>
           <a:prstGeom prst="rect">
             <a:avLst/>
@@ -6933,7 +7400,7 @@
                   <a:srgbClr val="E9F2FF"/>
                 </a:solidFill>
               </a:rPr>
-              <a:t>构建部署</a:t>
+              <a:t>引用与依赖注入</a:t>
             </a:r>
             <a:endParaRPr lang="en-US" sz="1400" dirty="0"/>
           </a:p>
@@ -6947,8 +7414,8 @@
         </p:nvSpPr>
         <p:spPr>
           <a:xfrm>
-            <a:off x="8412480" y="1892808"/>
-            <a:ext cx="3017520" cy="1271016"/>
+            <a:off x="8284464" y="1801368"/>
+            <a:ext cx="3154680" cy="1225296"/>
           </a:xfrm>
           <a:prstGeom prst="rect">
             <a:avLst/>
@@ -6971,7 +7438,7 @@
                   <a:srgbClr val="96A9C2"/>
                 </a:solidFill>
               </a:rPr>
-              <a:t>Debug / Release 双配置</a:t>
+              <a:t>RenderContext&amp; / AssetManager&amp;</a:t>
             </a:r>
             <a:endParaRPr lang="en-US" sz="1050" dirty="0"/>
           </a:p>
@@ -6985,7 +7452,7 @@
                   <a:srgbClr val="96A9C2"/>
                 </a:solidFill>
               </a:rPr>
-              <a:t>Assimp DLL 自动复制</a:t>
+              <a:t>依赖必须存在但不归本对象所有</a:t>
             </a:r>
             <a:endParaRPr lang="en-US" sz="1050" dirty="0"/>
           </a:p>
@@ -6999,21 +7466,7 @@
                   <a:srgbClr val="96A9C2"/>
                 </a:solidFill>
               </a:rPr>
-              <a:t>CMake 重新配置纳入新源码</a:t>
-            </a:r>
-            <a:endParaRPr lang="en-US" sz="1050" dirty="0"/>
-          </a:p>
-          <a:p>
-            <a:pPr indent="0" marL="0">
-              <a:buNone/>
-            </a:pPr>
-            <a:r>
-              <a:rPr lang="en-US" sz="1050" dirty="0">
-                <a:solidFill>
-                  <a:srgbClr val="96A9C2"/>
-                </a:solidFill>
-              </a:rPr>
-              <a:t>运行时依赖检查</a:t>
+              <a:t>减少 singleton，提升可测试性</a:t>
             </a:r>
             <a:endParaRPr lang="en-US" sz="1050" dirty="0"/>
           </a:p>
@@ -7027,11 +7480,13 @@
         </p:nvSpPr>
         <p:spPr>
           <a:xfrm>
-            <a:off x="594360" y="3794760"/>
-            <a:ext cx="11000232" cy="1508760"/>
+            <a:off x="566928" y="3474720"/>
+            <a:ext cx="3520440" cy="1920240"/>
           </a:xfrm>
           <a:prstGeom prst="roundRect">
-            <a:avLst/>
+            <a:avLst>
+              <a:gd name="adj" fmla="val 2857"/>
+            </a:avLst>
           </a:prstGeom>
           <a:solidFill>
             <a:srgbClr val="0F1C2E"/>
@@ -7046,14 +7501,39 @@
       </p:sp>
       <p:sp>
         <p:nvSpPr>
-          <p:cNvPr id="17" name="Text 15"/>
-          <p:cNvSpPr/>
-          <p:nvPr/>
-        </p:nvSpPr>
-        <p:spPr>
-          <a:xfrm>
-            <a:off x="822960" y="4050792"/>
-            <a:ext cx="1097280" cy="274320"/>
+          <p:cNvPr id="17" name="Shape 15"/>
+          <p:cNvSpPr/>
+          <p:nvPr/>
+        </p:nvSpPr>
+        <p:spPr>
+          <a:xfrm>
+            <a:off x="566928" y="3474720"/>
+            <a:ext cx="54864" cy="1920240"/>
+          </a:xfrm>
+          <a:prstGeom prst="rect">
+            <a:avLst/>
+          </a:prstGeom>
+          <a:solidFill>
+            <a:srgbClr val="B78CFF"/>
+          </a:solidFill>
+          <a:ln w="12700">
+            <a:solidFill>
+              <a:srgbClr val="B78CFF"/>
+            </a:solidFill>
+            <a:prstDash val="solid"/>
+          </a:ln>
+        </p:spPr>
+      </p:sp>
+      <p:sp>
+        <p:nvSpPr>
+          <p:cNvPr id="18" name="Text 16"/>
+          <p:cNvSpPr/>
+          <p:nvPr/>
+        </p:nvSpPr>
+        <p:spPr>
+          <a:xfrm>
+            <a:off x="768096" y="3639312"/>
+            <a:ext cx="3191256" cy="274320"/>
           </a:xfrm>
           <a:prstGeom prst="rect">
             <a:avLst/>
@@ -7069,138 +7549,349 @@
               <a:buNone/>
             </a:pPr>
             <a:r>
-              <a:rPr lang="en-US" sz="1500" b="1" dirty="0">
-                <a:solidFill>
-                  <a:srgbClr val="FFB45A"/>
-                </a:solidFill>
-              </a:rPr>
-              <a:t>本轮验证</a:t>
-            </a:r>
-            <a:endParaRPr lang="en-US" sz="1500" dirty="0"/>
-          </a:p>
-        </p:txBody>
-      </p:sp>
-      <p:sp>
-        <p:nvSpPr>
-          <p:cNvPr id="18" name="Text 16"/>
-          <p:cNvSpPr/>
-          <p:nvPr/>
-        </p:nvSpPr>
-        <p:spPr>
-          <a:xfrm>
-            <a:off x="1920240" y="3950208"/>
-            <a:ext cx="9052560" cy="1005840"/>
-          </a:xfrm>
-          <a:prstGeom prst="rect">
-            <a:avLst/>
-          </a:prstGeom>
-          <a:noFill/>
-          <a:ln/>
-        </p:spPr>
-        <p:txBody>
-          <a:bodyPr wrap="square" lIns="508" tIns="508" rIns="508" bIns="508" rtlCol="0" anchor="ctr">
+              <a:rPr lang="en-US" sz="1400" b="1" dirty="0">
+                <a:solidFill>
+                  <a:srgbClr val="E9F2FF"/>
+                </a:solidFill>
+              </a:rPr>
+              <a:t>模板 + Lambda</a:t>
+            </a:r>
+            <a:endParaRPr lang="en-US" sz="1400" dirty="0"/>
+          </a:p>
+        </p:txBody>
+      </p:sp>
+      <p:sp>
+        <p:nvSpPr>
+          <p:cNvPr id="19" name="Text 17"/>
+          <p:cNvSpPr/>
+          <p:nvPr/>
+        </p:nvSpPr>
+        <p:spPr>
+          <a:xfrm>
+            <a:off x="768096" y="4041648"/>
+            <a:ext cx="3154680" cy="1225296"/>
+          </a:xfrm>
+          <a:prstGeom prst="rect">
+            <a:avLst/>
+          </a:prstGeom>
+          <a:noFill/>
+          <a:ln/>
+        </p:spPr>
+        <p:txBody>
+          <a:bodyPr wrap="square" lIns="254" tIns="254" rIns="254" bIns="254" rtlCol="0" anchor="t">
             <a:normAutofit/>
           </a:bodyPr>
           <a:lstStyle/>
           <a:p>
-            <a:pPr marL="167640" indent="-167640">
-              <a:buSzPct val="100000"/>
-              <a:buChar char="•"/>
-            </a:pPr>
-            <a:r>
-              <a:rPr lang="en-US" sz="1100" dirty="0">
+            <a:pPr indent="0" marL="0">
+              <a:buNone/>
+            </a:pPr>
+            <a:r>
+              <a:rPr lang="en-US" sz="1050" dirty="0">
+                <a:solidFill>
+                  <a:srgbClr val="96A9C2"/>
+                </a:solidFill>
+              </a:rPr>
+              <a:t>RenderGraph::addPass&lt;T, Fn&gt;</a:t>
+            </a:r>
+            <a:endParaRPr lang="en-US" sz="1050" dirty="0"/>
+          </a:p>
+          <a:p>
+            <a:pPr indent="0" marL="0">
+              <a:buNone/>
+            </a:pPr>
+            <a:r>
+              <a:rPr lang="en-US" sz="1050" dirty="0">
+                <a:solidFill>
+                  <a:srgbClr val="96A9C2"/>
+                </a:solidFill>
+              </a:rPr>
+              <a:t>保存不同参数和执行函数</a:t>
+            </a:r>
+            <a:endParaRPr lang="en-US" sz="1050" dirty="0"/>
+          </a:p>
+          <a:p>
+            <a:pPr indent="0" marL="0">
+              <a:buNone/>
+            </a:pPr>
+            <a:r>
+              <a:rPr lang="en-US" sz="1050" dirty="0">
+                <a:solidFill>
+                  <a:srgbClr val="96A9C2"/>
+                </a:solidFill>
+              </a:rPr>
+              <a:t>统一通过虚函数 execute 调用</a:t>
+            </a:r>
+            <a:endParaRPr lang="en-US" sz="1050" dirty="0"/>
+          </a:p>
+        </p:txBody>
+      </p:sp>
+      <p:sp>
+        <p:nvSpPr>
+          <p:cNvPr id="20" name="Shape 18"/>
+          <p:cNvSpPr/>
+          <p:nvPr/>
+        </p:nvSpPr>
+        <p:spPr>
+          <a:xfrm>
+            <a:off x="4325112" y="3474720"/>
+            <a:ext cx="3520440" cy="1920240"/>
+          </a:xfrm>
+          <a:prstGeom prst="roundRect">
+            <a:avLst>
+              <a:gd name="adj" fmla="val 2857"/>
+            </a:avLst>
+          </a:prstGeom>
+          <a:solidFill>
+            <a:srgbClr val="0F1C2E"/>
+          </a:solidFill>
+          <a:ln w="12700">
+            <a:solidFill>
+              <a:srgbClr val="29405C"/>
+            </a:solidFill>
+            <a:prstDash val="solid"/>
+          </a:ln>
+        </p:spPr>
+      </p:sp>
+      <p:sp>
+        <p:nvSpPr>
+          <p:cNvPr id="21" name="Shape 19"/>
+          <p:cNvSpPr/>
+          <p:nvPr/>
+        </p:nvSpPr>
+        <p:spPr>
+          <a:xfrm>
+            <a:off x="4325112" y="3474720"/>
+            <a:ext cx="54864" cy="1920240"/>
+          </a:xfrm>
+          <a:prstGeom prst="rect">
+            <a:avLst/>
+          </a:prstGeom>
+          <a:solidFill>
+            <a:srgbClr val="FFB45A"/>
+          </a:solidFill>
+          <a:ln w="12700">
+            <a:solidFill>
+              <a:srgbClr val="FFB45A"/>
+            </a:solidFill>
+            <a:prstDash val="solid"/>
+          </a:ln>
+        </p:spPr>
+      </p:sp>
+      <p:sp>
+        <p:nvSpPr>
+          <p:cNvPr id="22" name="Text 20"/>
+          <p:cNvSpPr/>
+          <p:nvPr/>
+        </p:nvSpPr>
+        <p:spPr>
+          <a:xfrm>
+            <a:off x="4526280" y="3639312"/>
+            <a:ext cx="3191256" cy="274320"/>
+          </a:xfrm>
+          <a:prstGeom prst="rect">
+            <a:avLst/>
+          </a:prstGeom>
+          <a:noFill/>
+          <a:ln/>
+        </p:spPr>
+        <p:txBody>
+          <a:bodyPr wrap="square" lIns="0" tIns="0" rIns="0" bIns="0" rtlCol="0" anchor="ctr"/>
+          <a:lstStyle/>
+          <a:p>
+            <a:pPr indent="0" marL="0">
+              <a:buNone/>
+            </a:pPr>
+            <a:r>
+              <a:rPr lang="en-US" sz="1400" b="1" dirty="0">
                 <a:solidFill>
                   <a:srgbClr val="E9F2FF"/>
                 </a:solidFill>
               </a:rPr>
-              <a:t>Debug / Release 构建通过</a:t>
-            </a:r>
-            <a:endParaRPr lang="en-US" sz="1100" dirty="0"/>
-          </a:p>
-          <a:p>
-            <a:pPr marL="167640" indent="-167640">
-              <a:buSzPct val="100000"/>
-              <a:buChar char="•"/>
-            </a:pPr>
-            <a:r>
-              <a:rPr lang="en-US" sz="1100" dirty="0">
+              <a:t>多态与抽象接口</a:t>
+            </a:r>
+            <a:endParaRPr lang="en-US" sz="1400" dirty="0"/>
+          </a:p>
+        </p:txBody>
+      </p:sp>
+      <p:sp>
+        <p:nvSpPr>
+          <p:cNvPr id="23" name="Text 21"/>
+          <p:cNvSpPr/>
+          <p:nvPr/>
+        </p:nvSpPr>
+        <p:spPr>
+          <a:xfrm>
+            <a:off x="4526280" y="4041648"/>
+            <a:ext cx="3154680" cy="1225296"/>
+          </a:xfrm>
+          <a:prstGeom prst="rect">
+            <a:avLst/>
+          </a:prstGeom>
+          <a:noFill/>
+          <a:ln/>
+        </p:spPr>
+        <p:txBody>
+          <a:bodyPr wrap="square" lIns="254" tIns="254" rIns="254" bIns="254" rtlCol="0" anchor="t">
+            <a:normAutofit/>
+          </a:bodyPr>
+          <a:lstStyle/>
+          <a:p>
+            <a:pPr indent="0" marL="0">
+              <a:buNone/>
+            </a:pPr>
+            <a:r>
+              <a:rPr lang="en-US" sz="1050" dirty="0">
+                <a:solidFill>
+                  <a:srgbClr val="96A9C2"/>
+                </a:solidFill>
+              </a:rPr>
+              <a:t>RenderContext → OpenGLRenderContext</a:t>
+            </a:r>
+            <a:endParaRPr lang="en-US" sz="1050" dirty="0"/>
+          </a:p>
+          <a:p>
+            <a:pPr indent="0" marL="0">
+              <a:buNone/>
+            </a:pPr>
+            <a:r>
+              <a:rPr lang="en-US" sz="1050" dirty="0">
+                <a:solidFill>
+                  <a:srgbClr val="96A9C2"/>
+                </a:solidFill>
+              </a:rPr>
+              <a:t>Light → Direction / Point</a:t>
+            </a:r>
+            <a:endParaRPr lang="en-US" sz="1050" dirty="0"/>
+          </a:p>
+          <a:p>
+            <a:pPr indent="0" marL="0">
+              <a:buNone/>
+            </a:pPr>
+            <a:r>
+              <a:rPr lang="en-US" sz="1050" dirty="0">
+                <a:solidFill>
+                  <a:srgbClr val="96A9C2"/>
+                </a:solidFill>
+              </a:rPr>
+              <a:t>为替换后端和扩展类型保留边界</a:t>
+            </a:r>
+            <a:endParaRPr lang="en-US" sz="1050" dirty="0"/>
+          </a:p>
+        </p:txBody>
+      </p:sp>
+      <p:sp>
+        <p:nvSpPr>
+          <p:cNvPr id="24" name="Shape 22"/>
+          <p:cNvSpPr/>
+          <p:nvPr/>
+        </p:nvSpPr>
+        <p:spPr>
+          <a:xfrm>
+            <a:off x="8083296" y="3474720"/>
+            <a:ext cx="3520440" cy="1920240"/>
+          </a:xfrm>
+          <a:prstGeom prst="roundRect">
+            <a:avLst>
+              <a:gd name="adj" fmla="val 2857"/>
+            </a:avLst>
+          </a:prstGeom>
+          <a:solidFill>
+            <a:srgbClr val="0F1C2E"/>
+          </a:solidFill>
+          <a:ln w="12700">
+            <a:solidFill>
+              <a:srgbClr val="29405C"/>
+            </a:solidFill>
+            <a:prstDash val="solid"/>
+          </a:ln>
+        </p:spPr>
+      </p:sp>
+      <p:sp>
+        <p:nvSpPr>
+          <p:cNvPr id="25" name="Shape 23"/>
+          <p:cNvSpPr/>
+          <p:nvPr/>
+        </p:nvSpPr>
+        <p:spPr>
+          <a:xfrm>
+            <a:off x="8083296" y="3474720"/>
+            <a:ext cx="54864" cy="1920240"/>
+          </a:xfrm>
+          <a:prstGeom prst="rect">
+            <a:avLst/>
+          </a:prstGeom>
+          <a:solidFill>
+            <a:srgbClr val="FF6B7A"/>
+          </a:solidFill>
+          <a:ln w="12700">
+            <a:solidFill>
+              <a:srgbClr val="FF6B7A"/>
+            </a:solidFill>
+            <a:prstDash val="solid"/>
+          </a:ln>
+        </p:spPr>
+      </p:sp>
+      <p:sp>
+        <p:nvSpPr>
+          <p:cNvPr id="26" name="Text 24"/>
+          <p:cNvSpPr/>
+          <p:nvPr/>
+        </p:nvSpPr>
+        <p:spPr>
+          <a:xfrm>
+            <a:off x="8284464" y="3639312"/>
+            <a:ext cx="3191256" cy="274320"/>
+          </a:xfrm>
+          <a:prstGeom prst="rect">
+            <a:avLst/>
+          </a:prstGeom>
+          <a:noFill/>
+          <a:ln/>
+        </p:spPr>
+        <p:txBody>
+          <a:bodyPr wrap="square" lIns="0" tIns="0" rIns="0" bIns="0" rtlCol="0" anchor="ctr"/>
+          <a:lstStyle/>
+          <a:p>
+            <a:pPr indent="0" marL="0">
+              <a:buNone/>
+            </a:pPr>
+            <a:r>
+              <a:rPr lang="en-US" sz="1400" b="1" dirty="0">
                 <a:solidFill>
                   <a:srgbClr val="E9F2FF"/>
                 </a:solidFill>
               </a:rPr>
-              <a:t>默认场景与 Bloom 各运行 8 秒</a:t>
-            </a:r>
-            <a:endParaRPr lang="en-US" sz="1100" dirty="0"/>
-          </a:p>
-          <a:p>
-            <a:pPr marL="167640" indent="-167640">
-              <a:buSzPct val="100000"/>
-              <a:buChar char="•"/>
-            </a:pPr>
-            <a:r>
-              <a:rPr lang="en-US" sz="1100" dirty="0">
-                <a:solidFill>
-                  <a:srgbClr val="E9F2FF"/>
-                </a:solidFill>
-              </a:rPr>
-              <a:t>14 个运行时 FBO 正常创建</a:t>
-            </a:r>
-            <a:endParaRPr lang="en-US" sz="1100" dirty="0"/>
-          </a:p>
-          <a:p>
-            <a:pPr marL="167640" indent="-167640">
-              <a:buSzPct val="100000"/>
-              <a:buChar char="•"/>
-            </a:pPr>
-            <a:r>
-              <a:rPr lang="en-US" sz="1100" dirty="0">
-                <a:solidFill>
-                  <a:srgbClr val="E9F2FF"/>
-                </a:solidFill>
-              </a:rPr>
-              <a:t>1919×1009 → 800×600 连续 resize</a:t>
-            </a:r>
-            <a:endParaRPr lang="en-US" sz="1100" dirty="0"/>
-          </a:p>
-          <a:p>
-            <a:pPr marL="167640" indent="-167640">
-              <a:buSzPct val="100000"/>
-              <a:buChar char="•"/>
-            </a:pPr>
-            <a:r>
-              <a:rPr lang="en-US" sz="1100" dirty="0">
-                <a:solidFill>
-                  <a:srgbClr val="E9F2FF"/>
-                </a:solidFill>
-              </a:rPr>
-              <a:t>无 Shader / FBO / 高优先级 GL 错误</a:t>
-            </a:r>
-            <a:endParaRPr lang="en-US" sz="1100" dirty="0"/>
-          </a:p>
-        </p:txBody>
-      </p:sp>
-      <p:sp>
-        <p:nvSpPr>
-          <p:cNvPr id="19" name="Text 17"/>
-          <p:cNvSpPr/>
-          <p:nvPr/>
-        </p:nvSpPr>
-        <p:spPr>
-          <a:xfrm>
-            <a:off x="960120" y="5623560"/>
-            <a:ext cx="10241280" cy="320040"/>
-          </a:xfrm>
-          <a:prstGeom prst="rect">
-            <a:avLst/>
-          </a:prstGeom>
-          <a:noFill/>
-          <a:ln/>
-        </p:spPr>
-        <p:txBody>
-          <a:bodyPr wrap="square" lIns="0" tIns="0" rIns="0" bIns="0" rtlCol="0" anchor="ctr"/>
-          <a:lstStyle/>
-          <a:p>
-            <a:pPr algn="ctr" indent="0" marL="0">
+              <a:t>STL 与数据结构</a:t>
+            </a:r>
+            <a:endParaRPr lang="en-US" sz="1400" dirty="0"/>
+          </a:p>
+        </p:txBody>
+      </p:sp>
+      <p:sp>
+        <p:nvSpPr>
+          <p:cNvPr id="27" name="Text 25"/>
+          <p:cNvSpPr/>
+          <p:nvPr/>
+        </p:nvSpPr>
+        <p:spPr>
+          <a:xfrm>
+            <a:off x="8284464" y="4041648"/>
+            <a:ext cx="3154680" cy="1225296"/>
+          </a:xfrm>
+          <a:prstGeom prst="rect">
+            <a:avLst/>
+          </a:prstGeom>
+          <a:noFill/>
+          <a:ln/>
+        </p:spPr>
+        <p:txBody>
+          <a:bodyPr wrap="square" lIns="254" tIns="254" rIns="254" bIns="254" rtlCol="0" anchor="t">
+            <a:normAutofit/>
+          </a:bodyPr>
+          <a:lstStyle/>
+          <a:p>
+            <a:pPr indent="0" marL="0">
               <a:buNone/>
             </a:pPr>
             <a:r>
@@ -7209,7 +7900,49 @@
                   <a:srgbClr val="96A9C2"/>
                 </a:solidFill>
               </a:rPr>
-              <a:t>已知非功能警告：驱动提示 Vertex Shader 会根据 GL State 重新编译；后续通过 Pipeline State 规范化继续优化。</a:t>
+              <a:t>vector：对象/顶点/pass</a:t>
+            </a:r>
+            <a:endParaRPr lang="en-US" sz="1050" dirty="0"/>
+          </a:p>
+          <a:p>
+            <a:pPr indent="0" marL="0">
+              <a:buNone/>
+            </a:pPr>
+            <a:r>
+              <a:rPr lang="en-US" sz="1050" dirty="0">
+                <a:solidFill>
+                  <a:srgbClr val="96A9C2"/>
+                </a:solidFill>
+              </a:rPr>
+              <a:t>unordered_map：资源缓存</a:t>
+            </a:r>
+            <a:endParaRPr lang="en-US" sz="1050" dirty="0"/>
+          </a:p>
+          <a:p>
+            <a:pPr indent="0" marL="0">
+              <a:buNone/>
+            </a:pPr>
+            <a:r>
+              <a:rPr lang="en-US" sz="1050" dirty="0">
+                <a:solidFill>
+                  <a:srgbClr val="96A9C2"/>
+                </a:solidFill>
+              </a:rPr>
+              <a:t>array：固定 Bloom mip 链</a:t>
+            </a:r>
+            <a:endParaRPr lang="en-US" sz="1050" dirty="0"/>
+          </a:p>
+          <a:p>
+            <a:pPr indent="0" marL="0">
+              <a:buNone/>
+            </a:pPr>
+            <a:r>
+              <a:rPr lang="en-US" sz="1050" dirty="0">
+                <a:solidFill>
+                  <a:srgbClr val="96A9C2"/>
+                </a:solidFill>
+              </a:rPr>
+              <a:t>move：转移资源所有权</a:t>
             </a:r>
             <a:endParaRPr lang="en-US" sz="1050" dirty="0"/>
           </a:p>
@@ -7318,7 +8051,7 @@
                   <a:srgbClr val="E9F2FF"/>
                 </a:solidFill>
               </a:rPr>
-              <a:t>13  当前问题与演进路线</a:t>
+              <a:t>13  可诊断性与验证体系</a:t>
             </a:r>
             <a:endParaRPr lang="en-US" sz="2500" dirty="0"/>
           </a:p>
@@ -7354,7 +8087,7 @@
                   <a:srgbClr val="96A9C2"/>
                 </a:solidFill>
               </a:rPr>
-              <a:t>下一阶段优先解决“共享 GPU 资源”和“渲染队列”，而不是继续增加孤立特效</a:t>
+              <a:t>目标：程序失败时直接看到原因，而不是只得到黑屏</a:t>
             </a:r>
             <a:endParaRPr lang="en-US" sz="1050" dirty="0"/>
           </a:p>
@@ -7368,867 +8101,12 @@
         </p:nvSpPr>
         <p:spPr>
           <a:xfrm>
-            <a:off x="566928" y="1417320"/>
-            <a:ext cx="1993392" cy="2971800"/>
-          </a:xfrm>
-          <a:prstGeom prst="roundRect">
-            <a:avLst/>
-          </a:prstGeom>
-          <a:solidFill>
-            <a:srgbClr val="0F1C2E"/>
-          </a:solidFill>
-          <a:ln w="17780">
-            <a:solidFill>
-              <a:srgbClr val="FF6B7A"/>
-            </a:solidFill>
-            <a:prstDash val="solid"/>
-          </a:ln>
-        </p:spPr>
-      </p:sp>
-      <p:sp>
-        <p:nvSpPr>
-          <p:cNvPr id="5" name="Text 3"/>
-          <p:cNvSpPr/>
-          <p:nvPr/>
-        </p:nvSpPr>
-        <p:spPr>
-          <a:xfrm>
-            <a:off x="731520" y="1627632"/>
-            <a:ext cx="502920" cy="329184"/>
-          </a:xfrm>
-          <a:prstGeom prst="rect">
-            <a:avLst/>
-          </a:prstGeom>
-          <a:noFill/>
-          <a:ln/>
-        </p:spPr>
-        <p:txBody>
-          <a:bodyPr wrap="square" lIns="0" tIns="0" rIns="0" bIns="0" rtlCol="0" anchor="ctr"/>
-          <a:lstStyle/>
-          <a:p>
-            <a:pPr indent="0" marL="0">
-              <a:buNone/>
-            </a:pPr>
-            <a:r>
-              <a:rPr lang="en-US" sz="1800" b="1" dirty="0">
-                <a:solidFill>
-                  <a:srgbClr val="FF6B7A"/>
-                </a:solidFill>
-              </a:rPr>
-              <a:t>P0</a:t>
-            </a:r>
-            <a:endParaRPr lang="en-US" sz="1800" dirty="0"/>
-          </a:p>
-        </p:txBody>
-      </p:sp>
-      <p:sp>
-        <p:nvSpPr>
-          <p:cNvPr id="6" name="Text 4"/>
-          <p:cNvSpPr/>
-          <p:nvPr/>
-        </p:nvSpPr>
-        <p:spPr>
-          <a:xfrm>
-            <a:off x="731520" y="2121408"/>
-            <a:ext cx="1664208" cy="457200"/>
-          </a:xfrm>
-          <a:prstGeom prst="rect">
-            <a:avLst/>
-          </a:prstGeom>
-          <a:noFill/>
-          <a:ln/>
-        </p:spPr>
-        <p:txBody>
-          <a:bodyPr wrap="square" lIns="0" tIns="0" rIns="0" bIns="0" rtlCol="0" anchor="ctr">
-            <a:normAutofit/>
-          </a:bodyPr>
-          <a:lstStyle/>
-          <a:p>
-            <a:pPr indent="0" marL="0">
-              <a:buNone/>
-            </a:pPr>
-            <a:r>
-              <a:rPr lang="en-US" sz="1400" b="1" dirty="0">
-                <a:solidFill>
-                  <a:srgbClr val="E9F2FF"/>
-                </a:solidFill>
-              </a:rPr>
-              <a:t>MeshResource</a:t>
-            </a:r>
-            <a:endParaRPr lang="en-US" sz="1400" dirty="0"/>
-          </a:p>
-        </p:txBody>
-      </p:sp>
-      <p:sp>
-        <p:nvSpPr>
-          <p:cNvPr id="7" name="Text 5"/>
-          <p:cNvSpPr/>
-          <p:nvPr/>
-        </p:nvSpPr>
-        <p:spPr>
-          <a:xfrm>
-            <a:off x="731520" y="2852928"/>
-            <a:ext cx="1664208" cy="960120"/>
-          </a:xfrm>
-          <a:prstGeom prst="rect">
-            <a:avLst/>
-          </a:prstGeom>
-          <a:noFill/>
-          <a:ln/>
-        </p:spPr>
-        <p:txBody>
-          <a:bodyPr wrap="square" lIns="0" tIns="0" rIns="0" bIns="0" rtlCol="0" anchor="ctr">
-            <a:normAutofit/>
-          </a:bodyPr>
-          <a:lstStyle/>
-          <a:p>
-            <a:pPr indent="0" marL="0">
-              <a:buNone/>
-            </a:pPr>
-            <a:r>
-              <a:rPr lang="en-US" sz="1050" dirty="0">
-                <a:solidFill>
-                  <a:srgbClr val="96A9C2"/>
-                </a:solidFill>
-              </a:rPr>
-              <a:t>共享 VAO/VBO/IBO</a:t>
-            </a:r>
-            <a:endParaRPr lang="en-US" sz="1050" dirty="0"/>
-          </a:p>
-          <a:p>
-            <a:pPr indent="0" marL="0">
-              <a:buNone/>
-            </a:pPr>
-            <a:r>
-              <a:rPr lang="en-US" sz="1050" dirty="0">
-                <a:solidFill>
-                  <a:srgbClr val="96A9C2"/>
-                </a:solidFill>
-              </a:rPr>
-              <a:t>消除多实例重复上传</a:t>
-            </a:r>
-            <a:endParaRPr lang="en-US" sz="1050" dirty="0"/>
-          </a:p>
-        </p:txBody>
-      </p:sp>
-      <p:sp>
-        <p:nvSpPr>
-          <p:cNvPr id="8" name="Shape 6"/>
-          <p:cNvSpPr/>
-          <p:nvPr/>
-        </p:nvSpPr>
-        <p:spPr>
-          <a:xfrm>
-            <a:off x="2578608" y="2889504"/>
-            <a:ext cx="256032" cy="0"/>
-          </a:xfrm>
-          <a:prstGeom prst="line">
-            <a:avLst/>
-          </a:prstGeom>
-          <a:noFill/>
-          <a:ln w="17780">
-            <a:solidFill>
-              <a:srgbClr val="FF6B7A"/>
-            </a:solidFill>
-            <a:prstDash val="solid"/>
-            <a:headEnd type="none"/>
-            <a:tailEnd type="triangle"/>
-          </a:ln>
-        </p:spPr>
-      </p:sp>
-      <p:sp>
-        <p:nvSpPr>
-          <p:cNvPr id="9" name="Shape 7"/>
-          <p:cNvSpPr/>
-          <p:nvPr/>
-        </p:nvSpPr>
-        <p:spPr>
-          <a:xfrm>
-            <a:off x="2880360" y="1417320"/>
-            <a:ext cx="1993392" cy="2971800"/>
-          </a:xfrm>
-          <a:prstGeom prst="roundRect">
-            <a:avLst/>
-          </a:prstGeom>
-          <a:solidFill>
-            <a:srgbClr val="0F1C2E"/>
-          </a:solidFill>
-          <a:ln w="17780">
-            <a:solidFill>
-              <a:srgbClr val="FFB45A"/>
-            </a:solidFill>
-            <a:prstDash val="solid"/>
-          </a:ln>
-        </p:spPr>
-      </p:sp>
-      <p:sp>
-        <p:nvSpPr>
-          <p:cNvPr id="10" name="Text 8"/>
-          <p:cNvSpPr/>
-          <p:nvPr/>
-        </p:nvSpPr>
-        <p:spPr>
-          <a:xfrm>
-            <a:off x="3044952" y="1627632"/>
-            <a:ext cx="502920" cy="329184"/>
-          </a:xfrm>
-          <a:prstGeom prst="rect">
-            <a:avLst/>
-          </a:prstGeom>
-          <a:noFill/>
-          <a:ln/>
-        </p:spPr>
-        <p:txBody>
-          <a:bodyPr wrap="square" lIns="0" tIns="0" rIns="0" bIns="0" rtlCol="0" anchor="ctr"/>
-          <a:lstStyle/>
-          <a:p>
-            <a:pPr indent="0" marL="0">
-              <a:buNone/>
-            </a:pPr>
-            <a:r>
-              <a:rPr lang="en-US" sz="1800" b="1" dirty="0">
-                <a:solidFill>
-                  <a:srgbClr val="FFB45A"/>
-                </a:solidFill>
-              </a:rPr>
-              <a:t>P1</a:t>
-            </a:r>
-            <a:endParaRPr lang="en-US" sz="1800" dirty="0"/>
-          </a:p>
-        </p:txBody>
-      </p:sp>
-      <p:sp>
-        <p:nvSpPr>
-          <p:cNvPr id="11" name="Text 9"/>
-          <p:cNvSpPr/>
-          <p:nvPr/>
-        </p:nvSpPr>
-        <p:spPr>
-          <a:xfrm>
-            <a:off x="3044952" y="2121408"/>
-            <a:ext cx="1664208" cy="457200"/>
-          </a:xfrm>
-          <a:prstGeom prst="rect">
-            <a:avLst/>
-          </a:prstGeom>
-          <a:noFill/>
-          <a:ln/>
-        </p:spPr>
-        <p:txBody>
-          <a:bodyPr wrap="square" lIns="0" tIns="0" rIns="0" bIns="0" rtlCol="0" anchor="ctr">
-            <a:normAutofit/>
-          </a:bodyPr>
-          <a:lstStyle/>
-          <a:p>
-            <a:pPr indent="0" marL="0">
-              <a:buNone/>
-            </a:pPr>
-            <a:r>
-              <a:rPr lang="en-US" sz="1400" b="1" dirty="0">
-                <a:solidFill>
-                  <a:srgbClr val="E9F2FF"/>
-                </a:solidFill>
-              </a:rPr>
-              <a:t>Render Queue</a:t>
-            </a:r>
-            <a:endParaRPr lang="en-US" sz="1400" dirty="0"/>
-          </a:p>
-        </p:txBody>
-      </p:sp>
-      <p:sp>
-        <p:nvSpPr>
-          <p:cNvPr id="12" name="Text 10"/>
-          <p:cNvSpPr/>
-          <p:nvPr/>
-        </p:nvSpPr>
-        <p:spPr>
-          <a:xfrm>
-            <a:off x="3044952" y="2852928"/>
-            <a:ext cx="1664208" cy="960120"/>
-          </a:xfrm>
-          <a:prstGeom prst="rect">
-            <a:avLst/>
-          </a:prstGeom>
-          <a:noFill/>
-          <a:ln/>
-        </p:spPr>
-        <p:txBody>
-          <a:bodyPr wrap="square" lIns="0" tIns="0" rIns="0" bIns="0" rtlCol="0" anchor="ctr">
-            <a:normAutofit/>
-          </a:bodyPr>
-          <a:lstStyle/>
-          <a:p>
-            <a:pPr indent="0" marL="0">
-              <a:buNone/>
-            </a:pPr>
-            <a:r>
-              <a:rPr lang="en-US" sz="1050" dirty="0">
-                <a:solidFill>
-                  <a:srgbClr val="96A9C2"/>
-                </a:solidFill>
-              </a:rPr>
-              <a:t>RenderItem + Bounds</a:t>
-            </a:r>
-            <a:endParaRPr lang="en-US" sz="1050" dirty="0"/>
-          </a:p>
-          <a:p>
-            <a:pPr indent="0" marL="0">
-              <a:buNone/>
-            </a:pPr>
-            <a:r>
-              <a:rPr lang="en-US" sz="1050" dirty="0">
-                <a:solidFill>
-                  <a:srgbClr val="96A9C2"/>
-                </a:solidFill>
-              </a:rPr>
-              <a:t>视锥裁剪 + 状态排序</a:t>
-            </a:r>
-            <a:endParaRPr lang="en-US" sz="1050" dirty="0"/>
-          </a:p>
-        </p:txBody>
-      </p:sp>
-      <p:sp>
-        <p:nvSpPr>
-          <p:cNvPr id="13" name="Shape 11"/>
-          <p:cNvSpPr/>
-          <p:nvPr/>
-        </p:nvSpPr>
-        <p:spPr>
-          <a:xfrm>
-            <a:off x="4892040" y="2889504"/>
-            <a:ext cx="256032" cy="0"/>
-          </a:xfrm>
-          <a:prstGeom prst="line">
-            <a:avLst/>
-          </a:prstGeom>
-          <a:noFill/>
-          <a:ln w="17780">
-            <a:solidFill>
-              <a:srgbClr val="FFB45A"/>
-            </a:solidFill>
-            <a:prstDash val="solid"/>
-            <a:headEnd type="none"/>
-            <a:tailEnd type="triangle"/>
-          </a:ln>
-        </p:spPr>
-      </p:sp>
-      <p:sp>
-        <p:nvSpPr>
-          <p:cNvPr id="14" name="Shape 12"/>
-          <p:cNvSpPr/>
-          <p:nvPr/>
-        </p:nvSpPr>
-        <p:spPr>
-          <a:xfrm>
-            <a:off x="5193792" y="1417320"/>
-            <a:ext cx="1993392" cy="2971800"/>
-          </a:xfrm>
-          <a:prstGeom prst="roundRect">
-            <a:avLst/>
-          </a:prstGeom>
-          <a:solidFill>
-            <a:srgbClr val="0F1C2E"/>
-          </a:solidFill>
-          <a:ln w="17780">
-            <a:solidFill>
-              <a:srgbClr val="5EE2A0"/>
-            </a:solidFill>
-            <a:prstDash val="solid"/>
-          </a:ln>
-        </p:spPr>
-      </p:sp>
-      <p:sp>
-        <p:nvSpPr>
-          <p:cNvPr id="15" name="Text 13"/>
-          <p:cNvSpPr/>
-          <p:nvPr/>
-        </p:nvSpPr>
-        <p:spPr>
-          <a:xfrm>
-            <a:off x="5358384" y="1627632"/>
-            <a:ext cx="502920" cy="329184"/>
-          </a:xfrm>
-          <a:prstGeom prst="rect">
-            <a:avLst/>
-          </a:prstGeom>
-          <a:noFill/>
-          <a:ln/>
-        </p:spPr>
-        <p:txBody>
-          <a:bodyPr wrap="square" lIns="0" tIns="0" rIns="0" bIns="0" rtlCol="0" anchor="ctr"/>
-          <a:lstStyle/>
-          <a:p>
-            <a:pPr indent="0" marL="0">
-              <a:buNone/>
-            </a:pPr>
-            <a:r>
-              <a:rPr lang="en-US" sz="1800" b="1" dirty="0">
-                <a:solidFill>
-                  <a:srgbClr val="5EE2A0"/>
-                </a:solidFill>
-              </a:rPr>
-              <a:t>P2</a:t>
-            </a:r>
-            <a:endParaRPr lang="en-US" sz="1800" dirty="0"/>
-          </a:p>
-        </p:txBody>
-      </p:sp>
-      <p:sp>
-        <p:nvSpPr>
-          <p:cNvPr id="16" name="Text 14"/>
-          <p:cNvSpPr/>
-          <p:nvPr/>
-        </p:nvSpPr>
-        <p:spPr>
-          <a:xfrm>
-            <a:off x="5358384" y="2121408"/>
-            <a:ext cx="1664208" cy="457200"/>
-          </a:xfrm>
-          <a:prstGeom prst="rect">
-            <a:avLst/>
-          </a:prstGeom>
-          <a:noFill/>
-          <a:ln/>
-        </p:spPr>
-        <p:txBody>
-          <a:bodyPr wrap="square" lIns="0" tIns="0" rIns="0" bIns="0" rtlCol="0" anchor="ctr">
-            <a:normAutofit/>
-          </a:bodyPr>
-          <a:lstStyle/>
-          <a:p>
-            <a:pPr indent="0" marL="0">
-              <a:buNone/>
-            </a:pPr>
-            <a:r>
-              <a:rPr lang="en-US" sz="1400" b="1" dirty="0">
-                <a:solidFill>
-                  <a:srgbClr val="E9F2FF"/>
-                </a:solidFill>
-              </a:rPr>
-              <a:t>Shader System</a:t>
-            </a:r>
-            <a:endParaRPr lang="en-US" sz="1400" dirty="0"/>
-          </a:p>
-        </p:txBody>
-      </p:sp>
-      <p:sp>
-        <p:nvSpPr>
-          <p:cNvPr id="17" name="Text 15"/>
-          <p:cNvSpPr/>
-          <p:nvPr/>
-        </p:nvSpPr>
-        <p:spPr>
-          <a:xfrm>
-            <a:off x="5358384" y="2852928"/>
-            <a:ext cx="1664208" cy="960120"/>
-          </a:xfrm>
-          <a:prstGeom prst="rect">
-            <a:avLst/>
-          </a:prstGeom>
-          <a:noFill/>
-          <a:ln/>
-        </p:spPr>
-        <p:txBody>
-          <a:bodyPr wrap="square" lIns="0" tIns="0" rIns="0" bIns="0" rtlCol="0" anchor="ctr">
-            <a:normAutofit/>
-          </a:bodyPr>
-          <a:lstStyle/>
-          <a:p>
-            <a:pPr indent="0" marL="0">
-              <a:buNone/>
-            </a:pPr>
-            <a:r>
-              <a:rPr lang="en-US" sz="1050" dirty="0">
-                <a:solidFill>
-                  <a:srgbClr val="96A9C2"/>
-                </a:solidFill>
-              </a:rPr>
-              <a:t>外置源码 / Technique</a:t>
-            </a:r>
-            <a:endParaRPr lang="en-US" sz="1050" dirty="0"/>
-          </a:p>
-          <a:p>
-            <a:pPr indent="0" marL="0">
-              <a:buNone/>
-            </a:pPr>
-            <a:r>
-              <a:rPr lang="en-US" sz="1050" dirty="0">
-                <a:solidFill>
-                  <a:srgbClr val="96A9C2"/>
-                </a:solidFill>
-              </a:rPr>
-              <a:t>Variant + Hot Reload</a:t>
-            </a:r>
-            <a:endParaRPr lang="en-US" sz="1050" dirty="0"/>
-          </a:p>
-        </p:txBody>
-      </p:sp>
-      <p:sp>
-        <p:nvSpPr>
-          <p:cNvPr id="18" name="Shape 16"/>
-          <p:cNvSpPr/>
-          <p:nvPr/>
-        </p:nvSpPr>
-        <p:spPr>
-          <a:xfrm>
-            <a:off x="7205472" y="2889504"/>
-            <a:ext cx="256032" cy="0"/>
-          </a:xfrm>
-          <a:prstGeom prst="line">
-            <a:avLst/>
-          </a:prstGeom>
-          <a:noFill/>
-          <a:ln w="17780">
-            <a:solidFill>
-              <a:srgbClr val="5EE2A0"/>
-            </a:solidFill>
-            <a:prstDash val="solid"/>
-            <a:headEnd type="none"/>
-            <a:tailEnd type="triangle"/>
-          </a:ln>
-        </p:spPr>
-      </p:sp>
-      <p:sp>
-        <p:nvSpPr>
-          <p:cNvPr id="19" name="Shape 17"/>
-          <p:cNvSpPr/>
-          <p:nvPr/>
-        </p:nvSpPr>
-        <p:spPr>
-          <a:xfrm>
-            <a:off x="7507224" y="1417320"/>
-            <a:ext cx="1993392" cy="2971800"/>
-          </a:xfrm>
-          <a:prstGeom prst="roundRect">
-            <a:avLst/>
-          </a:prstGeom>
-          <a:solidFill>
-            <a:srgbClr val="0F1C2E"/>
-          </a:solidFill>
-          <a:ln w="17780">
-            <a:solidFill>
-              <a:srgbClr val="21D4FD"/>
-            </a:solidFill>
-            <a:prstDash val="solid"/>
-          </a:ln>
-        </p:spPr>
-      </p:sp>
-      <p:sp>
-        <p:nvSpPr>
-          <p:cNvPr id="20" name="Text 18"/>
-          <p:cNvSpPr/>
-          <p:nvPr/>
-        </p:nvSpPr>
-        <p:spPr>
-          <a:xfrm>
-            <a:off x="7671816" y="1627632"/>
-            <a:ext cx="502920" cy="329184"/>
-          </a:xfrm>
-          <a:prstGeom prst="rect">
-            <a:avLst/>
-          </a:prstGeom>
-          <a:noFill/>
-          <a:ln/>
-        </p:spPr>
-        <p:txBody>
-          <a:bodyPr wrap="square" lIns="0" tIns="0" rIns="0" bIns="0" rtlCol="0" anchor="ctr"/>
-          <a:lstStyle/>
-          <a:p>
-            <a:pPr indent="0" marL="0">
-              <a:buNone/>
-            </a:pPr>
-            <a:r>
-              <a:rPr lang="en-US" sz="1800" b="1" dirty="0">
-                <a:solidFill>
-                  <a:srgbClr val="21D4FD"/>
-                </a:solidFill>
-              </a:rPr>
-              <a:t>P3</a:t>
-            </a:r>
-            <a:endParaRPr lang="en-US" sz="1800" dirty="0"/>
-          </a:p>
-        </p:txBody>
-      </p:sp>
-      <p:sp>
-        <p:nvSpPr>
-          <p:cNvPr id="21" name="Text 19"/>
-          <p:cNvSpPr/>
-          <p:nvPr/>
-        </p:nvSpPr>
-        <p:spPr>
-          <a:xfrm>
-            <a:off x="7671816" y="2121408"/>
-            <a:ext cx="1664208" cy="457200"/>
-          </a:xfrm>
-          <a:prstGeom prst="rect">
-            <a:avLst/>
-          </a:prstGeom>
-          <a:noFill/>
-          <a:ln/>
-        </p:spPr>
-        <p:txBody>
-          <a:bodyPr wrap="square" lIns="0" tIns="0" rIns="0" bIns="0" rtlCol="0" anchor="ctr">
-            <a:normAutofit/>
-          </a:bodyPr>
-          <a:lstStyle/>
-          <a:p>
-            <a:pPr indent="0" marL="0">
-              <a:buNone/>
-            </a:pPr>
-            <a:r>
-              <a:rPr lang="en-US" sz="1400" b="1" dirty="0">
-                <a:solidFill>
-                  <a:srgbClr val="E9F2FF"/>
-                </a:solidFill>
-              </a:rPr>
-              <a:t>RenderGraph 2.0</a:t>
-            </a:r>
-            <a:endParaRPr lang="en-US" sz="1400" dirty="0"/>
-          </a:p>
-        </p:txBody>
-      </p:sp>
-      <p:sp>
-        <p:nvSpPr>
-          <p:cNvPr id="22" name="Text 20"/>
-          <p:cNvSpPr/>
-          <p:nvPr/>
-        </p:nvSpPr>
-        <p:spPr>
-          <a:xfrm>
-            <a:off x="7671816" y="2852928"/>
-            <a:ext cx="1664208" cy="960120"/>
-          </a:xfrm>
-          <a:prstGeom prst="rect">
-            <a:avLst/>
-          </a:prstGeom>
-          <a:noFill/>
-          <a:ln/>
-        </p:spPr>
-        <p:txBody>
-          <a:bodyPr wrap="square" lIns="0" tIns="0" rIns="0" bIns="0" rtlCol="0" anchor="ctr">
-            <a:normAutofit/>
-          </a:bodyPr>
-          <a:lstStyle/>
-          <a:p>
-            <a:pPr indent="0" marL="0">
-              <a:buNone/>
-            </a:pPr>
-            <a:r>
-              <a:rPr lang="en-US" sz="1050" dirty="0">
-                <a:solidFill>
-                  <a:srgbClr val="96A9C2"/>
-                </a:solidFill>
-              </a:rPr>
-              <a:t>资源读写依赖</a:t>
-            </a:r>
-            <a:endParaRPr lang="en-US" sz="1050" dirty="0"/>
-          </a:p>
-          <a:p>
-            <a:pPr indent="0" marL="0">
-              <a:buNone/>
-            </a:pPr>
-            <a:r>
-              <a:rPr lang="en-US" sz="1050" dirty="0">
-                <a:solidFill>
-                  <a:srgbClr val="96A9C2"/>
-                </a:solidFill>
-              </a:rPr>
-              <a:t>自动排序 + TargetPool</a:t>
-            </a:r>
-            <a:endParaRPr lang="en-US" sz="1050" dirty="0"/>
-          </a:p>
-        </p:txBody>
-      </p:sp>
-      <p:sp>
-        <p:nvSpPr>
-          <p:cNvPr id="23" name="Shape 21"/>
-          <p:cNvSpPr/>
-          <p:nvPr/>
-        </p:nvSpPr>
-        <p:spPr>
-          <a:xfrm>
-            <a:off x="9518904" y="2889504"/>
-            <a:ext cx="256032" cy="0"/>
-          </a:xfrm>
-          <a:prstGeom prst="line">
-            <a:avLst/>
-          </a:prstGeom>
-          <a:noFill/>
-          <a:ln w="17780">
-            <a:solidFill>
-              <a:srgbClr val="21D4FD"/>
-            </a:solidFill>
-            <a:prstDash val="solid"/>
-            <a:headEnd type="none"/>
-            <a:tailEnd type="triangle"/>
-          </a:ln>
-        </p:spPr>
-      </p:sp>
-      <p:sp>
-        <p:nvSpPr>
-          <p:cNvPr id="24" name="Shape 22"/>
-          <p:cNvSpPr/>
-          <p:nvPr/>
-        </p:nvSpPr>
-        <p:spPr>
-          <a:xfrm>
-            <a:off x="9820656" y="1417320"/>
-            <a:ext cx="1993392" cy="2971800"/>
-          </a:xfrm>
-          <a:prstGeom prst="roundRect">
-            <a:avLst/>
-          </a:prstGeom>
-          <a:solidFill>
-            <a:srgbClr val="0F1C2E"/>
-          </a:solidFill>
-          <a:ln w="17780">
-            <a:solidFill>
-              <a:srgbClr val="B78CFF"/>
-            </a:solidFill>
-            <a:prstDash val="solid"/>
-          </a:ln>
-        </p:spPr>
-      </p:sp>
-      <p:sp>
-        <p:nvSpPr>
-          <p:cNvPr id="25" name="Text 23"/>
-          <p:cNvSpPr/>
-          <p:nvPr/>
-        </p:nvSpPr>
-        <p:spPr>
-          <a:xfrm>
-            <a:off x="9985248" y="1627632"/>
-            <a:ext cx="502920" cy="329184"/>
-          </a:xfrm>
-          <a:prstGeom prst="rect">
-            <a:avLst/>
-          </a:prstGeom>
-          <a:noFill/>
-          <a:ln/>
-        </p:spPr>
-        <p:txBody>
-          <a:bodyPr wrap="square" lIns="0" tIns="0" rIns="0" bIns="0" rtlCol="0" anchor="ctr"/>
-          <a:lstStyle/>
-          <a:p>
-            <a:pPr indent="0" marL="0">
-              <a:buNone/>
-            </a:pPr>
-            <a:r>
-              <a:rPr lang="en-US" sz="1800" b="1" dirty="0">
-                <a:solidFill>
-                  <a:srgbClr val="B78CFF"/>
-                </a:solidFill>
-              </a:rPr>
-              <a:t>P4</a:t>
-            </a:r>
-            <a:endParaRPr lang="en-US" sz="1800" dirty="0"/>
-          </a:p>
-        </p:txBody>
-      </p:sp>
-      <p:sp>
-        <p:nvSpPr>
-          <p:cNvPr id="26" name="Text 24"/>
-          <p:cNvSpPr/>
-          <p:nvPr/>
-        </p:nvSpPr>
-        <p:spPr>
-          <a:xfrm>
-            <a:off x="9985248" y="2121408"/>
-            <a:ext cx="1664208" cy="457200"/>
-          </a:xfrm>
-          <a:prstGeom prst="rect">
-            <a:avLst/>
-          </a:prstGeom>
-          <a:noFill/>
-          <a:ln/>
-        </p:spPr>
-        <p:txBody>
-          <a:bodyPr wrap="square" lIns="0" tIns="0" rIns="0" bIns="0" rtlCol="0" anchor="ctr">
-            <a:normAutofit/>
-          </a:bodyPr>
-          <a:lstStyle/>
-          <a:p>
-            <a:pPr indent="0" marL="0">
-              <a:buNone/>
-            </a:pPr>
-            <a:r>
-              <a:rPr lang="en-US" sz="1400" b="1" dirty="0">
-                <a:solidFill>
-                  <a:srgbClr val="E9F2FF"/>
-                </a:solidFill>
-              </a:rPr>
-              <a:t>Advanced Rendering</a:t>
-            </a:r>
-            <a:endParaRPr lang="en-US" sz="1400" dirty="0"/>
-          </a:p>
-        </p:txBody>
-      </p:sp>
-      <p:sp>
-        <p:nvSpPr>
-          <p:cNvPr id="27" name="Text 25"/>
-          <p:cNvSpPr/>
-          <p:nvPr/>
-        </p:nvSpPr>
-        <p:spPr>
-          <a:xfrm>
-            <a:off x="9985248" y="2852928"/>
-            <a:ext cx="1664208" cy="960120"/>
-          </a:xfrm>
-          <a:prstGeom prst="rect">
-            <a:avLst/>
-          </a:prstGeom>
-          <a:noFill/>
-          <a:ln/>
-        </p:spPr>
-        <p:txBody>
-          <a:bodyPr wrap="square" lIns="0" tIns="0" rIns="0" bIns="0" rtlCol="0" anchor="ctr">
-            <a:normAutofit/>
-          </a:bodyPr>
-          <a:lstStyle/>
-          <a:p>
-            <a:pPr indent="0" marL="0">
-              <a:buNone/>
-            </a:pPr>
-            <a:r>
-              <a:rPr lang="en-US" sz="1050" dirty="0">
-                <a:solidFill>
-                  <a:srgbClr val="96A9C2"/>
-                </a:solidFill>
-              </a:rPr>
-              <a:t>CSM / Skin / Alpha</a:t>
-            </a:r>
-            <a:endParaRPr lang="en-US" sz="1050" dirty="0"/>
-          </a:p>
-          <a:p>
-            <a:pPr indent="0" marL="0">
-              <a:buNone/>
-            </a:pPr>
-            <a:r>
-              <a:rPr lang="en-US" sz="1050" dirty="0">
-                <a:solidFill>
-                  <a:srgbClr val="96A9C2"/>
-                </a:solidFill>
-              </a:rPr>
-              <a:t>SSAO / TAA / Profiler</a:t>
-            </a:r>
-            <a:endParaRPr lang="en-US" sz="1050" dirty="0"/>
-          </a:p>
-        </p:txBody>
-      </p:sp>
-      <p:sp>
-        <p:nvSpPr>
-          <p:cNvPr id="28" name="Shape 26"/>
-          <p:cNvSpPr/>
-          <p:nvPr/>
-        </p:nvSpPr>
-        <p:spPr>
-          <a:xfrm>
-            <a:off x="658368" y="4846320"/>
-            <a:ext cx="5394960" cy="960120"/>
+            <a:off x="594360" y="1325880"/>
+            <a:ext cx="3383280" cy="1965960"/>
           </a:xfrm>
           <a:prstGeom prst="roundRect">
             <a:avLst>
-              <a:gd name="adj" fmla="val 5714"/>
+              <a:gd name="adj" fmla="val 2791"/>
             </a:avLst>
           </a:prstGeom>
           <a:solidFill>
@@ -8244,39 +8122,39 @@
       </p:sp>
       <p:sp>
         <p:nvSpPr>
-          <p:cNvPr id="29" name="Shape 27"/>
-          <p:cNvSpPr/>
-          <p:nvPr/>
-        </p:nvSpPr>
-        <p:spPr>
-          <a:xfrm>
-            <a:off x="658368" y="4846320"/>
-            <a:ext cx="54864" cy="960120"/>
-          </a:xfrm>
-          <a:prstGeom prst="rect">
-            <a:avLst/>
-          </a:prstGeom>
-          <a:solidFill>
-            <a:srgbClr val="FF6B7A"/>
+          <p:cNvPr id="5" name="Shape 3"/>
+          <p:cNvSpPr/>
+          <p:nvPr/>
+        </p:nvSpPr>
+        <p:spPr>
+          <a:xfrm>
+            <a:off x="594360" y="1325880"/>
+            <a:ext cx="54864" cy="1965960"/>
+          </a:xfrm>
+          <a:prstGeom prst="rect">
+            <a:avLst/>
+          </a:prstGeom>
+          <a:solidFill>
+            <a:srgbClr val="21D4FD"/>
           </a:solidFill>
           <a:ln w="12700">
             <a:solidFill>
-              <a:srgbClr val="FF6B7A"/>
-            </a:solidFill>
-            <a:prstDash val="solid"/>
-          </a:ln>
-        </p:spPr>
-      </p:sp>
-      <p:sp>
-        <p:nvSpPr>
-          <p:cNvPr id="30" name="Text 28"/>
-          <p:cNvSpPr/>
-          <p:nvPr/>
-        </p:nvSpPr>
-        <p:spPr>
-          <a:xfrm>
-            <a:off x="859536" y="5010912"/>
-            <a:ext cx="5065776" cy="274320"/>
+              <a:srgbClr val="21D4FD"/>
+            </a:solidFill>
+            <a:prstDash val="solid"/>
+          </a:ln>
+        </p:spPr>
+      </p:sp>
+      <p:sp>
+        <p:nvSpPr>
+          <p:cNvPr id="6" name="Text 4"/>
+          <p:cNvSpPr/>
+          <p:nvPr/>
+        </p:nvSpPr>
+        <p:spPr>
+          <a:xfrm>
+            <a:off x="795528" y="1490472"/>
+            <a:ext cx="3054096" cy="274320"/>
           </a:xfrm>
           <a:prstGeom prst="rect">
             <a:avLst/>
@@ -8297,7 +8175,7 @@
                   <a:srgbClr val="E9F2FF"/>
                 </a:solidFill>
               </a:rPr>
-              <a:t>架构债务</a:t>
+              <a:t>日志系统</a:t>
             </a:r>
             <a:endParaRPr lang="en-US" sz="1400" dirty="0"/>
           </a:p>
@@ -8305,14 +8183,14 @@
       </p:sp>
       <p:sp>
         <p:nvSpPr>
-          <p:cNvPr id="31" name="Text 29"/>
-          <p:cNvSpPr/>
-          <p:nvPr/>
-        </p:nvSpPr>
-        <p:spPr>
-          <a:xfrm>
-            <a:off x="859536" y="5413248"/>
-            <a:ext cx="5029200" cy="265176"/>
+          <p:cNvPr id="7" name="Text 5"/>
+          <p:cNvSpPr/>
+          <p:nvPr/>
+        </p:nvSpPr>
+        <p:spPr>
+          <a:xfrm>
+            <a:off x="795528" y="1892808"/>
+            <a:ext cx="3017520" cy="1271016"/>
           </a:xfrm>
           <a:prstGeom prst="rect">
             <a:avLst/>
@@ -8335,26 +8213,68 @@
                   <a:srgbClr val="96A9C2"/>
                 </a:solidFill>
               </a:rPr>
-              <a:t>Scene/GameObject 裸指针 · RenderContext singleton · ShaderCode.cpp 硬编码 · CMake GLOB</a:t>
-            </a:r>
-            <a:endParaRPr lang="en-US" sz="1050" dirty="0"/>
-          </a:p>
-        </p:txBody>
-      </p:sp>
-      <p:sp>
-        <p:nvSpPr>
-          <p:cNvPr id="32" name="Shape 30"/>
-          <p:cNvSpPr/>
-          <p:nvPr/>
-        </p:nvSpPr>
-        <p:spPr>
-          <a:xfrm>
-            <a:off x="6263640" y="4846320"/>
-            <a:ext cx="5257800" cy="960120"/>
+              <a:t>控制台 + logs/engine.log</a:t>
+            </a:r>
+            <a:endParaRPr lang="en-US" sz="1050" dirty="0"/>
+          </a:p>
+          <a:p>
+            <a:pPr indent="0" marL="0">
+              <a:buNone/>
+            </a:pPr>
+            <a:r>
+              <a:rPr lang="en-US" sz="1050" dirty="0">
+                <a:solidFill>
+                  <a:srgbClr val="96A9C2"/>
+                </a:solidFill>
+              </a:rPr>
+              <a:t>INFO / WARN / ERROR</a:t>
+            </a:r>
+            <a:endParaRPr lang="en-US" sz="1050" dirty="0"/>
+          </a:p>
+          <a:p>
+            <a:pPr indent="0" marL="0">
+              <a:buNone/>
+            </a:pPr>
+            <a:r>
+              <a:rPr lang="en-US" sz="1050" dirty="0">
+                <a:solidFill>
+                  <a:srgbClr val="96A9C2"/>
+                </a:solidFill>
+              </a:rPr>
+              <a:t>资源路径、缓存命中、模型统计</a:t>
+            </a:r>
+            <a:endParaRPr lang="en-US" sz="1050" dirty="0"/>
+          </a:p>
+          <a:p>
+            <a:pPr indent="0" marL="0">
+              <a:buNone/>
+            </a:pPr>
+            <a:r>
+              <a:rPr lang="en-US" sz="1050" dirty="0">
+                <a:solidFill>
+                  <a:srgbClr val="96A9C2"/>
+                </a:solidFill>
+              </a:rPr>
+              <a:t>启动与关闭生命周期</a:t>
+            </a:r>
+            <a:endParaRPr lang="en-US" sz="1050" dirty="0"/>
+          </a:p>
+        </p:txBody>
+      </p:sp>
+      <p:sp>
+        <p:nvSpPr>
+          <p:cNvPr id="8" name="Shape 6"/>
+          <p:cNvSpPr/>
+          <p:nvPr/>
+        </p:nvSpPr>
+        <p:spPr>
+          <a:xfrm>
+            <a:off x="4407408" y="1325880"/>
+            <a:ext cx="3383280" cy="1965960"/>
           </a:xfrm>
           <a:prstGeom prst="roundRect">
             <a:avLst>
-              <a:gd name="adj" fmla="val 5714"/>
+              <a:gd name="adj" fmla="val 2791"/>
             </a:avLst>
           </a:prstGeom>
           <a:solidFill>
@@ -8370,39 +8290,39 @@
       </p:sp>
       <p:sp>
         <p:nvSpPr>
-          <p:cNvPr id="33" name="Shape 31"/>
-          <p:cNvSpPr/>
-          <p:nvPr/>
-        </p:nvSpPr>
-        <p:spPr>
-          <a:xfrm>
-            <a:off x="6263640" y="4846320"/>
-            <a:ext cx="54864" cy="960120"/>
-          </a:xfrm>
-          <a:prstGeom prst="rect">
-            <a:avLst/>
-          </a:prstGeom>
-          <a:solidFill>
-            <a:srgbClr val="B78CFF"/>
+          <p:cNvPr id="9" name="Shape 7"/>
+          <p:cNvSpPr/>
+          <p:nvPr/>
+        </p:nvSpPr>
+        <p:spPr>
+          <a:xfrm>
+            <a:off x="4407408" y="1325880"/>
+            <a:ext cx="54864" cy="1965960"/>
+          </a:xfrm>
+          <a:prstGeom prst="rect">
+            <a:avLst/>
+          </a:prstGeom>
+          <a:solidFill>
+            <a:srgbClr val="FF6B7A"/>
           </a:solidFill>
           <a:ln w="12700">
             <a:solidFill>
-              <a:srgbClr val="B78CFF"/>
-            </a:solidFill>
-            <a:prstDash val="solid"/>
-          </a:ln>
-        </p:spPr>
-      </p:sp>
-      <p:sp>
-        <p:nvSpPr>
-          <p:cNvPr id="34" name="Text 32"/>
-          <p:cNvSpPr/>
-          <p:nvPr/>
-        </p:nvSpPr>
-        <p:spPr>
-          <a:xfrm>
-            <a:off x="6464808" y="5010912"/>
-            <a:ext cx="4928616" cy="274320"/>
+              <a:srgbClr val="FF6B7A"/>
+            </a:solidFill>
+            <a:prstDash val="solid"/>
+          </a:ln>
+        </p:spPr>
+      </p:sp>
+      <p:sp>
+        <p:nvSpPr>
+          <p:cNvPr id="10" name="Text 8"/>
+          <p:cNvSpPr/>
+          <p:nvPr/>
+        </p:nvSpPr>
+        <p:spPr>
+          <a:xfrm>
+            <a:off x="4608576" y="1490472"/>
+            <a:ext cx="3054096" cy="274320"/>
           </a:xfrm>
           <a:prstGeom prst="rect">
             <a:avLst/>
@@ -8423,7 +8343,7 @@
                   <a:srgbClr val="E9F2FF"/>
                 </a:solidFill>
               </a:rPr>
-              <a:t>画面能力缺口</a:t>
+              <a:t>GPU 错误定位</a:t>
             </a:r>
             <a:endParaRPr lang="en-US" sz="1400" dirty="0"/>
           </a:p>
@@ -8431,14 +8351,14 @@
       </p:sp>
       <p:sp>
         <p:nvSpPr>
-          <p:cNvPr id="35" name="Text 33"/>
-          <p:cNvSpPr/>
-          <p:nvPr/>
-        </p:nvSpPr>
-        <p:spPr>
-          <a:xfrm>
-            <a:off x="6464808" y="5413248"/>
-            <a:ext cx="4892040" cy="265176"/>
+          <p:cNvPr id="11" name="Text 9"/>
+          <p:cNvSpPr/>
+          <p:nvPr/>
+        </p:nvSpPr>
+        <p:spPr>
+          <a:xfrm>
+            <a:off x="4608576" y="1892808"/>
+            <a:ext cx="3017520" cy="1271016"/>
           </a:xfrm>
           <a:prstGeom prst="rect">
             <a:avLst/>
@@ -8461,7 +8381,413 @@
                   <a:srgbClr val="96A9C2"/>
                 </a:solidFill>
               </a:rPr>
-              <a:t>CSM · glTF Alpha/Transmission/Skin · SSAO/TAA · GPU Profiler</a:t>
+              <a:t>Shader 编译/链接 info log</a:t>
+            </a:r>
+            <a:endParaRPr lang="en-US" sz="1050" dirty="0"/>
+          </a:p>
+          <a:p>
+            <a:pPr indent="0" marL="0">
+              <a:buNone/>
+            </a:pPr>
+            <a:r>
+              <a:rPr lang="en-US" sz="1050" dirty="0">
+                <a:solidFill>
+                  <a:srgbClr val="96A9C2"/>
+                </a:solidFill>
+              </a:rPr>
+              <a:t>源代码行号预览</a:t>
+            </a:r>
+            <a:endParaRPr lang="en-US" sz="1050" dirty="0"/>
+          </a:p>
+          <a:p>
+            <a:pPr indent="0" marL="0">
+              <a:buNone/>
+            </a:pPr>
+            <a:r>
+              <a:rPr lang="en-US" sz="1050" dirty="0">
+                <a:solidFill>
+                  <a:srgbClr val="96A9C2"/>
+                </a:solidFill>
+              </a:rPr>
+              <a:t>Framebuffer completeness</a:t>
+            </a:r>
+            <a:endParaRPr lang="en-US" sz="1050" dirty="0"/>
+          </a:p>
+          <a:p>
+            <a:pPr indent="0" marL="0">
+              <a:buNone/>
+            </a:pPr>
+            <a:r>
+              <a:rPr lang="en-US" sz="1050" dirty="0">
+                <a:solidFill>
+                  <a:srgbClr val="96A9C2"/>
+                </a:solidFill>
+              </a:rPr>
+              <a:t>OpenGL Debug Callback</a:t>
+            </a:r>
+            <a:endParaRPr lang="en-US" sz="1050" dirty="0"/>
+          </a:p>
+        </p:txBody>
+      </p:sp>
+      <p:sp>
+        <p:nvSpPr>
+          <p:cNvPr id="12" name="Shape 10"/>
+          <p:cNvSpPr/>
+          <p:nvPr/>
+        </p:nvSpPr>
+        <p:spPr>
+          <a:xfrm>
+            <a:off x="8211312" y="1325880"/>
+            <a:ext cx="3383280" cy="1965960"/>
+          </a:xfrm>
+          <a:prstGeom prst="roundRect">
+            <a:avLst>
+              <a:gd name="adj" fmla="val 2791"/>
+            </a:avLst>
+          </a:prstGeom>
+          <a:solidFill>
+            <a:srgbClr val="0F1C2E"/>
+          </a:solidFill>
+          <a:ln w="12700">
+            <a:solidFill>
+              <a:srgbClr val="29405C"/>
+            </a:solidFill>
+            <a:prstDash val="solid"/>
+          </a:ln>
+        </p:spPr>
+      </p:sp>
+      <p:sp>
+        <p:nvSpPr>
+          <p:cNvPr id="13" name="Shape 11"/>
+          <p:cNvSpPr/>
+          <p:nvPr/>
+        </p:nvSpPr>
+        <p:spPr>
+          <a:xfrm>
+            <a:off x="8211312" y="1325880"/>
+            <a:ext cx="54864" cy="1965960"/>
+          </a:xfrm>
+          <a:prstGeom prst="rect">
+            <a:avLst/>
+          </a:prstGeom>
+          <a:solidFill>
+            <a:srgbClr val="5EE2A0"/>
+          </a:solidFill>
+          <a:ln w="12700">
+            <a:solidFill>
+              <a:srgbClr val="5EE2A0"/>
+            </a:solidFill>
+            <a:prstDash val="solid"/>
+          </a:ln>
+        </p:spPr>
+      </p:sp>
+      <p:sp>
+        <p:nvSpPr>
+          <p:cNvPr id="14" name="Text 12"/>
+          <p:cNvSpPr/>
+          <p:nvPr/>
+        </p:nvSpPr>
+        <p:spPr>
+          <a:xfrm>
+            <a:off x="8412480" y="1490472"/>
+            <a:ext cx="3054096" cy="274320"/>
+          </a:xfrm>
+          <a:prstGeom prst="rect">
+            <a:avLst/>
+          </a:prstGeom>
+          <a:noFill/>
+          <a:ln/>
+        </p:spPr>
+        <p:txBody>
+          <a:bodyPr wrap="square" lIns="0" tIns="0" rIns="0" bIns="0" rtlCol="0" anchor="ctr"/>
+          <a:lstStyle/>
+          <a:p>
+            <a:pPr indent="0" marL="0">
+              <a:buNone/>
+            </a:pPr>
+            <a:r>
+              <a:rPr lang="en-US" sz="1400" b="1" dirty="0">
+                <a:solidFill>
+                  <a:srgbClr val="E9F2FF"/>
+                </a:solidFill>
+              </a:rPr>
+              <a:t>构建部署</a:t>
+            </a:r>
+            <a:endParaRPr lang="en-US" sz="1400" dirty="0"/>
+          </a:p>
+        </p:txBody>
+      </p:sp>
+      <p:sp>
+        <p:nvSpPr>
+          <p:cNvPr id="15" name="Text 13"/>
+          <p:cNvSpPr/>
+          <p:nvPr/>
+        </p:nvSpPr>
+        <p:spPr>
+          <a:xfrm>
+            <a:off x="8412480" y="1892808"/>
+            <a:ext cx="3017520" cy="1271016"/>
+          </a:xfrm>
+          <a:prstGeom prst="rect">
+            <a:avLst/>
+          </a:prstGeom>
+          <a:noFill/>
+          <a:ln/>
+        </p:spPr>
+        <p:txBody>
+          <a:bodyPr wrap="square" lIns="254" tIns="254" rIns="254" bIns="254" rtlCol="0" anchor="t">
+            <a:normAutofit/>
+          </a:bodyPr>
+          <a:lstStyle/>
+          <a:p>
+            <a:pPr indent="0" marL="0">
+              <a:buNone/>
+            </a:pPr>
+            <a:r>
+              <a:rPr lang="en-US" sz="1050" dirty="0">
+                <a:solidFill>
+                  <a:srgbClr val="96A9C2"/>
+                </a:solidFill>
+              </a:rPr>
+              <a:t>Debug / Release 双配置</a:t>
+            </a:r>
+            <a:endParaRPr lang="en-US" sz="1050" dirty="0"/>
+          </a:p>
+          <a:p>
+            <a:pPr indent="0" marL="0">
+              <a:buNone/>
+            </a:pPr>
+            <a:r>
+              <a:rPr lang="en-US" sz="1050" dirty="0">
+                <a:solidFill>
+                  <a:srgbClr val="96A9C2"/>
+                </a:solidFill>
+              </a:rPr>
+              <a:t>Assimp DLL 自动复制</a:t>
+            </a:r>
+            <a:endParaRPr lang="en-US" sz="1050" dirty="0"/>
+          </a:p>
+          <a:p>
+            <a:pPr indent="0" marL="0">
+              <a:buNone/>
+            </a:pPr>
+            <a:r>
+              <a:rPr lang="en-US" sz="1050" dirty="0">
+                <a:solidFill>
+                  <a:srgbClr val="96A9C2"/>
+                </a:solidFill>
+              </a:rPr>
+              <a:t>CMake 重新配置纳入新源码</a:t>
+            </a:r>
+            <a:endParaRPr lang="en-US" sz="1050" dirty="0"/>
+          </a:p>
+          <a:p>
+            <a:pPr indent="0" marL="0">
+              <a:buNone/>
+            </a:pPr>
+            <a:r>
+              <a:rPr lang="en-US" sz="1050" dirty="0">
+                <a:solidFill>
+                  <a:srgbClr val="96A9C2"/>
+                </a:solidFill>
+              </a:rPr>
+              <a:t>运行时依赖检查</a:t>
+            </a:r>
+            <a:endParaRPr lang="en-US" sz="1050" dirty="0"/>
+          </a:p>
+        </p:txBody>
+      </p:sp>
+      <p:sp>
+        <p:nvSpPr>
+          <p:cNvPr id="16" name="Shape 14"/>
+          <p:cNvSpPr/>
+          <p:nvPr/>
+        </p:nvSpPr>
+        <p:spPr>
+          <a:xfrm>
+            <a:off x="594360" y="3794760"/>
+            <a:ext cx="11000232" cy="1508760"/>
+          </a:xfrm>
+          <a:prstGeom prst="roundRect">
+            <a:avLst/>
+          </a:prstGeom>
+          <a:solidFill>
+            <a:srgbClr val="0F1C2E"/>
+          </a:solidFill>
+          <a:ln w="12700">
+            <a:solidFill>
+              <a:srgbClr val="29405C"/>
+            </a:solidFill>
+            <a:prstDash val="solid"/>
+          </a:ln>
+        </p:spPr>
+      </p:sp>
+      <p:sp>
+        <p:nvSpPr>
+          <p:cNvPr id="17" name="Text 15"/>
+          <p:cNvSpPr/>
+          <p:nvPr/>
+        </p:nvSpPr>
+        <p:spPr>
+          <a:xfrm>
+            <a:off x="822960" y="4050792"/>
+            <a:ext cx="1097280" cy="274320"/>
+          </a:xfrm>
+          <a:prstGeom prst="rect">
+            <a:avLst/>
+          </a:prstGeom>
+          <a:noFill/>
+          <a:ln/>
+        </p:spPr>
+        <p:txBody>
+          <a:bodyPr wrap="square" lIns="0" tIns="0" rIns="0" bIns="0" rtlCol="0" anchor="ctr"/>
+          <a:lstStyle/>
+          <a:p>
+            <a:pPr indent="0" marL="0">
+              <a:buNone/>
+            </a:pPr>
+            <a:r>
+              <a:rPr lang="en-US" sz="1500" b="1" dirty="0">
+                <a:solidFill>
+                  <a:srgbClr val="FFB45A"/>
+                </a:solidFill>
+              </a:rPr>
+              <a:t>本轮验证</a:t>
+            </a:r>
+            <a:endParaRPr lang="en-US" sz="1500" dirty="0"/>
+          </a:p>
+        </p:txBody>
+      </p:sp>
+      <p:sp>
+        <p:nvSpPr>
+          <p:cNvPr id="18" name="Text 16"/>
+          <p:cNvSpPr/>
+          <p:nvPr/>
+        </p:nvSpPr>
+        <p:spPr>
+          <a:xfrm>
+            <a:off x="1920240" y="3950208"/>
+            <a:ext cx="9052560" cy="1005840"/>
+          </a:xfrm>
+          <a:prstGeom prst="rect">
+            <a:avLst/>
+          </a:prstGeom>
+          <a:noFill/>
+          <a:ln/>
+        </p:spPr>
+        <p:txBody>
+          <a:bodyPr wrap="square" lIns="508" tIns="508" rIns="508" bIns="508" rtlCol="0" anchor="ctr">
+            <a:normAutofit/>
+          </a:bodyPr>
+          <a:lstStyle/>
+          <a:p>
+            <a:pPr marL="167640" indent="-167640">
+              <a:buSzPct val="100000"/>
+              <a:buChar char="•"/>
+            </a:pPr>
+            <a:r>
+              <a:rPr lang="en-US" sz="1100" dirty="0">
+                <a:solidFill>
+                  <a:srgbClr val="E9F2FF"/>
+                </a:solidFill>
+              </a:rPr>
+              <a:t>Debug / Release 构建通过</a:t>
+            </a:r>
+            <a:endParaRPr lang="en-US" sz="1100" dirty="0"/>
+          </a:p>
+          <a:p>
+            <a:pPr marL="167640" indent="-167640">
+              <a:buSzPct val="100000"/>
+              <a:buChar char="•"/>
+            </a:pPr>
+            <a:r>
+              <a:rPr lang="en-US" sz="1100" dirty="0">
+                <a:solidFill>
+                  <a:srgbClr val="E9F2FF"/>
+                </a:solidFill>
+              </a:rPr>
+              <a:t>默认场景与模型专项测试各运行 8 秒</a:t>
+            </a:r>
+            <a:endParaRPr lang="en-US" sz="1100" dirty="0"/>
+          </a:p>
+          <a:p>
+            <a:pPr marL="167640" indent="-167640">
+              <a:buSzPct val="100000"/>
+              <a:buChar char="•"/>
+            </a:pPr>
+            <a:r>
+              <a:rPr lang="en-US" sz="1100" dirty="0">
+                <a:solidFill>
+                  <a:srgbClr val="E9F2FF"/>
+                </a:solidFill>
+              </a:rPr>
+              <a:t>RenderQueue：2 提交 / 1 可见 / 1 裁剪</a:t>
+            </a:r>
+            <a:endParaRPr lang="en-US" sz="1100" dirty="0"/>
+          </a:p>
+          <a:p>
+            <a:pPr marL="167640" indent="-167640">
+              <a:buSzPct val="100000"/>
+              <a:buChar char="•"/>
+            </a:pPr>
+            <a:r>
+              <a:rPr lang="en-US" sz="1100" dirty="0">
+                <a:solidFill>
+                  <a:srgbClr val="E9F2FF"/>
+                </a:solidFill>
+              </a:rPr>
+              <a:t>同模型双实例只上传一份 MeshResource</a:t>
+            </a:r>
+            <a:endParaRPr lang="en-US" sz="1100" dirty="0"/>
+          </a:p>
+          <a:p>
+            <a:pPr marL="167640" indent="-167640">
+              <a:buSzPct val="100000"/>
+              <a:buChar char="•"/>
+            </a:pPr>
+            <a:r>
+              <a:rPr lang="en-US" sz="1100" dirty="0">
+                <a:solidFill>
+                  <a:srgbClr val="E9F2FF"/>
+                </a:solidFill>
+              </a:rPr>
+              <a:t>无 Shader / FBO / 高优先级 GL 错误</a:t>
+            </a:r>
+            <a:endParaRPr lang="en-US" sz="1100" dirty="0"/>
+          </a:p>
+        </p:txBody>
+      </p:sp>
+      <p:sp>
+        <p:nvSpPr>
+          <p:cNvPr id="19" name="Text 17"/>
+          <p:cNvSpPr/>
+          <p:nvPr/>
+        </p:nvSpPr>
+        <p:spPr>
+          <a:xfrm>
+            <a:off x="960120" y="5623560"/>
+            <a:ext cx="10241280" cy="320040"/>
+          </a:xfrm>
+          <a:prstGeom prst="rect">
+            <a:avLst/>
+          </a:prstGeom>
+          <a:noFill/>
+          <a:ln/>
+        </p:spPr>
+        <p:txBody>
+          <a:bodyPr wrap="square" lIns="0" tIns="0" rIns="0" bIns="0" rtlCol="0" anchor="ctr"/>
+          <a:lstStyle/>
+          <a:p>
+            <a:pPr algn="ctr" indent="0" marL="0">
+              <a:buNone/>
+            </a:pPr>
+            <a:r>
+              <a:rPr lang="en-US" sz="1050" dirty="0">
+                <a:solidFill>
+                  <a:srgbClr val="96A9C2"/>
+                </a:solidFill>
+              </a:rPr>
+              <a:t>已知非功能警告：驱动提示 Vertex Shader 会根据 GL State 重新编译；后续通过 Pipeline State 规范化继续优化。</a:t>
             </a:r>
             <a:endParaRPr lang="en-US" sz="1050" dirty="0"/>
           </a:p>
@@ -8548,8 +8874,8 @@
         </p:nvSpPr>
         <p:spPr>
           <a:xfrm>
-            <a:off x="640080" y="868680"/>
-            <a:ext cx="5029200" cy="640080"/>
+            <a:off x="502920" y="320040"/>
+            <a:ext cx="8961120" cy="475488"/>
           </a:xfrm>
           <a:prstGeom prst="rect">
             <a:avLst/>
@@ -8565,14 +8891,14 @@
               <a:buNone/>
             </a:pPr>
             <a:r>
-              <a:rPr lang="en-US" sz="3400" b="1" dirty="0">
+              <a:rPr lang="en-US" sz="2500" b="1" dirty="0">
                 <a:solidFill>
                   <a:srgbClr val="E9F2FF"/>
                 </a:solidFill>
               </a:rPr>
-              <a:t>Render Engine</a:t>
-            </a:r>
-            <a:endParaRPr lang="en-US" sz="3400" dirty="0"/>
+              <a:t>14  当前问题与演进路线</a:t>
+            </a:r>
+            <a:endParaRPr lang="en-US" sz="2500" dirty="0"/>
           </a:p>
         </p:txBody>
       </p:sp>
@@ -8584,8 +8910,8 @@
         </p:nvSpPr>
         <p:spPr>
           <a:xfrm>
-            <a:off x="658368" y="1691640"/>
-            <a:ext cx="6217920" cy="457200"/>
+            <a:off x="521208" y="859536"/>
+            <a:ext cx="10789920" cy="274320"/>
           </a:xfrm>
           <a:prstGeom prst="rect">
             <a:avLst/>
@@ -8601,31 +8927,886 @@
               <a:buNone/>
             </a:pPr>
             <a:r>
-              <a:rPr lang="en-US" sz="2000" dirty="0">
+              <a:rPr lang="en-US" sz="1050" dirty="0">
+                <a:solidFill>
+                  <a:srgbClr val="96A9C2"/>
+                </a:solidFill>
+              </a:rPr>
+              <a:t>P0 / P1 已完成，下一阶段进入 Shader Technique 与热重载</a:t>
+            </a:r>
+            <a:endParaRPr lang="en-US" sz="1050" dirty="0"/>
+          </a:p>
+        </p:txBody>
+      </p:sp>
+      <p:sp>
+        <p:nvSpPr>
+          <p:cNvPr id="4" name="Shape 2"/>
+          <p:cNvSpPr/>
+          <p:nvPr/>
+        </p:nvSpPr>
+        <p:spPr>
+          <a:xfrm>
+            <a:off x="566928" y="1417320"/>
+            <a:ext cx="1993392" cy="2971800"/>
+          </a:xfrm>
+          <a:prstGeom prst="roundRect">
+            <a:avLst/>
+          </a:prstGeom>
+          <a:solidFill>
+            <a:srgbClr val="0F1C2E"/>
+          </a:solidFill>
+          <a:ln w="17780">
+            <a:solidFill>
+              <a:srgbClr val="5EE2A0"/>
+            </a:solidFill>
+            <a:prstDash val="solid"/>
+          </a:ln>
+        </p:spPr>
+      </p:sp>
+      <p:sp>
+        <p:nvSpPr>
+          <p:cNvPr id="5" name="Text 3"/>
+          <p:cNvSpPr/>
+          <p:nvPr/>
+        </p:nvSpPr>
+        <p:spPr>
+          <a:xfrm>
+            <a:off x="731520" y="1627632"/>
+            <a:ext cx="502920" cy="329184"/>
+          </a:xfrm>
+          <a:prstGeom prst="rect">
+            <a:avLst/>
+          </a:prstGeom>
+          <a:noFill/>
+          <a:ln/>
+        </p:spPr>
+        <p:txBody>
+          <a:bodyPr wrap="square" lIns="0" tIns="0" rIns="0" bIns="0" rtlCol="0" anchor="ctr"/>
+          <a:lstStyle/>
+          <a:p>
+            <a:pPr indent="0" marL="0">
+              <a:buNone/>
+            </a:pPr>
+            <a:r>
+              <a:rPr lang="en-US" sz="1800" b="1" dirty="0">
+                <a:solidFill>
+                  <a:srgbClr val="5EE2A0"/>
+                </a:solidFill>
+              </a:rPr>
+              <a:t>P0 ✓</a:t>
+            </a:r>
+            <a:endParaRPr lang="en-US" sz="1800" dirty="0"/>
+          </a:p>
+        </p:txBody>
+      </p:sp>
+      <p:sp>
+        <p:nvSpPr>
+          <p:cNvPr id="6" name="Text 4"/>
+          <p:cNvSpPr/>
+          <p:nvPr/>
+        </p:nvSpPr>
+        <p:spPr>
+          <a:xfrm>
+            <a:off x="731520" y="2121408"/>
+            <a:ext cx="1664208" cy="457200"/>
+          </a:xfrm>
+          <a:prstGeom prst="rect">
+            <a:avLst/>
+          </a:prstGeom>
+          <a:noFill/>
+          <a:ln/>
+        </p:spPr>
+        <p:txBody>
+          <a:bodyPr wrap="square" lIns="0" tIns="0" rIns="0" bIns="0" rtlCol="0" anchor="ctr">
+            <a:normAutofit/>
+          </a:bodyPr>
+          <a:lstStyle/>
+          <a:p>
+            <a:pPr indent="0" marL="0">
+              <a:buNone/>
+            </a:pPr>
+            <a:r>
+              <a:rPr lang="en-US" sz="1400" b="1" dirty="0">
+                <a:solidFill>
+                  <a:srgbClr val="E9F2FF"/>
+                </a:solidFill>
+              </a:rPr>
+              <a:t>MeshResource</a:t>
+            </a:r>
+            <a:endParaRPr lang="en-US" sz="1400" dirty="0"/>
+          </a:p>
+        </p:txBody>
+      </p:sp>
+      <p:sp>
+        <p:nvSpPr>
+          <p:cNvPr id="7" name="Text 5"/>
+          <p:cNvSpPr/>
+          <p:nvPr/>
+        </p:nvSpPr>
+        <p:spPr>
+          <a:xfrm>
+            <a:off x="731520" y="2852928"/>
+            <a:ext cx="1664208" cy="960120"/>
+          </a:xfrm>
+          <a:prstGeom prst="rect">
+            <a:avLst/>
+          </a:prstGeom>
+          <a:noFill/>
+          <a:ln/>
+        </p:spPr>
+        <p:txBody>
+          <a:bodyPr wrap="square" lIns="0" tIns="0" rIns="0" bIns="0" rtlCol="0" anchor="ctr">
+            <a:normAutofit/>
+          </a:bodyPr>
+          <a:lstStyle/>
+          <a:p>
+            <a:pPr indent="0" marL="0">
+              <a:buNone/>
+            </a:pPr>
+            <a:r>
+              <a:rPr lang="en-US" sz="1050" dirty="0">
+                <a:solidFill>
+                  <a:srgbClr val="96A9C2"/>
+                </a:solidFill>
+              </a:rPr>
+              <a:t>共享 VAO/VBO/IBO</a:t>
+            </a:r>
+            <a:endParaRPr lang="en-US" sz="1050" dirty="0"/>
+          </a:p>
+          <a:p>
+            <a:pPr indent="0" marL="0">
+              <a:buNone/>
+            </a:pPr>
+            <a:r>
+              <a:rPr lang="en-US" sz="1050" dirty="0">
+                <a:solidFill>
+                  <a:srgbClr val="96A9C2"/>
+                </a:solidFill>
+              </a:rPr>
+              <a:t>消除多实例重复上传</a:t>
+            </a:r>
+            <a:endParaRPr lang="en-US" sz="1050" dirty="0"/>
+          </a:p>
+        </p:txBody>
+      </p:sp>
+      <p:sp>
+        <p:nvSpPr>
+          <p:cNvPr id="8" name="Shape 6"/>
+          <p:cNvSpPr/>
+          <p:nvPr/>
+        </p:nvSpPr>
+        <p:spPr>
+          <a:xfrm>
+            <a:off x="2578608" y="2889504"/>
+            <a:ext cx="256032" cy="0"/>
+          </a:xfrm>
+          <a:prstGeom prst="line">
+            <a:avLst/>
+          </a:prstGeom>
+          <a:noFill/>
+          <a:ln w="17780">
+            <a:solidFill>
+              <a:srgbClr val="5EE2A0"/>
+            </a:solidFill>
+            <a:prstDash val="solid"/>
+            <a:headEnd type="none"/>
+            <a:tailEnd type="triangle"/>
+          </a:ln>
+        </p:spPr>
+      </p:sp>
+      <p:sp>
+        <p:nvSpPr>
+          <p:cNvPr id="9" name="Shape 7"/>
+          <p:cNvSpPr/>
+          <p:nvPr/>
+        </p:nvSpPr>
+        <p:spPr>
+          <a:xfrm>
+            <a:off x="2880360" y="1417320"/>
+            <a:ext cx="1993392" cy="2971800"/>
+          </a:xfrm>
+          <a:prstGeom prst="roundRect">
+            <a:avLst/>
+          </a:prstGeom>
+          <a:solidFill>
+            <a:srgbClr val="0F1C2E"/>
+          </a:solidFill>
+          <a:ln w="17780">
+            <a:solidFill>
+              <a:srgbClr val="5EE2A0"/>
+            </a:solidFill>
+            <a:prstDash val="solid"/>
+          </a:ln>
+        </p:spPr>
+      </p:sp>
+      <p:sp>
+        <p:nvSpPr>
+          <p:cNvPr id="10" name="Text 8"/>
+          <p:cNvSpPr/>
+          <p:nvPr/>
+        </p:nvSpPr>
+        <p:spPr>
+          <a:xfrm>
+            <a:off x="3044952" y="1627632"/>
+            <a:ext cx="502920" cy="329184"/>
+          </a:xfrm>
+          <a:prstGeom prst="rect">
+            <a:avLst/>
+          </a:prstGeom>
+          <a:noFill/>
+          <a:ln/>
+        </p:spPr>
+        <p:txBody>
+          <a:bodyPr wrap="square" lIns="0" tIns="0" rIns="0" bIns="0" rtlCol="0" anchor="ctr"/>
+          <a:lstStyle/>
+          <a:p>
+            <a:pPr indent="0" marL="0">
+              <a:buNone/>
+            </a:pPr>
+            <a:r>
+              <a:rPr lang="en-US" sz="1800" b="1" dirty="0">
+                <a:solidFill>
+                  <a:srgbClr val="5EE2A0"/>
+                </a:solidFill>
+              </a:rPr>
+              <a:t>P1 ✓</a:t>
+            </a:r>
+            <a:endParaRPr lang="en-US" sz="1800" dirty="0"/>
+          </a:p>
+        </p:txBody>
+      </p:sp>
+      <p:sp>
+        <p:nvSpPr>
+          <p:cNvPr id="11" name="Text 9"/>
+          <p:cNvSpPr/>
+          <p:nvPr/>
+        </p:nvSpPr>
+        <p:spPr>
+          <a:xfrm>
+            <a:off x="3044952" y="2121408"/>
+            <a:ext cx="1664208" cy="457200"/>
+          </a:xfrm>
+          <a:prstGeom prst="rect">
+            <a:avLst/>
+          </a:prstGeom>
+          <a:noFill/>
+          <a:ln/>
+        </p:spPr>
+        <p:txBody>
+          <a:bodyPr wrap="square" lIns="0" tIns="0" rIns="0" bIns="0" rtlCol="0" anchor="ctr">
+            <a:normAutofit/>
+          </a:bodyPr>
+          <a:lstStyle/>
+          <a:p>
+            <a:pPr indent="0" marL="0">
+              <a:buNone/>
+            </a:pPr>
+            <a:r>
+              <a:rPr lang="en-US" sz="1400" b="1" dirty="0">
+                <a:solidFill>
+                  <a:srgbClr val="E9F2FF"/>
+                </a:solidFill>
+              </a:rPr>
+              <a:t>Render Queue</a:t>
+            </a:r>
+            <a:endParaRPr lang="en-US" sz="1400" dirty="0"/>
+          </a:p>
+        </p:txBody>
+      </p:sp>
+      <p:sp>
+        <p:nvSpPr>
+          <p:cNvPr id="12" name="Text 10"/>
+          <p:cNvSpPr/>
+          <p:nvPr/>
+        </p:nvSpPr>
+        <p:spPr>
+          <a:xfrm>
+            <a:off x="3044952" y="2852928"/>
+            <a:ext cx="1664208" cy="960120"/>
+          </a:xfrm>
+          <a:prstGeom prst="rect">
+            <a:avLst/>
+          </a:prstGeom>
+          <a:noFill/>
+          <a:ln/>
+        </p:spPr>
+        <p:txBody>
+          <a:bodyPr wrap="square" lIns="0" tIns="0" rIns="0" bIns="0" rtlCol="0" anchor="ctr">
+            <a:normAutofit/>
+          </a:bodyPr>
+          <a:lstStyle/>
+          <a:p>
+            <a:pPr indent="0" marL="0">
+              <a:buNone/>
+            </a:pPr>
+            <a:r>
+              <a:rPr lang="en-US" sz="1050" dirty="0">
+                <a:solidFill>
+                  <a:srgbClr val="96A9C2"/>
+                </a:solidFill>
+              </a:rPr>
+              <a:t>RenderItem + Bounds</a:t>
+            </a:r>
+            <a:endParaRPr lang="en-US" sz="1050" dirty="0"/>
+          </a:p>
+          <a:p>
+            <a:pPr indent="0" marL="0">
+              <a:buNone/>
+            </a:pPr>
+            <a:r>
+              <a:rPr lang="en-US" sz="1050" dirty="0">
+                <a:solidFill>
+                  <a:srgbClr val="96A9C2"/>
+                </a:solidFill>
+              </a:rPr>
+              <a:t>视锥裁剪 + 状态排序</a:t>
+            </a:r>
+            <a:endParaRPr lang="en-US" sz="1050" dirty="0"/>
+          </a:p>
+        </p:txBody>
+      </p:sp>
+      <p:sp>
+        <p:nvSpPr>
+          <p:cNvPr id="13" name="Shape 11"/>
+          <p:cNvSpPr/>
+          <p:nvPr/>
+        </p:nvSpPr>
+        <p:spPr>
+          <a:xfrm>
+            <a:off x="4892040" y="2889504"/>
+            <a:ext cx="256032" cy="0"/>
+          </a:xfrm>
+          <a:prstGeom prst="line">
+            <a:avLst/>
+          </a:prstGeom>
+          <a:noFill/>
+          <a:ln w="17780">
+            <a:solidFill>
+              <a:srgbClr val="5EE2A0"/>
+            </a:solidFill>
+            <a:prstDash val="solid"/>
+            <a:headEnd type="none"/>
+            <a:tailEnd type="triangle"/>
+          </a:ln>
+        </p:spPr>
+      </p:sp>
+      <p:sp>
+        <p:nvSpPr>
+          <p:cNvPr id="14" name="Shape 12"/>
+          <p:cNvSpPr/>
+          <p:nvPr/>
+        </p:nvSpPr>
+        <p:spPr>
+          <a:xfrm>
+            <a:off x="5193792" y="1417320"/>
+            <a:ext cx="1993392" cy="2971800"/>
+          </a:xfrm>
+          <a:prstGeom prst="roundRect">
+            <a:avLst/>
+          </a:prstGeom>
+          <a:solidFill>
+            <a:srgbClr val="0F1C2E"/>
+          </a:solidFill>
+          <a:ln w="17780">
+            <a:solidFill>
+              <a:srgbClr val="5EE2A0"/>
+            </a:solidFill>
+            <a:prstDash val="solid"/>
+          </a:ln>
+        </p:spPr>
+      </p:sp>
+      <p:sp>
+        <p:nvSpPr>
+          <p:cNvPr id="15" name="Text 13"/>
+          <p:cNvSpPr/>
+          <p:nvPr/>
+        </p:nvSpPr>
+        <p:spPr>
+          <a:xfrm>
+            <a:off x="5358384" y="1627632"/>
+            <a:ext cx="502920" cy="329184"/>
+          </a:xfrm>
+          <a:prstGeom prst="rect">
+            <a:avLst/>
+          </a:prstGeom>
+          <a:noFill/>
+          <a:ln/>
+        </p:spPr>
+        <p:txBody>
+          <a:bodyPr wrap="square" lIns="0" tIns="0" rIns="0" bIns="0" rtlCol="0" anchor="ctr"/>
+          <a:lstStyle/>
+          <a:p>
+            <a:pPr indent="0" marL="0">
+              <a:buNone/>
+            </a:pPr>
+            <a:r>
+              <a:rPr lang="en-US" sz="1800" b="1" dirty="0">
+                <a:solidFill>
+                  <a:srgbClr val="5EE2A0"/>
+                </a:solidFill>
+              </a:rPr>
+              <a:t>P2</a:t>
+            </a:r>
+            <a:endParaRPr lang="en-US" sz="1800" dirty="0"/>
+          </a:p>
+        </p:txBody>
+      </p:sp>
+      <p:sp>
+        <p:nvSpPr>
+          <p:cNvPr id="16" name="Text 14"/>
+          <p:cNvSpPr/>
+          <p:nvPr/>
+        </p:nvSpPr>
+        <p:spPr>
+          <a:xfrm>
+            <a:off x="5358384" y="2121408"/>
+            <a:ext cx="1664208" cy="457200"/>
+          </a:xfrm>
+          <a:prstGeom prst="rect">
+            <a:avLst/>
+          </a:prstGeom>
+          <a:noFill/>
+          <a:ln/>
+        </p:spPr>
+        <p:txBody>
+          <a:bodyPr wrap="square" lIns="0" tIns="0" rIns="0" bIns="0" rtlCol="0" anchor="ctr">
+            <a:normAutofit/>
+          </a:bodyPr>
+          <a:lstStyle/>
+          <a:p>
+            <a:pPr indent="0" marL="0">
+              <a:buNone/>
+            </a:pPr>
+            <a:r>
+              <a:rPr lang="en-US" sz="1400" b="1" dirty="0">
+                <a:solidFill>
+                  <a:srgbClr val="E9F2FF"/>
+                </a:solidFill>
+              </a:rPr>
+              <a:t>Shader System</a:t>
+            </a:r>
+            <a:endParaRPr lang="en-US" sz="1400" dirty="0"/>
+          </a:p>
+        </p:txBody>
+      </p:sp>
+      <p:sp>
+        <p:nvSpPr>
+          <p:cNvPr id="17" name="Text 15"/>
+          <p:cNvSpPr/>
+          <p:nvPr/>
+        </p:nvSpPr>
+        <p:spPr>
+          <a:xfrm>
+            <a:off x="5358384" y="2852928"/>
+            <a:ext cx="1664208" cy="960120"/>
+          </a:xfrm>
+          <a:prstGeom prst="rect">
+            <a:avLst/>
+          </a:prstGeom>
+          <a:noFill/>
+          <a:ln/>
+        </p:spPr>
+        <p:txBody>
+          <a:bodyPr wrap="square" lIns="0" tIns="0" rIns="0" bIns="0" rtlCol="0" anchor="ctr">
+            <a:normAutofit/>
+          </a:bodyPr>
+          <a:lstStyle/>
+          <a:p>
+            <a:pPr indent="0" marL="0">
+              <a:buNone/>
+            </a:pPr>
+            <a:r>
+              <a:rPr lang="en-US" sz="1050" dirty="0">
+                <a:solidFill>
+                  <a:srgbClr val="96A9C2"/>
+                </a:solidFill>
+              </a:rPr>
+              <a:t>外置源码 / Technique</a:t>
+            </a:r>
+            <a:endParaRPr lang="en-US" sz="1050" dirty="0"/>
+          </a:p>
+          <a:p>
+            <a:pPr indent="0" marL="0">
+              <a:buNone/>
+            </a:pPr>
+            <a:r>
+              <a:rPr lang="en-US" sz="1050" dirty="0">
+                <a:solidFill>
+                  <a:srgbClr val="96A9C2"/>
+                </a:solidFill>
+              </a:rPr>
+              <a:t>Variant + Hot Reload</a:t>
+            </a:r>
+            <a:endParaRPr lang="en-US" sz="1050" dirty="0"/>
+          </a:p>
+        </p:txBody>
+      </p:sp>
+      <p:sp>
+        <p:nvSpPr>
+          <p:cNvPr id="18" name="Shape 16"/>
+          <p:cNvSpPr/>
+          <p:nvPr/>
+        </p:nvSpPr>
+        <p:spPr>
+          <a:xfrm>
+            <a:off x="7205472" y="2889504"/>
+            <a:ext cx="256032" cy="0"/>
+          </a:xfrm>
+          <a:prstGeom prst="line">
+            <a:avLst/>
+          </a:prstGeom>
+          <a:noFill/>
+          <a:ln w="17780">
+            <a:solidFill>
+              <a:srgbClr val="5EE2A0"/>
+            </a:solidFill>
+            <a:prstDash val="solid"/>
+            <a:headEnd type="none"/>
+            <a:tailEnd type="triangle"/>
+          </a:ln>
+        </p:spPr>
+      </p:sp>
+      <p:sp>
+        <p:nvSpPr>
+          <p:cNvPr id="19" name="Shape 17"/>
+          <p:cNvSpPr/>
+          <p:nvPr/>
+        </p:nvSpPr>
+        <p:spPr>
+          <a:xfrm>
+            <a:off x="7507224" y="1417320"/>
+            <a:ext cx="1993392" cy="2971800"/>
+          </a:xfrm>
+          <a:prstGeom prst="roundRect">
+            <a:avLst/>
+          </a:prstGeom>
+          <a:solidFill>
+            <a:srgbClr val="0F1C2E"/>
+          </a:solidFill>
+          <a:ln w="17780">
+            <a:solidFill>
+              <a:srgbClr val="21D4FD"/>
+            </a:solidFill>
+            <a:prstDash val="solid"/>
+          </a:ln>
+        </p:spPr>
+      </p:sp>
+      <p:sp>
+        <p:nvSpPr>
+          <p:cNvPr id="20" name="Text 18"/>
+          <p:cNvSpPr/>
+          <p:nvPr/>
+        </p:nvSpPr>
+        <p:spPr>
+          <a:xfrm>
+            <a:off x="7671816" y="1627632"/>
+            <a:ext cx="502920" cy="329184"/>
+          </a:xfrm>
+          <a:prstGeom prst="rect">
+            <a:avLst/>
+          </a:prstGeom>
+          <a:noFill/>
+          <a:ln/>
+        </p:spPr>
+        <p:txBody>
+          <a:bodyPr wrap="square" lIns="0" tIns="0" rIns="0" bIns="0" rtlCol="0" anchor="ctr"/>
+          <a:lstStyle/>
+          <a:p>
+            <a:pPr indent="0" marL="0">
+              <a:buNone/>
+            </a:pPr>
+            <a:r>
+              <a:rPr lang="en-US" sz="1800" b="1" dirty="0">
                 <a:solidFill>
                   <a:srgbClr val="21D4FD"/>
                 </a:solidFill>
               </a:rPr>
-              <a:t>从“能画出来”走向“能持续演进”</a:t>
-            </a:r>
-            <a:endParaRPr lang="en-US" sz="2000" dirty="0"/>
-          </a:p>
-        </p:txBody>
-      </p:sp>
-      <p:sp>
-        <p:nvSpPr>
-          <p:cNvPr id="4" name="Shape 2"/>
-          <p:cNvSpPr/>
-          <p:nvPr/>
-        </p:nvSpPr>
-        <p:spPr>
-          <a:xfrm>
-            <a:off x="658368" y="2743200"/>
-            <a:ext cx="3383280" cy="1874520"/>
+              <a:t>P3</a:t>
+            </a:r>
+            <a:endParaRPr lang="en-US" sz="1800" dirty="0"/>
+          </a:p>
+        </p:txBody>
+      </p:sp>
+      <p:sp>
+        <p:nvSpPr>
+          <p:cNvPr id="21" name="Text 19"/>
+          <p:cNvSpPr/>
+          <p:nvPr/>
+        </p:nvSpPr>
+        <p:spPr>
+          <a:xfrm>
+            <a:off x="7671816" y="2121408"/>
+            <a:ext cx="1664208" cy="457200"/>
+          </a:xfrm>
+          <a:prstGeom prst="rect">
+            <a:avLst/>
+          </a:prstGeom>
+          <a:noFill/>
+          <a:ln/>
+        </p:spPr>
+        <p:txBody>
+          <a:bodyPr wrap="square" lIns="0" tIns="0" rIns="0" bIns="0" rtlCol="0" anchor="ctr">
+            <a:normAutofit/>
+          </a:bodyPr>
+          <a:lstStyle/>
+          <a:p>
+            <a:pPr indent="0" marL="0">
+              <a:buNone/>
+            </a:pPr>
+            <a:r>
+              <a:rPr lang="en-US" sz="1400" b="1" dirty="0">
+                <a:solidFill>
+                  <a:srgbClr val="E9F2FF"/>
+                </a:solidFill>
+              </a:rPr>
+              <a:t>RenderGraph 2.0</a:t>
+            </a:r>
+            <a:endParaRPr lang="en-US" sz="1400" dirty="0"/>
+          </a:p>
+        </p:txBody>
+      </p:sp>
+      <p:sp>
+        <p:nvSpPr>
+          <p:cNvPr id="22" name="Text 20"/>
+          <p:cNvSpPr/>
+          <p:nvPr/>
+        </p:nvSpPr>
+        <p:spPr>
+          <a:xfrm>
+            <a:off x="7671816" y="2852928"/>
+            <a:ext cx="1664208" cy="960120"/>
+          </a:xfrm>
+          <a:prstGeom prst="rect">
+            <a:avLst/>
+          </a:prstGeom>
+          <a:noFill/>
+          <a:ln/>
+        </p:spPr>
+        <p:txBody>
+          <a:bodyPr wrap="square" lIns="0" tIns="0" rIns="0" bIns="0" rtlCol="0" anchor="ctr">
+            <a:normAutofit/>
+          </a:bodyPr>
+          <a:lstStyle/>
+          <a:p>
+            <a:pPr indent="0" marL="0">
+              <a:buNone/>
+            </a:pPr>
+            <a:r>
+              <a:rPr lang="en-US" sz="1050" dirty="0">
+                <a:solidFill>
+                  <a:srgbClr val="96A9C2"/>
+                </a:solidFill>
+              </a:rPr>
+              <a:t>资源读写依赖</a:t>
+            </a:r>
+            <a:endParaRPr lang="en-US" sz="1050" dirty="0"/>
+          </a:p>
+          <a:p>
+            <a:pPr indent="0" marL="0">
+              <a:buNone/>
+            </a:pPr>
+            <a:r>
+              <a:rPr lang="en-US" sz="1050" dirty="0">
+                <a:solidFill>
+                  <a:srgbClr val="96A9C2"/>
+                </a:solidFill>
+              </a:rPr>
+              <a:t>自动排序 + TargetPool</a:t>
+            </a:r>
+            <a:endParaRPr lang="en-US" sz="1050" dirty="0"/>
+          </a:p>
+        </p:txBody>
+      </p:sp>
+      <p:sp>
+        <p:nvSpPr>
+          <p:cNvPr id="23" name="Shape 21"/>
+          <p:cNvSpPr/>
+          <p:nvPr/>
+        </p:nvSpPr>
+        <p:spPr>
+          <a:xfrm>
+            <a:off x="9518904" y="2889504"/>
+            <a:ext cx="256032" cy="0"/>
+          </a:xfrm>
+          <a:prstGeom prst="line">
+            <a:avLst/>
+          </a:prstGeom>
+          <a:noFill/>
+          <a:ln w="17780">
+            <a:solidFill>
+              <a:srgbClr val="21D4FD"/>
+            </a:solidFill>
+            <a:prstDash val="solid"/>
+            <a:headEnd type="none"/>
+            <a:tailEnd type="triangle"/>
+          </a:ln>
+        </p:spPr>
+      </p:sp>
+      <p:sp>
+        <p:nvSpPr>
+          <p:cNvPr id="24" name="Shape 22"/>
+          <p:cNvSpPr/>
+          <p:nvPr/>
+        </p:nvSpPr>
+        <p:spPr>
+          <a:xfrm>
+            <a:off x="9820656" y="1417320"/>
+            <a:ext cx="1993392" cy="2971800"/>
+          </a:xfrm>
+          <a:prstGeom prst="roundRect">
+            <a:avLst/>
+          </a:prstGeom>
+          <a:solidFill>
+            <a:srgbClr val="0F1C2E"/>
+          </a:solidFill>
+          <a:ln w="17780">
+            <a:solidFill>
+              <a:srgbClr val="B78CFF"/>
+            </a:solidFill>
+            <a:prstDash val="solid"/>
+          </a:ln>
+        </p:spPr>
+      </p:sp>
+      <p:sp>
+        <p:nvSpPr>
+          <p:cNvPr id="25" name="Text 23"/>
+          <p:cNvSpPr/>
+          <p:nvPr/>
+        </p:nvSpPr>
+        <p:spPr>
+          <a:xfrm>
+            <a:off x="9985248" y="1627632"/>
+            <a:ext cx="502920" cy="329184"/>
+          </a:xfrm>
+          <a:prstGeom prst="rect">
+            <a:avLst/>
+          </a:prstGeom>
+          <a:noFill/>
+          <a:ln/>
+        </p:spPr>
+        <p:txBody>
+          <a:bodyPr wrap="square" lIns="0" tIns="0" rIns="0" bIns="0" rtlCol="0" anchor="ctr"/>
+          <a:lstStyle/>
+          <a:p>
+            <a:pPr indent="0" marL="0">
+              <a:buNone/>
+            </a:pPr>
+            <a:r>
+              <a:rPr lang="en-US" sz="1800" b="1" dirty="0">
+                <a:solidFill>
+                  <a:srgbClr val="B78CFF"/>
+                </a:solidFill>
+              </a:rPr>
+              <a:t>P4</a:t>
+            </a:r>
+            <a:endParaRPr lang="en-US" sz="1800" dirty="0"/>
+          </a:p>
+        </p:txBody>
+      </p:sp>
+      <p:sp>
+        <p:nvSpPr>
+          <p:cNvPr id="26" name="Text 24"/>
+          <p:cNvSpPr/>
+          <p:nvPr/>
+        </p:nvSpPr>
+        <p:spPr>
+          <a:xfrm>
+            <a:off x="9985248" y="2121408"/>
+            <a:ext cx="1664208" cy="457200"/>
+          </a:xfrm>
+          <a:prstGeom prst="rect">
+            <a:avLst/>
+          </a:prstGeom>
+          <a:noFill/>
+          <a:ln/>
+        </p:spPr>
+        <p:txBody>
+          <a:bodyPr wrap="square" lIns="0" tIns="0" rIns="0" bIns="0" rtlCol="0" anchor="ctr">
+            <a:normAutofit/>
+          </a:bodyPr>
+          <a:lstStyle/>
+          <a:p>
+            <a:pPr indent="0" marL="0">
+              <a:buNone/>
+            </a:pPr>
+            <a:r>
+              <a:rPr lang="en-US" sz="1400" b="1" dirty="0">
+                <a:solidFill>
+                  <a:srgbClr val="E9F2FF"/>
+                </a:solidFill>
+              </a:rPr>
+              <a:t>Advanced Rendering</a:t>
+            </a:r>
+            <a:endParaRPr lang="en-US" sz="1400" dirty="0"/>
+          </a:p>
+        </p:txBody>
+      </p:sp>
+      <p:sp>
+        <p:nvSpPr>
+          <p:cNvPr id="27" name="Text 25"/>
+          <p:cNvSpPr/>
+          <p:nvPr/>
+        </p:nvSpPr>
+        <p:spPr>
+          <a:xfrm>
+            <a:off x="9985248" y="2852928"/>
+            <a:ext cx="1664208" cy="960120"/>
+          </a:xfrm>
+          <a:prstGeom prst="rect">
+            <a:avLst/>
+          </a:prstGeom>
+          <a:noFill/>
+          <a:ln/>
+        </p:spPr>
+        <p:txBody>
+          <a:bodyPr wrap="square" lIns="0" tIns="0" rIns="0" bIns="0" rtlCol="0" anchor="ctr">
+            <a:normAutofit/>
+          </a:bodyPr>
+          <a:lstStyle/>
+          <a:p>
+            <a:pPr indent="0" marL="0">
+              <a:buNone/>
+            </a:pPr>
+            <a:r>
+              <a:rPr lang="en-US" sz="1050" dirty="0">
+                <a:solidFill>
+                  <a:srgbClr val="96A9C2"/>
+                </a:solidFill>
+              </a:rPr>
+              <a:t>CSM / Skin / Alpha</a:t>
+            </a:r>
+            <a:endParaRPr lang="en-US" sz="1050" dirty="0"/>
+          </a:p>
+          <a:p>
+            <a:pPr indent="0" marL="0">
+              <a:buNone/>
+            </a:pPr>
+            <a:r>
+              <a:rPr lang="en-US" sz="1050" dirty="0">
+                <a:solidFill>
+                  <a:srgbClr val="96A9C2"/>
+                </a:solidFill>
+              </a:rPr>
+              <a:t>SSAO / TAA / Profiler</a:t>
+            </a:r>
+            <a:endParaRPr lang="en-US" sz="1050" dirty="0"/>
+          </a:p>
+        </p:txBody>
+      </p:sp>
+      <p:sp>
+        <p:nvSpPr>
+          <p:cNvPr id="28" name="Shape 26"/>
+          <p:cNvSpPr/>
+          <p:nvPr/>
+        </p:nvSpPr>
+        <p:spPr>
+          <a:xfrm>
+            <a:off x="658368" y="4846320"/>
+            <a:ext cx="5394960" cy="960120"/>
           </a:xfrm>
           <a:prstGeom prst="roundRect">
             <a:avLst>
-              <a:gd name="adj" fmla="val 2927"/>
+              <a:gd name="adj" fmla="val 5714"/>
             </a:avLst>
           </a:prstGeom>
           <a:solidFill>
@@ -8641,39 +9822,39 @@
       </p:sp>
       <p:sp>
         <p:nvSpPr>
-          <p:cNvPr id="5" name="Shape 3"/>
-          <p:cNvSpPr/>
-          <p:nvPr/>
-        </p:nvSpPr>
-        <p:spPr>
-          <a:xfrm>
-            <a:off x="658368" y="2743200"/>
-            <a:ext cx="54864" cy="1874520"/>
-          </a:xfrm>
-          <a:prstGeom prst="rect">
-            <a:avLst/>
-          </a:prstGeom>
-          <a:solidFill>
-            <a:srgbClr val="5EE2A0"/>
+          <p:cNvPr id="29" name="Shape 27"/>
+          <p:cNvSpPr/>
+          <p:nvPr/>
+        </p:nvSpPr>
+        <p:spPr>
+          <a:xfrm>
+            <a:off x="658368" y="4846320"/>
+            <a:ext cx="54864" cy="960120"/>
+          </a:xfrm>
+          <a:prstGeom prst="rect">
+            <a:avLst/>
+          </a:prstGeom>
+          <a:solidFill>
+            <a:srgbClr val="FF6B7A"/>
           </a:solidFill>
           <a:ln w="12700">
             <a:solidFill>
-              <a:srgbClr val="5EE2A0"/>
-            </a:solidFill>
-            <a:prstDash val="solid"/>
-          </a:ln>
-        </p:spPr>
-      </p:sp>
-      <p:sp>
-        <p:nvSpPr>
-          <p:cNvPr id="6" name="Text 4"/>
-          <p:cNvSpPr/>
-          <p:nvPr/>
-        </p:nvSpPr>
-        <p:spPr>
-          <a:xfrm>
-            <a:off x="859536" y="2907792"/>
-            <a:ext cx="3054096" cy="274320"/>
+              <a:srgbClr val="FF6B7A"/>
+            </a:solidFill>
+            <a:prstDash val="solid"/>
+          </a:ln>
+        </p:spPr>
+      </p:sp>
+      <p:sp>
+        <p:nvSpPr>
+          <p:cNvPr id="30" name="Text 28"/>
+          <p:cNvSpPr/>
+          <p:nvPr/>
+        </p:nvSpPr>
+        <p:spPr>
+          <a:xfrm>
+            <a:off x="859536" y="5010912"/>
+            <a:ext cx="5065776" cy="274320"/>
           </a:xfrm>
           <a:prstGeom prst="rect">
             <a:avLst/>
@@ -8694,7 +9875,7 @@
                   <a:srgbClr val="E9F2FF"/>
                 </a:solidFill>
               </a:rPr>
-              <a:t>已经建立</a:t>
+              <a:t>架构债务</a:t>
             </a:r>
             <a:endParaRPr lang="en-US" sz="1400" dirty="0"/>
           </a:p>
@@ -8702,14 +9883,14 @@
       </p:sp>
       <p:sp>
         <p:nvSpPr>
-          <p:cNvPr id="7" name="Text 5"/>
-          <p:cNvSpPr/>
-          <p:nvPr/>
-        </p:nvSpPr>
-        <p:spPr>
-          <a:xfrm>
-            <a:off x="859536" y="3310128"/>
-            <a:ext cx="3017520" cy="1179576"/>
+          <p:cNvPr id="31" name="Text 29"/>
+          <p:cNvSpPr/>
+          <p:nvPr/>
+        </p:nvSpPr>
+        <p:spPr>
+          <a:xfrm>
+            <a:off x="859536" y="5413248"/>
+            <a:ext cx="5029200" cy="265176"/>
           </a:xfrm>
           <a:prstGeom prst="rect">
             <a:avLst/>
@@ -8732,68 +9913,26 @@
                   <a:srgbClr val="96A9C2"/>
                 </a:solidFill>
               </a:rPr>
-              <a:t>资源缓存与 Asset 拆分</a:t>
-            </a:r>
-            <a:endParaRPr lang="en-US" sz="1050" dirty="0"/>
-          </a:p>
-          <a:p>
-            <a:pPr indent="0" marL="0">
-              <a:buNone/>
-            </a:pPr>
-            <a:r>
-              <a:rPr lang="en-US" sz="1050" dirty="0">
-                <a:solidFill>
-                  <a:srgbClr val="96A9C2"/>
-                </a:solidFill>
-              </a:rPr>
-              <a:t>PBR + IBL + Shadow + HDR</a:t>
-            </a:r>
-            <a:endParaRPr lang="en-US" sz="1050" dirty="0"/>
-          </a:p>
-          <a:p>
-            <a:pPr indent="0" marL="0">
-              <a:buNone/>
-            </a:pPr>
-            <a:r>
-              <a:rPr lang="en-US" sz="1050" dirty="0">
-                <a:solidFill>
-                  <a:srgbClr val="96A9C2"/>
-                </a:solidFill>
-              </a:rPr>
-              <a:t>Renderer / Scene / Material 边界</a:t>
-            </a:r>
-            <a:endParaRPr lang="en-US" sz="1050" dirty="0"/>
-          </a:p>
-          <a:p>
-            <a:pPr indent="0" marL="0">
-              <a:buNone/>
-            </a:pPr>
-            <a:r>
-              <a:rPr lang="en-US" sz="1050" dirty="0">
-                <a:solidFill>
-                  <a:srgbClr val="96A9C2"/>
-                </a:solidFill>
-              </a:rPr>
-              <a:t>日志与运行时诊断</a:t>
-            </a:r>
-            <a:endParaRPr lang="en-US" sz="1050" dirty="0"/>
-          </a:p>
-        </p:txBody>
-      </p:sp>
-      <p:sp>
-        <p:nvSpPr>
-          <p:cNvPr id="8" name="Shape 6"/>
-          <p:cNvSpPr/>
-          <p:nvPr/>
-        </p:nvSpPr>
-        <p:spPr>
-          <a:xfrm>
-            <a:off x="4407408" y="2743200"/>
-            <a:ext cx="3383280" cy="1874520"/>
+              <a:t>Scene/GameObject 裸指针 · RenderContext singleton · ShaderCode.cpp 硬编码 · CMake GLOB</a:t>
+            </a:r>
+            <a:endParaRPr lang="en-US" sz="1050" dirty="0"/>
+          </a:p>
+        </p:txBody>
+      </p:sp>
+      <p:sp>
+        <p:nvSpPr>
+          <p:cNvPr id="32" name="Shape 30"/>
+          <p:cNvSpPr/>
+          <p:nvPr/>
+        </p:nvSpPr>
+        <p:spPr>
+          <a:xfrm>
+            <a:off x="6263640" y="4846320"/>
+            <a:ext cx="5257800" cy="960120"/>
           </a:xfrm>
           <a:prstGeom prst="roundRect">
             <a:avLst>
-              <a:gd name="adj" fmla="val 2927"/>
+              <a:gd name="adj" fmla="val 5714"/>
             </a:avLst>
           </a:prstGeom>
           <a:solidFill>
@@ -8809,39 +9948,39 @@
       </p:sp>
       <p:sp>
         <p:nvSpPr>
-          <p:cNvPr id="9" name="Shape 7"/>
-          <p:cNvSpPr/>
-          <p:nvPr/>
-        </p:nvSpPr>
-        <p:spPr>
-          <a:xfrm>
-            <a:off x="4407408" y="2743200"/>
-            <a:ext cx="54864" cy="1874520"/>
-          </a:xfrm>
-          <a:prstGeom prst="rect">
-            <a:avLst/>
-          </a:prstGeom>
-          <a:solidFill>
-            <a:srgbClr val="21D4FD"/>
+          <p:cNvPr id="33" name="Shape 31"/>
+          <p:cNvSpPr/>
+          <p:nvPr/>
+        </p:nvSpPr>
+        <p:spPr>
+          <a:xfrm>
+            <a:off x="6263640" y="4846320"/>
+            <a:ext cx="54864" cy="960120"/>
+          </a:xfrm>
+          <a:prstGeom prst="rect">
+            <a:avLst/>
+          </a:prstGeom>
+          <a:solidFill>
+            <a:srgbClr val="B78CFF"/>
           </a:solidFill>
           <a:ln w="12700">
             <a:solidFill>
-              <a:srgbClr val="21D4FD"/>
-            </a:solidFill>
-            <a:prstDash val="solid"/>
-          </a:ln>
-        </p:spPr>
-      </p:sp>
-      <p:sp>
-        <p:nvSpPr>
-          <p:cNvPr id="10" name="Text 8"/>
-          <p:cNvSpPr/>
-          <p:nvPr/>
-        </p:nvSpPr>
-        <p:spPr>
-          <a:xfrm>
-            <a:off x="4608576" y="2907792"/>
-            <a:ext cx="3054096" cy="274320"/>
+              <a:srgbClr val="B78CFF"/>
+            </a:solidFill>
+            <a:prstDash val="solid"/>
+          </a:ln>
+        </p:spPr>
+      </p:sp>
+      <p:sp>
+        <p:nvSpPr>
+          <p:cNvPr id="34" name="Text 32"/>
+          <p:cNvSpPr/>
+          <p:nvPr/>
+        </p:nvSpPr>
+        <p:spPr>
+          <a:xfrm>
+            <a:off x="6464808" y="5010912"/>
+            <a:ext cx="4928616" cy="274320"/>
           </a:xfrm>
           <a:prstGeom prst="rect">
             <a:avLst/>
@@ -8862,7 +10001,7 @@
                   <a:srgbClr val="E9F2FF"/>
                 </a:solidFill>
               </a:rPr>
-              <a:t>本轮推进</a:t>
+              <a:t>画面能力缺口</a:t>
             </a:r>
             <a:endParaRPr lang="en-US" sz="1400" dirty="0"/>
           </a:p>
@@ -8870,14 +10009,14 @@
       </p:sp>
       <p:sp>
         <p:nvSpPr>
-          <p:cNvPr id="11" name="Text 9"/>
-          <p:cNvSpPr/>
-          <p:nvPr/>
-        </p:nvSpPr>
-        <p:spPr>
-          <a:xfrm>
-            <a:off x="4608576" y="3310128"/>
-            <a:ext cx="3017520" cy="1179576"/>
+          <p:cNvPr id="35" name="Text 33"/>
+          <p:cNvSpPr/>
+          <p:nvPr/>
+        </p:nvSpPr>
+        <p:spPr>
+          <a:xfrm>
+            <a:off x="6464808" y="5413248"/>
+            <a:ext cx="4892040" cy="265176"/>
           </a:xfrm>
           <a:prstGeom prst="rect">
             <a:avLst/>
@@ -8900,255 +10039,9 @@
                   <a:srgbClr val="96A9C2"/>
                 </a:solidFill>
               </a:rPr>
-              <a:t>RenderTarget 统一所有权</a:t>
-            </a:r>
-            <a:endParaRPr lang="en-US" sz="1050" dirty="0"/>
-          </a:p>
-          <a:p>
-            <a:pPr indent="0" marL="0">
-              <a:buNone/>
-            </a:pPr>
-            <a:r>
-              <a:rPr lang="en-US" sz="1050" dirty="0">
-                <a:solidFill>
-                  <a:srgbClr val="96A9C2"/>
-                </a:solidFill>
-              </a:rPr>
-              <a:t>后处理目标 RAII</a:t>
-            </a:r>
-            <a:endParaRPr lang="en-US" sz="1050" dirty="0"/>
-          </a:p>
-          <a:p>
-            <a:pPr indent="0" marL="0">
-              <a:buNone/>
-            </a:pPr>
-            <a:r>
-              <a:rPr lang="en-US" sz="1050" dirty="0">
-                <a:solidFill>
-                  <a:srgbClr val="96A9C2"/>
-                </a:solidFill>
-              </a:rPr>
-              <a:t>Bloom 尺寸一致性</a:t>
-            </a:r>
-            <a:endParaRPr lang="en-US" sz="1050" dirty="0"/>
-          </a:p>
-          <a:p>
-            <a:pPr indent="0" marL="0">
-              <a:buNone/>
-            </a:pPr>
-            <a:r>
-              <a:rPr lang="en-US" sz="1050" dirty="0">
-                <a:solidFill>
-                  <a:srgbClr val="96A9C2"/>
-                </a:solidFill>
-              </a:rPr>
-              <a:t>完整架构文档</a:t>
-            </a:r>
-            <a:endParaRPr lang="en-US" sz="1050" dirty="0"/>
-          </a:p>
-        </p:txBody>
-      </p:sp>
-      <p:sp>
-        <p:nvSpPr>
-          <p:cNvPr id="12" name="Shape 10"/>
-          <p:cNvSpPr/>
-          <p:nvPr/>
-        </p:nvSpPr>
-        <p:spPr>
-          <a:xfrm>
-            <a:off x="8156448" y="2743200"/>
-            <a:ext cx="3383280" cy="1874520"/>
-          </a:xfrm>
-          <a:prstGeom prst="roundRect">
-            <a:avLst>
-              <a:gd name="adj" fmla="val 2927"/>
-            </a:avLst>
-          </a:prstGeom>
-          <a:solidFill>
-            <a:srgbClr val="0F1C2E"/>
-          </a:solidFill>
-          <a:ln w="12700">
-            <a:solidFill>
-              <a:srgbClr val="29405C"/>
-            </a:solidFill>
-            <a:prstDash val="solid"/>
-          </a:ln>
-        </p:spPr>
-      </p:sp>
-      <p:sp>
-        <p:nvSpPr>
-          <p:cNvPr id="13" name="Shape 11"/>
-          <p:cNvSpPr/>
-          <p:nvPr/>
-        </p:nvSpPr>
-        <p:spPr>
-          <a:xfrm>
-            <a:off x="8156448" y="2743200"/>
-            <a:ext cx="54864" cy="1874520"/>
-          </a:xfrm>
-          <a:prstGeom prst="rect">
-            <a:avLst/>
-          </a:prstGeom>
-          <a:solidFill>
-            <a:srgbClr val="FFB45A"/>
-          </a:solidFill>
-          <a:ln w="12700">
-            <a:solidFill>
-              <a:srgbClr val="FFB45A"/>
-            </a:solidFill>
-            <a:prstDash val="solid"/>
-          </a:ln>
-        </p:spPr>
-      </p:sp>
-      <p:sp>
-        <p:nvSpPr>
-          <p:cNvPr id="14" name="Text 12"/>
-          <p:cNvSpPr/>
-          <p:nvPr/>
-        </p:nvSpPr>
-        <p:spPr>
-          <a:xfrm>
-            <a:off x="8357616" y="2907792"/>
-            <a:ext cx="3054096" cy="274320"/>
-          </a:xfrm>
-          <a:prstGeom prst="rect">
-            <a:avLst/>
-          </a:prstGeom>
-          <a:noFill/>
-          <a:ln/>
-        </p:spPr>
-        <p:txBody>
-          <a:bodyPr wrap="square" lIns="0" tIns="0" rIns="0" bIns="0" rtlCol="0" anchor="ctr"/>
-          <a:lstStyle/>
-          <a:p>
-            <a:pPr indent="0" marL="0">
-              <a:buNone/>
-            </a:pPr>
-            <a:r>
-              <a:rPr lang="en-US" sz="1400" b="1" dirty="0">
-                <a:solidFill>
-                  <a:srgbClr val="E9F2FF"/>
-                </a:solidFill>
-              </a:rPr>
-              <a:t>下一目标</a:t>
-            </a:r>
-            <a:endParaRPr lang="en-US" sz="1400" dirty="0"/>
-          </a:p>
-        </p:txBody>
-      </p:sp>
-      <p:sp>
-        <p:nvSpPr>
-          <p:cNvPr id="15" name="Text 13"/>
-          <p:cNvSpPr/>
-          <p:nvPr/>
-        </p:nvSpPr>
-        <p:spPr>
-          <a:xfrm>
-            <a:off x="8357616" y="3310128"/>
-            <a:ext cx="3017520" cy="1179576"/>
-          </a:xfrm>
-          <a:prstGeom prst="rect">
-            <a:avLst/>
-          </a:prstGeom>
-          <a:noFill/>
-          <a:ln/>
-        </p:spPr>
-        <p:txBody>
-          <a:bodyPr wrap="square" lIns="254" tIns="254" rIns="254" bIns="254" rtlCol="0" anchor="t">
-            <a:normAutofit/>
-          </a:bodyPr>
-          <a:lstStyle/>
-          <a:p>
-            <a:pPr indent="0" marL="0">
-              <a:buNone/>
-            </a:pPr>
-            <a:r>
-              <a:rPr lang="en-US" sz="1050" dirty="0">
-                <a:solidFill>
-                  <a:srgbClr val="96A9C2"/>
-                </a:solidFill>
-              </a:rPr>
-              <a:t>共享 GPU MeshResource</a:t>
-            </a:r>
-            <a:endParaRPr lang="en-US" sz="1050" dirty="0"/>
-          </a:p>
-          <a:p>
-            <a:pPr indent="0" marL="0">
-              <a:buNone/>
-            </a:pPr>
-            <a:r>
-              <a:rPr lang="en-US" sz="1050" dirty="0">
-                <a:solidFill>
-                  <a:srgbClr val="96A9C2"/>
-                </a:solidFill>
-              </a:rPr>
-              <a:t>渲染队列与可见性</a:t>
-            </a:r>
-            <a:endParaRPr lang="en-US" sz="1050" dirty="0"/>
-          </a:p>
-          <a:p>
-            <a:pPr indent="0" marL="0">
-              <a:buNone/>
-            </a:pPr>
-            <a:r>
-              <a:rPr lang="en-US" sz="1050" dirty="0">
-                <a:solidFill>
-                  <a:srgbClr val="96A9C2"/>
-                </a:solidFill>
-              </a:rPr>
-              <a:t>Shader Technique</a:t>
-            </a:r>
-            <a:endParaRPr lang="en-US" sz="1050" dirty="0"/>
-          </a:p>
-          <a:p>
-            <a:pPr indent="0" marL="0">
-              <a:buNone/>
-            </a:pPr>
-            <a:r>
-              <a:rPr lang="en-US" sz="1050" dirty="0">
-                <a:solidFill>
-                  <a:srgbClr val="96A9C2"/>
-                </a:solidFill>
-              </a:rPr>
-              <a:t>RenderGraph 资源依赖</a:t>
-            </a:r>
-            <a:endParaRPr lang="en-US" sz="1050" dirty="0"/>
-          </a:p>
-        </p:txBody>
-      </p:sp>
-      <p:sp>
-        <p:nvSpPr>
-          <p:cNvPr id="16" name="Text 14"/>
-          <p:cNvSpPr/>
-          <p:nvPr/>
-        </p:nvSpPr>
-        <p:spPr>
-          <a:xfrm>
-            <a:off x="1005840" y="5440680"/>
-            <a:ext cx="10149840" cy="384048"/>
-          </a:xfrm>
-          <a:prstGeom prst="rect">
-            <a:avLst/>
-          </a:prstGeom>
-          <a:noFill/>
-          <a:ln/>
-        </p:spPr>
-        <p:txBody>
-          <a:bodyPr wrap="square" lIns="0" tIns="0" rIns="0" bIns="0" rtlCol="0" anchor="ctr"/>
-          <a:lstStyle/>
-          <a:p>
-            <a:pPr algn="ctr" indent="0" marL="0">
-              <a:buNone/>
-            </a:pPr>
-            <a:r>
-              <a:rPr lang="en-US" sz="1500" b="1" dirty="0">
-                <a:solidFill>
-                  <a:srgbClr val="E9F2FF"/>
-                </a:solidFill>
-              </a:rPr>
-              <a:t>核心判断：架构的价值不是类更多，而是每个对象只负责一类变化。</a:t>
-            </a:r>
-            <a:endParaRPr lang="en-US" sz="1500" dirty="0"/>
+              <a:t>CSM · glTF Alpha/Transmission/Skin · SSAO/TAA · GPU Profiler</a:t>
+            </a:r>
+            <a:endParaRPr lang="en-US" sz="1050" dirty="0"/>
           </a:p>
         </p:txBody>
       </p:sp>
@@ -9195,6 +10088,691 @@
             <a:fld id="{F7021451-1387-4CA6-816F-3879F97B5CBC}" type="slidenum">
               <a:rPr b="0" lang="en-US"/>
               <a:t>15</a:t>
+            </a:fld>
+            <a:endParaRPr lang="en-US"/>
+          </a:p>
+        </p:txBody>
+      </p:sp>
+    </p:spTree>
+  </p:cSld>
+  <p:clrMapOvr>
+    <a:masterClrMapping/>
+  </p:clrMapOvr>
+</p:sld>
+</file>
+
+<file path=ppt/slides/slide16.xml><?xml version="1.0" encoding="utf-8"?>
+<p:sld xmlns:a="http://schemas.openxmlformats.org/drawingml/2006/main" xmlns:r="http://schemas.openxmlformats.org/officeDocument/2006/relationships" xmlns:p="http://schemas.openxmlformats.org/presentationml/2006/main">
+  <p:cSld name="Slide 16">
+    <p:spTree>
+      <p:nvGrpSpPr>
+        <p:cNvPr id="1" name=""/>
+        <p:cNvGrpSpPr/>
+        <p:nvPr/>
+      </p:nvGrpSpPr>
+      <p:grpSpPr>
+        <a:xfrm>
+          <a:off x="0" y="0"/>
+          <a:ext cx="0" cy="0"/>
+          <a:chOff x="0" y="0"/>
+          <a:chExt cx="0" cy="0"/>
+        </a:xfrm>
+      </p:grpSpPr>
+      <p:sp>
+        <p:nvSpPr>
+          <p:cNvPr id="2" name="Text 0"/>
+          <p:cNvSpPr/>
+          <p:nvPr/>
+        </p:nvSpPr>
+        <p:spPr>
+          <a:xfrm>
+            <a:off x="640080" y="868680"/>
+            <a:ext cx="5029200" cy="640080"/>
+          </a:xfrm>
+          <a:prstGeom prst="rect">
+            <a:avLst/>
+          </a:prstGeom>
+          <a:noFill/>
+          <a:ln/>
+        </p:spPr>
+        <p:txBody>
+          <a:bodyPr wrap="square" lIns="0" tIns="0" rIns="0" bIns="0" rtlCol="0" anchor="ctr"/>
+          <a:lstStyle/>
+          <a:p>
+            <a:pPr indent="0" marL="0">
+              <a:buNone/>
+            </a:pPr>
+            <a:r>
+              <a:rPr lang="en-US" sz="3400" b="1" dirty="0">
+                <a:solidFill>
+                  <a:srgbClr val="E9F2FF"/>
+                </a:solidFill>
+              </a:rPr>
+              <a:t>Render Engine</a:t>
+            </a:r>
+            <a:endParaRPr lang="en-US" sz="3400" dirty="0"/>
+          </a:p>
+        </p:txBody>
+      </p:sp>
+      <p:sp>
+        <p:nvSpPr>
+          <p:cNvPr id="3" name="Text 1"/>
+          <p:cNvSpPr/>
+          <p:nvPr/>
+        </p:nvSpPr>
+        <p:spPr>
+          <a:xfrm>
+            <a:off x="658368" y="1691640"/>
+            <a:ext cx="6217920" cy="457200"/>
+          </a:xfrm>
+          <a:prstGeom prst="rect">
+            <a:avLst/>
+          </a:prstGeom>
+          <a:noFill/>
+          <a:ln/>
+        </p:spPr>
+        <p:txBody>
+          <a:bodyPr wrap="square" lIns="0" tIns="0" rIns="0" bIns="0" rtlCol="0" anchor="ctr"/>
+          <a:lstStyle/>
+          <a:p>
+            <a:pPr indent="0" marL="0">
+              <a:buNone/>
+            </a:pPr>
+            <a:r>
+              <a:rPr lang="en-US" sz="2000" dirty="0">
+                <a:solidFill>
+                  <a:srgbClr val="21D4FD"/>
+                </a:solidFill>
+              </a:rPr>
+              <a:t>从“能画出来”走向“能持续演进”</a:t>
+            </a:r>
+            <a:endParaRPr lang="en-US" sz="2000" dirty="0"/>
+          </a:p>
+        </p:txBody>
+      </p:sp>
+      <p:sp>
+        <p:nvSpPr>
+          <p:cNvPr id="4" name="Shape 2"/>
+          <p:cNvSpPr/>
+          <p:nvPr/>
+        </p:nvSpPr>
+        <p:spPr>
+          <a:xfrm>
+            <a:off x="658368" y="2743200"/>
+            <a:ext cx="3383280" cy="1874520"/>
+          </a:xfrm>
+          <a:prstGeom prst="roundRect">
+            <a:avLst>
+              <a:gd name="adj" fmla="val 2927"/>
+            </a:avLst>
+          </a:prstGeom>
+          <a:solidFill>
+            <a:srgbClr val="0F1C2E"/>
+          </a:solidFill>
+          <a:ln w="12700">
+            <a:solidFill>
+              <a:srgbClr val="29405C"/>
+            </a:solidFill>
+            <a:prstDash val="solid"/>
+          </a:ln>
+        </p:spPr>
+      </p:sp>
+      <p:sp>
+        <p:nvSpPr>
+          <p:cNvPr id="5" name="Shape 3"/>
+          <p:cNvSpPr/>
+          <p:nvPr/>
+        </p:nvSpPr>
+        <p:spPr>
+          <a:xfrm>
+            <a:off x="658368" y="2743200"/>
+            <a:ext cx="54864" cy="1874520"/>
+          </a:xfrm>
+          <a:prstGeom prst="rect">
+            <a:avLst/>
+          </a:prstGeom>
+          <a:solidFill>
+            <a:srgbClr val="5EE2A0"/>
+          </a:solidFill>
+          <a:ln w="12700">
+            <a:solidFill>
+              <a:srgbClr val="5EE2A0"/>
+            </a:solidFill>
+            <a:prstDash val="solid"/>
+          </a:ln>
+        </p:spPr>
+      </p:sp>
+      <p:sp>
+        <p:nvSpPr>
+          <p:cNvPr id="6" name="Text 4"/>
+          <p:cNvSpPr/>
+          <p:nvPr/>
+        </p:nvSpPr>
+        <p:spPr>
+          <a:xfrm>
+            <a:off x="859536" y="2907792"/>
+            <a:ext cx="3054096" cy="274320"/>
+          </a:xfrm>
+          <a:prstGeom prst="rect">
+            <a:avLst/>
+          </a:prstGeom>
+          <a:noFill/>
+          <a:ln/>
+        </p:spPr>
+        <p:txBody>
+          <a:bodyPr wrap="square" lIns="0" tIns="0" rIns="0" bIns="0" rtlCol="0" anchor="ctr"/>
+          <a:lstStyle/>
+          <a:p>
+            <a:pPr indent="0" marL="0">
+              <a:buNone/>
+            </a:pPr>
+            <a:r>
+              <a:rPr lang="en-US" sz="1400" b="1" dirty="0">
+                <a:solidFill>
+                  <a:srgbClr val="E9F2FF"/>
+                </a:solidFill>
+              </a:rPr>
+              <a:t>已经建立</a:t>
+            </a:r>
+            <a:endParaRPr lang="en-US" sz="1400" dirty="0"/>
+          </a:p>
+        </p:txBody>
+      </p:sp>
+      <p:sp>
+        <p:nvSpPr>
+          <p:cNvPr id="7" name="Text 5"/>
+          <p:cNvSpPr/>
+          <p:nvPr/>
+        </p:nvSpPr>
+        <p:spPr>
+          <a:xfrm>
+            <a:off x="859536" y="3310128"/>
+            <a:ext cx="3017520" cy="1179576"/>
+          </a:xfrm>
+          <a:prstGeom prst="rect">
+            <a:avLst/>
+          </a:prstGeom>
+          <a:noFill/>
+          <a:ln/>
+        </p:spPr>
+        <p:txBody>
+          <a:bodyPr wrap="square" lIns="254" tIns="254" rIns="254" bIns="254" rtlCol="0" anchor="t">
+            <a:normAutofit/>
+          </a:bodyPr>
+          <a:lstStyle/>
+          <a:p>
+            <a:pPr indent="0" marL="0">
+              <a:buNone/>
+            </a:pPr>
+            <a:r>
+              <a:rPr lang="en-US" sz="1050" dirty="0">
+                <a:solidFill>
+                  <a:srgbClr val="96A9C2"/>
+                </a:solidFill>
+              </a:rPr>
+              <a:t>资源缓存与 Asset 拆分</a:t>
+            </a:r>
+            <a:endParaRPr lang="en-US" sz="1050" dirty="0"/>
+          </a:p>
+          <a:p>
+            <a:pPr indent="0" marL="0">
+              <a:buNone/>
+            </a:pPr>
+            <a:r>
+              <a:rPr lang="en-US" sz="1050" dirty="0">
+                <a:solidFill>
+                  <a:srgbClr val="96A9C2"/>
+                </a:solidFill>
+              </a:rPr>
+              <a:t>PBR + IBL + Shadow + HDR</a:t>
+            </a:r>
+            <a:endParaRPr lang="en-US" sz="1050" dirty="0"/>
+          </a:p>
+          <a:p>
+            <a:pPr indent="0" marL="0">
+              <a:buNone/>
+            </a:pPr>
+            <a:r>
+              <a:rPr lang="en-US" sz="1050" dirty="0">
+                <a:solidFill>
+                  <a:srgbClr val="96A9C2"/>
+                </a:solidFill>
+              </a:rPr>
+              <a:t>Renderer / Scene / Material 边界</a:t>
+            </a:r>
+            <a:endParaRPr lang="en-US" sz="1050" dirty="0"/>
+          </a:p>
+          <a:p>
+            <a:pPr indent="0" marL="0">
+              <a:buNone/>
+            </a:pPr>
+            <a:r>
+              <a:rPr lang="en-US" sz="1050" dirty="0">
+                <a:solidFill>
+                  <a:srgbClr val="96A9C2"/>
+                </a:solidFill>
+              </a:rPr>
+              <a:t>日志与运行时诊断</a:t>
+            </a:r>
+            <a:endParaRPr lang="en-US" sz="1050" dirty="0"/>
+          </a:p>
+        </p:txBody>
+      </p:sp>
+      <p:sp>
+        <p:nvSpPr>
+          <p:cNvPr id="8" name="Shape 6"/>
+          <p:cNvSpPr/>
+          <p:nvPr/>
+        </p:nvSpPr>
+        <p:spPr>
+          <a:xfrm>
+            <a:off x="4407408" y="2743200"/>
+            <a:ext cx="3383280" cy="1874520"/>
+          </a:xfrm>
+          <a:prstGeom prst="roundRect">
+            <a:avLst>
+              <a:gd name="adj" fmla="val 2927"/>
+            </a:avLst>
+          </a:prstGeom>
+          <a:solidFill>
+            <a:srgbClr val="0F1C2E"/>
+          </a:solidFill>
+          <a:ln w="12700">
+            <a:solidFill>
+              <a:srgbClr val="29405C"/>
+            </a:solidFill>
+            <a:prstDash val="solid"/>
+          </a:ln>
+        </p:spPr>
+      </p:sp>
+      <p:sp>
+        <p:nvSpPr>
+          <p:cNvPr id="9" name="Shape 7"/>
+          <p:cNvSpPr/>
+          <p:nvPr/>
+        </p:nvSpPr>
+        <p:spPr>
+          <a:xfrm>
+            <a:off x="4407408" y="2743200"/>
+            <a:ext cx="54864" cy="1874520"/>
+          </a:xfrm>
+          <a:prstGeom prst="rect">
+            <a:avLst/>
+          </a:prstGeom>
+          <a:solidFill>
+            <a:srgbClr val="21D4FD"/>
+          </a:solidFill>
+          <a:ln w="12700">
+            <a:solidFill>
+              <a:srgbClr val="21D4FD"/>
+            </a:solidFill>
+            <a:prstDash val="solid"/>
+          </a:ln>
+        </p:spPr>
+      </p:sp>
+      <p:sp>
+        <p:nvSpPr>
+          <p:cNvPr id="10" name="Text 8"/>
+          <p:cNvSpPr/>
+          <p:nvPr/>
+        </p:nvSpPr>
+        <p:spPr>
+          <a:xfrm>
+            <a:off x="4608576" y="2907792"/>
+            <a:ext cx="3054096" cy="274320"/>
+          </a:xfrm>
+          <a:prstGeom prst="rect">
+            <a:avLst/>
+          </a:prstGeom>
+          <a:noFill/>
+          <a:ln/>
+        </p:spPr>
+        <p:txBody>
+          <a:bodyPr wrap="square" lIns="0" tIns="0" rIns="0" bIns="0" rtlCol="0" anchor="ctr"/>
+          <a:lstStyle/>
+          <a:p>
+            <a:pPr indent="0" marL="0">
+              <a:buNone/>
+            </a:pPr>
+            <a:r>
+              <a:rPr lang="en-US" sz="1400" b="1" dirty="0">
+                <a:solidFill>
+                  <a:srgbClr val="E9F2FF"/>
+                </a:solidFill>
+              </a:rPr>
+              <a:t>本轮推进</a:t>
+            </a:r>
+            <a:endParaRPr lang="en-US" sz="1400" dirty="0"/>
+          </a:p>
+        </p:txBody>
+      </p:sp>
+      <p:sp>
+        <p:nvSpPr>
+          <p:cNvPr id="11" name="Text 9"/>
+          <p:cNvSpPr/>
+          <p:nvPr/>
+        </p:nvSpPr>
+        <p:spPr>
+          <a:xfrm>
+            <a:off x="4608576" y="3310128"/>
+            <a:ext cx="3017520" cy="1179576"/>
+          </a:xfrm>
+          <a:prstGeom prst="rect">
+            <a:avLst/>
+          </a:prstGeom>
+          <a:noFill/>
+          <a:ln/>
+        </p:spPr>
+        <p:txBody>
+          <a:bodyPr wrap="square" lIns="254" tIns="254" rIns="254" bIns="254" rtlCol="0" anchor="t">
+            <a:normAutofit/>
+          </a:bodyPr>
+          <a:lstStyle/>
+          <a:p>
+            <a:pPr indent="0" marL="0">
+              <a:buNone/>
+            </a:pPr>
+            <a:r>
+              <a:rPr lang="en-US" sz="1050" dirty="0">
+                <a:solidFill>
+                  <a:srgbClr val="96A9C2"/>
+                </a:solidFill>
+              </a:rPr>
+              <a:t>共享 GPU MeshResource</a:t>
+            </a:r>
+            <a:endParaRPr lang="en-US" sz="1050" dirty="0"/>
+          </a:p>
+          <a:p>
+            <a:pPr indent="0" marL="0">
+              <a:buNone/>
+            </a:pPr>
+            <a:r>
+              <a:rPr lang="en-US" sz="1050" dirty="0">
+                <a:solidFill>
+                  <a:srgbClr val="96A9C2"/>
+                </a:solidFill>
+              </a:rPr>
+              <a:t>Bounds 与 CPU 内存优化</a:t>
+            </a:r>
+            <a:endParaRPr lang="en-US" sz="1050" dirty="0"/>
+          </a:p>
+          <a:p>
+            <a:pPr indent="0" marL="0">
+              <a:buNone/>
+            </a:pPr>
+            <a:r>
+              <a:rPr lang="en-US" sz="1050" dirty="0">
+                <a:solidFill>
+                  <a:srgbClr val="96A9C2"/>
+                </a:solidFill>
+              </a:rPr>
+              <a:t>RenderQueue / 视锥裁剪</a:t>
+            </a:r>
+            <a:endParaRPr lang="en-US" sz="1050" dirty="0"/>
+          </a:p>
+          <a:p>
+            <a:pPr indent="0" marL="0">
+              <a:buNone/>
+            </a:pPr>
+            <a:r>
+              <a:rPr lang="en-US" sz="1050" dirty="0">
+                <a:solidFill>
+                  <a:srgbClr val="96A9C2"/>
+                </a:solidFill>
+              </a:rPr>
+              <a:t>透明分类与渲染统计</a:t>
+            </a:r>
+            <a:endParaRPr lang="en-US" sz="1050" dirty="0"/>
+          </a:p>
+        </p:txBody>
+      </p:sp>
+      <p:sp>
+        <p:nvSpPr>
+          <p:cNvPr id="12" name="Shape 10"/>
+          <p:cNvSpPr/>
+          <p:nvPr/>
+        </p:nvSpPr>
+        <p:spPr>
+          <a:xfrm>
+            <a:off x="8156448" y="2743200"/>
+            <a:ext cx="3383280" cy="1874520"/>
+          </a:xfrm>
+          <a:prstGeom prst="roundRect">
+            <a:avLst>
+              <a:gd name="adj" fmla="val 2927"/>
+            </a:avLst>
+          </a:prstGeom>
+          <a:solidFill>
+            <a:srgbClr val="0F1C2E"/>
+          </a:solidFill>
+          <a:ln w="12700">
+            <a:solidFill>
+              <a:srgbClr val="29405C"/>
+            </a:solidFill>
+            <a:prstDash val="solid"/>
+          </a:ln>
+        </p:spPr>
+      </p:sp>
+      <p:sp>
+        <p:nvSpPr>
+          <p:cNvPr id="13" name="Shape 11"/>
+          <p:cNvSpPr/>
+          <p:nvPr/>
+        </p:nvSpPr>
+        <p:spPr>
+          <a:xfrm>
+            <a:off x="8156448" y="2743200"/>
+            <a:ext cx="54864" cy="1874520"/>
+          </a:xfrm>
+          <a:prstGeom prst="rect">
+            <a:avLst/>
+          </a:prstGeom>
+          <a:solidFill>
+            <a:srgbClr val="FFB45A"/>
+          </a:solidFill>
+          <a:ln w="12700">
+            <a:solidFill>
+              <a:srgbClr val="FFB45A"/>
+            </a:solidFill>
+            <a:prstDash val="solid"/>
+          </a:ln>
+        </p:spPr>
+      </p:sp>
+      <p:sp>
+        <p:nvSpPr>
+          <p:cNvPr id="14" name="Text 12"/>
+          <p:cNvSpPr/>
+          <p:nvPr/>
+        </p:nvSpPr>
+        <p:spPr>
+          <a:xfrm>
+            <a:off x="8357616" y="2907792"/>
+            <a:ext cx="3054096" cy="274320"/>
+          </a:xfrm>
+          <a:prstGeom prst="rect">
+            <a:avLst/>
+          </a:prstGeom>
+          <a:noFill/>
+          <a:ln/>
+        </p:spPr>
+        <p:txBody>
+          <a:bodyPr wrap="square" lIns="0" tIns="0" rIns="0" bIns="0" rtlCol="0" anchor="ctr"/>
+          <a:lstStyle/>
+          <a:p>
+            <a:pPr indent="0" marL="0">
+              <a:buNone/>
+            </a:pPr>
+            <a:r>
+              <a:rPr lang="en-US" sz="1400" b="1" dirty="0">
+                <a:solidFill>
+                  <a:srgbClr val="E9F2FF"/>
+                </a:solidFill>
+              </a:rPr>
+              <a:t>下一目标</a:t>
+            </a:r>
+            <a:endParaRPr lang="en-US" sz="1400" dirty="0"/>
+          </a:p>
+        </p:txBody>
+      </p:sp>
+      <p:sp>
+        <p:nvSpPr>
+          <p:cNvPr id="15" name="Text 13"/>
+          <p:cNvSpPr/>
+          <p:nvPr/>
+        </p:nvSpPr>
+        <p:spPr>
+          <a:xfrm>
+            <a:off x="8357616" y="3310128"/>
+            <a:ext cx="3017520" cy="1179576"/>
+          </a:xfrm>
+          <a:prstGeom prst="rect">
+            <a:avLst/>
+          </a:prstGeom>
+          <a:noFill/>
+          <a:ln/>
+        </p:spPr>
+        <p:txBody>
+          <a:bodyPr wrap="square" lIns="254" tIns="254" rIns="254" bIns="254" rtlCol="0" anchor="t">
+            <a:normAutofit/>
+          </a:bodyPr>
+          <a:lstStyle/>
+          <a:p>
+            <a:pPr indent="0" marL="0">
+              <a:buNone/>
+            </a:pPr>
+            <a:r>
+              <a:rPr lang="en-US" sz="1050" dirty="0">
+                <a:solidFill>
+                  <a:srgbClr val="96A9C2"/>
+                </a:solidFill>
+              </a:rPr>
+              <a:t>Shader 外置文件</a:t>
+            </a:r>
+            <a:endParaRPr lang="en-US" sz="1050" dirty="0"/>
+          </a:p>
+          <a:p>
+            <a:pPr indent="0" marL="0">
+              <a:buNone/>
+            </a:pPr>
+            <a:r>
+              <a:rPr lang="en-US" sz="1050" dirty="0">
+                <a:solidFill>
+                  <a:srgbClr val="96A9C2"/>
+                </a:solidFill>
+              </a:rPr>
+              <a:t>Technique / ShaderPass</a:t>
+            </a:r>
+            <a:endParaRPr lang="en-US" sz="1050" dirty="0"/>
+          </a:p>
+          <a:p>
+            <a:pPr indent="0" marL="0">
+              <a:buNone/>
+            </a:pPr>
+            <a:r>
+              <a:rPr lang="en-US" sz="1050" dirty="0">
+                <a:solidFill>
+                  <a:srgbClr val="96A9C2"/>
+                </a:solidFill>
+              </a:rPr>
+              <a:t>Variant + Hot Reload</a:t>
+            </a:r>
+            <a:endParaRPr lang="en-US" sz="1050" dirty="0"/>
+          </a:p>
+          <a:p>
+            <a:pPr indent="0" marL="0">
+              <a:buNone/>
+            </a:pPr>
+            <a:r>
+              <a:rPr lang="en-US" sz="1050" dirty="0">
+                <a:solidFill>
+                  <a:srgbClr val="96A9C2"/>
+                </a:solidFill>
+              </a:rPr>
+              <a:t>RenderGraph 资源依赖</a:t>
+            </a:r>
+            <a:endParaRPr lang="en-US" sz="1050" dirty="0"/>
+          </a:p>
+        </p:txBody>
+      </p:sp>
+      <p:sp>
+        <p:nvSpPr>
+          <p:cNvPr id="16" name="Text 14"/>
+          <p:cNvSpPr/>
+          <p:nvPr/>
+        </p:nvSpPr>
+        <p:spPr>
+          <a:xfrm>
+            <a:off x="1005840" y="5440680"/>
+            <a:ext cx="10149840" cy="384048"/>
+          </a:xfrm>
+          <a:prstGeom prst="rect">
+            <a:avLst/>
+          </a:prstGeom>
+          <a:noFill/>
+          <a:ln/>
+        </p:spPr>
+        <p:txBody>
+          <a:bodyPr wrap="square" lIns="0" tIns="0" rIns="0" bIns="0" rtlCol="0" anchor="ctr"/>
+          <a:lstStyle/>
+          <a:p>
+            <a:pPr algn="ctr" indent="0" marL="0">
+              <a:buNone/>
+            </a:pPr>
+            <a:r>
+              <a:rPr lang="en-US" sz="1500" b="1" dirty="0">
+                <a:solidFill>
+                  <a:srgbClr val="E9F2FF"/>
+                </a:solidFill>
+              </a:rPr>
+              <a:t>核心判断：架构的价值不是类更多，而是每个对象只负责一类变化。</a:t>
+            </a:r>
+            <a:endParaRPr lang="en-US" sz="1500" dirty="0"/>
+          </a:p>
+        </p:txBody>
+      </p:sp>
+      <p:sp>
+        <p:nvSpPr>
+          <p:cNvPr id="25" name="Slide Number Placeholder 0"/>
+          <p:cNvSpPr>
+            <a:spLocks noGrp="1"/>
+          </p:cNvSpPr>
+          <p:nvPr>
+            <p:ph type="sldNum" sz="quarter" idx="4294967295"/>
+          </p:nvPr>
+        </p:nvSpPr>
+        <p:spPr>
+          <a:xfrm>
+            <a:off x="11814048" y="6528816"/>
+            <a:ext cx="800000" cy="300000"/>
+          </a:xfrm>
+          <a:prstGeom prst="rect">
+            <a:avLst/>
+          </a:prstGeom>
+          <a:extLst>
+            <a:ext uri="{C572A759-6A51-4108-AA02-DFA0A04FC94B}">
+              <ma14:wrappingTextBoxFlag xmlns:ma14="http://schemas.microsoft.com/office/mac/drawingml/2011/main" val="0"/>
+            </a:ext>
+          </a:extLst>
+        </p:spPr>
+        <p:txBody>
+          <a:bodyPr/>
+          <a:lstStyle>
+            <a:lvl1pPr>
+              <a:defRPr sz="800">
+                <a:solidFill>
+                  <a:srgbClr val="60758F"/>
+                </a:solidFill>
+                <a:latin typeface="Consolas"/>
+                <a:ea typeface="Consolas"/>
+                <a:cs typeface="Consolas"/>
+              </a:defRPr>
+            </a:lvl1pPr>
+          </a:lstStyle>
+          <a:p>
+            <a:pPr algn="l"/>
+            <a:fld id="{F7021451-1387-4CA6-816F-3879F97B5CBC}" type="slidenum">
+              <a:rPr b="0" lang="en-US"/>
+              <a:t>16</a:t>
             </a:fld>
             <a:endParaRPr lang="en-US"/>
           </a:p>
@@ -10813,7 +12391,7 @@
                   <a:srgbClr val="E9F2FF"/>
                 </a:solidFill>
               </a:rPr>
-              <a:t>PostProcessRenderer</a:t>
+              <a:t>RenderQueue</a:t>
             </a:r>
             <a:endParaRPr lang="en-US" sz="1050" dirty="0"/>
           </a:p>
@@ -12132,8 +13710,8 @@
         </p:nvSpPr>
         <p:spPr>
           <a:xfrm>
-            <a:off x="502920" y="1874520"/>
-            <a:ext cx="1307592" cy="822960"/>
+            <a:off x="347472" y="1874520"/>
+            <a:ext cx="1115568" cy="822960"/>
           </a:xfrm>
           <a:prstGeom prst="roundRect">
             <a:avLst>
@@ -12161,8 +13739,8 @@
         </p:nvSpPr>
         <p:spPr>
           <a:xfrm>
-            <a:off x="594360" y="1965960"/>
-            <a:ext cx="1124712" cy="640080"/>
+            <a:off x="438912" y="1965960"/>
+            <a:ext cx="932688" cy="640080"/>
           </a:xfrm>
           <a:prstGeom prst="rect">
             <a:avLst/>
@@ -12199,8 +13777,8 @@
         </p:nvSpPr>
         <p:spPr>
           <a:xfrm>
-            <a:off x="1819656" y="2286000"/>
-            <a:ext cx="283464" cy="0"/>
+            <a:off x="1472184" y="2286000"/>
+            <a:ext cx="274320" cy="0"/>
           </a:xfrm>
           <a:prstGeom prst="line">
             <a:avLst/>
@@ -12224,8 +13802,8 @@
         </p:nvSpPr>
         <p:spPr>
           <a:xfrm>
-            <a:off x="2148840" y="1874520"/>
-            <a:ext cx="1307592" cy="822960"/>
+            <a:off x="1783080" y="1874520"/>
+            <a:ext cx="1115568" cy="822960"/>
           </a:xfrm>
           <a:prstGeom prst="roundRect">
             <a:avLst>
@@ -12253,8 +13831,8 @@
         </p:nvSpPr>
         <p:spPr>
           <a:xfrm>
-            <a:off x="2240280" y="1965960"/>
-            <a:ext cx="1124712" cy="640080"/>
+            <a:off x="1874520" y="1965960"/>
+            <a:ext cx="932688" cy="640080"/>
           </a:xfrm>
           <a:prstGeom prst="rect">
             <a:avLst/>
@@ -12291,8 +13869,8 @@
         </p:nvSpPr>
         <p:spPr>
           <a:xfrm>
-            <a:off x="3465576" y="2286000"/>
-            <a:ext cx="283464" cy="0"/>
+            <a:off x="2907792" y="2286000"/>
+            <a:ext cx="274320" cy="0"/>
           </a:xfrm>
           <a:prstGeom prst="line">
             <a:avLst/>
@@ -12316,8 +13894,8 @@
         </p:nvSpPr>
         <p:spPr>
           <a:xfrm>
-            <a:off x="3794760" y="1874520"/>
-            <a:ext cx="1307592" cy="822960"/>
+            <a:off x="3218688" y="1874520"/>
+            <a:ext cx="1115568" cy="822960"/>
           </a:xfrm>
           <a:prstGeom prst="roundRect">
             <a:avLst>
@@ -12325,13 +13903,13 @@
             </a:avLst>
           </a:prstGeom>
           <a:solidFill>
-            <a:srgbClr val="FFB45A">
+            <a:srgbClr val="4F8CFF">
               <a:alpha val="17000"/>
             </a:srgbClr>
           </a:solidFill>
           <a:ln w="15240">
             <a:solidFill>
-              <a:srgbClr val="FFB45A"/>
+              <a:srgbClr val="4F8CFF"/>
             </a:solidFill>
             <a:prstDash val="solid"/>
           </a:ln>
@@ -12345,8 +13923,8 @@
         </p:nvSpPr>
         <p:spPr>
           <a:xfrm>
-            <a:off x="3886200" y="1965960"/>
-            <a:ext cx="1124712" cy="640080"/>
+            <a:off x="3310128" y="1965960"/>
+            <a:ext cx="932688" cy="640080"/>
           </a:xfrm>
           <a:prstGeom prst="rect">
             <a:avLst/>
@@ -12369,7 +13947,7 @@
                   <a:srgbClr val="E9F2FF"/>
                 </a:solidFill>
               </a:rPr>
-              <a:t>Shadow Pass</a:t>
+              <a:t>Build Queue</a:t>
             </a:r>
             <a:endParaRPr lang="en-US" sz="1050" dirty="0"/>
           </a:p>
@@ -12383,8 +13961,8 @@
         </p:nvSpPr>
         <p:spPr>
           <a:xfrm>
-            <a:off x="5111496" y="2286000"/>
-            <a:ext cx="283464" cy="0"/>
+            <a:off x="4343400" y="2286000"/>
+            <a:ext cx="274320" cy="0"/>
           </a:xfrm>
           <a:prstGeom prst="line">
             <a:avLst/>
@@ -12408,8 +13986,8 @@
         </p:nvSpPr>
         <p:spPr>
           <a:xfrm>
-            <a:off x="5440680" y="1874520"/>
-            <a:ext cx="1307592" cy="822960"/>
+            <a:off x="4654296" y="1874520"/>
+            <a:ext cx="1115568" cy="822960"/>
           </a:xfrm>
           <a:prstGeom prst="roundRect">
             <a:avLst>
@@ -12417,13 +13995,13 @@
             </a:avLst>
           </a:prstGeom>
           <a:solidFill>
-            <a:srgbClr val="21D4FD">
+            <a:srgbClr val="FFB45A">
               <a:alpha val="17000"/>
             </a:srgbClr>
           </a:solidFill>
           <a:ln w="15240">
             <a:solidFill>
-              <a:srgbClr val="21D4FD"/>
+              <a:srgbClr val="FFB45A"/>
             </a:solidFill>
             <a:prstDash val="solid"/>
           </a:ln>
@@ -12437,8 +14015,8 @@
         </p:nvSpPr>
         <p:spPr>
           <a:xfrm>
-            <a:off x="5532120" y="1965960"/>
-            <a:ext cx="1124712" cy="640080"/>
+            <a:off x="4745736" y="1965960"/>
+            <a:ext cx="932688" cy="640080"/>
           </a:xfrm>
           <a:prstGeom prst="rect">
             <a:avLst/>
@@ -12461,7 +14039,7 @@
                   <a:srgbClr val="E9F2FF"/>
                 </a:solidFill>
               </a:rPr>
-              <a:t>PBR Scene Pass</a:t>
+              <a:t>Shadow Pass</a:t>
             </a:r>
             <a:endParaRPr lang="en-US" sz="1050" dirty="0"/>
           </a:p>
@@ -12475,8 +14053,8 @@
         </p:nvSpPr>
         <p:spPr>
           <a:xfrm>
-            <a:off x="6757416" y="2286000"/>
-            <a:ext cx="283464" cy="0"/>
+            <a:off x="5779008" y="2286000"/>
+            <a:ext cx="274320" cy="0"/>
           </a:xfrm>
           <a:prstGeom prst="line">
             <a:avLst/>
@@ -12500,8 +14078,8 @@
         </p:nvSpPr>
         <p:spPr>
           <a:xfrm>
-            <a:off x="7086600" y="1874520"/>
-            <a:ext cx="1307592" cy="822960"/>
+            <a:off x="6089904" y="1874520"/>
+            <a:ext cx="1115568" cy="822960"/>
           </a:xfrm>
           <a:prstGeom prst="roundRect">
             <a:avLst>
@@ -12509,13 +14087,13 @@
             </a:avLst>
           </a:prstGeom>
           <a:solidFill>
-            <a:srgbClr val="4F8CFF">
+            <a:srgbClr val="21D4FD">
               <a:alpha val="17000"/>
             </a:srgbClr>
           </a:solidFill>
           <a:ln w="15240">
             <a:solidFill>
-              <a:srgbClr val="4F8CFF"/>
+              <a:srgbClr val="21D4FD"/>
             </a:solidFill>
             <a:prstDash val="solid"/>
           </a:ln>
@@ -12529,8 +14107,8 @@
         </p:nvSpPr>
         <p:spPr>
           <a:xfrm>
-            <a:off x="7178040" y="1965960"/>
-            <a:ext cx="1124712" cy="640080"/>
+            <a:off x="6181344" y="1965960"/>
+            <a:ext cx="932688" cy="640080"/>
           </a:xfrm>
           <a:prstGeom prst="rect">
             <a:avLst/>
@@ -12553,7 +14131,7 @@
                   <a:srgbClr val="E9F2FF"/>
                 </a:solidFill>
               </a:rPr>
-              <a:t>Bloom Chain</a:t>
+              <a:t>PBR Pass</a:t>
             </a:r>
             <a:endParaRPr lang="en-US" sz="1050" dirty="0"/>
           </a:p>
@@ -12567,8 +14145,8 @@
         </p:nvSpPr>
         <p:spPr>
           <a:xfrm>
-            <a:off x="8403336" y="2286000"/>
-            <a:ext cx="283464" cy="0"/>
+            <a:off x="7214616" y="2286000"/>
+            <a:ext cx="274320" cy="0"/>
           </a:xfrm>
           <a:prstGeom prst="line">
             <a:avLst/>
@@ -12592,8 +14170,8 @@
         </p:nvSpPr>
         <p:spPr>
           <a:xfrm>
-            <a:off x="8732520" y="1874520"/>
-            <a:ext cx="1307592" cy="822960"/>
+            <a:off x="7525512" y="1874520"/>
+            <a:ext cx="1115568" cy="822960"/>
           </a:xfrm>
           <a:prstGeom prst="roundRect">
             <a:avLst>
@@ -12601,13 +14179,13 @@
             </a:avLst>
           </a:prstGeom>
           <a:solidFill>
-            <a:srgbClr val="FF6B7A">
+            <a:srgbClr val="4F8CFF">
               <a:alpha val="17000"/>
             </a:srgbClr>
           </a:solidFill>
           <a:ln w="15240">
             <a:solidFill>
-              <a:srgbClr val="FF6B7A"/>
+              <a:srgbClr val="4F8CFF"/>
             </a:solidFill>
             <a:prstDash val="solid"/>
           </a:ln>
@@ -12621,8 +14199,8 @@
         </p:nvSpPr>
         <p:spPr>
           <a:xfrm>
-            <a:off x="8823960" y="1965960"/>
-            <a:ext cx="1124712" cy="640080"/>
+            <a:off x="7616952" y="1965960"/>
+            <a:ext cx="932688" cy="640080"/>
           </a:xfrm>
           <a:prstGeom prst="rect">
             <a:avLst/>
@@ -12645,7 +14223,7 @@
                   <a:srgbClr val="E9F2FF"/>
                 </a:solidFill>
               </a:rPr>
-              <a:t>Selected Effect</a:t>
+              <a:t>Bloom Chain</a:t>
             </a:r>
             <a:endParaRPr lang="en-US" sz="1050" dirty="0"/>
           </a:p>
@@ -12659,8 +14237,8 @@
         </p:nvSpPr>
         <p:spPr>
           <a:xfrm>
-            <a:off x="10049256" y="2286000"/>
-            <a:ext cx="283464" cy="0"/>
+            <a:off x="8650224" y="2286000"/>
+            <a:ext cx="274320" cy="0"/>
           </a:xfrm>
           <a:prstGeom prst="line">
             <a:avLst/>
@@ -12684,8 +14262,8 @@
         </p:nvSpPr>
         <p:spPr>
           <a:xfrm>
-            <a:off x="10378440" y="1874520"/>
-            <a:ext cx="1307592" cy="822960"/>
+            <a:off x="8961120" y="1874520"/>
+            <a:ext cx="1115568" cy="822960"/>
           </a:xfrm>
           <a:prstGeom prst="roundRect">
             <a:avLst>
@@ -12693,6 +14271,98 @@
             </a:avLst>
           </a:prstGeom>
           <a:solidFill>
+            <a:srgbClr val="FF6B7A">
+              <a:alpha val="17000"/>
+            </a:srgbClr>
+          </a:solidFill>
+          <a:ln w="15240">
+            <a:solidFill>
+              <a:srgbClr val="FF6B7A"/>
+            </a:solidFill>
+            <a:prstDash val="solid"/>
+          </a:ln>
+        </p:spPr>
+      </p:sp>
+      <p:sp>
+        <p:nvSpPr>
+          <p:cNvPr id="23" name="Text 21"/>
+          <p:cNvSpPr/>
+          <p:nvPr/>
+        </p:nvSpPr>
+        <p:spPr>
+          <a:xfrm>
+            <a:off x="9052560" y="1965960"/>
+            <a:ext cx="932688" cy="640080"/>
+          </a:xfrm>
+          <a:prstGeom prst="rect">
+            <a:avLst/>
+          </a:prstGeom>
+          <a:noFill/>
+          <a:ln/>
+        </p:spPr>
+        <p:txBody>
+          <a:bodyPr wrap="square" lIns="0" tIns="0" rIns="0" bIns="0" rtlCol="0" anchor="ctr">
+            <a:normAutofit/>
+          </a:bodyPr>
+          <a:lstStyle/>
+          <a:p>
+            <a:pPr algn="ctr" indent="0" marL="0">
+              <a:buNone/>
+            </a:pPr>
+            <a:r>
+              <a:rPr lang="en-US" sz="1050" b="1" dirty="0">
+                <a:solidFill>
+                  <a:srgbClr val="E9F2FF"/>
+                </a:solidFill>
+              </a:rPr>
+              <a:t>Selected Effect</a:t>
+            </a:r>
+            <a:endParaRPr lang="en-US" sz="1050" dirty="0"/>
+          </a:p>
+        </p:txBody>
+      </p:sp>
+      <p:sp>
+        <p:nvSpPr>
+          <p:cNvPr id="24" name="Shape 22"/>
+          <p:cNvSpPr/>
+          <p:nvPr/>
+        </p:nvSpPr>
+        <p:spPr>
+          <a:xfrm>
+            <a:off x="10085832" y="2286000"/>
+            <a:ext cx="274320" cy="0"/>
+          </a:xfrm>
+          <a:prstGeom prst="line">
+            <a:avLst/>
+          </a:prstGeom>
+          <a:noFill/>
+          <a:ln w="17780">
+            <a:solidFill>
+              <a:srgbClr val="96A9C2"/>
+            </a:solidFill>
+            <a:prstDash val="solid"/>
+            <a:headEnd type="none"/>
+            <a:tailEnd type="triangle"/>
+          </a:ln>
+        </p:spPr>
+      </p:sp>
+      <p:sp>
+        <p:nvSpPr>
+          <p:cNvPr id="25" name="Shape 23"/>
+          <p:cNvSpPr/>
+          <p:nvPr/>
+        </p:nvSpPr>
+        <p:spPr>
+          <a:xfrm>
+            <a:off x="10396728" y="1874520"/>
+            <a:ext cx="1115568" cy="822960"/>
+          </a:xfrm>
+          <a:prstGeom prst="roundRect">
+            <a:avLst>
+              <a:gd name="adj" fmla="val 5556"/>
+            </a:avLst>
+          </a:prstGeom>
+          <a:solidFill>
             <a:srgbClr val="B78CFF">
               <a:alpha val="17000"/>
             </a:srgbClr>
@@ -12707,14 +14377,14 @@
       </p:sp>
       <p:sp>
         <p:nvSpPr>
-          <p:cNvPr id="23" name="Text 21"/>
-          <p:cNvSpPr/>
-          <p:nvPr/>
-        </p:nvSpPr>
-        <p:spPr>
-          <a:xfrm>
-            <a:off x="10469880" y="1965960"/>
-            <a:ext cx="1124712" cy="640080"/>
+          <p:cNvPr id="26" name="Text 24"/>
+          <p:cNvSpPr/>
+          <p:nvPr/>
+        </p:nvSpPr>
+        <p:spPr>
+          <a:xfrm>
+            <a:off x="10488168" y="1965960"/>
+            <a:ext cx="932688" cy="640080"/>
           </a:xfrm>
           <a:prstGeom prst="rect">
             <a:avLst/>
@@ -12737,15 +14407,15 @@
                   <a:srgbClr val="E9F2FF"/>
                 </a:solidFill>
               </a:rPr>
-              <a:t>Tone Map / UI</a:t>
-            </a:r>
-            <a:endParaRPr lang="en-US" sz="1050" dirty="0"/>
-          </a:p>
-        </p:txBody>
-      </p:sp>
-      <p:sp>
-        <p:nvSpPr>
-          <p:cNvPr id="24" name="Shape 22"/>
+              <a:t>Present / UI</a:t>
+            </a:r>
+            <a:endParaRPr lang="en-US" sz="1050" dirty="0"/>
+          </a:p>
+        </p:txBody>
+      </p:sp>
+      <p:sp>
+        <p:nvSpPr>
+          <p:cNvPr id="27" name="Shape 25"/>
           <p:cNvSpPr/>
           <p:nvPr/>
         </p:nvSpPr>
@@ -12770,7 +14440,7 @@
       </p:sp>
       <p:sp>
         <p:nvSpPr>
-          <p:cNvPr id="25" name="Text 23"/>
+          <p:cNvPr id="28" name="Text 26"/>
           <p:cNvSpPr/>
           <p:nvPr/>
         </p:nvSpPr>
@@ -12806,7 +14476,7 @@
       </p:sp>
       <p:sp>
         <p:nvSpPr>
-          <p:cNvPr id="26" name="Text 24"/>
+          <p:cNvPr id="29" name="Text 27"/>
           <p:cNvSpPr/>
           <p:nvPr/>
         </p:nvSpPr>
@@ -12842,7 +14512,7 @@
       </p:sp>
       <p:sp>
         <p:nvSpPr>
-          <p:cNvPr id="27" name="Text 25"/>
+          <p:cNvPr id="30" name="Text 28"/>
           <p:cNvSpPr/>
           <p:nvPr/>
         </p:nvSpPr>
@@ -12878,7 +14548,7 @@
       </p:sp>
       <p:sp>
         <p:nvSpPr>
-          <p:cNvPr id="28" name="Shape 26"/>
+          <p:cNvPr id="31" name="Shape 29"/>
           <p:cNvSpPr/>
           <p:nvPr/>
         </p:nvSpPr>
@@ -12909,7 +14579,7 @@
       </p:sp>
       <p:sp>
         <p:nvSpPr>
-          <p:cNvPr id="29" name="Text 27"/>
+          <p:cNvPr id="32" name="Text 30"/>
           <p:cNvSpPr/>
           <p:nvPr/>
         </p:nvSpPr>
@@ -12945,7 +14615,7 @@
       </p:sp>
       <p:sp>
         <p:nvSpPr>
-          <p:cNvPr id="30" name="Shape 28"/>
+          <p:cNvPr id="33" name="Shape 31"/>
           <p:cNvSpPr/>
           <p:nvPr/>
         </p:nvSpPr>
@@ -12976,7 +14646,7 @@
       </p:sp>
       <p:sp>
         <p:nvSpPr>
-          <p:cNvPr id="31" name="Text 29"/>
+          <p:cNvPr id="34" name="Text 32"/>
           <p:cNvSpPr/>
           <p:nvPr/>
         </p:nvSpPr>
@@ -13012,7 +14682,7 @@
       </p:sp>
       <p:sp>
         <p:nvSpPr>
-          <p:cNvPr id="32" name="Text 30"/>
+          <p:cNvPr id="35" name="Text 33"/>
           <p:cNvSpPr/>
           <p:nvPr/>
         </p:nvSpPr>
@@ -13048,7 +14718,7 @@
       </p:sp>
       <p:sp>
         <p:nvSpPr>
-          <p:cNvPr id="33" name="Shape 31"/>
+          <p:cNvPr id="36" name="Shape 34"/>
           <p:cNvSpPr/>
           <p:nvPr/>
         </p:nvSpPr>
@@ -13077,7 +14747,7 @@
       </p:sp>
       <p:sp>
         <p:nvSpPr>
-          <p:cNvPr id="34" name="Text 32"/>
+          <p:cNvPr id="37" name="Text 35"/>
           <p:cNvSpPr/>
           <p:nvPr/>
         </p:nvSpPr>
@@ -13115,7 +14785,7 @@
       </p:sp>
       <p:sp>
         <p:nvSpPr>
-          <p:cNvPr id="35" name="Shape 33"/>
+          <p:cNvPr id="38" name="Shape 36"/>
           <p:cNvSpPr/>
           <p:nvPr/>
         </p:nvSpPr>
@@ -13144,7 +14814,7 @@
       </p:sp>
       <p:sp>
         <p:nvSpPr>
-          <p:cNvPr id="36" name="Text 34"/>
+          <p:cNvPr id="39" name="Text 37"/>
           <p:cNvSpPr/>
           <p:nvPr/>
         </p:nvSpPr>
@@ -13182,7 +14852,7 @@
       </p:sp>
       <p:sp>
         <p:nvSpPr>
-          <p:cNvPr id="37" name="Shape 35"/>
+          <p:cNvPr id="40" name="Shape 38"/>
           <p:cNvSpPr/>
           <p:nvPr/>
         </p:nvSpPr>
@@ -13211,7 +14881,7 @@
       </p:sp>
       <p:sp>
         <p:nvSpPr>
-          <p:cNvPr id="38" name="Text 36"/>
+          <p:cNvPr id="41" name="Text 39"/>
           <p:cNvSpPr/>
           <p:nvPr/>
         </p:nvSpPr>
@@ -13249,7 +14919,7 @@
       </p:sp>
       <p:sp>
         <p:nvSpPr>
-          <p:cNvPr id="39" name="Shape 37"/>
+          <p:cNvPr id="42" name="Shape 40"/>
           <p:cNvSpPr/>
           <p:nvPr/>
         </p:nvSpPr>
@@ -13278,7 +14948,7 @@
       </p:sp>
       <p:sp>
         <p:nvSpPr>
-          <p:cNvPr id="40" name="Text 38"/>
+          <p:cNvPr id="43" name="Text 41"/>
           <p:cNvSpPr/>
           <p:nvPr/>
         </p:nvSpPr>
@@ -14154,7 +15824,7 @@
                   <a:srgbClr val="96A9C2"/>
                 </a:solidFill>
               </a:rPr>
-              <a:t>• CPU vertices / indices / flags</a:t>
+              <a:t>• CPU vertices / indices / local Bounds</a:t>
             </a:r>
             <a:endParaRPr lang="en-US" sz="1050" dirty="0"/>
           </a:p>
@@ -14376,7 +16046,7 @@
                   <a:srgbClr val="96A9C2"/>
                 </a:solidFill>
               </a:rPr>
-              <a:t>• 当前实例的 VAO / VBO / IBO</a:t>
+              <a:t>• Bounds + MaterialAsset 引用</a:t>
             </a:r>
             <a:endParaRPr lang="en-US" sz="1050" dirty="0"/>
           </a:p>
@@ -14390,7 +16060,7 @@
                   <a:srgbClr val="96A9C2"/>
                 </a:solidFill>
               </a:rPr>
-              <a:t>• MaterialAsset 引用</a:t>
+              <a:t>• 共享 MeshResource</a:t>
             </a:r>
             <a:endParaRPr lang="en-US" sz="1050" dirty="0"/>
           </a:p>
@@ -14478,7 +16148,7 @@
                   <a:srgbClr val="E9F2FF"/>
                 </a:solidFill>
               </a:rPr>
-              <a:t>下一步：MeshResource</a:t>
+              <a:t>MeshResource（GPU 共享）</a:t>
             </a:r>
             <a:endParaRPr lang="en-US" sz="1400" dirty="0"/>
           </a:p>
@@ -14516,14 +16186,8 @@
                   <a:srgbClr val="96A9C2"/>
                 </a:solidFill>
               </a:rPr>
-              <a:t>同一个 ModelAsset 的多个实例目前仍重复上传 GPU Buffer。</a:t>
-            </a:r>
-            <a:endParaRPr lang="en-US" sz="1050" dirty="0"/>
-          </a:p>
-          <a:p>
-            <a:pPr indent="0" marL="0">
-              <a:buNone/>
-            </a:pPr>
+              <a:t>AssetManager 首次加载时上传</a:t>
+            </a:r>
             <a:endParaRPr lang="en-US" sz="1050" dirty="0"/>
           </a:p>
           <a:p>
@@ -14536,7 +16200,41 @@
                   <a:srgbClr val="96A9C2"/>
                 </a:solidFill>
               </a:rPr>
-              <a:t>下一阶段应缓存共享 VAO/VBO/IBO，让实例只保存资源句柄与 Transform。</a:t>
+              <a:t>• VAO / VBO / IBO</a:t>
+            </a:r>
+            <a:endParaRPr lang="en-US" sz="1050" dirty="0"/>
+          </a:p>
+          <a:p>
+            <a:pPr indent="0" marL="0">
+              <a:buNone/>
+            </a:pPr>
+            <a:r>
+              <a:rPr lang="en-US" sz="1050" dirty="0">
+                <a:solidFill>
+                  <a:srgbClr val="96A9C2"/>
+                </a:solidFill>
+              </a:rPr>
+              <a:t>• vertex / index count</a:t>
+            </a:r>
+            <a:endParaRPr lang="en-US" sz="1050" dirty="0"/>
+          </a:p>
+          <a:p>
+            <a:pPr indent="0" marL="0">
+              <a:buNone/>
+            </a:pPr>
+            <a:endParaRPr lang="en-US" sz="1050" dirty="0"/>
+          </a:p>
+          <a:p>
+            <a:pPr indent="0" marL="0">
+              <a:buNone/>
+            </a:pPr>
+            <a:r>
+              <a:rPr lang="en-US" sz="1050" dirty="0">
+                <a:solidFill>
+                  <a:srgbClr val="96A9C2"/>
+                </a:solidFill>
+              </a:rPr>
+              <a:t>同模型多实例复用一份 GPU 几何，实例不再复制 CPU 顶点和索引。</a:t>
             </a:r>
             <a:endParaRPr lang="en-US" sz="1050" dirty="0"/>
           </a:p>

--- a/docs/RenderEngine_Project_Overview.pptx
+++ b/docs/RenderEngine_Project_Overview.pptx
@@ -21,9 +21,10 @@
     <p:sldId id="269" r:id="rId15"/>
     <p:sldId id="270" r:id="rId16"/>
     <p:sldId id="271" r:id="rId17"/>
+    <p:sldId id="272" r:id="rId18"/>
   </p:sldIdLst>
   <p:notesMasterIdLst>
-    <p:notesMasterId r:id="rId18"/>
+    <p:notesMasterId r:id="rId19"/>
   </p:notesMasterIdLst>
   <p:sldSz cx="12192000" cy="6858000"/>
   <p:notesSz cx="6858000" cy="12192000"/>
@@ -1175,6 +1176,94 @@
 </p:notes>
 </file>
 
+<file path=ppt/notesSlides/notesSlide17.xml><?xml version="1.0" encoding="utf-8"?>
+<p:notes xmlns:a="http://schemas.openxmlformats.org/drawingml/2006/main" xmlns:r="http://schemas.openxmlformats.org/officeDocument/2006/relationships" xmlns:p="http://schemas.openxmlformats.org/presentationml/2006/main">
+  <p:cSld>
+    <p:spTree>
+      <p:nvGrpSpPr>
+        <p:cNvPr id="1" name=""/>
+        <p:cNvGrpSpPr/>
+        <p:nvPr/>
+      </p:nvGrpSpPr>
+      <p:grpSpPr>
+        <a:xfrm>
+          <a:off x="0" y="0"/>
+          <a:ext cx="0" cy="0"/>
+          <a:chOff x="0" y="0"/>
+          <a:chExt cx="0" cy="0"/>
+        </a:xfrm>
+      </p:grpSpPr>
+      <p:sp>
+        <p:nvSpPr>
+          <p:cNvPr id="2" name="Slide Image Placeholder 1"/>
+          <p:cNvSpPr>
+            <a:spLocks noGrp="1" noRot="1" noChangeAspect="1"/>
+          </p:cNvSpPr>
+          <p:nvPr>
+            <p:ph type="sldImg"/>
+          </p:nvPr>
+        </p:nvSpPr>
+        <p:spPr/>
+      </p:sp>
+      <p:sp>
+        <p:nvSpPr>
+          <p:cNvPr id="3" name="Notes Placeholder 2"/>
+          <p:cNvSpPr>
+            <a:spLocks noGrp="1"/>
+          </p:cNvSpPr>
+          <p:nvPr>
+            <p:ph type="body" idx="1"/>
+          </p:nvPr>
+        </p:nvSpPr>
+        <p:spPr/>
+        <p:txBody>
+          <a:bodyPr/>
+          <a:lstStyle/>
+          <a:p>
+            <a:r>
+              <a:rPr lang="en-US" dirty="0"/>
+              <a:t/>
+            </a:r>
+            <a:endParaRPr lang="en-US" dirty="0"/>
+          </a:p>
+        </p:txBody>
+      </p:sp>
+      <p:sp>
+        <p:nvSpPr>
+          <p:cNvPr id="4" name="Slide Number Placeholder 3"/>
+          <p:cNvSpPr>
+            <a:spLocks noGrp="1"/>
+          </p:cNvSpPr>
+          <p:nvPr>
+            <p:ph type="sldNum" sz="quarter" idx="10"/>
+          </p:nvPr>
+        </p:nvSpPr>
+        <p:spPr/>
+        <p:txBody>
+          <a:bodyPr/>
+          <a:lstStyle/>
+          <a:p>
+            <a:fld id="{F7021451-1387-4CA6-816F-3879F97B5CBC}" type="slidenum">
+              <a:rPr lang="en-US"/>
+              <a:t>17</a:t>
+            </a:fld>
+            <a:endParaRPr lang="en-US"/>
+          </a:p>
+        </p:txBody>
+      </p:sp>
+    </p:spTree>
+    <p:extLst>
+      <p:ext uri="{BB962C8B-B14F-4D97-AF65-F5344CB8AC3E}">
+        <p14:creationId xmlns:p14="http://schemas.microsoft.com/office/powerpoint/2010/main" val="1024086991"/>
+      </p:ext>
+    </p:extLst>
+  </p:cSld>
+  <p:clrMapOvr>
+    <a:masterClrMapping/>
+  </p:clrMapOvr>
+</p:notes>
+</file>
+
 <file path=ppt/notesSlides/notesSlide2.xml><?xml version="1.0" encoding="utf-8"?>
 <p:notes xmlns:a="http://schemas.openxmlformats.org/drawingml/2006/main" xmlns:r="http://schemas.openxmlformats.org/officeDocument/2006/relationships" xmlns:p="http://schemas.openxmlformats.org/presentationml/2006/main">
   <p:cSld>
@@ -6954,7 +7043,7 @@
                   <a:srgbClr val="E9F2FF"/>
                 </a:solidFill>
               </a:rPr>
-              <a:t>12  项目中的 C++ 核心知识点</a:t>
+              <a:t>12  本阶段升级：Shader Technique 与热重载</a:t>
             </a:r>
             <a:endParaRPr lang="en-US" sz="2500" dirty="0"/>
           </a:p>
@@ -6990,7 +7079,7 @@
                   <a:srgbClr val="96A9C2"/>
                 </a:solidFill>
               </a:rPr>
-              <a:t>语言特性不是孤立技巧，而是用来表达所有权、依赖和数据边界</a:t>
+              <a:t>外置源码、Pass 选择和 Variant 缓存统一进入 ShaderLibrary</a:t>
             </a:r>
             <a:endParaRPr lang="en-US" sz="1050" dirty="0"/>
           </a:p>
@@ -7004,15 +7093,506 @@
         </p:nvSpPr>
         <p:spPr>
           <a:xfrm>
-            <a:off x="566928" y="1234440"/>
-            <a:ext cx="3520440" cy="1920240"/>
+            <a:off x="548640" y="1325880"/>
+            <a:ext cx="2103120" cy="868680"/>
           </a:xfrm>
           <a:prstGeom prst="roundRect">
             <a:avLst>
-              <a:gd name="adj" fmla="val 2857"/>
+              <a:gd name="adj" fmla="val 5263"/>
             </a:avLst>
           </a:prstGeom>
           <a:solidFill>
+            <a:srgbClr val="FFB45A">
+              <a:alpha val="17000"/>
+            </a:srgbClr>
+          </a:solidFill>
+          <a:ln w="15240">
+            <a:solidFill>
+              <a:srgbClr val="FFB45A"/>
+            </a:solidFill>
+            <a:prstDash val="solid"/>
+          </a:ln>
+        </p:spPr>
+      </p:sp>
+      <p:sp>
+        <p:nvSpPr>
+          <p:cNvPr id="5" name="Text 3"/>
+          <p:cNvSpPr/>
+          <p:nvPr/>
+        </p:nvSpPr>
+        <p:spPr>
+          <a:xfrm>
+            <a:off x="640080" y="1417320"/>
+            <a:ext cx="1920240" cy="685800"/>
+          </a:xfrm>
+          <a:prstGeom prst="rect">
+            <a:avLst/>
+          </a:prstGeom>
+          <a:noFill/>
+          <a:ln/>
+        </p:spPr>
+        <p:txBody>
+          <a:bodyPr wrap="square" lIns="0" tIns="0" rIns="0" bIns="0" rtlCol="0" anchor="ctr">
+            <a:normAutofit/>
+          </a:bodyPr>
+          <a:lstStyle/>
+          <a:p>
+            <a:pPr algn="ctr" indent="0" marL="0">
+              <a:buNone/>
+            </a:pPr>
+            <a:r>
+              <a:rPr lang="en-US" sz="1050" b="1" dirty="0">
+                <a:solidFill>
+                  <a:srgbClr val="E9F2FF"/>
+                </a:solidFill>
+              </a:rPr>
+              <a:t>MaterialAsset</a:t>
+            </a:r>
+            <a:endParaRPr lang="en-US" sz="1050" dirty="0"/>
+          </a:p>
+          <a:p>
+            <a:pPr algn="ctr" indent="0" marL="0">
+              <a:buNone/>
+            </a:pPr>
+            <a:r>
+              <a:rPr lang="en-US" sz="1050" b="1" dirty="0">
+                <a:solidFill>
+                  <a:srgbClr val="E9F2FF"/>
+                </a:solidFill>
+              </a:rPr>
+              <a:t>ShaderHandle + Defines</a:t>
+            </a:r>
+            <a:endParaRPr lang="en-US" sz="1050" dirty="0"/>
+          </a:p>
+        </p:txBody>
+      </p:sp>
+      <p:sp>
+        <p:nvSpPr>
+          <p:cNvPr id="6" name="Shape 4"/>
+          <p:cNvSpPr/>
+          <p:nvPr/>
+        </p:nvSpPr>
+        <p:spPr>
+          <a:xfrm>
+            <a:off x="3063240" y="1325880"/>
+            <a:ext cx="2057400" cy="868680"/>
+          </a:xfrm>
+          <a:prstGeom prst="roundRect">
+            <a:avLst>
+              <a:gd name="adj" fmla="val 5263"/>
+            </a:avLst>
+          </a:prstGeom>
+          <a:solidFill>
+            <a:srgbClr val="4F8CFF">
+              <a:alpha val="17000"/>
+            </a:srgbClr>
+          </a:solidFill>
+          <a:ln w="15240">
+            <a:solidFill>
+              <a:srgbClr val="4F8CFF"/>
+            </a:solidFill>
+            <a:prstDash val="solid"/>
+          </a:ln>
+        </p:spPr>
+      </p:sp>
+      <p:sp>
+        <p:nvSpPr>
+          <p:cNvPr id="7" name="Text 5"/>
+          <p:cNvSpPr/>
+          <p:nvPr/>
+        </p:nvSpPr>
+        <p:spPr>
+          <a:xfrm>
+            <a:off x="3154680" y="1417320"/>
+            <a:ext cx="1874520" cy="685800"/>
+          </a:xfrm>
+          <a:prstGeom prst="rect">
+            <a:avLst/>
+          </a:prstGeom>
+          <a:noFill/>
+          <a:ln/>
+        </p:spPr>
+        <p:txBody>
+          <a:bodyPr wrap="square" lIns="0" tIns="0" rIns="0" bIns="0" rtlCol="0" anchor="ctr">
+            <a:normAutofit/>
+          </a:bodyPr>
+          <a:lstStyle/>
+          <a:p>
+            <a:pPr algn="ctr" indent="0" marL="0">
+              <a:buNone/>
+            </a:pPr>
+            <a:r>
+              <a:rPr lang="en-US" sz="1050" b="1" dirty="0">
+                <a:solidFill>
+                  <a:srgbClr val="E9F2FF"/>
+                </a:solidFill>
+              </a:rPr>
+              <a:t>Technique</a:t>
+            </a:r>
+            <a:endParaRPr lang="en-US" sz="1050" dirty="0"/>
+          </a:p>
+          <a:p>
+            <a:pPr algn="ctr" indent="0" marL="0">
+              <a:buNone/>
+            </a:pPr>
+            <a:r>
+              <a:rPr lang="en-US" sz="1050" b="1" dirty="0">
+                <a:solidFill>
+                  <a:srgbClr val="E9F2FF"/>
+                </a:solidFill>
+              </a:rPr>
+              <a:t>default-lit / post / IBL</a:t>
+            </a:r>
+            <a:endParaRPr lang="en-US" sz="1050" dirty="0"/>
+          </a:p>
+        </p:txBody>
+      </p:sp>
+      <p:sp>
+        <p:nvSpPr>
+          <p:cNvPr id="8" name="Shape 6"/>
+          <p:cNvSpPr/>
+          <p:nvPr/>
+        </p:nvSpPr>
+        <p:spPr>
+          <a:xfrm>
+            <a:off x="5532120" y="1325880"/>
+            <a:ext cx="2057400" cy="868680"/>
+          </a:xfrm>
+          <a:prstGeom prst="roundRect">
+            <a:avLst>
+              <a:gd name="adj" fmla="val 5263"/>
+            </a:avLst>
+          </a:prstGeom>
+          <a:solidFill>
+            <a:srgbClr val="21D4FD">
+              <a:alpha val="17000"/>
+            </a:srgbClr>
+          </a:solidFill>
+          <a:ln w="15240">
+            <a:solidFill>
+              <a:srgbClr val="21D4FD"/>
+            </a:solidFill>
+            <a:prstDash val="solid"/>
+          </a:ln>
+        </p:spPr>
+      </p:sp>
+      <p:sp>
+        <p:nvSpPr>
+          <p:cNvPr id="9" name="Text 7"/>
+          <p:cNvSpPr/>
+          <p:nvPr/>
+        </p:nvSpPr>
+        <p:spPr>
+          <a:xfrm>
+            <a:off x="5623560" y="1417320"/>
+            <a:ext cx="1874520" cy="685800"/>
+          </a:xfrm>
+          <a:prstGeom prst="rect">
+            <a:avLst/>
+          </a:prstGeom>
+          <a:noFill/>
+          <a:ln/>
+        </p:spPr>
+        <p:txBody>
+          <a:bodyPr wrap="square" lIns="0" tIns="0" rIns="0" bIns="0" rtlCol="0" anchor="ctr">
+            <a:normAutofit/>
+          </a:bodyPr>
+          <a:lstStyle/>
+          <a:p>
+            <a:pPr algn="ctr" indent="0" marL="0">
+              <a:buNone/>
+            </a:pPr>
+            <a:r>
+              <a:rPr lang="en-US" sz="1050" b="1" dirty="0">
+                <a:solidFill>
+                  <a:srgbClr val="E9F2FF"/>
+                </a:solidFill>
+              </a:rPr>
+              <a:t>ShaderPass</a:t>
+            </a:r>
+            <a:endParaRPr lang="en-US" sz="1050" dirty="0"/>
+          </a:p>
+          <a:p>
+            <a:pPr algn="ctr" indent="0" marL="0">
+              <a:buNone/>
+            </a:pPr>
+            <a:r>
+              <a:rPr lang="en-US" sz="1050" b="1" dirty="0">
+                <a:solidFill>
+                  <a:srgbClr val="E9F2FF"/>
+                </a:solidFill>
+              </a:rPr>
+              <a:t>Forward / Shadow / Debug</a:t>
+            </a:r>
+            <a:endParaRPr lang="en-US" sz="1050" dirty="0"/>
+          </a:p>
+        </p:txBody>
+      </p:sp>
+      <p:sp>
+        <p:nvSpPr>
+          <p:cNvPr id="10" name="Shape 8"/>
+          <p:cNvSpPr/>
+          <p:nvPr/>
+        </p:nvSpPr>
+        <p:spPr>
+          <a:xfrm>
+            <a:off x="8001000" y="1325880"/>
+            <a:ext cx="1783080" cy="868680"/>
+          </a:xfrm>
+          <a:prstGeom prst="roundRect">
+            <a:avLst>
+              <a:gd name="adj" fmla="val 5263"/>
+            </a:avLst>
+          </a:prstGeom>
+          <a:solidFill>
+            <a:srgbClr val="5EE2A0">
+              <a:alpha val="17000"/>
+            </a:srgbClr>
+          </a:solidFill>
+          <a:ln w="15240">
+            <a:solidFill>
+              <a:srgbClr val="5EE2A0"/>
+            </a:solidFill>
+            <a:prstDash val="solid"/>
+          </a:ln>
+        </p:spPr>
+      </p:sp>
+      <p:sp>
+        <p:nvSpPr>
+          <p:cNvPr id="11" name="Text 9"/>
+          <p:cNvSpPr/>
+          <p:nvPr/>
+        </p:nvSpPr>
+        <p:spPr>
+          <a:xfrm>
+            <a:off x="8092440" y="1417320"/>
+            <a:ext cx="1600200" cy="685800"/>
+          </a:xfrm>
+          <a:prstGeom prst="rect">
+            <a:avLst/>
+          </a:prstGeom>
+          <a:noFill/>
+          <a:ln/>
+        </p:spPr>
+        <p:txBody>
+          <a:bodyPr wrap="square" lIns="0" tIns="0" rIns="0" bIns="0" rtlCol="0" anchor="ctr">
+            <a:normAutofit/>
+          </a:bodyPr>
+          <a:lstStyle/>
+          <a:p>
+            <a:pPr algn="ctr" indent="0" marL="0">
+              <a:buNone/>
+            </a:pPr>
+            <a:r>
+              <a:rPr lang="en-US" sz="1050" b="1" dirty="0">
+                <a:solidFill>
+                  <a:srgbClr val="E9F2FF"/>
+                </a:solidFill>
+              </a:rPr>
+              <a:t>Variant Key</a:t>
+            </a:r>
+            <a:endParaRPr lang="en-US" sz="1050" dirty="0"/>
+          </a:p>
+          <a:p>
+            <a:pPr algn="ctr" indent="0" marL="0">
+              <a:buNone/>
+            </a:pPr>
+            <a:r>
+              <a:rPr lang="en-US" sz="1050" b="1" dirty="0">
+                <a:solidFill>
+                  <a:srgbClr val="E9F2FF"/>
+                </a:solidFill>
+              </a:rPr>
+              <a:t>Pass + Sorted Defines</a:t>
+            </a:r>
+            <a:endParaRPr lang="en-US" sz="1050" dirty="0"/>
+          </a:p>
+        </p:txBody>
+      </p:sp>
+      <p:sp>
+        <p:nvSpPr>
+          <p:cNvPr id="12" name="Shape 10"/>
+          <p:cNvSpPr/>
+          <p:nvPr/>
+        </p:nvSpPr>
+        <p:spPr>
+          <a:xfrm>
+            <a:off x="10195560" y="1325880"/>
+            <a:ext cx="1417320" cy="868680"/>
+          </a:xfrm>
+          <a:prstGeom prst="roundRect">
+            <a:avLst>
+              <a:gd name="adj" fmla="val 5263"/>
+            </a:avLst>
+          </a:prstGeom>
+          <a:solidFill>
+            <a:srgbClr val="B78CFF">
+              <a:alpha val="17000"/>
+            </a:srgbClr>
+          </a:solidFill>
+          <a:ln w="15240">
+            <a:solidFill>
+              <a:srgbClr val="B78CFF"/>
+            </a:solidFill>
+            <a:prstDash val="solid"/>
+          </a:ln>
+        </p:spPr>
+      </p:sp>
+      <p:sp>
+        <p:nvSpPr>
+          <p:cNvPr id="13" name="Text 11"/>
+          <p:cNvSpPr/>
+          <p:nvPr/>
+        </p:nvSpPr>
+        <p:spPr>
+          <a:xfrm>
+            <a:off x="10287000" y="1417320"/>
+            <a:ext cx="1234440" cy="685800"/>
+          </a:xfrm>
+          <a:prstGeom prst="rect">
+            <a:avLst/>
+          </a:prstGeom>
+          <a:noFill/>
+          <a:ln/>
+        </p:spPr>
+        <p:txBody>
+          <a:bodyPr wrap="square" lIns="0" tIns="0" rIns="0" bIns="0" rtlCol="0" anchor="ctr">
+            <a:normAutofit/>
+          </a:bodyPr>
+          <a:lstStyle/>
+          <a:p>
+            <a:pPr algn="ctr" indent="0" marL="0">
+              <a:buNone/>
+            </a:pPr>
+            <a:r>
+              <a:rPr lang="en-US" sz="1050" b="1" dirty="0">
+                <a:solidFill>
+                  <a:srgbClr val="E9F2FF"/>
+                </a:solidFill>
+              </a:rPr>
+              <a:t>Program Cache</a:t>
+            </a:r>
+            <a:endParaRPr lang="en-US" sz="1050" dirty="0"/>
+          </a:p>
+        </p:txBody>
+      </p:sp>
+      <p:sp>
+        <p:nvSpPr>
+          <p:cNvPr id="14" name="Shape 12"/>
+          <p:cNvSpPr/>
+          <p:nvPr/>
+        </p:nvSpPr>
+        <p:spPr>
+          <a:xfrm>
+            <a:off x="2651760" y="1755648"/>
+            <a:ext cx="365760" cy="0"/>
+          </a:xfrm>
+          <a:prstGeom prst="line">
+            <a:avLst/>
+          </a:prstGeom>
+          <a:noFill/>
+          <a:ln w="17780">
+            <a:solidFill>
+              <a:srgbClr val="96A9C2"/>
+            </a:solidFill>
+            <a:prstDash val="solid"/>
+            <a:headEnd type="none"/>
+            <a:tailEnd type="triangle"/>
+          </a:ln>
+        </p:spPr>
+      </p:sp>
+      <p:sp>
+        <p:nvSpPr>
+          <p:cNvPr id="15" name="Shape 13"/>
+          <p:cNvSpPr/>
+          <p:nvPr/>
+        </p:nvSpPr>
+        <p:spPr>
+          <a:xfrm>
+            <a:off x="5120640" y="1755648"/>
+            <a:ext cx="365760" cy="0"/>
+          </a:xfrm>
+          <a:prstGeom prst="line">
+            <a:avLst/>
+          </a:prstGeom>
+          <a:noFill/>
+          <a:ln w="17780">
+            <a:solidFill>
+              <a:srgbClr val="96A9C2"/>
+            </a:solidFill>
+            <a:prstDash val="solid"/>
+            <a:headEnd type="none"/>
+            <a:tailEnd type="triangle"/>
+          </a:ln>
+        </p:spPr>
+      </p:sp>
+      <p:sp>
+        <p:nvSpPr>
+          <p:cNvPr id="16" name="Shape 14"/>
+          <p:cNvSpPr/>
+          <p:nvPr/>
+        </p:nvSpPr>
+        <p:spPr>
+          <a:xfrm>
+            <a:off x="7589520" y="1755648"/>
+            <a:ext cx="365760" cy="0"/>
+          </a:xfrm>
+          <a:prstGeom prst="line">
+            <a:avLst/>
+          </a:prstGeom>
+          <a:noFill/>
+          <a:ln w="17780">
+            <a:solidFill>
+              <a:srgbClr val="96A9C2"/>
+            </a:solidFill>
+            <a:prstDash val="solid"/>
+            <a:headEnd type="none"/>
+            <a:tailEnd type="triangle"/>
+          </a:ln>
+        </p:spPr>
+      </p:sp>
+      <p:sp>
+        <p:nvSpPr>
+          <p:cNvPr id="17" name="Shape 15"/>
+          <p:cNvSpPr/>
+          <p:nvPr/>
+        </p:nvSpPr>
+        <p:spPr>
+          <a:xfrm>
+            <a:off x="9784080" y="1755648"/>
+            <a:ext cx="365760" cy="0"/>
+          </a:xfrm>
+          <a:prstGeom prst="line">
+            <a:avLst/>
+          </a:prstGeom>
+          <a:noFill/>
+          <a:ln w="17780">
+            <a:solidFill>
+              <a:srgbClr val="96A9C2"/>
+            </a:solidFill>
+            <a:prstDash val="solid"/>
+            <a:headEnd type="none"/>
+            <a:tailEnd type="triangle"/>
+          </a:ln>
+        </p:spPr>
+      </p:sp>
+      <p:sp>
+        <p:nvSpPr>
+          <p:cNvPr id="18" name="Shape 16"/>
+          <p:cNvSpPr/>
+          <p:nvPr/>
+        </p:nvSpPr>
+        <p:spPr>
+          <a:xfrm>
+            <a:off x="594360" y="2743200"/>
+            <a:ext cx="3429000" cy="2057400"/>
+          </a:xfrm>
+          <a:prstGeom prst="roundRect">
+            <a:avLst>
+              <a:gd name="adj" fmla="val 2667"/>
+            </a:avLst>
+          </a:prstGeom>
+          <a:solidFill>
             <a:srgbClr val="0F1C2E"/>
           </a:solidFill>
           <a:ln w="12700">
@@ -7025,39 +7605,39 @@
       </p:sp>
       <p:sp>
         <p:nvSpPr>
-          <p:cNvPr id="5" name="Shape 3"/>
-          <p:cNvSpPr/>
-          <p:nvPr/>
-        </p:nvSpPr>
-        <p:spPr>
-          <a:xfrm>
-            <a:off x="566928" y="1234440"/>
-            <a:ext cx="54864" cy="1920240"/>
-          </a:xfrm>
-          <a:prstGeom prst="rect">
-            <a:avLst/>
-          </a:prstGeom>
-          <a:solidFill>
-            <a:srgbClr val="5EE2A0"/>
+          <p:cNvPr id="19" name="Shape 17"/>
+          <p:cNvSpPr/>
+          <p:nvPr/>
+        </p:nvSpPr>
+        <p:spPr>
+          <a:xfrm>
+            <a:off x="594360" y="2743200"/>
+            <a:ext cx="54864" cy="2057400"/>
+          </a:xfrm>
+          <a:prstGeom prst="rect">
+            <a:avLst/>
+          </a:prstGeom>
+          <a:solidFill>
+            <a:srgbClr val="21D4FD"/>
           </a:solidFill>
           <a:ln w="12700">
             <a:solidFill>
-              <a:srgbClr val="5EE2A0"/>
-            </a:solidFill>
-            <a:prstDash val="solid"/>
-          </a:ln>
-        </p:spPr>
-      </p:sp>
-      <p:sp>
-        <p:nvSpPr>
-          <p:cNvPr id="6" name="Text 4"/>
-          <p:cNvSpPr/>
-          <p:nvPr/>
-        </p:nvSpPr>
-        <p:spPr>
-          <a:xfrm>
-            <a:off x="768096" y="1399032"/>
-            <a:ext cx="3191256" cy="274320"/>
+              <a:srgbClr val="21D4FD"/>
+            </a:solidFill>
+            <a:prstDash val="solid"/>
+          </a:ln>
+        </p:spPr>
+      </p:sp>
+      <p:sp>
+        <p:nvSpPr>
+          <p:cNvPr id="20" name="Text 18"/>
+          <p:cNvSpPr/>
+          <p:nvPr/>
+        </p:nvSpPr>
+        <p:spPr>
+          <a:xfrm>
+            <a:off x="795528" y="2907792"/>
+            <a:ext cx="3099816" cy="274320"/>
           </a:xfrm>
           <a:prstGeom prst="rect">
             <a:avLst/>
@@ -7078,7 +7658,7 @@
                   <a:srgbClr val="E9F2FF"/>
                 </a:solidFill>
               </a:rPr>
-              <a:t>RAII / unique_ptr</a:t>
+              <a:t>外置 Shader 资源</a:t>
             </a:r>
             <a:endParaRPr lang="en-US" sz="1400" dirty="0"/>
           </a:p>
@@ -7086,14 +7666,14 @@
       </p:sp>
       <p:sp>
         <p:nvSpPr>
-          <p:cNvPr id="7" name="Text 5"/>
-          <p:cNvSpPr/>
-          <p:nvPr/>
-        </p:nvSpPr>
-        <p:spPr>
-          <a:xfrm>
-            <a:off x="768096" y="1801368"/>
-            <a:ext cx="3154680" cy="1225296"/>
+          <p:cNvPr id="21" name="Text 19"/>
+          <p:cNvSpPr/>
+          <p:nvPr/>
+        </p:nvSpPr>
+        <p:spPr>
+          <a:xfrm>
+            <a:off x="795528" y="3310128"/>
+            <a:ext cx="3063240" cy="1362456"/>
           </a:xfrm>
           <a:prstGeom prst="rect">
             <a:avLst/>
@@ -7116,7 +7696,7 @@
                   <a:srgbClr val="96A9C2"/>
                 </a:solidFill>
               </a:rPr>
-              <a:t>RenderTarget 独占 attachment</a:t>
+              <a:t>PBR / Depth / Light Debug</a:t>
             </a:r>
             <a:endParaRPr lang="en-US" sz="1050" dirty="0"/>
           </a:p>
@@ -7130,7 +7710,7 @@
                   <a:srgbClr val="96A9C2"/>
                 </a:solidFill>
               </a:rPr>
-              <a:t>Renderer 独占子系统</a:t>
+              <a:t>Screen / IBL / Post Process</a:t>
             </a:r>
             <a:endParaRPr lang="en-US" sz="1050" dirty="0"/>
           </a:p>
@@ -7144,7 +7724,7 @@
                   <a:srgbClr val="96A9C2"/>
                 </a:solidFill>
               </a:rPr>
-              <a:t>析构自动释放 GPU wrapper</a:t>
+              <a:t>统一存放 resources/shaders</a:t>
             </a:r>
             <a:endParaRPr lang="en-US" sz="1050" dirty="0"/>
           </a:p>
@@ -7158,26 +7738,26 @@
                   <a:srgbClr val="96A9C2"/>
                 </a:solidFill>
               </a:rPr>
-              <a:t>禁止复制表达唯一所有权</a:t>
-            </a:r>
-            <a:endParaRPr lang="en-US" sz="1050" dirty="0"/>
-          </a:p>
-        </p:txBody>
-      </p:sp>
-      <p:sp>
-        <p:nvSpPr>
-          <p:cNvPr id="8" name="Shape 6"/>
-          <p:cNvSpPr/>
-          <p:nvPr/>
-        </p:nvSpPr>
-        <p:spPr>
-          <a:xfrm>
-            <a:off x="4325112" y="1234440"/>
-            <a:ext cx="3520440" cy="1920240"/>
+              <a:t>日志输出真实文件路径与源码行号</a:t>
+            </a:r>
+            <a:endParaRPr lang="en-US" sz="1050" dirty="0"/>
+          </a:p>
+        </p:txBody>
+      </p:sp>
+      <p:sp>
+        <p:nvSpPr>
+          <p:cNvPr id="22" name="Shape 20"/>
+          <p:cNvSpPr/>
+          <p:nvPr/>
+        </p:nvSpPr>
+        <p:spPr>
+          <a:xfrm>
+            <a:off x="4370832" y="2743200"/>
+            <a:ext cx="3429000" cy="2057400"/>
           </a:xfrm>
           <a:prstGeom prst="roundRect">
             <a:avLst>
-              <a:gd name="adj" fmla="val 2857"/>
+              <a:gd name="adj" fmla="val 2667"/>
             </a:avLst>
           </a:prstGeom>
           <a:solidFill>
@@ -7193,39 +7773,39 @@
       </p:sp>
       <p:sp>
         <p:nvSpPr>
-          <p:cNvPr id="9" name="Shape 7"/>
-          <p:cNvSpPr/>
-          <p:nvPr/>
-        </p:nvSpPr>
-        <p:spPr>
-          <a:xfrm>
-            <a:off x="4325112" y="1234440"/>
-            <a:ext cx="54864" cy="1920240"/>
-          </a:xfrm>
-          <a:prstGeom prst="rect">
-            <a:avLst/>
-          </a:prstGeom>
-          <a:solidFill>
-            <a:srgbClr val="4F8CFF"/>
+          <p:cNvPr id="23" name="Shape 21"/>
+          <p:cNvSpPr/>
+          <p:nvPr/>
+        </p:nvSpPr>
+        <p:spPr>
+          <a:xfrm>
+            <a:off x="4370832" y="2743200"/>
+            <a:ext cx="54864" cy="2057400"/>
+          </a:xfrm>
+          <a:prstGeom prst="rect">
+            <a:avLst/>
+          </a:prstGeom>
+          <a:solidFill>
+            <a:srgbClr val="5EE2A0"/>
           </a:solidFill>
           <a:ln w="12700">
             <a:solidFill>
-              <a:srgbClr val="4F8CFF"/>
-            </a:solidFill>
-            <a:prstDash val="solid"/>
-          </a:ln>
-        </p:spPr>
-      </p:sp>
-      <p:sp>
-        <p:nvSpPr>
-          <p:cNvPr id="10" name="Text 8"/>
-          <p:cNvSpPr/>
-          <p:nvPr/>
-        </p:nvSpPr>
-        <p:spPr>
-          <a:xfrm>
-            <a:off x="4526280" y="1399032"/>
-            <a:ext cx="3191256" cy="274320"/>
+              <a:srgbClr val="5EE2A0"/>
+            </a:solidFill>
+            <a:prstDash val="solid"/>
+          </a:ln>
+        </p:spPr>
+      </p:sp>
+      <p:sp>
+        <p:nvSpPr>
+          <p:cNvPr id="24" name="Text 22"/>
+          <p:cNvSpPr/>
+          <p:nvPr/>
+        </p:nvSpPr>
+        <p:spPr>
+          <a:xfrm>
+            <a:off x="4572000" y="2907792"/>
+            <a:ext cx="3099816" cy="274320"/>
           </a:xfrm>
           <a:prstGeom prst="rect">
             <a:avLst/>
@@ -7246,7 +7826,7 @@
                   <a:srgbClr val="E9F2FF"/>
                 </a:solidFill>
               </a:rPr>
-              <a:t>shared_ptr / Cache</a:t>
+              <a:t>安全热重载</a:t>
             </a:r>
             <a:endParaRPr lang="en-US" sz="1400" dirty="0"/>
           </a:p>
@@ -7254,14 +7834,14 @@
       </p:sp>
       <p:sp>
         <p:nvSpPr>
-          <p:cNvPr id="11" name="Text 9"/>
-          <p:cNvSpPr/>
-          <p:nvPr/>
-        </p:nvSpPr>
-        <p:spPr>
-          <a:xfrm>
-            <a:off x="4526280" y="1801368"/>
-            <a:ext cx="3154680" cy="1225296"/>
+          <p:cNvPr id="25" name="Text 23"/>
+          <p:cNvSpPr/>
+          <p:nvPr/>
+        </p:nvSpPr>
+        <p:spPr>
+          <a:xfrm>
+            <a:off x="4572000" y="3310128"/>
+            <a:ext cx="3063240" cy="1362456"/>
           </a:xfrm>
           <a:prstGeom prst="rect">
             <a:avLst/>
@@ -7284,7 +7864,7 @@
                   <a:srgbClr val="96A9C2"/>
                 </a:solidFill>
               </a:rPr>
-              <a:t>ModelAsset、MaterialAsset、Texture2D 跨系统共享</a:t>
+              <a:t>500ms 文件时间戳检查</a:t>
             </a:r>
             <a:endParaRPr lang="en-US" sz="1050" dirty="0"/>
           </a:p>
@@ -7298,7 +7878,7 @@
                   <a:srgbClr val="96A9C2"/>
                 </a:solidFill>
               </a:rPr>
-              <a:t>AssetManager 保持缓存生命周期</a:t>
+              <a:t>先编译 Candidate Program</a:t>
             </a:r>
             <a:endParaRPr lang="en-US" sz="1050" dirty="0"/>
           </a:p>
@@ -7312,26 +7892,40 @@
                   <a:srgbClr val="96A9C2"/>
                 </a:solidFill>
               </a:rPr>
-              <a:t>实例只保存共享引用</a:t>
-            </a:r>
-            <a:endParaRPr lang="en-US" sz="1050" dirty="0"/>
-          </a:p>
-        </p:txBody>
-      </p:sp>
-      <p:sp>
-        <p:nvSpPr>
-          <p:cNvPr id="12" name="Shape 10"/>
-          <p:cNvSpPr/>
-          <p:nvPr/>
-        </p:nvSpPr>
-        <p:spPr>
-          <a:xfrm>
-            <a:off x="8083296" y="1234440"/>
-            <a:ext cx="3520440" cy="1920240"/>
+              <a:t>成功：原子替换 OpenGL ID</a:t>
+            </a:r>
+            <a:endParaRPr lang="en-US" sz="1050" dirty="0"/>
+          </a:p>
+          <a:p>
+            <a:pPr indent="0" marL="0">
+              <a:buNone/>
+            </a:pPr>
+            <a:r>
+              <a:rPr lang="en-US" sz="1050" dirty="0">
+                <a:solidFill>
+                  <a:srgbClr val="96A9C2"/>
+                </a:solidFill>
+              </a:rPr>
+              <a:t>失败：保留上一版，不黑屏</a:t>
+            </a:r>
+            <a:endParaRPr lang="en-US" sz="1050" dirty="0"/>
+          </a:p>
+        </p:txBody>
+      </p:sp>
+      <p:sp>
+        <p:nvSpPr>
+          <p:cNvPr id="26" name="Shape 24"/>
+          <p:cNvSpPr/>
+          <p:nvPr/>
+        </p:nvSpPr>
+        <p:spPr>
+          <a:xfrm>
+            <a:off x="8138160" y="2743200"/>
+            <a:ext cx="3429000" cy="2057400"/>
           </a:xfrm>
           <a:prstGeom prst="roundRect">
             <a:avLst>
-              <a:gd name="adj" fmla="val 2857"/>
+              <a:gd name="adj" fmla="val 2667"/>
             </a:avLst>
           </a:prstGeom>
           <a:solidFill>
@@ -7347,39 +7941,39 @@
       </p:sp>
       <p:sp>
         <p:nvSpPr>
-          <p:cNvPr id="13" name="Shape 11"/>
-          <p:cNvSpPr/>
-          <p:nvPr/>
-        </p:nvSpPr>
-        <p:spPr>
-          <a:xfrm>
-            <a:off x="8083296" y="1234440"/>
-            <a:ext cx="54864" cy="1920240"/>
-          </a:xfrm>
-          <a:prstGeom prst="rect">
-            <a:avLst/>
-          </a:prstGeom>
-          <a:solidFill>
-            <a:srgbClr val="21D4FD"/>
+          <p:cNvPr id="27" name="Shape 25"/>
+          <p:cNvSpPr/>
+          <p:nvPr/>
+        </p:nvSpPr>
+        <p:spPr>
+          <a:xfrm>
+            <a:off x="8138160" y="2743200"/>
+            <a:ext cx="54864" cy="2057400"/>
+          </a:xfrm>
+          <a:prstGeom prst="rect">
+            <a:avLst/>
+          </a:prstGeom>
+          <a:solidFill>
+            <a:srgbClr val="FFB45A"/>
           </a:solidFill>
           <a:ln w="12700">
             <a:solidFill>
-              <a:srgbClr val="21D4FD"/>
-            </a:solidFill>
-            <a:prstDash val="solid"/>
-          </a:ln>
-        </p:spPr>
-      </p:sp>
-      <p:sp>
-        <p:nvSpPr>
-          <p:cNvPr id="14" name="Text 12"/>
-          <p:cNvSpPr/>
-          <p:nvPr/>
-        </p:nvSpPr>
-        <p:spPr>
-          <a:xfrm>
-            <a:off x="8284464" y="1399032"/>
-            <a:ext cx="3191256" cy="274320"/>
+              <a:srgbClr val="FFB45A"/>
+            </a:solidFill>
+            <a:prstDash val="solid"/>
+          </a:ln>
+        </p:spPr>
+      </p:sp>
+      <p:sp>
+        <p:nvSpPr>
+          <p:cNvPr id="28" name="Text 26"/>
+          <p:cNvSpPr/>
+          <p:nvPr/>
+        </p:nvSpPr>
+        <p:spPr>
+          <a:xfrm>
+            <a:off x="8339328" y="2907792"/>
+            <a:ext cx="3099816" cy="274320"/>
           </a:xfrm>
           <a:prstGeom prst="rect">
             <a:avLst/>
@@ -7400,7 +7994,7 @@
                   <a:srgbClr val="E9F2FF"/>
                 </a:solidFill>
               </a:rPr>
-              <a:t>引用与依赖注入</a:t>
+              <a:t>真实 Variant</a:t>
             </a:r>
             <a:endParaRPr lang="en-US" sz="1400" dirty="0"/>
           </a:p>
@@ -7408,14 +8002,14 @@
       </p:sp>
       <p:sp>
         <p:nvSpPr>
-          <p:cNvPr id="15" name="Text 13"/>
-          <p:cNvSpPr/>
-          <p:nvPr/>
-        </p:nvSpPr>
-        <p:spPr>
-          <a:xfrm>
-            <a:off x="8284464" y="1801368"/>
-            <a:ext cx="3154680" cy="1225296"/>
+          <p:cNvPr id="29" name="Text 27"/>
+          <p:cNvSpPr/>
+          <p:nvPr/>
+        </p:nvSpPr>
+        <p:spPr>
+          <a:xfrm>
+            <a:off x="8339328" y="3310128"/>
+            <a:ext cx="3063240" cy="1362456"/>
           </a:xfrm>
           <a:prstGeom prst="rect">
             <a:avLst/>
@@ -7438,7 +8032,7 @@
                   <a:srgbClr val="96A9C2"/>
                 </a:solidFill>
               </a:rPr>
-              <a:t>RenderContext&amp; / AssetManager&amp;</a:t>
+              <a:t>ShaderHandle.defines 参与缓存 Key</a:t>
             </a:r>
             <a:endParaRPr lang="en-US" sz="1050" dirty="0"/>
           </a:p>
@@ -7452,7 +8046,7 @@
                   <a:srgbClr val="96A9C2"/>
                 </a:solidFill>
               </a:rPr>
-              <a:t>依赖必须存在但不归本对象所有</a:t>
+              <a:t>MATERIAL_NORMAL_MAP 独立 program</a:t>
             </a:r>
             <a:endParaRPr lang="en-US" sz="1050" dirty="0"/>
           </a:p>
@@ -7466,74 +8060,67 @@
                   <a:srgbClr val="96A9C2"/>
                 </a:solidFill>
               </a:rPr>
-              <a:t>减少 singleton，提升可测试性</a:t>
-            </a:r>
-            <a:endParaRPr lang="en-US" sz="1050" dirty="0"/>
-          </a:p>
-        </p:txBody>
-      </p:sp>
-      <p:sp>
-        <p:nvSpPr>
-          <p:cNvPr id="16" name="Shape 14"/>
-          <p:cNvSpPr/>
-          <p:nvPr/>
-        </p:nvSpPr>
-        <p:spPr>
-          <a:xfrm>
-            <a:off x="566928" y="3474720"/>
-            <a:ext cx="3520440" cy="1920240"/>
+              <a:t>相同宏集合只编译一次</a:t>
+            </a:r>
+            <a:endParaRPr lang="en-US" sz="1050" dirty="0"/>
+          </a:p>
+          <a:p>
+            <a:pPr indent="0" marL="0">
+              <a:buNone/>
+            </a:pPr>
+            <a:r>
+              <a:rPr lang="en-US" sz="1050" dirty="0">
+                <a:solidFill>
+                  <a:srgbClr val="96A9C2"/>
+                </a:solidFill>
+              </a:rPr>
+              <a:t>ImGui 可手动 Reload</a:t>
+            </a:r>
+            <a:endParaRPr lang="en-US" sz="1050" dirty="0"/>
+          </a:p>
+        </p:txBody>
+      </p:sp>
+      <p:sp>
+        <p:nvSpPr>
+          <p:cNvPr id="30" name="Shape 28"/>
+          <p:cNvSpPr/>
+          <p:nvPr/>
+        </p:nvSpPr>
+        <p:spPr>
+          <a:xfrm>
+            <a:off x="1097280" y="5285232"/>
+            <a:ext cx="1737360" cy="310896"/>
           </a:xfrm>
           <a:prstGeom prst="roundRect">
             <a:avLst>
-              <a:gd name="adj" fmla="val 2857"/>
+              <a:gd name="adj" fmla="val 23529"/>
             </a:avLst>
           </a:prstGeom>
           <a:solidFill>
-            <a:srgbClr val="0F1C2E"/>
+            <a:srgbClr val="5EE2A0">
+              <a:alpha val="18000"/>
+            </a:srgbClr>
           </a:solidFill>
           <a:ln w="12700">
             <a:solidFill>
-              <a:srgbClr val="29405C"/>
-            </a:solidFill>
-            <a:prstDash val="solid"/>
-          </a:ln>
-        </p:spPr>
-      </p:sp>
-      <p:sp>
-        <p:nvSpPr>
-          <p:cNvPr id="17" name="Shape 15"/>
-          <p:cNvSpPr/>
-          <p:nvPr/>
-        </p:nvSpPr>
-        <p:spPr>
-          <a:xfrm>
-            <a:off x="566928" y="3474720"/>
-            <a:ext cx="54864" cy="1920240"/>
-          </a:xfrm>
-          <a:prstGeom prst="rect">
-            <a:avLst/>
-          </a:prstGeom>
-          <a:solidFill>
-            <a:srgbClr val="B78CFF"/>
-          </a:solidFill>
-          <a:ln w="12700">
-            <a:solidFill>
-              <a:srgbClr val="B78CFF"/>
-            </a:solidFill>
-            <a:prstDash val="solid"/>
-          </a:ln>
-        </p:spPr>
-      </p:sp>
-      <p:sp>
-        <p:nvSpPr>
-          <p:cNvPr id="18" name="Text 16"/>
-          <p:cNvSpPr/>
-          <p:nvPr/>
-        </p:nvSpPr>
-        <p:spPr>
-          <a:xfrm>
-            <a:off x="768096" y="3639312"/>
-            <a:ext cx="3191256" cy="274320"/>
+              <a:srgbClr val="5EE2A0">
+                <a:alpha val="65000"/>
+              </a:srgbClr>
+            </a:solidFill>
+            <a:prstDash val="solid"/>
+          </a:ln>
+        </p:spPr>
+      </p:sp>
+      <p:sp>
+        <p:nvSpPr>
+          <p:cNvPr id="31" name="Text 29"/>
+          <p:cNvSpPr/>
+          <p:nvPr/>
+        </p:nvSpPr>
+        <p:spPr>
+          <a:xfrm>
+            <a:off x="1170432" y="5340096"/>
+            <a:ext cx="1591056" cy="155448"/>
           </a:xfrm>
           <a:prstGeom prst="rect">
             <a:avLst/>
@@ -7545,149 +8132,62 @@
           <a:bodyPr wrap="square" lIns="0" tIns="0" rIns="0" bIns="0" rtlCol="0" anchor="ctr"/>
           <a:lstStyle/>
           <a:p>
-            <a:pPr indent="0" marL="0">
-              <a:buNone/>
-            </a:pPr>
-            <a:r>
-              <a:rPr lang="en-US" sz="1400" b="1" dirty="0">
-                <a:solidFill>
-                  <a:srgbClr val="E9F2FF"/>
-                </a:solidFill>
-              </a:rPr>
-              <a:t>模板 + Lambda</a:t>
-            </a:r>
-            <a:endParaRPr lang="en-US" sz="1400" dirty="0"/>
-          </a:p>
-        </p:txBody>
-      </p:sp>
-      <p:sp>
-        <p:nvSpPr>
-          <p:cNvPr id="19" name="Text 17"/>
-          <p:cNvSpPr/>
-          <p:nvPr/>
-        </p:nvSpPr>
-        <p:spPr>
-          <a:xfrm>
-            <a:off x="768096" y="4041648"/>
-            <a:ext cx="3154680" cy="1225296"/>
-          </a:xfrm>
-          <a:prstGeom prst="rect">
-            <a:avLst/>
-          </a:prstGeom>
-          <a:noFill/>
-          <a:ln/>
-        </p:spPr>
-        <p:txBody>
-          <a:bodyPr wrap="square" lIns="254" tIns="254" rIns="254" bIns="254" rtlCol="0" anchor="t">
-            <a:normAutofit/>
-          </a:bodyPr>
-          <a:lstStyle/>
-          <a:p>
-            <a:pPr indent="0" marL="0">
-              <a:buNone/>
-            </a:pPr>
-            <a:r>
-              <a:rPr lang="en-US" sz="1050" dirty="0">
-                <a:solidFill>
-                  <a:srgbClr val="96A9C2"/>
-                </a:solidFill>
-              </a:rPr>
-              <a:t>RenderGraph::addPass&lt;T, Fn&gt;</a:t>
-            </a:r>
-            <a:endParaRPr lang="en-US" sz="1050" dirty="0"/>
-          </a:p>
-          <a:p>
-            <a:pPr indent="0" marL="0">
-              <a:buNone/>
-            </a:pPr>
-            <a:r>
-              <a:rPr lang="en-US" sz="1050" dirty="0">
-                <a:solidFill>
-                  <a:srgbClr val="96A9C2"/>
-                </a:solidFill>
-              </a:rPr>
-              <a:t>保存不同参数和执行函数</a:t>
-            </a:r>
-            <a:endParaRPr lang="en-US" sz="1050" dirty="0"/>
-          </a:p>
-          <a:p>
-            <a:pPr indent="0" marL="0">
-              <a:buNone/>
-            </a:pPr>
-            <a:r>
-              <a:rPr lang="en-US" sz="1050" dirty="0">
-                <a:solidFill>
-                  <a:srgbClr val="96A9C2"/>
-                </a:solidFill>
-              </a:rPr>
-              <a:t>统一通过虚函数 execute 调用</a:t>
-            </a:r>
-            <a:endParaRPr lang="en-US" sz="1050" dirty="0"/>
-          </a:p>
-        </p:txBody>
-      </p:sp>
-      <p:sp>
-        <p:nvSpPr>
-          <p:cNvPr id="20" name="Shape 18"/>
-          <p:cNvSpPr/>
-          <p:nvPr/>
-        </p:nvSpPr>
-        <p:spPr>
-          <a:xfrm>
-            <a:off x="4325112" y="3474720"/>
-            <a:ext cx="3520440" cy="1920240"/>
+            <a:pPr algn="ctr" indent="0" marL="0">
+              <a:buNone/>
+            </a:pPr>
+            <a:r>
+              <a:rPr lang="en-US" sz="900" b="1" dirty="0">
+                <a:solidFill>
+                  <a:srgbClr val="5EE2A0"/>
+                </a:solidFill>
+              </a:rPr>
+              <a:t>Reload Success</a:t>
+            </a:r>
+            <a:endParaRPr lang="en-US" sz="900" dirty="0"/>
+          </a:p>
+        </p:txBody>
+      </p:sp>
+      <p:sp>
+        <p:nvSpPr>
+          <p:cNvPr id="32" name="Shape 30"/>
+          <p:cNvSpPr/>
+          <p:nvPr/>
+        </p:nvSpPr>
+        <p:spPr>
+          <a:xfrm>
+            <a:off x="3246120" y="5285232"/>
+            <a:ext cx="2011680" cy="310896"/>
           </a:xfrm>
           <a:prstGeom prst="roundRect">
             <a:avLst>
-              <a:gd name="adj" fmla="val 2857"/>
+              <a:gd name="adj" fmla="val 23529"/>
             </a:avLst>
           </a:prstGeom>
           <a:solidFill>
-            <a:srgbClr val="0F1C2E"/>
+            <a:srgbClr val="FF6B7A">
+              <a:alpha val="18000"/>
+            </a:srgbClr>
           </a:solidFill>
           <a:ln w="12700">
             <a:solidFill>
-              <a:srgbClr val="29405C"/>
-            </a:solidFill>
-            <a:prstDash val="solid"/>
-          </a:ln>
-        </p:spPr>
-      </p:sp>
-      <p:sp>
-        <p:nvSpPr>
-          <p:cNvPr id="21" name="Shape 19"/>
-          <p:cNvSpPr/>
-          <p:nvPr/>
-        </p:nvSpPr>
-        <p:spPr>
-          <a:xfrm>
-            <a:off x="4325112" y="3474720"/>
-            <a:ext cx="54864" cy="1920240"/>
-          </a:xfrm>
-          <a:prstGeom prst="rect">
-            <a:avLst/>
-          </a:prstGeom>
-          <a:solidFill>
-            <a:srgbClr val="FFB45A"/>
-          </a:solidFill>
-          <a:ln w="12700">
-            <a:solidFill>
-              <a:srgbClr val="FFB45A"/>
-            </a:solidFill>
-            <a:prstDash val="solid"/>
-          </a:ln>
-        </p:spPr>
-      </p:sp>
-      <p:sp>
-        <p:nvSpPr>
-          <p:cNvPr id="22" name="Text 20"/>
-          <p:cNvSpPr/>
-          <p:nvPr/>
-        </p:nvSpPr>
-        <p:spPr>
-          <a:xfrm>
-            <a:off x="4526280" y="3639312"/>
-            <a:ext cx="3191256" cy="274320"/>
+              <a:srgbClr val="FF6B7A">
+                <a:alpha val="65000"/>
+              </a:srgbClr>
+            </a:solidFill>
+            <a:prstDash val="solid"/>
+          </a:ln>
+        </p:spPr>
+      </p:sp>
+      <p:sp>
+        <p:nvSpPr>
+          <p:cNvPr id="33" name="Text 31"/>
+          <p:cNvSpPr/>
+          <p:nvPr/>
+        </p:nvSpPr>
+        <p:spPr>
+          <a:xfrm>
+            <a:off x="3319272" y="5340096"/>
+            <a:ext cx="1865376" cy="155448"/>
           </a:xfrm>
           <a:prstGeom prst="rect">
             <a:avLst/>
@@ -7699,149 +8199,129 @@
           <a:bodyPr wrap="square" lIns="0" tIns="0" rIns="0" bIns="0" rtlCol="0" anchor="ctr"/>
           <a:lstStyle/>
           <a:p>
-            <a:pPr indent="0" marL="0">
-              <a:buNone/>
-            </a:pPr>
-            <a:r>
-              <a:rPr lang="en-US" sz="1400" b="1" dirty="0">
-                <a:solidFill>
-                  <a:srgbClr val="E9F2FF"/>
-                </a:solidFill>
-              </a:rPr>
-              <a:t>多态与抽象接口</a:t>
-            </a:r>
-            <a:endParaRPr lang="en-US" sz="1400" dirty="0"/>
-          </a:p>
-        </p:txBody>
-      </p:sp>
-      <p:sp>
-        <p:nvSpPr>
-          <p:cNvPr id="23" name="Text 21"/>
-          <p:cNvSpPr/>
-          <p:nvPr/>
-        </p:nvSpPr>
-        <p:spPr>
-          <a:xfrm>
-            <a:off x="4526280" y="4041648"/>
-            <a:ext cx="3154680" cy="1225296"/>
-          </a:xfrm>
-          <a:prstGeom prst="rect">
-            <a:avLst/>
-          </a:prstGeom>
-          <a:noFill/>
-          <a:ln/>
-        </p:spPr>
-        <p:txBody>
-          <a:bodyPr wrap="square" lIns="254" tIns="254" rIns="254" bIns="254" rtlCol="0" anchor="t">
-            <a:normAutofit/>
-          </a:bodyPr>
-          <a:lstStyle/>
-          <a:p>
-            <a:pPr indent="0" marL="0">
-              <a:buNone/>
-            </a:pPr>
-            <a:r>
-              <a:rPr lang="en-US" sz="1050" dirty="0">
-                <a:solidFill>
-                  <a:srgbClr val="96A9C2"/>
-                </a:solidFill>
-              </a:rPr>
-              <a:t>RenderContext → OpenGLRenderContext</a:t>
-            </a:r>
-            <a:endParaRPr lang="en-US" sz="1050" dirty="0"/>
-          </a:p>
-          <a:p>
-            <a:pPr indent="0" marL="0">
-              <a:buNone/>
-            </a:pPr>
-            <a:r>
-              <a:rPr lang="en-US" sz="1050" dirty="0">
-                <a:solidFill>
-                  <a:srgbClr val="96A9C2"/>
-                </a:solidFill>
-              </a:rPr>
-              <a:t>Light → Direction / Point</a:t>
-            </a:r>
-            <a:endParaRPr lang="en-US" sz="1050" dirty="0"/>
-          </a:p>
-          <a:p>
-            <a:pPr indent="0" marL="0">
-              <a:buNone/>
-            </a:pPr>
-            <a:r>
-              <a:rPr lang="en-US" sz="1050" dirty="0">
-                <a:solidFill>
-                  <a:srgbClr val="96A9C2"/>
-                </a:solidFill>
-              </a:rPr>
-              <a:t>为替换后端和扩展类型保留边界</a:t>
-            </a:r>
-            <a:endParaRPr lang="en-US" sz="1050" dirty="0"/>
-          </a:p>
-        </p:txBody>
-      </p:sp>
-      <p:sp>
-        <p:nvSpPr>
-          <p:cNvPr id="24" name="Shape 22"/>
-          <p:cNvSpPr/>
-          <p:nvPr/>
-        </p:nvSpPr>
-        <p:spPr>
-          <a:xfrm>
-            <a:off x="8083296" y="3474720"/>
-            <a:ext cx="3520440" cy="1920240"/>
+            <a:pPr algn="ctr" indent="0" marL="0">
+              <a:buNone/>
+            </a:pPr>
+            <a:r>
+              <a:rPr lang="en-US" sz="900" b="1" dirty="0">
+                <a:solidFill>
+                  <a:srgbClr val="FF6B7A"/>
+                </a:solidFill>
+              </a:rPr>
+              <a:t>Compile Error Logged</a:t>
+            </a:r>
+            <a:endParaRPr lang="en-US" sz="900" dirty="0"/>
+          </a:p>
+        </p:txBody>
+      </p:sp>
+      <p:sp>
+        <p:nvSpPr>
+          <p:cNvPr id="34" name="Shape 32"/>
+          <p:cNvSpPr/>
+          <p:nvPr/>
+        </p:nvSpPr>
+        <p:spPr>
+          <a:xfrm>
+            <a:off x="5669280" y="5285232"/>
+            <a:ext cx="2240280" cy="310896"/>
           </a:xfrm>
           <a:prstGeom prst="roundRect">
             <a:avLst>
-              <a:gd name="adj" fmla="val 2857"/>
+              <a:gd name="adj" fmla="val 23529"/>
             </a:avLst>
           </a:prstGeom>
           <a:solidFill>
-            <a:srgbClr val="0F1C2E"/>
+            <a:srgbClr val="4F8CFF">
+              <a:alpha val="18000"/>
+            </a:srgbClr>
           </a:solidFill>
           <a:ln w="12700">
             <a:solidFill>
-              <a:srgbClr val="29405C"/>
-            </a:solidFill>
-            <a:prstDash val="solid"/>
-          </a:ln>
-        </p:spPr>
-      </p:sp>
-      <p:sp>
-        <p:nvSpPr>
-          <p:cNvPr id="25" name="Shape 23"/>
-          <p:cNvSpPr/>
-          <p:nvPr/>
-        </p:nvSpPr>
-        <p:spPr>
-          <a:xfrm>
-            <a:off x="8083296" y="3474720"/>
-            <a:ext cx="54864" cy="1920240"/>
-          </a:xfrm>
-          <a:prstGeom prst="rect">
-            <a:avLst/>
-          </a:prstGeom>
-          <a:solidFill>
-            <a:srgbClr val="FF6B7A"/>
+              <a:srgbClr val="4F8CFF">
+                <a:alpha val="65000"/>
+              </a:srgbClr>
+            </a:solidFill>
+            <a:prstDash val="solid"/>
+          </a:ln>
+        </p:spPr>
+      </p:sp>
+      <p:sp>
+        <p:nvSpPr>
+          <p:cNvPr id="35" name="Text 33"/>
+          <p:cNvSpPr/>
+          <p:nvPr/>
+        </p:nvSpPr>
+        <p:spPr>
+          <a:xfrm>
+            <a:off x="5742432" y="5340096"/>
+            <a:ext cx="2093976" cy="155448"/>
+          </a:xfrm>
+          <a:prstGeom prst="rect">
+            <a:avLst/>
+          </a:prstGeom>
+          <a:noFill/>
+          <a:ln/>
+        </p:spPr>
+        <p:txBody>
+          <a:bodyPr wrap="square" lIns="0" tIns="0" rIns="0" bIns="0" rtlCol="0" anchor="ctr"/>
+          <a:lstStyle/>
+          <a:p>
+            <a:pPr algn="ctr" indent="0" marL="0">
+              <a:buNone/>
+            </a:pPr>
+            <a:r>
+              <a:rPr lang="en-US" sz="900" b="1" dirty="0">
+                <a:solidFill>
+                  <a:srgbClr val="4F8CFF"/>
+                </a:solidFill>
+              </a:rPr>
+              <a:t>Previous Program Active</a:t>
+            </a:r>
+            <a:endParaRPr lang="en-US" sz="900" dirty="0"/>
+          </a:p>
+        </p:txBody>
+      </p:sp>
+      <p:sp>
+        <p:nvSpPr>
+          <p:cNvPr id="36" name="Shape 34"/>
+          <p:cNvSpPr/>
+          <p:nvPr/>
+        </p:nvSpPr>
+        <p:spPr>
+          <a:xfrm>
+            <a:off x="8321040" y="5285232"/>
+            <a:ext cx="1965960" cy="310896"/>
+          </a:xfrm>
+          <a:prstGeom prst="roundRect">
+            <a:avLst>
+              <a:gd name="adj" fmla="val 23529"/>
+            </a:avLst>
+          </a:prstGeom>
+          <a:solidFill>
+            <a:srgbClr val="B78CFF">
+              <a:alpha val="18000"/>
+            </a:srgbClr>
           </a:solidFill>
           <a:ln w="12700">
             <a:solidFill>
-              <a:srgbClr val="FF6B7A"/>
-            </a:solidFill>
-            <a:prstDash val="solid"/>
-          </a:ln>
-        </p:spPr>
-      </p:sp>
-      <p:sp>
-        <p:nvSpPr>
-          <p:cNvPr id="26" name="Text 24"/>
-          <p:cNvSpPr/>
-          <p:nvPr/>
-        </p:nvSpPr>
-        <p:spPr>
-          <a:xfrm>
-            <a:off x="8284464" y="3639312"/>
-            <a:ext cx="3191256" cy="274320"/>
+              <a:srgbClr val="B78CFF">
+                <a:alpha val="65000"/>
+              </a:srgbClr>
+            </a:solidFill>
+            <a:prstDash val="solid"/>
+          </a:ln>
+        </p:spPr>
+      </p:sp>
+      <p:sp>
+        <p:nvSpPr>
+          <p:cNvPr id="37" name="Text 35"/>
+          <p:cNvSpPr/>
+          <p:nvPr/>
+        </p:nvSpPr>
+        <p:spPr>
+          <a:xfrm>
+            <a:off x="8394192" y="5340096"/>
+            <a:ext cx="1819656" cy="155448"/>
           </a:xfrm>
           <a:prstGeom prst="rect">
             <a:avLst/>
@@ -7853,98 +8333,18 @@
           <a:bodyPr wrap="square" lIns="0" tIns="0" rIns="0" bIns="0" rtlCol="0" anchor="ctr"/>
           <a:lstStyle/>
           <a:p>
-            <a:pPr indent="0" marL="0">
-              <a:buNone/>
-            </a:pPr>
-            <a:r>
-              <a:rPr lang="en-US" sz="1400" b="1" dirty="0">
-                <a:solidFill>
-                  <a:srgbClr val="E9F2FF"/>
-                </a:solidFill>
-              </a:rPr>
-              <a:t>STL 与数据结构</a:t>
-            </a:r>
-            <a:endParaRPr lang="en-US" sz="1400" dirty="0"/>
-          </a:p>
-        </p:txBody>
-      </p:sp>
-      <p:sp>
-        <p:nvSpPr>
-          <p:cNvPr id="27" name="Text 25"/>
-          <p:cNvSpPr/>
-          <p:nvPr/>
-        </p:nvSpPr>
-        <p:spPr>
-          <a:xfrm>
-            <a:off x="8284464" y="4041648"/>
-            <a:ext cx="3154680" cy="1225296"/>
-          </a:xfrm>
-          <a:prstGeom prst="rect">
-            <a:avLst/>
-          </a:prstGeom>
-          <a:noFill/>
-          <a:ln/>
-        </p:spPr>
-        <p:txBody>
-          <a:bodyPr wrap="square" lIns="254" tIns="254" rIns="254" bIns="254" rtlCol="0" anchor="t">
-            <a:normAutofit/>
-          </a:bodyPr>
-          <a:lstStyle/>
-          <a:p>
-            <a:pPr indent="0" marL="0">
-              <a:buNone/>
-            </a:pPr>
-            <a:r>
-              <a:rPr lang="en-US" sz="1050" dirty="0">
-                <a:solidFill>
-                  <a:srgbClr val="96A9C2"/>
-                </a:solidFill>
-              </a:rPr>
-              <a:t>vector：对象/顶点/pass</a:t>
-            </a:r>
-            <a:endParaRPr lang="en-US" sz="1050" dirty="0"/>
-          </a:p>
-          <a:p>
-            <a:pPr indent="0" marL="0">
-              <a:buNone/>
-            </a:pPr>
-            <a:r>
-              <a:rPr lang="en-US" sz="1050" dirty="0">
-                <a:solidFill>
-                  <a:srgbClr val="96A9C2"/>
-                </a:solidFill>
-              </a:rPr>
-              <a:t>unordered_map：资源缓存</a:t>
-            </a:r>
-            <a:endParaRPr lang="en-US" sz="1050" dirty="0"/>
-          </a:p>
-          <a:p>
-            <a:pPr indent="0" marL="0">
-              <a:buNone/>
-            </a:pPr>
-            <a:r>
-              <a:rPr lang="en-US" sz="1050" dirty="0">
-                <a:solidFill>
-                  <a:srgbClr val="96A9C2"/>
-                </a:solidFill>
-              </a:rPr>
-              <a:t>array：固定 Bloom mip 链</a:t>
-            </a:r>
-            <a:endParaRPr lang="en-US" sz="1050" dirty="0"/>
-          </a:p>
-          <a:p>
-            <a:pPr indent="0" marL="0">
-              <a:buNone/>
-            </a:pPr>
-            <a:r>
-              <a:rPr lang="en-US" sz="1050" dirty="0">
-                <a:solidFill>
-                  <a:srgbClr val="96A9C2"/>
-                </a:solidFill>
-              </a:rPr>
-              <a:t>move：转移资源所有权</a:t>
-            </a:r>
-            <a:endParaRPr lang="en-US" sz="1050" dirty="0"/>
+            <a:pPr algn="ctr" indent="0" marL="0">
+              <a:buNone/>
+            </a:pPr>
+            <a:r>
+              <a:rPr lang="en-US" sz="900" b="1" dirty="0">
+                <a:solidFill>
+                  <a:srgbClr val="B78CFF"/>
+                </a:solidFill>
+              </a:rPr>
+              <a:t>Fix → Auto Recover</a:t>
+            </a:r>
+            <a:endParaRPr lang="en-US" sz="900" dirty="0"/>
           </a:p>
         </p:txBody>
       </p:sp>
@@ -8051,7 +8451,7 @@
                   <a:srgbClr val="E9F2FF"/>
                 </a:solidFill>
               </a:rPr>
-              <a:t>13  可诊断性与验证体系</a:t>
+              <a:t>13  项目中的 C++ 核心知识点</a:t>
             </a:r>
             <a:endParaRPr lang="en-US" sz="2500" dirty="0"/>
           </a:p>
@@ -8087,7 +8487,7 @@
                   <a:srgbClr val="96A9C2"/>
                 </a:solidFill>
               </a:rPr>
-              <a:t>目标：程序失败时直接看到原因，而不是只得到黑屏</a:t>
+              <a:t>语言特性不是孤立技巧，而是用来表达所有权、依赖和数据边界</a:t>
             </a:r>
             <a:endParaRPr lang="en-US" sz="1050" dirty="0"/>
           </a:p>
@@ -8101,12 +8501,12 @@
         </p:nvSpPr>
         <p:spPr>
           <a:xfrm>
-            <a:off x="594360" y="1325880"/>
-            <a:ext cx="3383280" cy="1965960"/>
+            <a:off x="566928" y="1234440"/>
+            <a:ext cx="3520440" cy="1920240"/>
           </a:xfrm>
           <a:prstGeom prst="roundRect">
             <a:avLst>
-              <a:gd name="adj" fmla="val 2791"/>
+              <a:gd name="adj" fmla="val 2857"/>
             </a:avLst>
           </a:prstGeom>
           <a:solidFill>
@@ -8128,18 +8528,18 @@
         </p:nvSpPr>
         <p:spPr>
           <a:xfrm>
-            <a:off x="594360" y="1325880"/>
-            <a:ext cx="54864" cy="1965960"/>
-          </a:xfrm>
-          <a:prstGeom prst="rect">
-            <a:avLst/>
-          </a:prstGeom>
-          <a:solidFill>
-            <a:srgbClr val="21D4FD"/>
+            <a:off x="566928" y="1234440"/>
+            <a:ext cx="54864" cy="1920240"/>
+          </a:xfrm>
+          <a:prstGeom prst="rect">
+            <a:avLst/>
+          </a:prstGeom>
+          <a:solidFill>
+            <a:srgbClr val="5EE2A0"/>
           </a:solidFill>
           <a:ln w="12700">
             <a:solidFill>
-              <a:srgbClr val="21D4FD"/>
+              <a:srgbClr val="5EE2A0"/>
             </a:solidFill>
             <a:prstDash val="solid"/>
           </a:ln>
@@ -8153,8 +8553,8 @@
         </p:nvSpPr>
         <p:spPr>
           <a:xfrm>
-            <a:off x="795528" y="1490472"/>
-            <a:ext cx="3054096" cy="274320"/>
+            <a:off x="768096" y="1399032"/>
+            <a:ext cx="3191256" cy="274320"/>
           </a:xfrm>
           <a:prstGeom prst="rect">
             <a:avLst/>
@@ -8175,7 +8575,7 @@
                   <a:srgbClr val="E9F2FF"/>
                 </a:solidFill>
               </a:rPr>
-              <a:t>日志系统</a:t>
+              <a:t>RAII / unique_ptr</a:t>
             </a:r>
             <a:endParaRPr lang="en-US" sz="1400" dirty="0"/>
           </a:p>
@@ -8189,8 +8589,8 @@
         </p:nvSpPr>
         <p:spPr>
           <a:xfrm>
-            <a:off x="795528" y="1892808"/>
-            <a:ext cx="3017520" cy="1271016"/>
+            <a:off x="768096" y="1801368"/>
+            <a:ext cx="3154680" cy="1225296"/>
           </a:xfrm>
           <a:prstGeom prst="rect">
             <a:avLst/>
@@ -8213,7 +8613,7 @@
                   <a:srgbClr val="96A9C2"/>
                 </a:solidFill>
               </a:rPr>
-              <a:t>控制台 + logs/engine.log</a:t>
+              <a:t>RenderTarget 独占 attachment</a:t>
             </a:r>
             <a:endParaRPr lang="en-US" sz="1050" dirty="0"/>
           </a:p>
@@ -8227,7 +8627,7 @@
                   <a:srgbClr val="96A9C2"/>
                 </a:solidFill>
               </a:rPr>
-              <a:t>INFO / WARN / ERROR</a:t>
+              <a:t>Renderer 独占子系统</a:t>
             </a:r>
             <a:endParaRPr lang="en-US" sz="1050" dirty="0"/>
           </a:p>
@@ -8241,7 +8641,7 @@
                   <a:srgbClr val="96A9C2"/>
                 </a:solidFill>
               </a:rPr>
-              <a:t>资源路径、缓存命中、模型统计</a:t>
+              <a:t>析构自动释放 GPU wrapper</a:t>
             </a:r>
             <a:endParaRPr lang="en-US" sz="1050" dirty="0"/>
           </a:p>
@@ -8255,7 +8655,7 @@
                   <a:srgbClr val="96A9C2"/>
                 </a:solidFill>
               </a:rPr>
-              <a:t>启动与关闭生命周期</a:t>
+              <a:t>禁止复制表达唯一所有权</a:t>
             </a:r>
             <a:endParaRPr lang="en-US" sz="1050" dirty="0"/>
           </a:p>
@@ -8269,12 +8669,12 @@
         </p:nvSpPr>
         <p:spPr>
           <a:xfrm>
-            <a:off x="4407408" y="1325880"/>
-            <a:ext cx="3383280" cy="1965960"/>
+            <a:off x="4325112" y="1234440"/>
+            <a:ext cx="3520440" cy="1920240"/>
           </a:xfrm>
           <a:prstGeom prst="roundRect">
             <a:avLst>
-              <a:gd name="adj" fmla="val 2791"/>
+              <a:gd name="adj" fmla="val 2857"/>
             </a:avLst>
           </a:prstGeom>
           <a:solidFill>
@@ -8296,18 +8696,18 @@
         </p:nvSpPr>
         <p:spPr>
           <a:xfrm>
-            <a:off x="4407408" y="1325880"/>
-            <a:ext cx="54864" cy="1965960"/>
-          </a:xfrm>
-          <a:prstGeom prst="rect">
-            <a:avLst/>
-          </a:prstGeom>
-          <a:solidFill>
-            <a:srgbClr val="FF6B7A"/>
+            <a:off x="4325112" y="1234440"/>
+            <a:ext cx="54864" cy="1920240"/>
+          </a:xfrm>
+          <a:prstGeom prst="rect">
+            <a:avLst/>
+          </a:prstGeom>
+          <a:solidFill>
+            <a:srgbClr val="4F8CFF"/>
           </a:solidFill>
           <a:ln w="12700">
             <a:solidFill>
-              <a:srgbClr val="FF6B7A"/>
+              <a:srgbClr val="4F8CFF"/>
             </a:solidFill>
             <a:prstDash val="solid"/>
           </a:ln>
@@ -8321,8 +8721,8 @@
         </p:nvSpPr>
         <p:spPr>
           <a:xfrm>
-            <a:off x="4608576" y="1490472"/>
-            <a:ext cx="3054096" cy="274320"/>
+            <a:off x="4526280" y="1399032"/>
+            <a:ext cx="3191256" cy="274320"/>
           </a:xfrm>
           <a:prstGeom prst="rect">
             <a:avLst/>
@@ -8343,7 +8743,7 @@
                   <a:srgbClr val="E9F2FF"/>
                 </a:solidFill>
               </a:rPr>
-              <a:t>GPU 错误定位</a:t>
+              <a:t>shared_ptr / Cache</a:t>
             </a:r>
             <a:endParaRPr lang="en-US" sz="1400" dirty="0"/>
           </a:p>
@@ -8357,8 +8757,8 @@
         </p:nvSpPr>
         <p:spPr>
           <a:xfrm>
-            <a:off x="4608576" y="1892808"/>
-            <a:ext cx="3017520" cy="1271016"/>
+            <a:off x="4526280" y="1801368"/>
+            <a:ext cx="3154680" cy="1225296"/>
           </a:xfrm>
           <a:prstGeom prst="rect">
             <a:avLst/>
@@ -8381,7 +8781,7 @@
                   <a:srgbClr val="96A9C2"/>
                 </a:solidFill>
               </a:rPr>
-              <a:t>Shader 编译/链接 info log</a:t>
+              <a:t>ModelAsset、MaterialAsset、Texture2D 跨系统共享</a:t>
             </a:r>
             <a:endParaRPr lang="en-US" sz="1050" dirty="0"/>
           </a:p>
@@ -8395,7 +8795,7 @@
                   <a:srgbClr val="96A9C2"/>
                 </a:solidFill>
               </a:rPr>
-              <a:t>源代码行号预览</a:t>
+              <a:t>AssetManager 保持缓存生命周期</a:t>
             </a:r>
             <a:endParaRPr lang="en-US" sz="1050" dirty="0"/>
           </a:p>
@@ -8409,21 +8809,7 @@
                   <a:srgbClr val="96A9C2"/>
                 </a:solidFill>
               </a:rPr>
-              <a:t>Framebuffer completeness</a:t>
-            </a:r>
-            <a:endParaRPr lang="en-US" sz="1050" dirty="0"/>
-          </a:p>
-          <a:p>
-            <a:pPr indent="0" marL="0">
-              <a:buNone/>
-            </a:pPr>
-            <a:r>
-              <a:rPr lang="en-US" sz="1050" dirty="0">
-                <a:solidFill>
-                  <a:srgbClr val="96A9C2"/>
-                </a:solidFill>
-              </a:rPr>
-              <a:t>OpenGL Debug Callback</a:t>
+              <a:t>实例只保存共享引用</a:t>
             </a:r>
             <a:endParaRPr lang="en-US" sz="1050" dirty="0"/>
           </a:p>
@@ -8437,12 +8823,12 @@
         </p:nvSpPr>
         <p:spPr>
           <a:xfrm>
-            <a:off x="8211312" y="1325880"/>
-            <a:ext cx="3383280" cy="1965960"/>
+            <a:off x="8083296" y="1234440"/>
+            <a:ext cx="3520440" cy="1920240"/>
           </a:xfrm>
           <a:prstGeom prst="roundRect">
             <a:avLst>
-              <a:gd name="adj" fmla="val 2791"/>
+              <a:gd name="adj" fmla="val 2857"/>
             </a:avLst>
           </a:prstGeom>
           <a:solidFill>
@@ -8464,18 +8850,18 @@
         </p:nvSpPr>
         <p:spPr>
           <a:xfrm>
-            <a:off x="8211312" y="1325880"/>
-            <a:ext cx="54864" cy="1965960"/>
-          </a:xfrm>
-          <a:prstGeom prst="rect">
-            <a:avLst/>
-          </a:prstGeom>
-          <a:solidFill>
-            <a:srgbClr val="5EE2A0"/>
+            <a:off x="8083296" y="1234440"/>
+            <a:ext cx="54864" cy="1920240"/>
+          </a:xfrm>
+          <a:prstGeom prst="rect">
+            <a:avLst/>
+          </a:prstGeom>
+          <a:solidFill>
+            <a:srgbClr val="21D4FD"/>
           </a:solidFill>
           <a:ln w="12700">
             <a:solidFill>
-              <a:srgbClr val="5EE2A0"/>
+              <a:srgbClr val="21D4FD"/>
             </a:solidFill>
             <a:prstDash val="solid"/>
           </a:ln>
@@ -8489,8 +8875,8 @@
         </p:nvSpPr>
         <p:spPr>
           <a:xfrm>
-            <a:off x="8412480" y="1490472"/>
-            <a:ext cx="3054096" cy="274320"/>
+            <a:off x="8284464" y="1399032"/>
+            <a:ext cx="3191256" cy="274320"/>
           </a:xfrm>
           <a:prstGeom prst="rect">
             <a:avLst/>
@@ -8511,7 +8897,7 @@
                   <a:srgbClr val="E9F2FF"/>
                 </a:solidFill>
               </a:rPr>
-              <a:t>构建部署</a:t>
+              <a:t>引用与依赖注入</a:t>
             </a:r>
             <a:endParaRPr lang="en-US" sz="1400" dirty="0"/>
           </a:p>
@@ -8525,8 +8911,8 @@
         </p:nvSpPr>
         <p:spPr>
           <a:xfrm>
-            <a:off x="8412480" y="1892808"/>
-            <a:ext cx="3017520" cy="1271016"/>
+            <a:off x="8284464" y="1801368"/>
+            <a:ext cx="3154680" cy="1225296"/>
           </a:xfrm>
           <a:prstGeom prst="rect">
             <a:avLst/>
@@ -8549,7 +8935,7 @@
                   <a:srgbClr val="96A9C2"/>
                 </a:solidFill>
               </a:rPr>
-              <a:t>Debug / Release 双配置</a:t>
+              <a:t>RenderContext&amp; / AssetManager&amp;</a:t>
             </a:r>
             <a:endParaRPr lang="en-US" sz="1050" dirty="0"/>
           </a:p>
@@ -8563,7 +8949,7 @@
                   <a:srgbClr val="96A9C2"/>
                 </a:solidFill>
               </a:rPr>
-              <a:t>Assimp DLL 自动复制</a:t>
+              <a:t>依赖必须存在但不归本对象所有</a:t>
             </a:r>
             <a:endParaRPr lang="en-US" sz="1050" dirty="0"/>
           </a:p>
@@ -8577,21 +8963,7 @@
                   <a:srgbClr val="96A9C2"/>
                 </a:solidFill>
               </a:rPr>
-              <a:t>CMake 重新配置纳入新源码</a:t>
-            </a:r>
-            <a:endParaRPr lang="en-US" sz="1050" dirty="0"/>
-          </a:p>
-          <a:p>
-            <a:pPr indent="0" marL="0">
-              <a:buNone/>
-            </a:pPr>
-            <a:r>
-              <a:rPr lang="en-US" sz="1050" dirty="0">
-                <a:solidFill>
-                  <a:srgbClr val="96A9C2"/>
-                </a:solidFill>
-              </a:rPr>
-              <a:t>运行时依赖检查</a:t>
+              <a:t>减少 singleton，提升可测试性</a:t>
             </a:r>
             <a:endParaRPr lang="en-US" sz="1050" dirty="0"/>
           </a:p>
@@ -8605,11 +8977,13 @@
         </p:nvSpPr>
         <p:spPr>
           <a:xfrm>
-            <a:off x="594360" y="3794760"/>
-            <a:ext cx="11000232" cy="1508760"/>
+            <a:off x="566928" y="3474720"/>
+            <a:ext cx="3520440" cy="1920240"/>
           </a:xfrm>
           <a:prstGeom prst="roundRect">
-            <a:avLst/>
+            <a:avLst>
+              <a:gd name="adj" fmla="val 2857"/>
+            </a:avLst>
           </a:prstGeom>
           <a:solidFill>
             <a:srgbClr val="0F1C2E"/>
@@ -8624,14 +8998,39 @@
       </p:sp>
       <p:sp>
         <p:nvSpPr>
-          <p:cNvPr id="17" name="Text 15"/>
-          <p:cNvSpPr/>
-          <p:nvPr/>
-        </p:nvSpPr>
-        <p:spPr>
-          <a:xfrm>
-            <a:off x="822960" y="4050792"/>
-            <a:ext cx="1097280" cy="274320"/>
+          <p:cNvPr id="17" name="Shape 15"/>
+          <p:cNvSpPr/>
+          <p:nvPr/>
+        </p:nvSpPr>
+        <p:spPr>
+          <a:xfrm>
+            <a:off x="566928" y="3474720"/>
+            <a:ext cx="54864" cy="1920240"/>
+          </a:xfrm>
+          <a:prstGeom prst="rect">
+            <a:avLst/>
+          </a:prstGeom>
+          <a:solidFill>
+            <a:srgbClr val="B78CFF"/>
+          </a:solidFill>
+          <a:ln w="12700">
+            <a:solidFill>
+              <a:srgbClr val="B78CFF"/>
+            </a:solidFill>
+            <a:prstDash val="solid"/>
+          </a:ln>
+        </p:spPr>
+      </p:sp>
+      <p:sp>
+        <p:nvSpPr>
+          <p:cNvPr id="18" name="Text 16"/>
+          <p:cNvSpPr/>
+          <p:nvPr/>
+        </p:nvSpPr>
+        <p:spPr>
+          <a:xfrm>
+            <a:off x="768096" y="3639312"/>
+            <a:ext cx="3191256" cy="274320"/>
           </a:xfrm>
           <a:prstGeom prst="rect">
             <a:avLst/>
@@ -8647,138 +9046,349 @@
               <a:buNone/>
             </a:pPr>
             <a:r>
-              <a:rPr lang="en-US" sz="1500" b="1" dirty="0">
-                <a:solidFill>
-                  <a:srgbClr val="FFB45A"/>
-                </a:solidFill>
-              </a:rPr>
-              <a:t>本轮验证</a:t>
-            </a:r>
-            <a:endParaRPr lang="en-US" sz="1500" dirty="0"/>
-          </a:p>
-        </p:txBody>
-      </p:sp>
-      <p:sp>
-        <p:nvSpPr>
-          <p:cNvPr id="18" name="Text 16"/>
-          <p:cNvSpPr/>
-          <p:nvPr/>
-        </p:nvSpPr>
-        <p:spPr>
-          <a:xfrm>
-            <a:off x="1920240" y="3950208"/>
-            <a:ext cx="9052560" cy="1005840"/>
-          </a:xfrm>
-          <a:prstGeom prst="rect">
-            <a:avLst/>
-          </a:prstGeom>
-          <a:noFill/>
-          <a:ln/>
-        </p:spPr>
-        <p:txBody>
-          <a:bodyPr wrap="square" lIns="508" tIns="508" rIns="508" bIns="508" rtlCol="0" anchor="ctr">
+              <a:rPr lang="en-US" sz="1400" b="1" dirty="0">
+                <a:solidFill>
+                  <a:srgbClr val="E9F2FF"/>
+                </a:solidFill>
+              </a:rPr>
+              <a:t>模板 + Lambda</a:t>
+            </a:r>
+            <a:endParaRPr lang="en-US" sz="1400" dirty="0"/>
+          </a:p>
+        </p:txBody>
+      </p:sp>
+      <p:sp>
+        <p:nvSpPr>
+          <p:cNvPr id="19" name="Text 17"/>
+          <p:cNvSpPr/>
+          <p:nvPr/>
+        </p:nvSpPr>
+        <p:spPr>
+          <a:xfrm>
+            <a:off x="768096" y="4041648"/>
+            <a:ext cx="3154680" cy="1225296"/>
+          </a:xfrm>
+          <a:prstGeom prst="rect">
+            <a:avLst/>
+          </a:prstGeom>
+          <a:noFill/>
+          <a:ln/>
+        </p:spPr>
+        <p:txBody>
+          <a:bodyPr wrap="square" lIns="254" tIns="254" rIns="254" bIns="254" rtlCol="0" anchor="t">
             <a:normAutofit/>
           </a:bodyPr>
           <a:lstStyle/>
           <a:p>
-            <a:pPr marL="167640" indent="-167640">
-              <a:buSzPct val="100000"/>
-              <a:buChar char="•"/>
-            </a:pPr>
-            <a:r>
-              <a:rPr lang="en-US" sz="1100" dirty="0">
+            <a:pPr indent="0" marL="0">
+              <a:buNone/>
+            </a:pPr>
+            <a:r>
+              <a:rPr lang="en-US" sz="1050" dirty="0">
+                <a:solidFill>
+                  <a:srgbClr val="96A9C2"/>
+                </a:solidFill>
+              </a:rPr>
+              <a:t>RenderGraph::addPass&lt;T, Fn&gt;</a:t>
+            </a:r>
+            <a:endParaRPr lang="en-US" sz="1050" dirty="0"/>
+          </a:p>
+          <a:p>
+            <a:pPr indent="0" marL="0">
+              <a:buNone/>
+            </a:pPr>
+            <a:r>
+              <a:rPr lang="en-US" sz="1050" dirty="0">
+                <a:solidFill>
+                  <a:srgbClr val="96A9C2"/>
+                </a:solidFill>
+              </a:rPr>
+              <a:t>保存不同参数和执行函数</a:t>
+            </a:r>
+            <a:endParaRPr lang="en-US" sz="1050" dirty="0"/>
+          </a:p>
+          <a:p>
+            <a:pPr indent="0" marL="0">
+              <a:buNone/>
+            </a:pPr>
+            <a:r>
+              <a:rPr lang="en-US" sz="1050" dirty="0">
+                <a:solidFill>
+                  <a:srgbClr val="96A9C2"/>
+                </a:solidFill>
+              </a:rPr>
+              <a:t>统一通过虚函数 execute 调用</a:t>
+            </a:r>
+            <a:endParaRPr lang="en-US" sz="1050" dirty="0"/>
+          </a:p>
+        </p:txBody>
+      </p:sp>
+      <p:sp>
+        <p:nvSpPr>
+          <p:cNvPr id="20" name="Shape 18"/>
+          <p:cNvSpPr/>
+          <p:nvPr/>
+        </p:nvSpPr>
+        <p:spPr>
+          <a:xfrm>
+            <a:off x="4325112" y="3474720"/>
+            <a:ext cx="3520440" cy="1920240"/>
+          </a:xfrm>
+          <a:prstGeom prst="roundRect">
+            <a:avLst>
+              <a:gd name="adj" fmla="val 2857"/>
+            </a:avLst>
+          </a:prstGeom>
+          <a:solidFill>
+            <a:srgbClr val="0F1C2E"/>
+          </a:solidFill>
+          <a:ln w="12700">
+            <a:solidFill>
+              <a:srgbClr val="29405C"/>
+            </a:solidFill>
+            <a:prstDash val="solid"/>
+          </a:ln>
+        </p:spPr>
+      </p:sp>
+      <p:sp>
+        <p:nvSpPr>
+          <p:cNvPr id="21" name="Shape 19"/>
+          <p:cNvSpPr/>
+          <p:nvPr/>
+        </p:nvSpPr>
+        <p:spPr>
+          <a:xfrm>
+            <a:off x="4325112" y="3474720"/>
+            <a:ext cx="54864" cy="1920240"/>
+          </a:xfrm>
+          <a:prstGeom prst="rect">
+            <a:avLst/>
+          </a:prstGeom>
+          <a:solidFill>
+            <a:srgbClr val="FFB45A"/>
+          </a:solidFill>
+          <a:ln w="12700">
+            <a:solidFill>
+              <a:srgbClr val="FFB45A"/>
+            </a:solidFill>
+            <a:prstDash val="solid"/>
+          </a:ln>
+        </p:spPr>
+      </p:sp>
+      <p:sp>
+        <p:nvSpPr>
+          <p:cNvPr id="22" name="Text 20"/>
+          <p:cNvSpPr/>
+          <p:nvPr/>
+        </p:nvSpPr>
+        <p:spPr>
+          <a:xfrm>
+            <a:off x="4526280" y="3639312"/>
+            <a:ext cx="3191256" cy="274320"/>
+          </a:xfrm>
+          <a:prstGeom prst="rect">
+            <a:avLst/>
+          </a:prstGeom>
+          <a:noFill/>
+          <a:ln/>
+        </p:spPr>
+        <p:txBody>
+          <a:bodyPr wrap="square" lIns="0" tIns="0" rIns="0" bIns="0" rtlCol="0" anchor="ctr"/>
+          <a:lstStyle/>
+          <a:p>
+            <a:pPr indent="0" marL="0">
+              <a:buNone/>
+            </a:pPr>
+            <a:r>
+              <a:rPr lang="en-US" sz="1400" b="1" dirty="0">
                 <a:solidFill>
                   <a:srgbClr val="E9F2FF"/>
                 </a:solidFill>
               </a:rPr>
-              <a:t>Debug / Release 构建通过</a:t>
-            </a:r>
-            <a:endParaRPr lang="en-US" sz="1100" dirty="0"/>
-          </a:p>
-          <a:p>
-            <a:pPr marL="167640" indent="-167640">
-              <a:buSzPct val="100000"/>
-              <a:buChar char="•"/>
-            </a:pPr>
-            <a:r>
-              <a:rPr lang="en-US" sz="1100" dirty="0">
+              <a:t>多态与抽象接口</a:t>
+            </a:r>
+            <a:endParaRPr lang="en-US" sz="1400" dirty="0"/>
+          </a:p>
+        </p:txBody>
+      </p:sp>
+      <p:sp>
+        <p:nvSpPr>
+          <p:cNvPr id="23" name="Text 21"/>
+          <p:cNvSpPr/>
+          <p:nvPr/>
+        </p:nvSpPr>
+        <p:spPr>
+          <a:xfrm>
+            <a:off x="4526280" y="4041648"/>
+            <a:ext cx="3154680" cy="1225296"/>
+          </a:xfrm>
+          <a:prstGeom prst="rect">
+            <a:avLst/>
+          </a:prstGeom>
+          <a:noFill/>
+          <a:ln/>
+        </p:spPr>
+        <p:txBody>
+          <a:bodyPr wrap="square" lIns="254" tIns="254" rIns="254" bIns="254" rtlCol="0" anchor="t">
+            <a:normAutofit/>
+          </a:bodyPr>
+          <a:lstStyle/>
+          <a:p>
+            <a:pPr indent="0" marL="0">
+              <a:buNone/>
+            </a:pPr>
+            <a:r>
+              <a:rPr lang="en-US" sz="1050" dirty="0">
+                <a:solidFill>
+                  <a:srgbClr val="96A9C2"/>
+                </a:solidFill>
+              </a:rPr>
+              <a:t>RenderContext → OpenGLRenderContext</a:t>
+            </a:r>
+            <a:endParaRPr lang="en-US" sz="1050" dirty="0"/>
+          </a:p>
+          <a:p>
+            <a:pPr indent="0" marL="0">
+              <a:buNone/>
+            </a:pPr>
+            <a:r>
+              <a:rPr lang="en-US" sz="1050" dirty="0">
+                <a:solidFill>
+                  <a:srgbClr val="96A9C2"/>
+                </a:solidFill>
+              </a:rPr>
+              <a:t>Light → Direction / Point</a:t>
+            </a:r>
+            <a:endParaRPr lang="en-US" sz="1050" dirty="0"/>
+          </a:p>
+          <a:p>
+            <a:pPr indent="0" marL="0">
+              <a:buNone/>
+            </a:pPr>
+            <a:r>
+              <a:rPr lang="en-US" sz="1050" dirty="0">
+                <a:solidFill>
+                  <a:srgbClr val="96A9C2"/>
+                </a:solidFill>
+              </a:rPr>
+              <a:t>为替换后端和扩展类型保留边界</a:t>
+            </a:r>
+            <a:endParaRPr lang="en-US" sz="1050" dirty="0"/>
+          </a:p>
+        </p:txBody>
+      </p:sp>
+      <p:sp>
+        <p:nvSpPr>
+          <p:cNvPr id="24" name="Shape 22"/>
+          <p:cNvSpPr/>
+          <p:nvPr/>
+        </p:nvSpPr>
+        <p:spPr>
+          <a:xfrm>
+            <a:off x="8083296" y="3474720"/>
+            <a:ext cx="3520440" cy="1920240"/>
+          </a:xfrm>
+          <a:prstGeom prst="roundRect">
+            <a:avLst>
+              <a:gd name="adj" fmla="val 2857"/>
+            </a:avLst>
+          </a:prstGeom>
+          <a:solidFill>
+            <a:srgbClr val="0F1C2E"/>
+          </a:solidFill>
+          <a:ln w="12700">
+            <a:solidFill>
+              <a:srgbClr val="29405C"/>
+            </a:solidFill>
+            <a:prstDash val="solid"/>
+          </a:ln>
+        </p:spPr>
+      </p:sp>
+      <p:sp>
+        <p:nvSpPr>
+          <p:cNvPr id="25" name="Shape 23"/>
+          <p:cNvSpPr/>
+          <p:nvPr/>
+        </p:nvSpPr>
+        <p:spPr>
+          <a:xfrm>
+            <a:off x="8083296" y="3474720"/>
+            <a:ext cx="54864" cy="1920240"/>
+          </a:xfrm>
+          <a:prstGeom prst="rect">
+            <a:avLst/>
+          </a:prstGeom>
+          <a:solidFill>
+            <a:srgbClr val="FF6B7A"/>
+          </a:solidFill>
+          <a:ln w="12700">
+            <a:solidFill>
+              <a:srgbClr val="FF6B7A"/>
+            </a:solidFill>
+            <a:prstDash val="solid"/>
+          </a:ln>
+        </p:spPr>
+      </p:sp>
+      <p:sp>
+        <p:nvSpPr>
+          <p:cNvPr id="26" name="Text 24"/>
+          <p:cNvSpPr/>
+          <p:nvPr/>
+        </p:nvSpPr>
+        <p:spPr>
+          <a:xfrm>
+            <a:off x="8284464" y="3639312"/>
+            <a:ext cx="3191256" cy="274320"/>
+          </a:xfrm>
+          <a:prstGeom prst="rect">
+            <a:avLst/>
+          </a:prstGeom>
+          <a:noFill/>
+          <a:ln/>
+        </p:spPr>
+        <p:txBody>
+          <a:bodyPr wrap="square" lIns="0" tIns="0" rIns="0" bIns="0" rtlCol="0" anchor="ctr"/>
+          <a:lstStyle/>
+          <a:p>
+            <a:pPr indent="0" marL="0">
+              <a:buNone/>
+            </a:pPr>
+            <a:r>
+              <a:rPr lang="en-US" sz="1400" b="1" dirty="0">
                 <a:solidFill>
                   <a:srgbClr val="E9F2FF"/>
                 </a:solidFill>
               </a:rPr>
-              <a:t>默认场景与模型专项测试各运行 8 秒</a:t>
-            </a:r>
-            <a:endParaRPr lang="en-US" sz="1100" dirty="0"/>
-          </a:p>
-          <a:p>
-            <a:pPr marL="167640" indent="-167640">
-              <a:buSzPct val="100000"/>
-              <a:buChar char="•"/>
-            </a:pPr>
-            <a:r>
-              <a:rPr lang="en-US" sz="1100" dirty="0">
-                <a:solidFill>
-                  <a:srgbClr val="E9F2FF"/>
-                </a:solidFill>
-              </a:rPr>
-              <a:t>RenderQueue：2 提交 / 1 可见 / 1 裁剪</a:t>
-            </a:r>
-            <a:endParaRPr lang="en-US" sz="1100" dirty="0"/>
-          </a:p>
-          <a:p>
-            <a:pPr marL="167640" indent="-167640">
-              <a:buSzPct val="100000"/>
-              <a:buChar char="•"/>
-            </a:pPr>
-            <a:r>
-              <a:rPr lang="en-US" sz="1100" dirty="0">
-                <a:solidFill>
-                  <a:srgbClr val="E9F2FF"/>
-                </a:solidFill>
-              </a:rPr>
-              <a:t>同模型双实例只上传一份 MeshResource</a:t>
-            </a:r>
-            <a:endParaRPr lang="en-US" sz="1100" dirty="0"/>
-          </a:p>
-          <a:p>
-            <a:pPr marL="167640" indent="-167640">
-              <a:buSzPct val="100000"/>
-              <a:buChar char="•"/>
-            </a:pPr>
-            <a:r>
-              <a:rPr lang="en-US" sz="1100" dirty="0">
-                <a:solidFill>
-                  <a:srgbClr val="E9F2FF"/>
-                </a:solidFill>
-              </a:rPr>
-              <a:t>无 Shader / FBO / 高优先级 GL 错误</a:t>
-            </a:r>
-            <a:endParaRPr lang="en-US" sz="1100" dirty="0"/>
-          </a:p>
-        </p:txBody>
-      </p:sp>
-      <p:sp>
-        <p:nvSpPr>
-          <p:cNvPr id="19" name="Text 17"/>
-          <p:cNvSpPr/>
-          <p:nvPr/>
-        </p:nvSpPr>
-        <p:spPr>
-          <a:xfrm>
-            <a:off x="960120" y="5623560"/>
-            <a:ext cx="10241280" cy="320040"/>
-          </a:xfrm>
-          <a:prstGeom prst="rect">
-            <a:avLst/>
-          </a:prstGeom>
-          <a:noFill/>
-          <a:ln/>
-        </p:spPr>
-        <p:txBody>
-          <a:bodyPr wrap="square" lIns="0" tIns="0" rIns="0" bIns="0" rtlCol="0" anchor="ctr"/>
-          <a:lstStyle/>
-          <a:p>
-            <a:pPr algn="ctr" indent="0" marL="0">
+              <a:t>STL 与数据结构</a:t>
+            </a:r>
+            <a:endParaRPr lang="en-US" sz="1400" dirty="0"/>
+          </a:p>
+        </p:txBody>
+      </p:sp>
+      <p:sp>
+        <p:nvSpPr>
+          <p:cNvPr id="27" name="Text 25"/>
+          <p:cNvSpPr/>
+          <p:nvPr/>
+        </p:nvSpPr>
+        <p:spPr>
+          <a:xfrm>
+            <a:off x="8284464" y="4041648"/>
+            <a:ext cx="3154680" cy="1225296"/>
+          </a:xfrm>
+          <a:prstGeom prst="rect">
+            <a:avLst/>
+          </a:prstGeom>
+          <a:noFill/>
+          <a:ln/>
+        </p:spPr>
+        <p:txBody>
+          <a:bodyPr wrap="square" lIns="254" tIns="254" rIns="254" bIns="254" rtlCol="0" anchor="t">
+            <a:normAutofit/>
+          </a:bodyPr>
+          <a:lstStyle/>
+          <a:p>
+            <a:pPr indent="0" marL="0">
               <a:buNone/>
             </a:pPr>
             <a:r>
@@ -8787,7 +9397,49 @@
                   <a:srgbClr val="96A9C2"/>
                 </a:solidFill>
               </a:rPr>
-              <a:t>已知非功能警告：驱动提示 Vertex Shader 会根据 GL State 重新编译；后续通过 Pipeline State 规范化继续优化。</a:t>
+              <a:t>vector：对象/顶点/pass</a:t>
+            </a:r>
+            <a:endParaRPr lang="en-US" sz="1050" dirty="0"/>
+          </a:p>
+          <a:p>
+            <a:pPr indent="0" marL="0">
+              <a:buNone/>
+            </a:pPr>
+            <a:r>
+              <a:rPr lang="en-US" sz="1050" dirty="0">
+                <a:solidFill>
+                  <a:srgbClr val="96A9C2"/>
+                </a:solidFill>
+              </a:rPr>
+              <a:t>unordered_map：资源缓存</a:t>
+            </a:r>
+            <a:endParaRPr lang="en-US" sz="1050" dirty="0"/>
+          </a:p>
+          <a:p>
+            <a:pPr indent="0" marL="0">
+              <a:buNone/>
+            </a:pPr>
+            <a:r>
+              <a:rPr lang="en-US" sz="1050" dirty="0">
+                <a:solidFill>
+                  <a:srgbClr val="96A9C2"/>
+                </a:solidFill>
+              </a:rPr>
+              <a:t>array：固定 Bloom mip 链</a:t>
+            </a:r>
+            <a:endParaRPr lang="en-US" sz="1050" dirty="0"/>
+          </a:p>
+          <a:p>
+            <a:pPr indent="0" marL="0">
+              <a:buNone/>
+            </a:pPr>
+            <a:r>
+              <a:rPr lang="en-US" sz="1050" dirty="0">
+                <a:solidFill>
+                  <a:srgbClr val="96A9C2"/>
+                </a:solidFill>
+              </a:rPr>
+              <a:t>move：转移资源所有权</a:t>
             </a:r>
             <a:endParaRPr lang="en-US" sz="1050" dirty="0"/>
           </a:p>
@@ -8896,7 +9548,7 @@
                   <a:srgbClr val="E9F2FF"/>
                 </a:solidFill>
               </a:rPr>
-              <a:t>14  当前问题与演进路线</a:t>
+              <a:t>14  可诊断性与验证体系</a:t>
             </a:r>
             <a:endParaRPr lang="en-US" sz="2500" dirty="0"/>
           </a:p>
@@ -8932,7 +9584,7 @@
                   <a:srgbClr val="96A9C2"/>
                 </a:solidFill>
               </a:rPr>
-              <a:t>P0 / P1 已完成，下一阶段进入 Shader Technique 与热重载</a:t>
+              <a:t>目标：程序失败时直接看到原因，而不是只得到黑屏</a:t>
             </a:r>
             <a:endParaRPr lang="en-US" sz="1050" dirty="0"/>
           </a:p>
@@ -8946,867 +9598,12 @@
         </p:nvSpPr>
         <p:spPr>
           <a:xfrm>
-            <a:off x="566928" y="1417320"/>
-            <a:ext cx="1993392" cy="2971800"/>
-          </a:xfrm>
-          <a:prstGeom prst="roundRect">
-            <a:avLst/>
-          </a:prstGeom>
-          <a:solidFill>
-            <a:srgbClr val="0F1C2E"/>
-          </a:solidFill>
-          <a:ln w="17780">
-            <a:solidFill>
-              <a:srgbClr val="5EE2A0"/>
-            </a:solidFill>
-            <a:prstDash val="solid"/>
-          </a:ln>
-        </p:spPr>
-      </p:sp>
-      <p:sp>
-        <p:nvSpPr>
-          <p:cNvPr id="5" name="Text 3"/>
-          <p:cNvSpPr/>
-          <p:nvPr/>
-        </p:nvSpPr>
-        <p:spPr>
-          <a:xfrm>
-            <a:off x="731520" y="1627632"/>
-            <a:ext cx="502920" cy="329184"/>
-          </a:xfrm>
-          <a:prstGeom prst="rect">
-            <a:avLst/>
-          </a:prstGeom>
-          <a:noFill/>
-          <a:ln/>
-        </p:spPr>
-        <p:txBody>
-          <a:bodyPr wrap="square" lIns="0" tIns="0" rIns="0" bIns="0" rtlCol="0" anchor="ctr"/>
-          <a:lstStyle/>
-          <a:p>
-            <a:pPr indent="0" marL="0">
-              <a:buNone/>
-            </a:pPr>
-            <a:r>
-              <a:rPr lang="en-US" sz="1800" b="1" dirty="0">
-                <a:solidFill>
-                  <a:srgbClr val="5EE2A0"/>
-                </a:solidFill>
-              </a:rPr>
-              <a:t>P0 ✓</a:t>
-            </a:r>
-            <a:endParaRPr lang="en-US" sz="1800" dirty="0"/>
-          </a:p>
-        </p:txBody>
-      </p:sp>
-      <p:sp>
-        <p:nvSpPr>
-          <p:cNvPr id="6" name="Text 4"/>
-          <p:cNvSpPr/>
-          <p:nvPr/>
-        </p:nvSpPr>
-        <p:spPr>
-          <a:xfrm>
-            <a:off x="731520" y="2121408"/>
-            <a:ext cx="1664208" cy="457200"/>
-          </a:xfrm>
-          <a:prstGeom prst="rect">
-            <a:avLst/>
-          </a:prstGeom>
-          <a:noFill/>
-          <a:ln/>
-        </p:spPr>
-        <p:txBody>
-          <a:bodyPr wrap="square" lIns="0" tIns="0" rIns="0" bIns="0" rtlCol="0" anchor="ctr">
-            <a:normAutofit/>
-          </a:bodyPr>
-          <a:lstStyle/>
-          <a:p>
-            <a:pPr indent="0" marL="0">
-              <a:buNone/>
-            </a:pPr>
-            <a:r>
-              <a:rPr lang="en-US" sz="1400" b="1" dirty="0">
-                <a:solidFill>
-                  <a:srgbClr val="E9F2FF"/>
-                </a:solidFill>
-              </a:rPr>
-              <a:t>MeshResource</a:t>
-            </a:r>
-            <a:endParaRPr lang="en-US" sz="1400" dirty="0"/>
-          </a:p>
-        </p:txBody>
-      </p:sp>
-      <p:sp>
-        <p:nvSpPr>
-          <p:cNvPr id="7" name="Text 5"/>
-          <p:cNvSpPr/>
-          <p:nvPr/>
-        </p:nvSpPr>
-        <p:spPr>
-          <a:xfrm>
-            <a:off x="731520" y="2852928"/>
-            <a:ext cx="1664208" cy="960120"/>
-          </a:xfrm>
-          <a:prstGeom prst="rect">
-            <a:avLst/>
-          </a:prstGeom>
-          <a:noFill/>
-          <a:ln/>
-        </p:spPr>
-        <p:txBody>
-          <a:bodyPr wrap="square" lIns="0" tIns="0" rIns="0" bIns="0" rtlCol="0" anchor="ctr">
-            <a:normAutofit/>
-          </a:bodyPr>
-          <a:lstStyle/>
-          <a:p>
-            <a:pPr indent="0" marL="0">
-              <a:buNone/>
-            </a:pPr>
-            <a:r>
-              <a:rPr lang="en-US" sz="1050" dirty="0">
-                <a:solidFill>
-                  <a:srgbClr val="96A9C2"/>
-                </a:solidFill>
-              </a:rPr>
-              <a:t>共享 VAO/VBO/IBO</a:t>
-            </a:r>
-            <a:endParaRPr lang="en-US" sz="1050" dirty="0"/>
-          </a:p>
-          <a:p>
-            <a:pPr indent="0" marL="0">
-              <a:buNone/>
-            </a:pPr>
-            <a:r>
-              <a:rPr lang="en-US" sz="1050" dirty="0">
-                <a:solidFill>
-                  <a:srgbClr val="96A9C2"/>
-                </a:solidFill>
-              </a:rPr>
-              <a:t>消除多实例重复上传</a:t>
-            </a:r>
-            <a:endParaRPr lang="en-US" sz="1050" dirty="0"/>
-          </a:p>
-        </p:txBody>
-      </p:sp>
-      <p:sp>
-        <p:nvSpPr>
-          <p:cNvPr id="8" name="Shape 6"/>
-          <p:cNvSpPr/>
-          <p:nvPr/>
-        </p:nvSpPr>
-        <p:spPr>
-          <a:xfrm>
-            <a:off x="2578608" y="2889504"/>
-            <a:ext cx="256032" cy="0"/>
-          </a:xfrm>
-          <a:prstGeom prst="line">
-            <a:avLst/>
-          </a:prstGeom>
-          <a:noFill/>
-          <a:ln w="17780">
-            <a:solidFill>
-              <a:srgbClr val="5EE2A0"/>
-            </a:solidFill>
-            <a:prstDash val="solid"/>
-            <a:headEnd type="none"/>
-            <a:tailEnd type="triangle"/>
-          </a:ln>
-        </p:spPr>
-      </p:sp>
-      <p:sp>
-        <p:nvSpPr>
-          <p:cNvPr id="9" name="Shape 7"/>
-          <p:cNvSpPr/>
-          <p:nvPr/>
-        </p:nvSpPr>
-        <p:spPr>
-          <a:xfrm>
-            <a:off x="2880360" y="1417320"/>
-            <a:ext cx="1993392" cy="2971800"/>
-          </a:xfrm>
-          <a:prstGeom prst="roundRect">
-            <a:avLst/>
-          </a:prstGeom>
-          <a:solidFill>
-            <a:srgbClr val="0F1C2E"/>
-          </a:solidFill>
-          <a:ln w="17780">
-            <a:solidFill>
-              <a:srgbClr val="5EE2A0"/>
-            </a:solidFill>
-            <a:prstDash val="solid"/>
-          </a:ln>
-        </p:spPr>
-      </p:sp>
-      <p:sp>
-        <p:nvSpPr>
-          <p:cNvPr id="10" name="Text 8"/>
-          <p:cNvSpPr/>
-          <p:nvPr/>
-        </p:nvSpPr>
-        <p:spPr>
-          <a:xfrm>
-            <a:off x="3044952" y="1627632"/>
-            <a:ext cx="502920" cy="329184"/>
-          </a:xfrm>
-          <a:prstGeom prst="rect">
-            <a:avLst/>
-          </a:prstGeom>
-          <a:noFill/>
-          <a:ln/>
-        </p:spPr>
-        <p:txBody>
-          <a:bodyPr wrap="square" lIns="0" tIns="0" rIns="0" bIns="0" rtlCol="0" anchor="ctr"/>
-          <a:lstStyle/>
-          <a:p>
-            <a:pPr indent="0" marL="0">
-              <a:buNone/>
-            </a:pPr>
-            <a:r>
-              <a:rPr lang="en-US" sz="1800" b="1" dirty="0">
-                <a:solidFill>
-                  <a:srgbClr val="5EE2A0"/>
-                </a:solidFill>
-              </a:rPr>
-              <a:t>P1 ✓</a:t>
-            </a:r>
-            <a:endParaRPr lang="en-US" sz="1800" dirty="0"/>
-          </a:p>
-        </p:txBody>
-      </p:sp>
-      <p:sp>
-        <p:nvSpPr>
-          <p:cNvPr id="11" name="Text 9"/>
-          <p:cNvSpPr/>
-          <p:nvPr/>
-        </p:nvSpPr>
-        <p:spPr>
-          <a:xfrm>
-            <a:off x="3044952" y="2121408"/>
-            <a:ext cx="1664208" cy="457200"/>
-          </a:xfrm>
-          <a:prstGeom prst="rect">
-            <a:avLst/>
-          </a:prstGeom>
-          <a:noFill/>
-          <a:ln/>
-        </p:spPr>
-        <p:txBody>
-          <a:bodyPr wrap="square" lIns="0" tIns="0" rIns="0" bIns="0" rtlCol="0" anchor="ctr">
-            <a:normAutofit/>
-          </a:bodyPr>
-          <a:lstStyle/>
-          <a:p>
-            <a:pPr indent="0" marL="0">
-              <a:buNone/>
-            </a:pPr>
-            <a:r>
-              <a:rPr lang="en-US" sz="1400" b="1" dirty="0">
-                <a:solidFill>
-                  <a:srgbClr val="E9F2FF"/>
-                </a:solidFill>
-              </a:rPr>
-              <a:t>Render Queue</a:t>
-            </a:r>
-            <a:endParaRPr lang="en-US" sz="1400" dirty="0"/>
-          </a:p>
-        </p:txBody>
-      </p:sp>
-      <p:sp>
-        <p:nvSpPr>
-          <p:cNvPr id="12" name="Text 10"/>
-          <p:cNvSpPr/>
-          <p:nvPr/>
-        </p:nvSpPr>
-        <p:spPr>
-          <a:xfrm>
-            <a:off x="3044952" y="2852928"/>
-            <a:ext cx="1664208" cy="960120"/>
-          </a:xfrm>
-          <a:prstGeom prst="rect">
-            <a:avLst/>
-          </a:prstGeom>
-          <a:noFill/>
-          <a:ln/>
-        </p:spPr>
-        <p:txBody>
-          <a:bodyPr wrap="square" lIns="0" tIns="0" rIns="0" bIns="0" rtlCol="0" anchor="ctr">
-            <a:normAutofit/>
-          </a:bodyPr>
-          <a:lstStyle/>
-          <a:p>
-            <a:pPr indent="0" marL="0">
-              <a:buNone/>
-            </a:pPr>
-            <a:r>
-              <a:rPr lang="en-US" sz="1050" dirty="0">
-                <a:solidFill>
-                  <a:srgbClr val="96A9C2"/>
-                </a:solidFill>
-              </a:rPr>
-              <a:t>RenderItem + Bounds</a:t>
-            </a:r>
-            <a:endParaRPr lang="en-US" sz="1050" dirty="0"/>
-          </a:p>
-          <a:p>
-            <a:pPr indent="0" marL="0">
-              <a:buNone/>
-            </a:pPr>
-            <a:r>
-              <a:rPr lang="en-US" sz="1050" dirty="0">
-                <a:solidFill>
-                  <a:srgbClr val="96A9C2"/>
-                </a:solidFill>
-              </a:rPr>
-              <a:t>视锥裁剪 + 状态排序</a:t>
-            </a:r>
-            <a:endParaRPr lang="en-US" sz="1050" dirty="0"/>
-          </a:p>
-        </p:txBody>
-      </p:sp>
-      <p:sp>
-        <p:nvSpPr>
-          <p:cNvPr id="13" name="Shape 11"/>
-          <p:cNvSpPr/>
-          <p:nvPr/>
-        </p:nvSpPr>
-        <p:spPr>
-          <a:xfrm>
-            <a:off x="4892040" y="2889504"/>
-            <a:ext cx="256032" cy="0"/>
-          </a:xfrm>
-          <a:prstGeom prst="line">
-            <a:avLst/>
-          </a:prstGeom>
-          <a:noFill/>
-          <a:ln w="17780">
-            <a:solidFill>
-              <a:srgbClr val="5EE2A0"/>
-            </a:solidFill>
-            <a:prstDash val="solid"/>
-            <a:headEnd type="none"/>
-            <a:tailEnd type="triangle"/>
-          </a:ln>
-        </p:spPr>
-      </p:sp>
-      <p:sp>
-        <p:nvSpPr>
-          <p:cNvPr id="14" name="Shape 12"/>
-          <p:cNvSpPr/>
-          <p:nvPr/>
-        </p:nvSpPr>
-        <p:spPr>
-          <a:xfrm>
-            <a:off x="5193792" y="1417320"/>
-            <a:ext cx="1993392" cy="2971800"/>
-          </a:xfrm>
-          <a:prstGeom prst="roundRect">
-            <a:avLst/>
-          </a:prstGeom>
-          <a:solidFill>
-            <a:srgbClr val="0F1C2E"/>
-          </a:solidFill>
-          <a:ln w="17780">
-            <a:solidFill>
-              <a:srgbClr val="5EE2A0"/>
-            </a:solidFill>
-            <a:prstDash val="solid"/>
-          </a:ln>
-        </p:spPr>
-      </p:sp>
-      <p:sp>
-        <p:nvSpPr>
-          <p:cNvPr id="15" name="Text 13"/>
-          <p:cNvSpPr/>
-          <p:nvPr/>
-        </p:nvSpPr>
-        <p:spPr>
-          <a:xfrm>
-            <a:off x="5358384" y="1627632"/>
-            <a:ext cx="502920" cy="329184"/>
-          </a:xfrm>
-          <a:prstGeom prst="rect">
-            <a:avLst/>
-          </a:prstGeom>
-          <a:noFill/>
-          <a:ln/>
-        </p:spPr>
-        <p:txBody>
-          <a:bodyPr wrap="square" lIns="0" tIns="0" rIns="0" bIns="0" rtlCol="0" anchor="ctr"/>
-          <a:lstStyle/>
-          <a:p>
-            <a:pPr indent="0" marL="0">
-              <a:buNone/>
-            </a:pPr>
-            <a:r>
-              <a:rPr lang="en-US" sz="1800" b="1" dirty="0">
-                <a:solidFill>
-                  <a:srgbClr val="5EE2A0"/>
-                </a:solidFill>
-              </a:rPr>
-              <a:t>P2</a:t>
-            </a:r>
-            <a:endParaRPr lang="en-US" sz="1800" dirty="0"/>
-          </a:p>
-        </p:txBody>
-      </p:sp>
-      <p:sp>
-        <p:nvSpPr>
-          <p:cNvPr id="16" name="Text 14"/>
-          <p:cNvSpPr/>
-          <p:nvPr/>
-        </p:nvSpPr>
-        <p:spPr>
-          <a:xfrm>
-            <a:off x="5358384" y="2121408"/>
-            <a:ext cx="1664208" cy="457200"/>
-          </a:xfrm>
-          <a:prstGeom prst="rect">
-            <a:avLst/>
-          </a:prstGeom>
-          <a:noFill/>
-          <a:ln/>
-        </p:spPr>
-        <p:txBody>
-          <a:bodyPr wrap="square" lIns="0" tIns="0" rIns="0" bIns="0" rtlCol="0" anchor="ctr">
-            <a:normAutofit/>
-          </a:bodyPr>
-          <a:lstStyle/>
-          <a:p>
-            <a:pPr indent="0" marL="0">
-              <a:buNone/>
-            </a:pPr>
-            <a:r>
-              <a:rPr lang="en-US" sz="1400" b="1" dirty="0">
-                <a:solidFill>
-                  <a:srgbClr val="E9F2FF"/>
-                </a:solidFill>
-              </a:rPr>
-              <a:t>Shader System</a:t>
-            </a:r>
-            <a:endParaRPr lang="en-US" sz="1400" dirty="0"/>
-          </a:p>
-        </p:txBody>
-      </p:sp>
-      <p:sp>
-        <p:nvSpPr>
-          <p:cNvPr id="17" name="Text 15"/>
-          <p:cNvSpPr/>
-          <p:nvPr/>
-        </p:nvSpPr>
-        <p:spPr>
-          <a:xfrm>
-            <a:off x="5358384" y="2852928"/>
-            <a:ext cx="1664208" cy="960120"/>
-          </a:xfrm>
-          <a:prstGeom prst="rect">
-            <a:avLst/>
-          </a:prstGeom>
-          <a:noFill/>
-          <a:ln/>
-        </p:spPr>
-        <p:txBody>
-          <a:bodyPr wrap="square" lIns="0" tIns="0" rIns="0" bIns="0" rtlCol="0" anchor="ctr">
-            <a:normAutofit/>
-          </a:bodyPr>
-          <a:lstStyle/>
-          <a:p>
-            <a:pPr indent="0" marL="0">
-              <a:buNone/>
-            </a:pPr>
-            <a:r>
-              <a:rPr lang="en-US" sz="1050" dirty="0">
-                <a:solidFill>
-                  <a:srgbClr val="96A9C2"/>
-                </a:solidFill>
-              </a:rPr>
-              <a:t>外置源码 / Technique</a:t>
-            </a:r>
-            <a:endParaRPr lang="en-US" sz="1050" dirty="0"/>
-          </a:p>
-          <a:p>
-            <a:pPr indent="0" marL="0">
-              <a:buNone/>
-            </a:pPr>
-            <a:r>
-              <a:rPr lang="en-US" sz="1050" dirty="0">
-                <a:solidFill>
-                  <a:srgbClr val="96A9C2"/>
-                </a:solidFill>
-              </a:rPr>
-              <a:t>Variant + Hot Reload</a:t>
-            </a:r>
-            <a:endParaRPr lang="en-US" sz="1050" dirty="0"/>
-          </a:p>
-        </p:txBody>
-      </p:sp>
-      <p:sp>
-        <p:nvSpPr>
-          <p:cNvPr id="18" name="Shape 16"/>
-          <p:cNvSpPr/>
-          <p:nvPr/>
-        </p:nvSpPr>
-        <p:spPr>
-          <a:xfrm>
-            <a:off x="7205472" y="2889504"/>
-            <a:ext cx="256032" cy="0"/>
-          </a:xfrm>
-          <a:prstGeom prst="line">
-            <a:avLst/>
-          </a:prstGeom>
-          <a:noFill/>
-          <a:ln w="17780">
-            <a:solidFill>
-              <a:srgbClr val="5EE2A0"/>
-            </a:solidFill>
-            <a:prstDash val="solid"/>
-            <a:headEnd type="none"/>
-            <a:tailEnd type="triangle"/>
-          </a:ln>
-        </p:spPr>
-      </p:sp>
-      <p:sp>
-        <p:nvSpPr>
-          <p:cNvPr id="19" name="Shape 17"/>
-          <p:cNvSpPr/>
-          <p:nvPr/>
-        </p:nvSpPr>
-        <p:spPr>
-          <a:xfrm>
-            <a:off x="7507224" y="1417320"/>
-            <a:ext cx="1993392" cy="2971800"/>
-          </a:xfrm>
-          <a:prstGeom prst="roundRect">
-            <a:avLst/>
-          </a:prstGeom>
-          <a:solidFill>
-            <a:srgbClr val="0F1C2E"/>
-          </a:solidFill>
-          <a:ln w="17780">
-            <a:solidFill>
-              <a:srgbClr val="21D4FD"/>
-            </a:solidFill>
-            <a:prstDash val="solid"/>
-          </a:ln>
-        </p:spPr>
-      </p:sp>
-      <p:sp>
-        <p:nvSpPr>
-          <p:cNvPr id="20" name="Text 18"/>
-          <p:cNvSpPr/>
-          <p:nvPr/>
-        </p:nvSpPr>
-        <p:spPr>
-          <a:xfrm>
-            <a:off x="7671816" y="1627632"/>
-            <a:ext cx="502920" cy="329184"/>
-          </a:xfrm>
-          <a:prstGeom prst="rect">
-            <a:avLst/>
-          </a:prstGeom>
-          <a:noFill/>
-          <a:ln/>
-        </p:spPr>
-        <p:txBody>
-          <a:bodyPr wrap="square" lIns="0" tIns="0" rIns="0" bIns="0" rtlCol="0" anchor="ctr"/>
-          <a:lstStyle/>
-          <a:p>
-            <a:pPr indent="0" marL="0">
-              <a:buNone/>
-            </a:pPr>
-            <a:r>
-              <a:rPr lang="en-US" sz="1800" b="1" dirty="0">
-                <a:solidFill>
-                  <a:srgbClr val="21D4FD"/>
-                </a:solidFill>
-              </a:rPr>
-              <a:t>P3</a:t>
-            </a:r>
-            <a:endParaRPr lang="en-US" sz="1800" dirty="0"/>
-          </a:p>
-        </p:txBody>
-      </p:sp>
-      <p:sp>
-        <p:nvSpPr>
-          <p:cNvPr id="21" name="Text 19"/>
-          <p:cNvSpPr/>
-          <p:nvPr/>
-        </p:nvSpPr>
-        <p:spPr>
-          <a:xfrm>
-            <a:off x="7671816" y="2121408"/>
-            <a:ext cx="1664208" cy="457200"/>
-          </a:xfrm>
-          <a:prstGeom prst="rect">
-            <a:avLst/>
-          </a:prstGeom>
-          <a:noFill/>
-          <a:ln/>
-        </p:spPr>
-        <p:txBody>
-          <a:bodyPr wrap="square" lIns="0" tIns="0" rIns="0" bIns="0" rtlCol="0" anchor="ctr">
-            <a:normAutofit/>
-          </a:bodyPr>
-          <a:lstStyle/>
-          <a:p>
-            <a:pPr indent="0" marL="0">
-              <a:buNone/>
-            </a:pPr>
-            <a:r>
-              <a:rPr lang="en-US" sz="1400" b="1" dirty="0">
-                <a:solidFill>
-                  <a:srgbClr val="E9F2FF"/>
-                </a:solidFill>
-              </a:rPr>
-              <a:t>RenderGraph 2.0</a:t>
-            </a:r>
-            <a:endParaRPr lang="en-US" sz="1400" dirty="0"/>
-          </a:p>
-        </p:txBody>
-      </p:sp>
-      <p:sp>
-        <p:nvSpPr>
-          <p:cNvPr id="22" name="Text 20"/>
-          <p:cNvSpPr/>
-          <p:nvPr/>
-        </p:nvSpPr>
-        <p:spPr>
-          <a:xfrm>
-            <a:off x="7671816" y="2852928"/>
-            <a:ext cx="1664208" cy="960120"/>
-          </a:xfrm>
-          <a:prstGeom prst="rect">
-            <a:avLst/>
-          </a:prstGeom>
-          <a:noFill/>
-          <a:ln/>
-        </p:spPr>
-        <p:txBody>
-          <a:bodyPr wrap="square" lIns="0" tIns="0" rIns="0" bIns="0" rtlCol="0" anchor="ctr">
-            <a:normAutofit/>
-          </a:bodyPr>
-          <a:lstStyle/>
-          <a:p>
-            <a:pPr indent="0" marL="0">
-              <a:buNone/>
-            </a:pPr>
-            <a:r>
-              <a:rPr lang="en-US" sz="1050" dirty="0">
-                <a:solidFill>
-                  <a:srgbClr val="96A9C2"/>
-                </a:solidFill>
-              </a:rPr>
-              <a:t>资源读写依赖</a:t>
-            </a:r>
-            <a:endParaRPr lang="en-US" sz="1050" dirty="0"/>
-          </a:p>
-          <a:p>
-            <a:pPr indent="0" marL="0">
-              <a:buNone/>
-            </a:pPr>
-            <a:r>
-              <a:rPr lang="en-US" sz="1050" dirty="0">
-                <a:solidFill>
-                  <a:srgbClr val="96A9C2"/>
-                </a:solidFill>
-              </a:rPr>
-              <a:t>自动排序 + TargetPool</a:t>
-            </a:r>
-            <a:endParaRPr lang="en-US" sz="1050" dirty="0"/>
-          </a:p>
-        </p:txBody>
-      </p:sp>
-      <p:sp>
-        <p:nvSpPr>
-          <p:cNvPr id="23" name="Shape 21"/>
-          <p:cNvSpPr/>
-          <p:nvPr/>
-        </p:nvSpPr>
-        <p:spPr>
-          <a:xfrm>
-            <a:off x="9518904" y="2889504"/>
-            <a:ext cx="256032" cy="0"/>
-          </a:xfrm>
-          <a:prstGeom prst="line">
-            <a:avLst/>
-          </a:prstGeom>
-          <a:noFill/>
-          <a:ln w="17780">
-            <a:solidFill>
-              <a:srgbClr val="21D4FD"/>
-            </a:solidFill>
-            <a:prstDash val="solid"/>
-            <a:headEnd type="none"/>
-            <a:tailEnd type="triangle"/>
-          </a:ln>
-        </p:spPr>
-      </p:sp>
-      <p:sp>
-        <p:nvSpPr>
-          <p:cNvPr id="24" name="Shape 22"/>
-          <p:cNvSpPr/>
-          <p:nvPr/>
-        </p:nvSpPr>
-        <p:spPr>
-          <a:xfrm>
-            <a:off x="9820656" y="1417320"/>
-            <a:ext cx="1993392" cy="2971800"/>
-          </a:xfrm>
-          <a:prstGeom prst="roundRect">
-            <a:avLst/>
-          </a:prstGeom>
-          <a:solidFill>
-            <a:srgbClr val="0F1C2E"/>
-          </a:solidFill>
-          <a:ln w="17780">
-            <a:solidFill>
-              <a:srgbClr val="B78CFF"/>
-            </a:solidFill>
-            <a:prstDash val="solid"/>
-          </a:ln>
-        </p:spPr>
-      </p:sp>
-      <p:sp>
-        <p:nvSpPr>
-          <p:cNvPr id="25" name="Text 23"/>
-          <p:cNvSpPr/>
-          <p:nvPr/>
-        </p:nvSpPr>
-        <p:spPr>
-          <a:xfrm>
-            <a:off x="9985248" y="1627632"/>
-            <a:ext cx="502920" cy="329184"/>
-          </a:xfrm>
-          <a:prstGeom prst="rect">
-            <a:avLst/>
-          </a:prstGeom>
-          <a:noFill/>
-          <a:ln/>
-        </p:spPr>
-        <p:txBody>
-          <a:bodyPr wrap="square" lIns="0" tIns="0" rIns="0" bIns="0" rtlCol="0" anchor="ctr"/>
-          <a:lstStyle/>
-          <a:p>
-            <a:pPr indent="0" marL="0">
-              <a:buNone/>
-            </a:pPr>
-            <a:r>
-              <a:rPr lang="en-US" sz="1800" b="1" dirty="0">
-                <a:solidFill>
-                  <a:srgbClr val="B78CFF"/>
-                </a:solidFill>
-              </a:rPr>
-              <a:t>P4</a:t>
-            </a:r>
-            <a:endParaRPr lang="en-US" sz="1800" dirty="0"/>
-          </a:p>
-        </p:txBody>
-      </p:sp>
-      <p:sp>
-        <p:nvSpPr>
-          <p:cNvPr id="26" name="Text 24"/>
-          <p:cNvSpPr/>
-          <p:nvPr/>
-        </p:nvSpPr>
-        <p:spPr>
-          <a:xfrm>
-            <a:off x="9985248" y="2121408"/>
-            <a:ext cx="1664208" cy="457200"/>
-          </a:xfrm>
-          <a:prstGeom prst="rect">
-            <a:avLst/>
-          </a:prstGeom>
-          <a:noFill/>
-          <a:ln/>
-        </p:spPr>
-        <p:txBody>
-          <a:bodyPr wrap="square" lIns="0" tIns="0" rIns="0" bIns="0" rtlCol="0" anchor="ctr">
-            <a:normAutofit/>
-          </a:bodyPr>
-          <a:lstStyle/>
-          <a:p>
-            <a:pPr indent="0" marL="0">
-              <a:buNone/>
-            </a:pPr>
-            <a:r>
-              <a:rPr lang="en-US" sz="1400" b="1" dirty="0">
-                <a:solidFill>
-                  <a:srgbClr val="E9F2FF"/>
-                </a:solidFill>
-              </a:rPr>
-              <a:t>Advanced Rendering</a:t>
-            </a:r>
-            <a:endParaRPr lang="en-US" sz="1400" dirty="0"/>
-          </a:p>
-        </p:txBody>
-      </p:sp>
-      <p:sp>
-        <p:nvSpPr>
-          <p:cNvPr id="27" name="Text 25"/>
-          <p:cNvSpPr/>
-          <p:nvPr/>
-        </p:nvSpPr>
-        <p:spPr>
-          <a:xfrm>
-            <a:off x="9985248" y="2852928"/>
-            <a:ext cx="1664208" cy="960120"/>
-          </a:xfrm>
-          <a:prstGeom prst="rect">
-            <a:avLst/>
-          </a:prstGeom>
-          <a:noFill/>
-          <a:ln/>
-        </p:spPr>
-        <p:txBody>
-          <a:bodyPr wrap="square" lIns="0" tIns="0" rIns="0" bIns="0" rtlCol="0" anchor="ctr">
-            <a:normAutofit/>
-          </a:bodyPr>
-          <a:lstStyle/>
-          <a:p>
-            <a:pPr indent="0" marL="0">
-              <a:buNone/>
-            </a:pPr>
-            <a:r>
-              <a:rPr lang="en-US" sz="1050" dirty="0">
-                <a:solidFill>
-                  <a:srgbClr val="96A9C2"/>
-                </a:solidFill>
-              </a:rPr>
-              <a:t>CSM / Skin / Alpha</a:t>
-            </a:r>
-            <a:endParaRPr lang="en-US" sz="1050" dirty="0"/>
-          </a:p>
-          <a:p>
-            <a:pPr indent="0" marL="0">
-              <a:buNone/>
-            </a:pPr>
-            <a:r>
-              <a:rPr lang="en-US" sz="1050" dirty="0">
-                <a:solidFill>
-                  <a:srgbClr val="96A9C2"/>
-                </a:solidFill>
-              </a:rPr>
-              <a:t>SSAO / TAA / Profiler</a:t>
-            </a:r>
-            <a:endParaRPr lang="en-US" sz="1050" dirty="0"/>
-          </a:p>
-        </p:txBody>
-      </p:sp>
-      <p:sp>
-        <p:nvSpPr>
-          <p:cNvPr id="28" name="Shape 26"/>
-          <p:cNvSpPr/>
-          <p:nvPr/>
-        </p:nvSpPr>
-        <p:spPr>
-          <a:xfrm>
-            <a:off x="658368" y="4846320"/>
-            <a:ext cx="5394960" cy="960120"/>
+            <a:off x="594360" y="1325880"/>
+            <a:ext cx="3383280" cy="1965960"/>
           </a:xfrm>
           <a:prstGeom prst="roundRect">
             <a:avLst>
-              <a:gd name="adj" fmla="val 5714"/>
+              <a:gd name="adj" fmla="val 2791"/>
             </a:avLst>
           </a:prstGeom>
           <a:solidFill>
@@ -9822,39 +9619,39 @@
       </p:sp>
       <p:sp>
         <p:nvSpPr>
-          <p:cNvPr id="29" name="Shape 27"/>
-          <p:cNvSpPr/>
-          <p:nvPr/>
-        </p:nvSpPr>
-        <p:spPr>
-          <a:xfrm>
-            <a:off x="658368" y="4846320"/>
-            <a:ext cx="54864" cy="960120"/>
-          </a:xfrm>
-          <a:prstGeom prst="rect">
-            <a:avLst/>
-          </a:prstGeom>
-          <a:solidFill>
-            <a:srgbClr val="FF6B7A"/>
+          <p:cNvPr id="5" name="Shape 3"/>
+          <p:cNvSpPr/>
+          <p:nvPr/>
+        </p:nvSpPr>
+        <p:spPr>
+          <a:xfrm>
+            <a:off x="594360" y="1325880"/>
+            <a:ext cx="54864" cy="1965960"/>
+          </a:xfrm>
+          <a:prstGeom prst="rect">
+            <a:avLst/>
+          </a:prstGeom>
+          <a:solidFill>
+            <a:srgbClr val="21D4FD"/>
           </a:solidFill>
           <a:ln w="12700">
             <a:solidFill>
-              <a:srgbClr val="FF6B7A"/>
-            </a:solidFill>
-            <a:prstDash val="solid"/>
-          </a:ln>
-        </p:spPr>
-      </p:sp>
-      <p:sp>
-        <p:nvSpPr>
-          <p:cNvPr id="30" name="Text 28"/>
-          <p:cNvSpPr/>
-          <p:nvPr/>
-        </p:nvSpPr>
-        <p:spPr>
-          <a:xfrm>
-            <a:off x="859536" y="5010912"/>
-            <a:ext cx="5065776" cy="274320"/>
+              <a:srgbClr val="21D4FD"/>
+            </a:solidFill>
+            <a:prstDash val="solid"/>
+          </a:ln>
+        </p:spPr>
+      </p:sp>
+      <p:sp>
+        <p:nvSpPr>
+          <p:cNvPr id="6" name="Text 4"/>
+          <p:cNvSpPr/>
+          <p:nvPr/>
+        </p:nvSpPr>
+        <p:spPr>
+          <a:xfrm>
+            <a:off x="795528" y="1490472"/>
+            <a:ext cx="3054096" cy="274320"/>
           </a:xfrm>
           <a:prstGeom prst="rect">
             <a:avLst/>
@@ -9875,7 +9672,7 @@
                   <a:srgbClr val="E9F2FF"/>
                 </a:solidFill>
               </a:rPr>
-              <a:t>架构债务</a:t>
+              <a:t>日志系统</a:t>
             </a:r>
             <a:endParaRPr lang="en-US" sz="1400" dirty="0"/>
           </a:p>
@@ -9883,14 +9680,14 @@
       </p:sp>
       <p:sp>
         <p:nvSpPr>
-          <p:cNvPr id="31" name="Text 29"/>
-          <p:cNvSpPr/>
-          <p:nvPr/>
-        </p:nvSpPr>
-        <p:spPr>
-          <a:xfrm>
-            <a:off x="859536" y="5413248"/>
-            <a:ext cx="5029200" cy="265176"/>
+          <p:cNvPr id="7" name="Text 5"/>
+          <p:cNvSpPr/>
+          <p:nvPr/>
+        </p:nvSpPr>
+        <p:spPr>
+          <a:xfrm>
+            <a:off x="795528" y="1892808"/>
+            <a:ext cx="3017520" cy="1271016"/>
           </a:xfrm>
           <a:prstGeom prst="rect">
             <a:avLst/>
@@ -9913,26 +9710,68 @@
                   <a:srgbClr val="96A9C2"/>
                 </a:solidFill>
               </a:rPr>
-              <a:t>Scene/GameObject 裸指针 · RenderContext singleton · ShaderCode.cpp 硬编码 · CMake GLOB</a:t>
-            </a:r>
-            <a:endParaRPr lang="en-US" sz="1050" dirty="0"/>
-          </a:p>
-        </p:txBody>
-      </p:sp>
-      <p:sp>
-        <p:nvSpPr>
-          <p:cNvPr id="32" name="Shape 30"/>
-          <p:cNvSpPr/>
-          <p:nvPr/>
-        </p:nvSpPr>
-        <p:spPr>
-          <a:xfrm>
-            <a:off x="6263640" y="4846320"/>
-            <a:ext cx="5257800" cy="960120"/>
+              <a:t>控制台 + logs/engine.log</a:t>
+            </a:r>
+            <a:endParaRPr lang="en-US" sz="1050" dirty="0"/>
+          </a:p>
+          <a:p>
+            <a:pPr indent="0" marL="0">
+              <a:buNone/>
+            </a:pPr>
+            <a:r>
+              <a:rPr lang="en-US" sz="1050" dirty="0">
+                <a:solidFill>
+                  <a:srgbClr val="96A9C2"/>
+                </a:solidFill>
+              </a:rPr>
+              <a:t>INFO / WARN / ERROR</a:t>
+            </a:r>
+            <a:endParaRPr lang="en-US" sz="1050" dirty="0"/>
+          </a:p>
+          <a:p>
+            <a:pPr indent="0" marL="0">
+              <a:buNone/>
+            </a:pPr>
+            <a:r>
+              <a:rPr lang="en-US" sz="1050" dirty="0">
+                <a:solidFill>
+                  <a:srgbClr val="96A9C2"/>
+                </a:solidFill>
+              </a:rPr>
+              <a:t>资源路径、缓存命中、模型统计</a:t>
+            </a:r>
+            <a:endParaRPr lang="en-US" sz="1050" dirty="0"/>
+          </a:p>
+          <a:p>
+            <a:pPr indent="0" marL="0">
+              <a:buNone/>
+            </a:pPr>
+            <a:r>
+              <a:rPr lang="en-US" sz="1050" dirty="0">
+                <a:solidFill>
+                  <a:srgbClr val="96A9C2"/>
+                </a:solidFill>
+              </a:rPr>
+              <a:t>启动与关闭生命周期</a:t>
+            </a:r>
+            <a:endParaRPr lang="en-US" sz="1050" dirty="0"/>
+          </a:p>
+        </p:txBody>
+      </p:sp>
+      <p:sp>
+        <p:nvSpPr>
+          <p:cNvPr id="8" name="Shape 6"/>
+          <p:cNvSpPr/>
+          <p:nvPr/>
+        </p:nvSpPr>
+        <p:spPr>
+          <a:xfrm>
+            <a:off x="4407408" y="1325880"/>
+            <a:ext cx="3383280" cy="1965960"/>
           </a:xfrm>
           <a:prstGeom prst="roundRect">
             <a:avLst>
-              <a:gd name="adj" fmla="val 5714"/>
+              <a:gd name="adj" fmla="val 2791"/>
             </a:avLst>
           </a:prstGeom>
           <a:solidFill>
@@ -9948,39 +9787,39 @@
       </p:sp>
       <p:sp>
         <p:nvSpPr>
-          <p:cNvPr id="33" name="Shape 31"/>
-          <p:cNvSpPr/>
-          <p:nvPr/>
-        </p:nvSpPr>
-        <p:spPr>
-          <a:xfrm>
-            <a:off x="6263640" y="4846320"/>
-            <a:ext cx="54864" cy="960120"/>
-          </a:xfrm>
-          <a:prstGeom prst="rect">
-            <a:avLst/>
-          </a:prstGeom>
-          <a:solidFill>
-            <a:srgbClr val="B78CFF"/>
+          <p:cNvPr id="9" name="Shape 7"/>
+          <p:cNvSpPr/>
+          <p:nvPr/>
+        </p:nvSpPr>
+        <p:spPr>
+          <a:xfrm>
+            <a:off x="4407408" y="1325880"/>
+            <a:ext cx="54864" cy="1965960"/>
+          </a:xfrm>
+          <a:prstGeom prst="rect">
+            <a:avLst/>
+          </a:prstGeom>
+          <a:solidFill>
+            <a:srgbClr val="FF6B7A"/>
           </a:solidFill>
           <a:ln w="12700">
             <a:solidFill>
-              <a:srgbClr val="B78CFF"/>
-            </a:solidFill>
-            <a:prstDash val="solid"/>
-          </a:ln>
-        </p:spPr>
-      </p:sp>
-      <p:sp>
-        <p:nvSpPr>
-          <p:cNvPr id="34" name="Text 32"/>
-          <p:cNvSpPr/>
-          <p:nvPr/>
-        </p:nvSpPr>
-        <p:spPr>
-          <a:xfrm>
-            <a:off x="6464808" y="5010912"/>
-            <a:ext cx="4928616" cy="274320"/>
+              <a:srgbClr val="FF6B7A"/>
+            </a:solidFill>
+            <a:prstDash val="solid"/>
+          </a:ln>
+        </p:spPr>
+      </p:sp>
+      <p:sp>
+        <p:nvSpPr>
+          <p:cNvPr id="10" name="Text 8"/>
+          <p:cNvSpPr/>
+          <p:nvPr/>
+        </p:nvSpPr>
+        <p:spPr>
+          <a:xfrm>
+            <a:off x="4608576" y="1490472"/>
+            <a:ext cx="3054096" cy="274320"/>
           </a:xfrm>
           <a:prstGeom prst="rect">
             <a:avLst/>
@@ -10001,7 +9840,7 @@
                   <a:srgbClr val="E9F2FF"/>
                 </a:solidFill>
               </a:rPr>
-              <a:t>画面能力缺口</a:t>
+              <a:t>GPU 错误定位</a:t>
             </a:r>
             <a:endParaRPr lang="en-US" sz="1400" dirty="0"/>
           </a:p>
@@ -10009,14 +9848,14 @@
       </p:sp>
       <p:sp>
         <p:nvSpPr>
-          <p:cNvPr id="35" name="Text 33"/>
-          <p:cNvSpPr/>
-          <p:nvPr/>
-        </p:nvSpPr>
-        <p:spPr>
-          <a:xfrm>
-            <a:off x="6464808" y="5413248"/>
-            <a:ext cx="4892040" cy="265176"/>
+          <p:cNvPr id="11" name="Text 9"/>
+          <p:cNvSpPr/>
+          <p:nvPr/>
+        </p:nvSpPr>
+        <p:spPr>
+          <a:xfrm>
+            <a:off x="4608576" y="1892808"/>
+            <a:ext cx="3017520" cy="1271016"/>
           </a:xfrm>
           <a:prstGeom prst="rect">
             <a:avLst/>
@@ -10039,7 +9878,413 @@
                   <a:srgbClr val="96A9C2"/>
                 </a:solidFill>
               </a:rPr>
-              <a:t>CSM · glTF Alpha/Transmission/Skin · SSAO/TAA · GPU Profiler</a:t>
+              <a:t>Shader 编译/链接 info log</a:t>
+            </a:r>
+            <a:endParaRPr lang="en-US" sz="1050" dirty="0"/>
+          </a:p>
+          <a:p>
+            <a:pPr indent="0" marL="0">
+              <a:buNone/>
+            </a:pPr>
+            <a:r>
+              <a:rPr lang="en-US" sz="1050" dirty="0">
+                <a:solidFill>
+                  <a:srgbClr val="96A9C2"/>
+                </a:solidFill>
+              </a:rPr>
+              <a:t>源代码行号预览</a:t>
+            </a:r>
+            <a:endParaRPr lang="en-US" sz="1050" dirty="0"/>
+          </a:p>
+          <a:p>
+            <a:pPr indent="0" marL="0">
+              <a:buNone/>
+            </a:pPr>
+            <a:r>
+              <a:rPr lang="en-US" sz="1050" dirty="0">
+                <a:solidFill>
+                  <a:srgbClr val="96A9C2"/>
+                </a:solidFill>
+              </a:rPr>
+              <a:t>Framebuffer completeness</a:t>
+            </a:r>
+            <a:endParaRPr lang="en-US" sz="1050" dirty="0"/>
+          </a:p>
+          <a:p>
+            <a:pPr indent="0" marL="0">
+              <a:buNone/>
+            </a:pPr>
+            <a:r>
+              <a:rPr lang="en-US" sz="1050" dirty="0">
+                <a:solidFill>
+                  <a:srgbClr val="96A9C2"/>
+                </a:solidFill>
+              </a:rPr>
+              <a:t>OpenGL Debug Callback</a:t>
+            </a:r>
+            <a:endParaRPr lang="en-US" sz="1050" dirty="0"/>
+          </a:p>
+        </p:txBody>
+      </p:sp>
+      <p:sp>
+        <p:nvSpPr>
+          <p:cNvPr id="12" name="Shape 10"/>
+          <p:cNvSpPr/>
+          <p:nvPr/>
+        </p:nvSpPr>
+        <p:spPr>
+          <a:xfrm>
+            <a:off x="8211312" y="1325880"/>
+            <a:ext cx="3383280" cy="1965960"/>
+          </a:xfrm>
+          <a:prstGeom prst="roundRect">
+            <a:avLst>
+              <a:gd name="adj" fmla="val 2791"/>
+            </a:avLst>
+          </a:prstGeom>
+          <a:solidFill>
+            <a:srgbClr val="0F1C2E"/>
+          </a:solidFill>
+          <a:ln w="12700">
+            <a:solidFill>
+              <a:srgbClr val="29405C"/>
+            </a:solidFill>
+            <a:prstDash val="solid"/>
+          </a:ln>
+        </p:spPr>
+      </p:sp>
+      <p:sp>
+        <p:nvSpPr>
+          <p:cNvPr id="13" name="Shape 11"/>
+          <p:cNvSpPr/>
+          <p:nvPr/>
+        </p:nvSpPr>
+        <p:spPr>
+          <a:xfrm>
+            <a:off x="8211312" y="1325880"/>
+            <a:ext cx="54864" cy="1965960"/>
+          </a:xfrm>
+          <a:prstGeom prst="rect">
+            <a:avLst/>
+          </a:prstGeom>
+          <a:solidFill>
+            <a:srgbClr val="5EE2A0"/>
+          </a:solidFill>
+          <a:ln w="12700">
+            <a:solidFill>
+              <a:srgbClr val="5EE2A0"/>
+            </a:solidFill>
+            <a:prstDash val="solid"/>
+          </a:ln>
+        </p:spPr>
+      </p:sp>
+      <p:sp>
+        <p:nvSpPr>
+          <p:cNvPr id="14" name="Text 12"/>
+          <p:cNvSpPr/>
+          <p:nvPr/>
+        </p:nvSpPr>
+        <p:spPr>
+          <a:xfrm>
+            <a:off x="8412480" y="1490472"/>
+            <a:ext cx="3054096" cy="274320"/>
+          </a:xfrm>
+          <a:prstGeom prst="rect">
+            <a:avLst/>
+          </a:prstGeom>
+          <a:noFill/>
+          <a:ln/>
+        </p:spPr>
+        <p:txBody>
+          <a:bodyPr wrap="square" lIns="0" tIns="0" rIns="0" bIns="0" rtlCol="0" anchor="ctr"/>
+          <a:lstStyle/>
+          <a:p>
+            <a:pPr indent="0" marL="0">
+              <a:buNone/>
+            </a:pPr>
+            <a:r>
+              <a:rPr lang="en-US" sz="1400" b="1" dirty="0">
+                <a:solidFill>
+                  <a:srgbClr val="E9F2FF"/>
+                </a:solidFill>
+              </a:rPr>
+              <a:t>构建部署</a:t>
+            </a:r>
+            <a:endParaRPr lang="en-US" sz="1400" dirty="0"/>
+          </a:p>
+        </p:txBody>
+      </p:sp>
+      <p:sp>
+        <p:nvSpPr>
+          <p:cNvPr id="15" name="Text 13"/>
+          <p:cNvSpPr/>
+          <p:nvPr/>
+        </p:nvSpPr>
+        <p:spPr>
+          <a:xfrm>
+            <a:off x="8412480" y="1892808"/>
+            <a:ext cx="3017520" cy="1271016"/>
+          </a:xfrm>
+          <a:prstGeom prst="rect">
+            <a:avLst/>
+          </a:prstGeom>
+          <a:noFill/>
+          <a:ln/>
+        </p:spPr>
+        <p:txBody>
+          <a:bodyPr wrap="square" lIns="254" tIns="254" rIns="254" bIns="254" rtlCol="0" anchor="t">
+            <a:normAutofit/>
+          </a:bodyPr>
+          <a:lstStyle/>
+          <a:p>
+            <a:pPr indent="0" marL="0">
+              <a:buNone/>
+            </a:pPr>
+            <a:r>
+              <a:rPr lang="en-US" sz="1050" dirty="0">
+                <a:solidFill>
+                  <a:srgbClr val="96A9C2"/>
+                </a:solidFill>
+              </a:rPr>
+              <a:t>Debug / Release 双配置</a:t>
+            </a:r>
+            <a:endParaRPr lang="en-US" sz="1050" dirty="0"/>
+          </a:p>
+          <a:p>
+            <a:pPr indent="0" marL="0">
+              <a:buNone/>
+            </a:pPr>
+            <a:r>
+              <a:rPr lang="en-US" sz="1050" dirty="0">
+                <a:solidFill>
+                  <a:srgbClr val="96A9C2"/>
+                </a:solidFill>
+              </a:rPr>
+              <a:t>Assimp DLL 自动复制</a:t>
+            </a:r>
+            <a:endParaRPr lang="en-US" sz="1050" dirty="0"/>
+          </a:p>
+          <a:p>
+            <a:pPr indent="0" marL="0">
+              <a:buNone/>
+            </a:pPr>
+            <a:r>
+              <a:rPr lang="en-US" sz="1050" dirty="0">
+                <a:solidFill>
+                  <a:srgbClr val="96A9C2"/>
+                </a:solidFill>
+              </a:rPr>
+              <a:t>CMake 重新配置纳入新源码</a:t>
+            </a:r>
+            <a:endParaRPr lang="en-US" sz="1050" dirty="0"/>
+          </a:p>
+          <a:p>
+            <a:pPr indent="0" marL="0">
+              <a:buNone/>
+            </a:pPr>
+            <a:r>
+              <a:rPr lang="en-US" sz="1050" dirty="0">
+                <a:solidFill>
+                  <a:srgbClr val="96A9C2"/>
+                </a:solidFill>
+              </a:rPr>
+              <a:t>运行时依赖检查</a:t>
+            </a:r>
+            <a:endParaRPr lang="en-US" sz="1050" dirty="0"/>
+          </a:p>
+        </p:txBody>
+      </p:sp>
+      <p:sp>
+        <p:nvSpPr>
+          <p:cNvPr id="16" name="Shape 14"/>
+          <p:cNvSpPr/>
+          <p:nvPr/>
+        </p:nvSpPr>
+        <p:spPr>
+          <a:xfrm>
+            <a:off x="594360" y="3794760"/>
+            <a:ext cx="11000232" cy="1508760"/>
+          </a:xfrm>
+          <a:prstGeom prst="roundRect">
+            <a:avLst/>
+          </a:prstGeom>
+          <a:solidFill>
+            <a:srgbClr val="0F1C2E"/>
+          </a:solidFill>
+          <a:ln w="12700">
+            <a:solidFill>
+              <a:srgbClr val="29405C"/>
+            </a:solidFill>
+            <a:prstDash val="solid"/>
+          </a:ln>
+        </p:spPr>
+      </p:sp>
+      <p:sp>
+        <p:nvSpPr>
+          <p:cNvPr id="17" name="Text 15"/>
+          <p:cNvSpPr/>
+          <p:nvPr/>
+        </p:nvSpPr>
+        <p:spPr>
+          <a:xfrm>
+            <a:off x="822960" y="4050792"/>
+            <a:ext cx="1097280" cy="274320"/>
+          </a:xfrm>
+          <a:prstGeom prst="rect">
+            <a:avLst/>
+          </a:prstGeom>
+          <a:noFill/>
+          <a:ln/>
+        </p:spPr>
+        <p:txBody>
+          <a:bodyPr wrap="square" lIns="0" tIns="0" rIns="0" bIns="0" rtlCol="0" anchor="ctr"/>
+          <a:lstStyle/>
+          <a:p>
+            <a:pPr indent="0" marL="0">
+              <a:buNone/>
+            </a:pPr>
+            <a:r>
+              <a:rPr lang="en-US" sz="1500" b="1" dirty="0">
+                <a:solidFill>
+                  <a:srgbClr val="FFB45A"/>
+                </a:solidFill>
+              </a:rPr>
+              <a:t>本轮验证</a:t>
+            </a:r>
+            <a:endParaRPr lang="en-US" sz="1500" dirty="0"/>
+          </a:p>
+        </p:txBody>
+      </p:sp>
+      <p:sp>
+        <p:nvSpPr>
+          <p:cNvPr id="18" name="Text 16"/>
+          <p:cNvSpPr/>
+          <p:nvPr/>
+        </p:nvSpPr>
+        <p:spPr>
+          <a:xfrm>
+            <a:off x="1920240" y="3950208"/>
+            <a:ext cx="9052560" cy="1005840"/>
+          </a:xfrm>
+          <a:prstGeom prst="rect">
+            <a:avLst/>
+          </a:prstGeom>
+          <a:noFill/>
+          <a:ln/>
+        </p:spPr>
+        <p:txBody>
+          <a:bodyPr wrap="square" lIns="508" tIns="508" rIns="508" bIns="508" rtlCol="0" anchor="ctr">
+            <a:normAutofit/>
+          </a:bodyPr>
+          <a:lstStyle/>
+          <a:p>
+            <a:pPr marL="167640" indent="-167640">
+              <a:buSzPct val="100000"/>
+              <a:buChar char="•"/>
+            </a:pPr>
+            <a:r>
+              <a:rPr lang="en-US" sz="1100" dirty="0">
+                <a:solidFill>
+                  <a:srgbClr val="E9F2FF"/>
+                </a:solidFill>
+              </a:rPr>
+              <a:t>Debug / Release 构建通过</a:t>
+            </a:r>
+            <a:endParaRPr lang="en-US" sz="1100" dirty="0"/>
+          </a:p>
+          <a:p>
+            <a:pPr marL="167640" indent="-167640">
+              <a:buSzPct val="100000"/>
+              <a:buChar char="•"/>
+            </a:pPr>
+            <a:r>
+              <a:rPr lang="en-US" sz="1100" dirty="0">
+                <a:solidFill>
+                  <a:srgbClr val="E9F2FF"/>
+                </a:solidFill>
+              </a:rPr>
+              <a:t>全部运行时 Shader 从外置文件成功加载</a:t>
+            </a:r>
+            <a:endParaRPr lang="en-US" sz="1100" dirty="0"/>
+          </a:p>
+          <a:p>
+            <a:pPr marL="167640" indent="-167640">
+              <a:buSzPct val="100000"/>
+              <a:buChar char="•"/>
+            </a:pPr>
+            <a:r>
+              <a:rPr lang="en-US" sz="1100" dirty="0">
+                <a:solidFill>
+                  <a:srgbClr val="E9F2FF"/>
+                </a:solidFill>
+              </a:rPr>
+              <a:t>热重载成功 / 失败回退 / 修复恢复通过</a:t>
+            </a:r>
+            <a:endParaRPr lang="en-US" sz="1100" dirty="0"/>
+          </a:p>
+          <a:p>
+            <a:pPr marL="167640" indent="-167640">
+              <a:buSzPct val="100000"/>
+              <a:buChar char="•"/>
+            </a:pPr>
+            <a:r>
+              <a:rPr lang="en-US" sz="1100" dirty="0">
+                <a:solidFill>
+                  <a:srgbClr val="E9F2FF"/>
+                </a:solidFill>
+              </a:rPr>
+              <a:t>RenderQueue：2 提交 / 1 可见 / 1 裁剪</a:t>
+            </a:r>
+            <a:endParaRPr lang="en-US" sz="1100" dirty="0"/>
+          </a:p>
+          <a:p>
+            <a:pPr marL="167640" indent="-167640">
+              <a:buSzPct val="100000"/>
+              <a:buChar char="•"/>
+            </a:pPr>
+            <a:r>
+              <a:rPr lang="en-US" sz="1100" dirty="0">
+                <a:solidFill>
+                  <a:srgbClr val="E9F2FF"/>
+                </a:solidFill>
+              </a:rPr>
+              <a:t>无 Shader / FBO / 高优先级 GL 错误</a:t>
+            </a:r>
+            <a:endParaRPr lang="en-US" sz="1100" dirty="0"/>
+          </a:p>
+        </p:txBody>
+      </p:sp>
+      <p:sp>
+        <p:nvSpPr>
+          <p:cNvPr id="19" name="Text 17"/>
+          <p:cNvSpPr/>
+          <p:nvPr/>
+        </p:nvSpPr>
+        <p:spPr>
+          <a:xfrm>
+            <a:off x="960120" y="5623560"/>
+            <a:ext cx="10241280" cy="320040"/>
+          </a:xfrm>
+          <a:prstGeom prst="rect">
+            <a:avLst/>
+          </a:prstGeom>
+          <a:noFill/>
+          <a:ln/>
+        </p:spPr>
+        <p:txBody>
+          <a:bodyPr wrap="square" lIns="0" tIns="0" rIns="0" bIns="0" rtlCol="0" anchor="ctr"/>
+          <a:lstStyle/>
+          <a:p>
+            <a:pPr algn="ctr" indent="0" marL="0">
+              <a:buNone/>
+            </a:pPr>
+            <a:r>
+              <a:rPr lang="en-US" sz="1050" dirty="0">
+                <a:solidFill>
+                  <a:srgbClr val="96A9C2"/>
+                </a:solidFill>
+              </a:rPr>
+              <a:t>已知非功能警告：驱动提示 Vertex Shader 会根据 GL State 重新编译；后续通过 Pipeline State 规范化继续优化。</a:t>
             </a:r>
             <a:endParaRPr lang="en-US" sz="1050" dirty="0"/>
           </a:p>
@@ -10126,8 +10371,8 @@
         </p:nvSpPr>
         <p:spPr>
           <a:xfrm>
-            <a:off x="640080" y="868680"/>
-            <a:ext cx="5029200" cy="640080"/>
+            <a:off x="502920" y="320040"/>
+            <a:ext cx="8961120" cy="475488"/>
           </a:xfrm>
           <a:prstGeom prst="rect">
             <a:avLst/>
@@ -10143,14 +10388,14 @@
               <a:buNone/>
             </a:pPr>
             <a:r>
-              <a:rPr lang="en-US" sz="3400" b="1" dirty="0">
+              <a:rPr lang="en-US" sz="2500" b="1" dirty="0">
                 <a:solidFill>
                   <a:srgbClr val="E9F2FF"/>
                 </a:solidFill>
               </a:rPr>
-              <a:t>Render Engine</a:t>
-            </a:r>
-            <a:endParaRPr lang="en-US" sz="3400" dirty="0"/>
+              <a:t>15  当前问题与演进路线</a:t>
+            </a:r>
+            <a:endParaRPr lang="en-US" sz="2500" dirty="0"/>
           </a:p>
         </p:txBody>
       </p:sp>
@@ -10162,8 +10407,8 @@
         </p:nvSpPr>
         <p:spPr>
           <a:xfrm>
-            <a:off x="658368" y="1691640"/>
-            <a:ext cx="6217920" cy="457200"/>
+            <a:off x="521208" y="859536"/>
+            <a:ext cx="10789920" cy="274320"/>
           </a:xfrm>
           <a:prstGeom prst="rect">
             <a:avLst/>
@@ -10179,31 +10424,886 @@
               <a:buNone/>
             </a:pPr>
             <a:r>
-              <a:rPr lang="en-US" sz="2000" dirty="0">
+              <a:rPr lang="en-US" sz="1050" dirty="0">
+                <a:solidFill>
+                  <a:srgbClr val="96A9C2"/>
+                </a:solidFill>
+              </a:rPr>
+              <a:t>P0 / P1 / P2 已完成，下一阶段进入 RenderGraph 资源依赖</a:t>
+            </a:r>
+            <a:endParaRPr lang="en-US" sz="1050" dirty="0"/>
+          </a:p>
+        </p:txBody>
+      </p:sp>
+      <p:sp>
+        <p:nvSpPr>
+          <p:cNvPr id="4" name="Shape 2"/>
+          <p:cNvSpPr/>
+          <p:nvPr/>
+        </p:nvSpPr>
+        <p:spPr>
+          <a:xfrm>
+            <a:off x="566928" y="1417320"/>
+            <a:ext cx="1993392" cy="2971800"/>
+          </a:xfrm>
+          <a:prstGeom prst="roundRect">
+            <a:avLst/>
+          </a:prstGeom>
+          <a:solidFill>
+            <a:srgbClr val="0F1C2E"/>
+          </a:solidFill>
+          <a:ln w="17780">
+            <a:solidFill>
+              <a:srgbClr val="5EE2A0"/>
+            </a:solidFill>
+            <a:prstDash val="solid"/>
+          </a:ln>
+        </p:spPr>
+      </p:sp>
+      <p:sp>
+        <p:nvSpPr>
+          <p:cNvPr id="5" name="Text 3"/>
+          <p:cNvSpPr/>
+          <p:nvPr/>
+        </p:nvSpPr>
+        <p:spPr>
+          <a:xfrm>
+            <a:off x="731520" y="1627632"/>
+            <a:ext cx="502920" cy="329184"/>
+          </a:xfrm>
+          <a:prstGeom prst="rect">
+            <a:avLst/>
+          </a:prstGeom>
+          <a:noFill/>
+          <a:ln/>
+        </p:spPr>
+        <p:txBody>
+          <a:bodyPr wrap="square" lIns="0" tIns="0" rIns="0" bIns="0" rtlCol="0" anchor="ctr"/>
+          <a:lstStyle/>
+          <a:p>
+            <a:pPr indent="0" marL="0">
+              <a:buNone/>
+            </a:pPr>
+            <a:r>
+              <a:rPr lang="en-US" sz="1800" b="1" dirty="0">
+                <a:solidFill>
+                  <a:srgbClr val="5EE2A0"/>
+                </a:solidFill>
+              </a:rPr>
+              <a:t>P0 ✓</a:t>
+            </a:r>
+            <a:endParaRPr lang="en-US" sz="1800" dirty="0"/>
+          </a:p>
+        </p:txBody>
+      </p:sp>
+      <p:sp>
+        <p:nvSpPr>
+          <p:cNvPr id="6" name="Text 4"/>
+          <p:cNvSpPr/>
+          <p:nvPr/>
+        </p:nvSpPr>
+        <p:spPr>
+          <a:xfrm>
+            <a:off x="731520" y="2121408"/>
+            <a:ext cx="1664208" cy="457200"/>
+          </a:xfrm>
+          <a:prstGeom prst="rect">
+            <a:avLst/>
+          </a:prstGeom>
+          <a:noFill/>
+          <a:ln/>
+        </p:spPr>
+        <p:txBody>
+          <a:bodyPr wrap="square" lIns="0" tIns="0" rIns="0" bIns="0" rtlCol="0" anchor="ctr">
+            <a:normAutofit/>
+          </a:bodyPr>
+          <a:lstStyle/>
+          <a:p>
+            <a:pPr indent="0" marL="0">
+              <a:buNone/>
+            </a:pPr>
+            <a:r>
+              <a:rPr lang="en-US" sz="1400" b="1" dirty="0">
+                <a:solidFill>
+                  <a:srgbClr val="E9F2FF"/>
+                </a:solidFill>
+              </a:rPr>
+              <a:t>MeshResource</a:t>
+            </a:r>
+            <a:endParaRPr lang="en-US" sz="1400" dirty="0"/>
+          </a:p>
+        </p:txBody>
+      </p:sp>
+      <p:sp>
+        <p:nvSpPr>
+          <p:cNvPr id="7" name="Text 5"/>
+          <p:cNvSpPr/>
+          <p:nvPr/>
+        </p:nvSpPr>
+        <p:spPr>
+          <a:xfrm>
+            <a:off x="731520" y="2852928"/>
+            <a:ext cx="1664208" cy="960120"/>
+          </a:xfrm>
+          <a:prstGeom prst="rect">
+            <a:avLst/>
+          </a:prstGeom>
+          <a:noFill/>
+          <a:ln/>
+        </p:spPr>
+        <p:txBody>
+          <a:bodyPr wrap="square" lIns="0" tIns="0" rIns="0" bIns="0" rtlCol="0" anchor="ctr">
+            <a:normAutofit/>
+          </a:bodyPr>
+          <a:lstStyle/>
+          <a:p>
+            <a:pPr indent="0" marL="0">
+              <a:buNone/>
+            </a:pPr>
+            <a:r>
+              <a:rPr lang="en-US" sz="1050" dirty="0">
+                <a:solidFill>
+                  <a:srgbClr val="96A9C2"/>
+                </a:solidFill>
+              </a:rPr>
+              <a:t>共享 VAO/VBO/IBO</a:t>
+            </a:r>
+            <a:endParaRPr lang="en-US" sz="1050" dirty="0"/>
+          </a:p>
+          <a:p>
+            <a:pPr indent="0" marL="0">
+              <a:buNone/>
+            </a:pPr>
+            <a:r>
+              <a:rPr lang="en-US" sz="1050" dirty="0">
+                <a:solidFill>
+                  <a:srgbClr val="96A9C2"/>
+                </a:solidFill>
+              </a:rPr>
+              <a:t>消除多实例重复上传</a:t>
+            </a:r>
+            <a:endParaRPr lang="en-US" sz="1050" dirty="0"/>
+          </a:p>
+        </p:txBody>
+      </p:sp>
+      <p:sp>
+        <p:nvSpPr>
+          <p:cNvPr id="8" name="Shape 6"/>
+          <p:cNvSpPr/>
+          <p:nvPr/>
+        </p:nvSpPr>
+        <p:spPr>
+          <a:xfrm>
+            <a:off x="2578608" y="2889504"/>
+            <a:ext cx="256032" cy="0"/>
+          </a:xfrm>
+          <a:prstGeom prst="line">
+            <a:avLst/>
+          </a:prstGeom>
+          <a:noFill/>
+          <a:ln w="17780">
+            <a:solidFill>
+              <a:srgbClr val="5EE2A0"/>
+            </a:solidFill>
+            <a:prstDash val="solid"/>
+            <a:headEnd type="none"/>
+            <a:tailEnd type="triangle"/>
+          </a:ln>
+        </p:spPr>
+      </p:sp>
+      <p:sp>
+        <p:nvSpPr>
+          <p:cNvPr id="9" name="Shape 7"/>
+          <p:cNvSpPr/>
+          <p:nvPr/>
+        </p:nvSpPr>
+        <p:spPr>
+          <a:xfrm>
+            <a:off x="2880360" y="1417320"/>
+            <a:ext cx="1993392" cy="2971800"/>
+          </a:xfrm>
+          <a:prstGeom prst="roundRect">
+            <a:avLst/>
+          </a:prstGeom>
+          <a:solidFill>
+            <a:srgbClr val="0F1C2E"/>
+          </a:solidFill>
+          <a:ln w="17780">
+            <a:solidFill>
+              <a:srgbClr val="5EE2A0"/>
+            </a:solidFill>
+            <a:prstDash val="solid"/>
+          </a:ln>
+        </p:spPr>
+      </p:sp>
+      <p:sp>
+        <p:nvSpPr>
+          <p:cNvPr id="10" name="Text 8"/>
+          <p:cNvSpPr/>
+          <p:nvPr/>
+        </p:nvSpPr>
+        <p:spPr>
+          <a:xfrm>
+            <a:off x="3044952" y="1627632"/>
+            <a:ext cx="502920" cy="329184"/>
+          </a:xfrm>
+          <a:prstGeom prst="rect">
+            <a:avLst/>
+          </a:prstGeom>
+          <a:noFill/>
+          <a:ln/>
+        </p:spPr>
+        <p:txBody>
+          <a:bodyPr wrap="square" lIns="0" tIns="0" rIns="0" bIns="0" rtlCol="0" anchor="ctr"/>
+          <a:lstStyle/>
+          <a:p>
+            <a:pPr indent="0" marL="0">
+              <a:buNone/>
+            </a:pPr>
+            <a:r>
+              <a:rPr lang="en-US" sz="1800" b="1" dirty="0">
+                <a:solidFill>
+                  <a:srgbClr val="5EE2A0"/>
+                </a:solidFill>
+              </a:rPr>
+              <a:t>P1 ✓</a:t>
+            </a:r>
+            <a:endParaRPr lang="en-US" sz="1800" dirty="0"/>
+          </a:p>
+        </p:txBody>
+      </p:sp>
+      <p:sp>
+        <p:nvSpPr>
+          <p:cNvPr id="11" name="Text 9"/>
+          <p:cNvSpPr/>
+          <p:nvPr/>
+        </p:nvSpPr>
+        <p:spPr>
+          <a:xfrm>
+            <a:off x="3044952" y="2121408"/>
+            <a:ext cx="1664208" cy="457200"/>
+          </a:xfrm>
+          <a:prstGeom prst="rect">
+            <a:avLst/>
+          </a:prstGeom>
+          <a:noFill/>
+          <a:ln/>
+        </p:spPr>
+        <p:txBody>
+          <a:bodyPr wrap="square" lIns="0" tIns="0" rIns="0" bIns="0" rtlCol="0" anchor="ctr">
+            <a:normAutofit/>
+          </a:bodyPr>
+          <a:lstStyle/>
+          <a:p>
+            <a:pPr indent="0" marL="0">
+              <a:buNone/>
+            </a:pPr>
+            <a:r>
+              <a:rPr lang="en-US" sz="1400" b="1" dirty="0">
+                <a:solidFill>
+                  <a:srgbClr val="E9F2FF"/>
+                </a:solidFill>
+              </a:rPr>
+              <a:t>Render Queue</a:t>
+            </a:r>
+            <a:endParaRPr lang="en-US" sz="1400" dirty="0"/>
+          </a:p>
+        </p:txBody>
+      </p:sp>
+      <p:sp>
+        <p:nvSpPr>
+          <p:cNvPr id="12" name="Text 10"/>
+          <p:cNvSpPr/>
+          <p:nvPr/>
+        </p:nvSpPr>
+        <p:spPr>
+          <a:xfrm>
+            <a:off x="3044952" y="2852928"/>
+            <a:ext cx="1664208" cy="960120"/>
+          </a:xfrm>
+          <a:prstGeom prst="rect">
+            <a:avLst/>
+          </a:prstGeom>
+          <a:noFill/>
+          <a:ln/>
+        </p:spPr>
+        <p:txBody>
+          <a:bodyPr wrap="square" lIns="0" tIns="0" rIns="0" bIns="0" rtlCol="0" anchor="ctr">
+            <a:normAutofit/>
+          </a:bodyPr>
+          <a:lstStyle/>
+          <a:p>
+            <a:pPr indent="0" marL="0">
+              <a:buNone/>
+            </a:pPr>
+            <a:r>
+              <a:rPr lang="en-US" sz="1050" dirty="0">
+                <a:solidFill>
+                  <a:srgbClr val="96A9C2"/>
+                </a:solidFill>
+              </a:rPr>
+              <a:t>RenderItem + Bounds</a:t>
+            </a:r>
+            <a:endParaRPr lang="en-US" sz="1050" dirty="0"/>
+          </a:p>
+          <a:p>
+            <a:pPr indent="0" marL="0">
+              <a:buNone/>
+            </a:pPr>
+            <a:r>
+              <a:rPr lang="en-US" sz="1050" dirty="0">
+                <a:solidFill>
+                  <a:srgbClr val="96A9C2"/>
+                </a:solidFill>
+              </a:rPr>
+              <a:t>视锥裁剪 + 状态排序</a:t>
+            </a:r>
+            <a:endParaRPr lang="en-US" sz="1050" dirty="0"/>
+          </a:p>
+        </p:txBody>
+      </p:sp>
+      <p:sp>
+        <p:nvSpPr>
+          <p:cNvPr id="13" name="Shape 11"/>
+          <p:cNvSpPr/>
+          <p:nvPr/>
+        </p:nvSpPr>
+        <p:spPr>
+          <a:xfrm>
+            <a:off x="4892040" y="2889504"/>
+            <a:ext cx="256032" cy="0"/>
+          </a:xfrm>
+          <a:prstGeom prst="line">
+            <a:avLst/>
+          </a:prstGeom>
+          <a:noFill/>
+          <a:ln w="17780">
+            <a:solidFill>
+              <a:srgbClr val="5EE2A0"/>
+            </a:solidFill>
+            <a:prstDash val="solid"/>
+            <a:headEnd type="none"/>
+            <a:tailEnd type="triangle"/>
+          </a:ln>
+        </p:spPr>
+      </p:sp>
+      <p:sp>
+        <p:nvSpPr>
+          <p:cNvPr id="14" name="Shape 12"/>
+          <p:cNvSpPr/>
+          <p:nvPr/>
+        </p:nvSpPr>
+        <p:spPr>
+          <a:xfrm>
+            <a:off x="5193792" y="1417320"/>
+            <a:ext cx="1993392" cy="2971800"/>
+          </a:xfrm>
+          <a:prstGeom prst="roundRect">
+            <a:avLst/>
+          </a:prstGeom>
+          <a:solidFill>
+            <a:srgbClr val="0F1C2E"/>
+          </a:solidFill>
+          <a:ln w="17780">
+            <a:solidFill>
+              <a:srgbClr val="5EE2A0"/>
+            </a:solidFill>
+            <a:prstDash val="solid"/>
+          </a:ln>
+        </p:spPr>
+      </p:sp>
+      <p:sp>
+        <p:nvSpPr>
+          <p:cNvPr id="15" name="Text 13"/>
+          <p:cNvSpPr/>
+          <p:nvPr/>
+        </p:nvSpPr>
+        <p:spPr>
+          <a:xfrm>
+            <a:off x="5358384" y="1627632"/>
+            <a:ext cx="502920" cy="329184"/>
+          </a:xfrm>
+          <a:prstGeom prst="rect">
+            <a:avLst/>
+          </a:prstGeom>
+          <a:noFill/>
+          <a:ln/>
+        </p:spPr>
+        <p:txBody>
+          <a:bodyPr wrap="square" lIns="0" tIns="0" rIns="0" bIns="0" rtlCol="0" anchor="ctr"/>
+          <a:lstStyle/>
+          <a:p>
+            <a:pPr indent="0" marL="0">
+              <a:buNone/>
+            </a:pPr>
+            <a:r>
+              <a:rPr lang="en-US" sz="1800" b="1" dirty="0">
+                <a:solidFill>
+                  <a:srgbClr val="5EE2A0"/>
+                </a:solidFill>
+              </a:rPr>
+              <a:t>P2 ✓</a:t>
+            </a:r>
+            <a:endParaRPr lang="en-US" sz="1800" dirty="0"/>
+          </a:p>
+        </p:txBody>
+      </p:sp>
+      <p:sp>
+        <p:nvSpPr>
+          <p:cNvPr id="16" name="Text 14"/>
+          <p:cNvSpPr/>
+          <p:nvPr/>
+        </p:nvSpPr>
+        <p:spPr>
+          <a:xfrm>
+            <a:off x="5358384" y="2121408"/>
+            <a:ext cx="1664208" cy="457200"/>
+          </a:xfrm>
+          <a:prstGeom prst="rect">
+            <a:avLst/>
+          </a:prstGeom>
+          <a:noFill/>
+          <a:ln/>
+        </p:spPr>
+        <p:txBody>
+          <a:bodyPr wrap="square" lIns="0" tIns="0" rIns="0" bIns="0" rtlCol="0" anchor="ctr">
+            <a:normAutofit/>
+          </a:bodyPr>
+          <a:lstStyle/>
+          <a:p>
+            <a:pPr indent="0" marL="0">
+              <a:buNone/>
+            </a:pPr>
+            <a:r>
+              <a:rPr lang="en-US" sz="1400" b="1" dirty="0">
+                <a:solidFill>
+                  <a:srgbClr val="E9F2FF"/>
+                </a:solidFill>
+              </a:rPr>
+              <a:t>Shader System</a:t>
+            </a:r>
+            <a:endParaRPr lang="en-US" sz="1400" dirty="0"/>
+          </a:p>
+        </p:txBody>
+      </p:sp>
+      <p:sp>
+        <p:nvSpPr>
+          <p:cNvPr id="17" name="Text 15"/>
+          <p:cNvSpPr/>
+          <p:nvPr/>
+        </p:nvSpPr>
+        <p:spPr>
+          <a:xfrm>
+            <a:off x="5358384" y="2852928"/>
+            <a:ext cx="1664208" cy="960120"/>
+          </a:xfrm>
+          <a:prstGeom prst="rect">
+            <a:avLst/>
+          </a:prstGeom>
+          <a:noFill/>
+          <a:ln/>
+        </p:spPr>
+        <p:txBody>
+          <a:bodyPr wrap="square" lIns="0" tIns="0" rIns="0" bIns="0" rtlCol="0" anchor="ctr">
+            <a:normAutofit/>
+          </a:bodyPr>
+          <a:lstStyle/>
+          <a:p>
+            <a:pPr indent="0" marL="0">
+              <a:buNone/>
+            </a:pPr>
+            <a:r>
+              <a:rPr lang="en-US" sz="1050" dirty="0">
+                <a:solidFill>
+                  <a:srgbClr val="96A9C2"/>
+                </a:solidFill>
+              </a:rPr>
+              <a:t>外置源码 / Technique</a:t>
+            </a:r>
+            <a:endParaRPr lang="en-US" sz="1050" dirty="0"/>
+          </a:p>
+          <a:p>
+            <a:pPr indent="0" marL="0">
+              <a:buNone/>
+            </a:pPr>
+            <a:r>
+              <a:rPr lang="en-US" sz="1050" dirty="0">
+                <a:solidFill>
+                  <a:srgbClr val="96A9C2"/>
+                </a:solidFill>
+              </a:rPr>
+              <a:t>Variant + Hot Reload</a:t>
+            </a:r>
+            <a:endParaRPr lang="en-US" sz="1050" dirty="0"/>
+          </a:p>
+        </p:txBody>
+      </p:sp>
+      <p:sp>
+        <p:nvSpPr>
+          <p:cNvPr id="18" name="Shape 16"/>
+          <p:cNvSpPr/>
+          <p:nvPr/>
+        </p:nvSpPr>
+        <p:spPr>
+          <a:xfrm>
+            <a:off x="7205472" y="2889504"/>
+            <a:ext cx="256032" cy="0"/>
+          </a:xfrm>
+          <a:prstGeom prst="line">
+            <a:avLst/>
+          </a:prstGeom>
+          <a:noFill/>
+          <a:ln w="17780">
+            <a:solidFill>
+              <a:srgbClr val="5EE2A0"/>
+            </a:solidFill>
+            <a:prstDash val="solid"/>
+            <a:headEnd type="none"/>
+            <a:tailEnd type="triangle"/>
+          </a:ln>
+        </p:spPr>
+      </p:sp>
+      <p:sp>
+        <p:nvSpPr>
+          <p:cNvPr id="19" name="Shape 17"/>
+          <p:cNvSpPr/>
+          <p:nvPr/>
+        </p:nvSpPr>
+        <p:spPr>
+          <a:xfrm>
+            <a:off x="7507224" y="1417320"/>
+            <a:ext cx="1993392" cy="2971800"/>
+          </a:xfrm>
+          <a:prstGeom prst="roundRect">
+            <a:avLst/>
+          </a:prstGeom>
+          <a:solidFill>
+            <a:srgbClr val="0F1C2E"/>
+          </a:solidFill>
+          <a:ln w="17780">
+            <a:solidFill>
+              <a:srgbClr val="21D4FD"/>
+            </a:solidFill>
+            <a:prstDash val="solid"/>
+          </a:ln>
+        </p:spPr>
+      </p:sp>
+      <p:sp>
+        <p:nvSpPr>
+          <p:cNvPr id="20" name="Text 18"/>
+          <p:cNvSpPr/>
+          <p:nvPr/>
+        </p:nvSpPr>
+        <p:spPr>
+          <a:xfrm>
+            <a:off x="7671816" y="1627632"/>
+            <a:ext cx="502920" cy="329184"/>
+          </a:xfrm>
+          <a:prstGeom prst="rect">
+            <a:avLst/>
+          </a:prstGeom>
+          <a:noFill/>
+          <a:ln/>
+        </p:spPr>
+        <p:txBody>
+          <a:bodyPr wrap="square" lIns="0" tIns="0" rIns="0" bIns="0" rtlCol="0" anchor="ctr"/>
+          <a:lstStyle/>
+          <a:p>
+            <a:pPr indent="0" marL="0">
+              <a:buNone/>
+            </a:pPr>
+            <a:r>
+              <a:rPr lang="en-US" sz="1800" b="1" dirty="0">
                 <a:solidFill>
                   <a:srgbClr val="21D4FD"/>
                 </a:solidFill>
               </a:rPr>
-              <a:t>从“能画出来”走向“能持续演进”</a:t>
-            </a:r>
-            <a:endParaRPr lang="en-US" sz="2000" dirty="0"/>
-          </a:p>
-        </p:txBody>
-      </p:sp>
-      <p:sp>
-        <p:nvSpPr>
-          <p:cNvPr id="4" name="Shape 2"/>
-          <p:cNvSpPr/>
-          <p:nvPr/>
-        </p:nvSpPr>
-        <p:spPr>
-          <a:xfrm>
-            <a:off x="658368" y="2743200"/>
-            <a:ext cx="3383280" cy="1874520"/>
+              <a:t>P3</a:t>
+            </a:r>
+            <a:endParaRPr lang="en-US" sz="1800" dirty="0"/>
+          </a:p>
+        </p:txBody>
+      </p:sp>
+      <p:sp>
+        <p:nvSpPr>
+          <p:cNvPr id="21" name="Text 19"/>
+          <p:cNvSpPr/>
+          <p:nvPr/>
+        </p:nvSpPr>
+        <p:spPr>
+          <a:xfrm>
+            <a:off x="7671816" y="2121408"/>
+            <a:ext cx="1664208" cy="457200"/>
+          </a:xfrm>
+          <a:prstGeom prst="rect">
+            <a:avLst/>
+          </a:prstGeom>
+          <a:noFill/>
+          <a:ln/>
+        </p:spPr>
+        <p:txBody>
+          <a:bodyPr wrap="square" lIns="0" tIns="0" rIns="0" bIns="0" rtlCol="0" anchor="ctr">
+            <a:normAutofit/>
+          </a:bodyPr>
+          <a:lstStyle/>
+          <a:p>
+            <a:pPr indent="0" marL="0">
+              <a:buNone/>
+            </a:pPr>
+            <a:r>
+              <a:rPr lang="en-US" sz="1400" b="1" dirty="0">
+                <a:solidFill>
+                  <a:srgbClr val="E9F2FF"/>
+                </a:solidFill>
+              </a:rPr>
+              <a:t>RenderGraph 2.0</a:t>
+            </a:r>
+            <a:endParaRPr lang="en-US" sz="1400" dirty="0"/>
+          </a:p>
+        </p:txBody>
+      </p:sp>
+      <p:sp>
+        <p:nvSpPr>
+          <p:cNvPr id="22" name="Text 20"/>
+          <p:cNvSpPr/>
+          <p:nvPr/>
+        </p:nvSpPr>
+        <p:spPr>
+          <a:xfrm>
+            <a:off x="7671816" y="2852928"/>
+            <a:ext cx="1664208" cy="960120"/>
+          </a:xfrm>
+          <a:prstGeom prst="rect">
+            <a:avLst/>
+          </a:prstGeom>
+          <a:noFill/>
+          <a:ln/>
+        </p:spPr>
+        <p:txBody>
+          <a:bodyPr wrap="square" lIns="0" tIns="0" rIns="0" bIns="0" rtlCol="0" anchor="ctr">
+            <a:normAutofit/>
+          </a:bodyPr>
+          <a:lstStyle/>
+          <a:p>
+            <a:pPr indent="0" marL="0">
+              <a:buNone/>
+            </a:pPr>
+            <a:r>
+              <a:rPr lang="en-US" sz="1050" dirty="0">
+                <a:solidFill>
+                  <a:srgbClr val="96A9C2"/>
+                </a:solidFill>
+              </a:rPr>
+              <a:t>资源读写依赖</a:t>
+            </a:r>
+            <a:endParaRPr lang="en-US" sz="1050" dirty="0"/>
+          </a:p>
+          <a:p>
+            <a:pPr indent="0" marL="0">
+              <a:buNone/>
+            </a:pPr>
+            <a:r>
+              <a:rPr lang="en-US" sz="1050" dirty="0">
+                <a:solidFill>
+                  <a:srgbClr val="96A9C2"/>
+                </a:solidFill>
+              </a:rPr>
+              <a:t>自动排序 + TargetPool</a:t>
+            </a:r>
+            <a:endParaRPr lang="en-US" sz="1050" dirty="0"/>
+          </a:p>
+        </p:txBody>
+      </p:sp>
+      <p:sp>
+        <p:nvSpPr>
+          <p:cNvPr id="23" name="Shape 21"/>
+          <p:cNvSpPr/>
+          <p:nvPr/>
+        </p:nvSpPr>
+        <p:spPr>
+          <a:xfrm>
+            <a:off x="9518904" y="2889504"/>
+            <a:ext cx="256032" cy="0"/>
+          </a:xfrm>
+          <a:prstGeom prst="line">
+            <a:avLst/>
+          </a:prstGeom>
+          <a:noFill/>
+          <a:ln w="17780">
+            <a:solidFill>
+              <a:srgbClr val="21D4FD"/>
+            </a:solidFill>
+            <a:prstDash val="solid"/>
+            <a:headEnd type="none"/>
+            <a:tailEnd type="triangle"/>
+          </a:ln>
+        </p:spPr>
+      </p:sp>
+      <p:sp>
+        <p:nvSpPr>
+          <p:cNvPr id="24" name="Shape 22"/>
+          <p:cNvSpPr/>
+          <p:nvPr/>
+        </p:nvSpPr>
+        <p:spPr>
+          <a:xfrm>
+            <a:off x="9820656" y="1417320"/>
+            <a:ext cx="1993392" cy="2971800"/>
+          </a:xfrm>
+          <a:prstGeom prst="roundRect">
+            <a:avLst/>
+          </a:prstGeom>
+          <a:solidFill>
+            <a:srgbClr val="0F1C2E"/>
+          </a:solidFill>
+          <a:ln w="17780">
+            <a:solidFill>
+              <a:srgbClr val="B78CFF"/>
+            </a:solidFill>
+            <a:prstDash val="solid"/>
+          </a:ln>
+        </p:spPr>
+      </p:sp>
+      <p:sp>
+        <p:nvSpPr>
+          <p:cNvPr id="25" name="Text 23"/>
+          <p:cNvSpPr/>
+          <p:nvPr/>
+        </p:nvSpPr>
+        <p:spPr>
+          <a:xfrm>
+            <a:off x="9985248" y="1627632"/>
+            <a:ext cx="502920" cy="329184"/>
+          </a:xfrm>
+          <a:prstGeom prst="rect">
+            <a:avLst/>
+          </a:prstGeom>
+          <a:noFill/>
+          <a:ln/>
+        </p:spPr>
+        <p:txBody>
+          <a:bodyPr wrap="square" lIns="0" tIns="0" rIns="0" bIns="0" rtlCol="0" anchor="ctr"/>
+          <a:lstStyle/>
+          <a:p>
+            <a:pPr indent="0" marL="0">
+              <a:buNone/>
+            </a:pPr>
+            <a:r>
+              <a:rPr lang="en-US" sz="1800" b="1" dirty="0">
+                <a:solidFill>
+                  <a:srgbClr val="B78CFF"/>
+                </a:solidFill>
+              </a:rPr>
+              <a:t>P4</a:t>
+            </a:r>
+            <a:endParaRPr lang="en-US" sz="1800" dirty="0"/>
+          </a:p>
+        </p:txBody>
+      </p:sp>
+      <p:sp>
+        <p:nvSpPr>
+          <p:cNvPr id="26" name="Text 24"/>
+          <p:cNvSpPr/>
+          <p:nvPr/>
+        </p:nvSpPr>
+        <p:spPr>
+          <a:xfrm>
+            <a:off x="9985248" y="2121408"/>
+            <a:ext cx="1664208" cy="457200"/>
+          </a:xfrm>
+          <a:prstGeom prst="rect">
+            <a:avLst/>
+          </a:prstGeom>
+          <a:noFill/>
+          <a:ln/>
+        </p:spPr>
+        <p:txBody>
+          <a:bodyPr wrap="square" lIns="0" tIns="0" rIns="0" bIns="0" rtlCol="0" anchor="ctr">
+            <a:normAutofit/>
+          </a:bodyPr>
+          <a:lstStyle/>
+          <a:p>
+            <a:pPr indent="0" marL="0">
+              <a:buNone/>
+            </a:pPr>
+            <a:r>
+              <a:rPr lang="en-US" sz="1400" b="1" dirty="0">
+                <a:solidFill>
+                  <a:srgbClr val="E9F2FF"/>
+                </a:solidFill>
+              </a:rPr>
+              <a:t>Advanced Rendering</a:t>
+            </a:r>
+            <a:endParaRPr lang="en-US" sz="1400" dirty="0"/>
+          </a:p>
+        </p:txBody>
+      </p:sp>
+      <p:sp>
+        <p:nvSpPr>
+          <p:cNvPr id="27" name="Text 25"/>
+          <p:cNvSpPr/>
+          <p:nvPr/>
+        </p:nvSpPr>
+        <p:spPr>
+          <a:xfrm>
+            <a:off x="9985248" y="2852928"/>
+            <a:ext cx="1664208" cy="960120"/>
+          </a:xfrm>
+          <a:prstGeom prst="rect">
+            <a:avLst/>
+          </a:prstGeom>
+          <a:noFill/>
+          <a:ln/>
+        </p:spPr>
+        <p:txBody>
+          <a:bodyPr wrap="square" lIns="0" tIns="0" rIns="0" bIns="0" rtlCol="0" anchor="ctr">
+            <a:normAutofit/>
+          </a:bodyPr>
+          <a:lstStyle/>
+          <a:p>
+            <a:pPr indent="0" marL="0">
+              <a:buNone/>
+            </a:pPr>
+            <a:r>
+              <a:rPr lang="en-US" sz="1050" dirty="0">
+                <a:solidFill>
+                  <a:srgbClr val="96A9C2"/>
+                </a:solidFill>
+              </a:rPr>
+              <a:t>CSM / Skin / Alpha</a:t>
+            </a:r>
+            <a:endParaRPr lang="en-US" sz="1050" dirty="0"/>
+          </a:p>
+          <a:p>
+            <a:pPr indent="0" marL="0">
+              <a:buNone/>
+            </a:pPr>
+            <a:r>
+              <a:rPr lang="en-US" sz="1050" dirty="0">
+                <a:solidFill>
+                  <a:srgbClr val="96A9C2"/>
+                </a:solidFill>
+              </a:rPr>
+              <a:t>SSAO / TAA / Profiler</a:t>
+            </a:r>
+            <a:endParaRPr lang="en-US" sz="1050" dirty="0"/>
+          </a:p>
+        </p:txBody>
+      </p:sp>
+      <p:sp>
+        <p:nvSpPr>
+          <p:cNvPr id="28" name="Shape 26"/>
+          <p:cNvSpPr/>
+          <p:nvPr/>
+        </p:nvSpPr>
+        <p:spPr>
+          <a:xfrm>
+            <a:off x="658368" y="4846320"/>
+            <a:ext cx="5394960" cy="960120"/>
           </a:xfrm>
           <a:prstGeom prst="roundRect">
             <a:avLst>
-              <a:gd name="adj" fmla="val 2927"/>
+              <a:gd name="adj" fmla="val 5714"/>
             </a:avLst>
           </a:prstGeom>
           <a:solidFill>
@@ -10219,39 +11319,39 @@
       </p:sp>
       <p:sp>
         <p:nvSpPr>
-          <p:cNvPr id="5" name="Shape 3"/>
-          <p:cNvSpPr/>
-          <p:nvPr/>
-        </p:nvSpPr>
-        <p:spPr>
-          <a:xfrm>
-            <a:off x="658368" y="2743200"/>
-            <a:ext cx="54864" cy="1874520"/>
-          </a:xfrm>
-          <a:prstGeom prst="rect">
-            <a:avLst/>
-          </a:prstGeom>
-          <a:solidFill>
-            <a:srgbClr val="5EE2A0"/>
+          <p:cNvPr id="29" name="Shape 27"/>
+          <p:cNvSpPr/>
+          <p:nvPr/>
+        </p:nvSpPr>
+        <p:spPr>
+          <a:xfrm>
+            <a:off x="658368" y="4846320"/>
+            <a:ext cx="54864" cy="960120"/>
+          </a:xfrm>
+          <a:prstGeom prst="rect">
+            <a:avLst/>
+          </a:prstGeom>
+          <a:solidFill>
+            <a:srgbClr val="FF6B7A"/>
           </a:solidFill>
           <a:ln w="12700">
             <a:solidFill>
-              <a:srgbClr val="5EE2A0"/>
-            </a:solidFill>
-            <a:prstDash val="solid"/>
-          </a:ln>
-        </p:spPr>
-      </p:sp>
-      <p:sp>
-        <p:nvSpPr>
-          <p:cNvPr id="6" name="Text 4"/>
-          <p:cNvSpPr/>
-          <p:nvPr/>
-        </p:nvSpPr>
-        <p:spPr>
-          <a:xfrm>
-            <a:off x="859536" y="2907792"/>
-            <a:ext cx="3054096" cy="274320"/>
+              <a:srgbClr val="FF6B7A"/>
+            </a:solidFill>
+            <a:prstDash val="solid"/>
+          </a:ln>
+        </p:spPr>
+      </p:sp>
+      <p:sp>
+        <p:nvSpPr>
+          <p:cNvPr id="30" name="Text 28"/>
+          <p:cNvSpPr/>
+          <p:nvPr/>
+        </p:nvSpPr>
+        <p:spPr>
+          <a:xfrm>
+            <a:off x="859536" y="5010912"/>
+            <a:ext cx="5065776" cy="274320"/>
           </a:xfrm>
           <a:prstGeom prst="rect">
             <a:avLst/>
@@ -10272,7 +11372,7 @@
                   <a:srgbClr val="E9F2FF"/>
                 </a:solidFill>
               </a:rPr>
-              <a:t>已经建立</a:t>
+              <a:t>架构债务</a:t>
             </a:r>
             <a:endParaRPr lang="en-US" sz="1400" dirty="0"/>
           </a:p>
@@ -10280,14 +11380,14 @@
       </p:sp>
       <p:sp>
         <p:nvSpPr>
-          <p:cNvPr id="7" name="Text 5"/>
-          <p:cNvSpPr/>
-          <p:nvPr/>
-        </p:nvSpPr>
-        <p:spPr>
-          <a:xfrm>
-            <a:off x="859536" y="3310128"/>
-            <a:ext cx="3017520" cy="1179576"/>
+          <p:cNvPr id="31" name="Text 29"/>
+          <p:cNvSpPr/>
+          <p:nvPr/>
+        </p:nvSpPr>
+        <p:spPr>
+          <a:xfrm>
+            <a:off x="859536" y="5413248"/>
+            <a:ext cx="5029200" cy="265176"/>
           </a:xfrm>
           <a:prstGeom prst="rect">
             <a:avLst/>
@@ -10310,68 +11410,26 @@
                   <a:srgbClr val="96A9C2"/>
                 </a:solidFill>
               </a:rPr>
-              <a:t>资源缓存与 Asset 拆分</a:t>
-            </a:r>
-            <a:endParaRPr lang="en-US" sz="1050" dirty="0"/>
-          </a:p>
-          <a:p>
-            <a:pPr indent="0" marL="0">
-              <a:buNone/>
-            </a:pPr>
-            <a:r>
-              <a:rPr lang="en-US" sz="1050" dirty="0">
-                <a:solidFill>
-                  <a:srgbClr val="96A9C2"/>
-                </a:solidFill>
-              </a:rPr>
-              <a:t>PBR + IBL + Shadow + HDR</a:t>
-            </a:r>
-            <a:endParaRPr lang="en-US" sz="1050" dirty="0"/>
-          </a:p>
-          <a:p>
-            <a:pPr indent="0" marL="0">
-              <a:buNone/>
-            </a:pPr>
-            <a:r>
-              <a:rPr lang="en-US" sz="1050" dirty="0">
-                <a:solidFill>
-                  <a:srgbClr val="96A9C2"/>
-                </a:solidFill>
-              </a:rPr>
-              <a:t>Renderer / Scene / Material 边界</a:t>
-            </a:r>
-            <a:endParaRPr lang="en-US" sz="1050" dirty="0"/>
-          </a:p>
-          <a:p>
-            <a:pPr indent="0" marL="0">
-              <a:buNone/>
-            </a:pPr>
-            <a:r>
-              <a:rPr lang="en-US" sz="1050" dirty="0">
-                <a:solidFill>
-                  <a:srgbClr val="96A9C2"/>
-                </a:solidFill>
-              </a:rPr>
-              <a:t>日志与运行时诊断</a:t>
-            </a:r>
-            <a:endParaRPr lang="en-US" sz="1050" dirty="0"/>
-          </a:p>
-        </p:txBody>
-      </p:sp>
-      <p:sp>
-        <p:nvSpPr>
-          <p:cNvPr id="8" name="Shape 6"/>
-          <p:cNvSpPr/>
-          <p:nvPr/>
-        </p:nvSpPr>
-        <p:spPr>
-          <a:xfrm>
-            <a:off x="4407408" y="2743200"/>
-            <a:ext cx="3383280" cy="1874520"/>
+              <a:t>Scene/GameObject 裸指针 · RenderContext singleton · ShaderCode.cpp 硬编码 · CMake GLOB</a:t>
+            </a:r>
+            <a:endParaRPr lang="en-US" sz="1050" dirty="0"/>
+          </a:p>
+        </p:txBody>
+      </p:sp>
+      <p:sp>
+        <p:nvSpPr>
+          <p:cNvPr id="32" name="Shape 30"/>
+          <p:cNvSpPr/>
+          <p:nvPr/>
+        </p:nvSpPr>
+        <p:spPr>
+          <a:xfrm>
+            <a:off x="6263640" y="4846320"/>
+            <a:ext cx="5257800" cy="960120"/>
           </a:xfrm>
           <a:prstGeom prst="roundRect">
             <a:avLst>
-              <a:gd name="adj" fmla="val 2927"/>
+              <a:gd name="adj" fmla="val 5714"/>
             </a:avLst>
           </a:prstGeom>
           <a:solidFill>
@@ -10387,39 +11445,39 @@
       </p:sp>
       <p:sp>
         <p:nvSpPr>
-          <p:cNvPr id="9" name="Shape 7"/>
-          <p:cNvSpPr/>
-          <p:nvPr/>
-        </p:nvSpPr>
-        <p:spPr>
-          <a:xfrm>
-            <a:off x="4407408" y="2743200"/>
-            <a:ext cx="54864" cy="1874520"/>
-          </a:xfrm>
-          <a:prstGeom prst="rect">
-            <a:avLst/>
-          </a:prstGeom>
-          <a:solidFill>
-            <a:srgbClr val="21D4FD"/>
+          <p:cNvPr id="33" name="Shape 31"/>
+          <p:cNvSpPr/>
+          <p:nvPr/>
+        </p:nvSpPr>
+        <p:spPr>
+          <a:xfrm>
+            <a:off x="6263640" y="4846320"/>
+            <a:ext cx="54864" cy="960120"/>
+          </a:xfrm>
+          <a:prstGeom prst="rect">
+            <a:avLst/>
+          </a:prstGeom>
+          <a:solidFill>
+            <a:srgbClr val="B78CFF"/>
           </a:solidFill>
           <a:ln w="12700">
             <a:solidFill>
-              <a:srgbClr val="21D4FD"/>
-            </a:solidFill>
-            <a:prstDash val="solid"/>
-          </a:ln>
-        </p:spPr>
-      </p:sp>
-      <p:sp>
-        <p:nvSpPr>
-          <p:cNvPr id="10" name="Text 8"/>
-          <p:cNvSpPr/>
-          <p:nvPr/>
-        </p:nvSpPr>
-        <p:spPr>
-          <a:xfrm>
-            <a:off x="4608576" y="2907792"/>
-            <a:ext cx="3054096" cy="274320"/>
+              <a:srgbClr val="B78CFF"/>
+            </a:solidFill>
+            <a:prstDash val="solid"/>
+          </a:ln>
+        </p:spPr>
+      </p:sp>
+      <p:sp>
+        <p:nvSpPr>
+          <p:cNvPr id="34" name="Text 32"/>
+          <p:cNvSpPr/>
+          <p:nvPr/>
+        </p:nvSpPr>
+        <p:spPr>
+          <a:xfrm>
+            <a:off x="6464808" y="5010912"/>
+            <a:ext cx="4928616" cy="274320"/>
           </a:xfrm>
           <a:prstGeom prst="rect">
             <a:avLst/>
@@ -10440,7 +11498,7 @@
                   <a:srgbClr val="E9F2FF"/>
                 </a:solidFill>
               </a:rPr>
-              <a:t>本轮推进</a:t>
+              <a:t>画面能力缺口</a:t>
             </a:r>
             <a:endParaRPr lang="en-US" sz="1400" dirty="0"/>
           </a:p>
@@ -10448,14 +11506,14 @@
       </p:sp>
       <p:sp>
         <p:nvSpPr>
-          <p:cNvPr id="11" name="Text 9"/>
-          <p:cNvSpPr/>
-          <p:nvPr/>
-        </p:nvSpPr>
-        <p:spPr>
-          <a:xfrm>
-            <a:off x="4608576" y="3310128"/>
-            <a:ext cx="3017520" cy="1179576"/>
+          <p:cNvPr id="35" name="Text 33"/>
+          <p:cNvSpPr/>
+          <p:nvPr/>
+        </p:nvSpPr>
+        <p:spPr>
+          <a:xfrm>
+            <a:off x="6464808" y="5413248"/>
+            <a:ext cx="4892040" cy="265176"/>
           </a:xfrm>
           <a:prstGeom prst="rect">
             <a:avLst/>
@@ -10478,255 +11536,9 @@
                   <a:srgbClr val="96A9C2"/>
                 </a:solidFill>
               </a:rPr>
-              <a:t>共享 GPU MeshResource</a:t>
-            </a:r>
-            <a:endParaRPr lang="en-US" sz="1050" dirty="0"/>
-          </a:p>
-          <a:p>
-            <a:pPr indent="0" marL="0">
-              <a:buNone/>
-            </a:pPr>
-            <a:r>
-              <a:rPr lang="en-US" sz="1050" dirty="0">
-                <a:solidFill>
-                  <a:srgbClr val="96A9C2"/>
-                </a:solidFill>
-              </a:rPr>
-              <a:t>Bounds 与 CPU 内存优化</a:t>
-            </a:r>
-            <a:endParaRPr lang="en-US" sz="1050" dirty="0"/>
-          </a:p>
-          <a:p>
-            <a:pPr indent="0" marL="0">
-              <a:buNone/>
-            </a:pPr>
-            <a:r>
-              <a:rPr lang="en-US" sz="1050" dirty="0">
-                <a:solidFill>
-                  <a:srgbClr val="96A9C2"/>
-                </a:solidFill>
-              </a:rPr>
-              <a:t>RenderQueue / 视锥裁剪</a:t>
-            </a:r>
-            <a:endParaRPr lang="en-US" sz="1050" dirty="0"/>
-          </a:p>
-          <a:p>
-            <a:pPr indent="0" marL="0">
-              <a:buNone/>
-            </a:pPr>
-            <a:r>
-              <a:rPr lang="en-US" sz="1050" dirty="0">
-                <a:solidFill>
-                  <a:srgbClr val="96A9C2"/>
-                </a:solidFill>
-              </a:rPr>
-              <a:t>透明分类与渲染统计</a:t>
-            </a:r>
-            <a:endParaRPr lang="en-US" sz="1050" dirty="0"/>
-          </a:p>
-        </p:txBody>
-      </p:sp>
-      <p:sp>
-        <p:nvSpPr>
-          <p:cNvPr id="12" name="Shape 10"/>
-          <p:cNvSpPr/>
-          <p:nvPr/>
-        </p:nvSpPr>
-        <p:spPr>
-          <a:xfrm>
-            <a:off x="8156448" y="2743200"/>
-            <a:ext cx="3383280" cy="1874520"/>
-          </a:xfrm>
-          <a:prstGeom prst="roundRect">
-            <a:avLst>
-              <a:gd name="adj" fmla="val 2927"/>
-            </a:avLst>
-          </a:prstGeom>
-          <a:solidFill>
-            <a:srgbClr val="0F1C2E"/>
-          </a:solidFill>
-          <a:ln w="12700">
-            <a:solidFill>
-              <a:srgbClr val="29405C"/>
-            </a:solidFill>
-            <a:prstDash val="solid"/>
-          </a:ln>
-        </p:spPr>
-      </p:sp>
-      <p:sp>
-        <p:nvSpPr>
-          <p:cNvPr id="13" name="Shape 11"/>
-          <p:cNvSpPr/>
-          <p:nvPr/>
-        </p:nvSpPr>
-        <p:spPr>
-          <a:xfrm>
-            <a:off x="8156448" y="2743200"/>
-            <a:ext cx="54864" cy="1874520"/>
-          </a:xfrm>
-          <a:prstGeom prst="rect">
-            <a:avLst/>
-          </a:prstGeom>
-          <a:solidFill>
-            <a:srgbClr val="FFB45A"/>
-          </a:solidFill>
-          <a:ln w="12700">
-            <a:solidFill>
-              <a:srgbClr val="FFB45A"/>
-            </a:solidFill>
-            <a:prstDash val="solid"/>
-          </a:ln>
-        </p:spPr>
-      </p:sp>
-      <p:sp>
-        <p:nvSpPr>
-          <p:cNvPr id="14" name="Text 12"/>
-          <p:cNvSpPr/>
-          <p:nvPr/>
-        </p:nvSpPr>
-        <p:spPr>
-          <a:xfrm>
-            <a:off x="8357616" y="2907792"/>
-            <a:ext cx="3054096" cy="274320"/>
-          </a:xfrm>
-          <a:prstGeom prst="rect">
-            <a:avLst/>
-          </a:prstGeom>
-          <a:noFill/>
-          <a:ln/>
-        </p:spPr>
-        <p:txBody>
-          <a:bodyPr wrap="square" lIns="0" tIns="0" rIns="0" bIns="0" rtlCol="0" anchor="ctr"/>
-          <a:lstStyle/>
-          <a:p>
-            <a:pPr indent="0" marL="0">
-              <a:buNone/>
-            </a:pPr>
-            <a:r>
-              <a:rPr lang="en-US" sz="1400" b="1" dirty="0">
-                <a:solidFill>
-                  <a:srgbClr val="E9F2FF"/>
-                </a:solidFill>
-              </a:rPr>
-              <a:t>下一目标</a:t>
-            </a:r>
-            <a:endParaRPr lang="en-US" sz="1400" dirty="0"/>
-          </a:p>
-        </p:txBody>
-      </p:sp>
-      <p:sp>
-        <p:nvSpPr>
-          <p:cNvPr id="15" name="Text 13"/>
-          <p:cNvSpPr/>
-          <p:nvPr/>
-        </p:nvSpPr>
-        <p:spPr>
-          <a:xfrm>
-            <a:off x="8357616" y="3310128"/>
-            <a:ext cx="3017520" cy="1179576"/>
-          </a:xfrm>
-          <a:prstGeom prst="rect">
-            <a:avLst/>
-          </a:prstGeom>
-          <a:noFill/>
-          <a:ln/>
-        </p:spPr>
-        <p:txBody>
-          <a:bodyPr wrap="square" lIns="254" tIns="254" rIns="254" bIns="254" rtlCol="0" anchor="t">
-            <a:normAutofit/>
-          </a:bodyPr>
-          <a:lstStyle/>
-          <a:p>
-            <a:pPr indent="0" marL="0">
-              <a:buNone/>
-            </a:pPr>
-            <a:r>
-              <a:rPr lang="en-US" sz="1050" dirty="0">
-                <a:solidFill>
-                  <a:srgbClr val="96A9C2"/>
-                </a:solidFill>
-              </a:rPr>
-              <a:t>Shader 外置文件</a:t>
-            </a:r>
-            <a:endParaRPr lang="en-US" sz="1050" dirty="0"/>
-          </a:p>
-          <a:p>
-            <a:pPr indent="0" marL="0">
-              <a:buNone/>
-            </a:pPr>
-            <a:r>
-              <a:rPr lang="en-US" sz="1050" dirty="0">
-                <a:solidFill>
-                  <a:srgbClr val="96A9C2"/>
-                </a:solidFill>
-              </a:rPr>
-              <a:t>Technique / ShaderPass</a:t>
-            </a:r>
-            <a:endParaRPr lang="en-US" sz="1050" dirty="0"/>
-          </a:p>
-          <a:p>
-            <a:pPr indent="0" marL="0">
-              <a:buNone/>
-            </a:pPr>
-            <a:r>
-              <a:rPr lang="en-US" sz="1050" dirty="0">
-                <a:solidFill>
-                  <a:srgbClr val="96A9C2"/>
-                </a:solidFill>
-              </a:rPr>
-              <a:t>Variant + Hot Reload</a:t>
-            </a:r>
-            <a:endParaRPr lang="en-US" sz="1050" dirty="0"/>
-          </a:p>
-          <a:p>
-            <a:pPr indent="0" marL="0">
-              <a:buNone/>
-            </a:pPr>
-            <a:r>
-              <a:rPr lang="en-US" sz="1050" dirty="0">
-                <a:solidFill>
-                  <a:srgbClr val="96A9C2"/>
-                </a:solidFill>
-              </a:rPr>
-              <a:t>RenderGraph 资源依赖</a:t>
-            </a:r>
-            <a:endParaRPr lang="en-US" sz="1050" dirty="0"/>
-          </a:p>
-        </p:txBody>
-      </p:sp>
-      <p:sp>
-        <p:nvSpPr>
-          <p:cNvPr id="16" name="Text 14"/>
-          <p:cNvSpPr/>
-          <p:nvPr/>
-        </p:nvSpPr>
-        <p:spPr>
-          <a:xfrm>
-            <a:off x="1005840" y="5440680"/>
-            <a:ext cx="10149840" cy="384048"/>
-          </a:xfrm>
-          <a:prstGeom prst="rect">
-            <a:avLst/>
-          </a:prstGeom>
-          <a:noFill/>
-          <a:ln/>
-        </p:spPr>
-        <p:txBody>
-          <a:bodyPr wrap="square" lIns="0" tIns="0" rIns="0" bIns="0" rtlCol="0" anchor="ctr"/>
-          <a:lstStyle/>
-          <a:p>
-            <a:pPr algn="ctr" indent="0" marL="0">
-              <a:buNone/>
-            </a:pPr>
-            <a:r>
-              <a:rPr lang="en-US" sz="1500" b="1" dirty="0">
-                <a:solidFill>
-                  <a:srgbClr val="E9F2FF"/>
-                </a:solidFill>
-              </a:rPr>
-              <a:t>核心判断：架构的价值不是类更多，而是每个对象只负责一类变化。</a:t>
-            </a:r>
-            <a:endParaRPr lang="en-US" sz="1500" dirty="0"/>
+              <a:t>CSM · glTF Alpha/Transmission/Skin · SSAO/TAA · GPU Profiler</a:t>
+            </a:r>
+            <a:endParaRPr lang="en-US" sz="1050" dirty="0"/>
           </a:p>
         </p:txBody>
       </p:sp>
@@ -10773,6 +11585,691 @@
             <a:fld id="{F7021451-1387-4CA6-816F-3879F97B5CBC}" type="slidenum">
               <a:rPr b="0" lang="en-US"/>
               <a:t>16</a:t>
+            </a:fld>
+            <a:endParaRPr lang="en-US"/>
+          </a:p>
+        </p:txBody>
+      </p:sp>
+    </p:spTree>
+  </p:cSld>
+  <p:clrMapOvr>
+    <a:masterClrMapping/>
+  </p:clrMapOvr>
+</p:sld>
+</file>
+
+<file path=ppt/slides/slide17.xml><?xml version="1.0" encoding="utf-8"?>
+<p:sld xmlns:a="http://schemas.openxmlformats.org/drawingml/2006/main" xmlns:r="http://schemas.openxmlformats.org/officeDocument/2006/relationships" xmlns:p="http://schemas.openxmlformats.org/presentationml/2006/main">
+  <p:cSld name="Slide 17">
+    <p:spTree>
+      <p:nvGrpSpPr>
+        <p:cNvPr id="1" name=""/>
+        <p:cNvGrpSpPr/>
+        <p:nvPr/>
+      </p:nvGrpSpPr>
+      <p:grpSpPr>
+        <a:xfrm>
+          <a:off x="0" y="0"/>
+          <a:ext cx="0" cy="0"/>
+          <a:chOff x="0" y="0"/>
+          <a:chExt cx="0" cy="0"/>
+        </a:xfrm>
+      </p:grpSpPr>
+      <p:sp>
+        <p:nvSpPr>
+          <p:cNvPr id="2" name="Text 0"/>
+          <p:cNvSpPr/>
+          <p:nvPr/>
+        </p:nvSpPr>
+        <p:spPr>
+          <a:xfrm>
+            <a:off x="640080" y="868680"/>
+            <a:ext cx="5029200" cy="640080"/>
+          </a:xfrm>
+          <a:prstGeom prst="rect">
+            <a:avLst/>
+          </a:prstGeom>
+          <a:noFill/>
+          <a:ln/>
+        </p:spPr>
+        <p:txBody>
+          <a:bodyPr wrap="square" lIns="0" tIns="0" rIns="0" bIns="0" rtlCol="0" anchor="ctr"/>
+          <a:lstStyle/>
+          <a:p>
+            <a:pPr indent="0" marL="0">
+              <a:buNone/>
+            </a:pPr>
+            <a:r>
+              <a:rPr lang="en-US" sz="3400" b="1" dirty="0">
+                <a:solidFill>
+                  <a:srgbClr val="E9F2FF"/>
+                </a:solidFill>
+              </a:rPr>
+              <a:t>Render Engine</a:t>
+            </a:r>
+            <a:endParaRPr lang="en-US" sz="3400" dirty="0"/>
+          </a:p>
+        </p:txBody>
+      </p:sp>
+      <p:sp>
+        <p:nvSpPr>
+          <p:cNvPr id="3" name="Text 1"/>
+          <p:cNvSpPr/>
+          <p:nvPr/>
+        </p:nvSpPr>
+        <p:spPr>
+          <a:xfrm>
+            <a:off x="658368" y="1691640"/>
+            <a:ext cx="6217920" cy="457200"/>
+          </a:xfrm>
+          <a:prstGeom prst="rect">
+            <a:avLst/>
+          </a:prstGeom>
+          <a:noFill/>
+          <a:ln/>
+        </p:spPr>
+        <p:txBody>
+          <a:bodyPr wrap="square" lIns="0" tIns="0" rIns="0" bIns="0" rtlCol="0" anchor="ctr"/>
+          <a:lstStyle/>
+          <a:p>
+            <a:pPr indent="0" marL="0">
+              <a:buNone/>
+            </a:pPr>
+            <a:r>
+              <a:rPr lang="en-US" sz="2000" dirty="0">
+                <a:solidFill>
+                  <a:srgbClr val="21D4FD"/>
+                </a:solidFill>
+              </a:rPr>
+              <a:t>从“能画出来”走向“能持续演进”</a:t>
+            </a:r>
+            <a:endParaRPr lang="en-US" sz="2000" dirty="0"/>
+          </a:p>
+        </p:txBody>
+      </p:sp>
+      <p:sp>
+        <p:nvSpPr>
+          <p:cNvPr id="4" name="Shape 2"/>
+          <p:cNvSpPr/>
+          <p:nvPr/>
+        </p:nvSpPr>
+        <p:spPr>
+          <a:xfrm>
+            <a:off x="658368" y="2743200"/>
+            <a:ext cx="3383280" cy="1874520"/>
+          </a:xfrm>
+          <a:prstGeom prst="roundRect">
+            <a:avLst>
+              <a:gd name="adj" fmla="val 2927"/>
+            </a:avLst>
+          </a:prstGeom>
+          <a:solidFill>
+            <a:srgbClr val="0F1C2E"/>
+          </a:solidFill>
+          <a:ln w="12700">
+            <a:solidFill>
+              <a:srgbClr val="29405C"/>
+            </a:solidFill>
+            <a:prstDash val="solid"/>
+          </a:ln>
+        </p:spPr>
+      </p:sp>
+      <p:sp>
+        <p:nvSpPr>
+          <p:cNvPr id="5" name="Shape 3"/>
+          <p:cNvSpPr/>
+          <p:nvPr/>
+        </p:nvSpPr>
+        <p:spPr>
+          <a:xfrm>
+            <a:off x="658368" y="2743200"/>
+            <a:ext cx="54864" cy="1874520"/>
+          </a:xfrm>
+          <a:prstGeom prst="rect">
+            <a:avLst/>
+          </a:prstGeom>
+          <a:solidFill>
+            <a:srgbClr val="5EE2A0"/>
+          </a:solidFill>
+          <a:ln w="12700">
+            <a:solidFill>
+              <a:srgbClr val="5EE2A0"/>
+            </a:solidFill>
+            <a:prstDash val="solid"/>
+          </a:ln>
+        </p:spPr>
+      </p:sp>
+      <p:sp>
+        <p:nvSpPr>
+          <p:cNvPr id="6" name="Text 4"/>
+          <p:cNvSpPr/>
+          <p:nvPr/>
+        </p:nvSpPr>
+        <p:spPr>
+          <a:xfrm>
+            <a:off x="859536" y="2907792"/>
+            <a:ext cx="3054096" cy="274320"/>
+          </a:xfrm>
+          <a:prstGeom prst="rect">
+            <a:avLst/>
+          </a:prstGeom>
+          <a:noFill/>
+          <a:ln/>
+        </p:spPr>
+        <p:txBody>
+          <a:bodyPr wrap="square" lIns="0" tIns="0" rIns="0" bIns="0" rtlCol="0" anchor="ctr"/>
+          <a:lstStyle/>
+          <a:p>
+            <a:pPr indent="0" marL="0">
+              <a:buNone/>
+            </a:pPr>
+            <a:r>
+              <a:rPr lang="en-US" sz="1400" b="1" dirty="0">
+                <a:solidFill>
+                  <a:srgbClr val="E9F2FF"/>
+                </a:solidFill>
+              </a:rPr>
+              <a:t>已经建立</a:t>
+            </a:r>
+            <a:endParaRPr lang="en-US" sz="1400" dirty="0"/>
+          </a:p>
+        </p:txBody>
+      </p:sp>
+      <p:sp>
+        <p:nvSpPr>
+          <p:cNvPr id="7" name="Text 5"/>
+          <p:cNvSpPr/>
+          <p:nvPr/>
+        </p:nvSpPr>
+        <p:spPr>
+          <a:xfrm>
+            <a:off x="859536" y="3310128"/>
+            <a:ext cx="3017520" cy="1179576"/>
+          </a:xfrm>
+          <a:prstGeom prst="rect">
+            <a:avLst/>
+          </a:prstGeom>
+          <a:noFill/>
+          <a:ln/>
+        </p:spPr>
+        <p:txBody>
+          <a:bodyPr wrap="square" lIns="254" tIns="254" rIns="254" bIns="254" rtlCol="0" anchor="t">
+            <a:normAutofit/>
+          </a:bodyPr>
+          <a:lstStyle/>
+          <a:p>
+            <a:pPr indent="0" marL="0">
+              <a:buNone/>
+            </a:pPr>
+            <a:r>
+              <a:rPr lang="en-US" sz="1050" dirty="0">
+                <a:solidFill>
+                  <a:srgbClr val="96A9C2"/>
+                </a:solidFill>
+              </a:rPr>
+              <a:t>资源缓存与 Asset 拆分</a:t>
+            </a:r>
+            <a:endParaRPr lang="en-US" sz="1050" dirty="0"/>
+          </a:p>
+          <a:p>
+            <a:pPr indent="0" marL="0">
+              <a:buNone/>
+            </a:pPr>
+            <a:r>
+              <a:rPr lang="en-US" sz="1050" dirty="0">
+                <a:solidFill>
+                  <a:srgbClr val="96A9C2"/>
+                </a:solidFill>
+              </a:rPr>
+              <a:t>PBR + IBL + Shadow + HDR</a:t>
+            </a:r>
+            <a:endParaRPr lang="en-US" sz="1050" dirty="0"/>
+          </a:p>
+          <a:p>
+            <a:pPr indent="0" marL="0">
+              <a:buNone/>
+            </a:pPr>
+            <a:r>
+              <a:rPr lang="en-US" sz="1050" dirty="0">
+                <a:solidFill>
+                  <a:srgbClr val="96A9C2"/>
+                </a:solidFill>
+              </a:rPr>
+              <a:t>Renderer / Scene / Material 边界</a:t>
+            </a:r>
+            <a:endParaRPr lang="en-US" sz="1050" dirty="0"/>
+          </a:p>
+          <a:p>
+            <a:pPr indent="0" marL="0">
+              <a:buNone/>
+            </a:pPr>
+            <a:r>
+              <a:rPr lang="en-US" sz="1050" dirty="0">
+                <a:solidFill>
+                  <a:srgbClr val="96A9C2"/>
+                </a:solidFill>
+              </a:rPr>
+              <a:t>日志与运行时诊断</a:t>
+            </a:r>
+            <a:endParaRPr lang="en-US" sz="1050" dirty="0"/>
+          </a:p>
+        </p:txBody>
+      </p:sp>
+      <p:sp>
+        <p:nvSpPr>
+          <p:cNvPr id="8" name="Shape 6"/>
+          <p:cNvSpPr/>
+          <p:nvPr/>
+        </p:nvSpPr>
+        <p:spPr>
+          <a:xfrm>
+            <a:off x="4407408" y="2743200"/>
+            <a:ext cx="3383280" cy="1874520"/>
+          </a:xfrm>
+          <a:prstGeom prst="roundRect">
+            <a:avLst>
+              <a:gd name="adj" fmla="val 2927"/>
+            </a:avLst>
+          </a:prstGeom>
+          <a:solidFill>
+            <a:srgbClr val="0F1C2E"/>
+          </a:solidFill>
+          <a:ln w="12700">
+            <a:solidFill>
+              <a:srgbClr val="29405C"/>
+            </a:solidFill>
+            <a:prstDash val="solid"/>
+          </a:ln>
+        </p:spPr>
+      </p:sp>
+      <p:sp>
+        <p:nvSpPr>
+          <p:cNvPr id="9" name="Shape 7"/>
+          <p:cNvSpPr/>
+          <p:nvPr/>
+        </p:nvSpPr>
+        <p:spPr>
+          <a:xfrm>
+            <a:off x="4407408" y="2743200"/>
+            <a:ext cx="54864" cy="1874520"/>
+          </a:xfrm>
+          <a:prstGeom prst="rect">
+            <a:avLst/>
+          </a:prstGeom>
+          <a:solidFill>
+            <a:srgbClr val="21D4FD"/>
+          </a:solidFill>
+          <a:ln w="12700">
+            <a:solidFill>
+              <a:srgbClr val="21D4FD"/>
+            </a:solidFill>
+            <a:prstDash val="solid"/>
+          </a:ln>
+        </p:spPr>
+      </p:sp>
+      <p:sp>
+        <p:nvSpPr>
+          <p:cNvPr id="10" name="Text 8"/>
+          <p:cNvSpPr/>
+          <p:nvPr/>
+        </p:nvSpPr>
+        <p:spPr>
+          <a:xfrm>
+            <a:off x="4608576" y="2907792"/>
+            <a:ext cx="3054096" cy="274320"/>
+          </a:xfrm>
+          <a:prstGeom prst="rect">
+            <a:avLst/>
+          </a:prstGeom>
+          <a:noFill/>
+          <a:ln/>
+        </p:spPr>
+        <p:txBody>
+          <a:bodyPr wrap="square" lIns="0" tIns="0" rIns="0" bIns="0" rtlCol="0" anchor="ctr"/>
+          <a:lstStyle/>
+          <a:p>
+            <a:pPr indent="0" marL="0">
+              <a:buNone/>
+            </a:pPr>
+            <a:r>
+              <a:rPr lang="en-US" sz="1400" b="1" dirty="0">
+                <a:solidFill>
+                  <a:srgbClr val="E9F2FF"/>
+                </a:solidFill>
+              </a:rPr>
+              <a:t>本轮推进</a:t>
+            </a:r>
+            <a:endParaRPr lang="en-US" sz="1400" dirty="0"/>
+          </a:p>
+        </p:txBody>
+      </p:sp>
+      <p:sp>
+        <p:nvSpPr>
+          <p:cNvPr id="11" name="Text 9"/>
+          <p:cNvSpPr/>
+          <p:nvPr/>
+        </p:nvSpPr>
+        <p:spPr>
+          <a:xfrm>
+            <a:off x="4608576" y="3310128"/>
+            <a:ext cx="3017520" cy="1179576"/>
+          </a:xfrm>
+          <a:prstGeom prst="rect">
+            <a:avLst/>
+          </a:prstGeom>
+          <a:noFill/>
+          <a:ln/>
+        </p:spPr>
+        <p:txBody>
+          <a:bodyPr wrap="square" lIns="254" tIns="254" rIns="254" bIns="254" rtlCol="0" anchor="t">
+            <a:normAutofit/>
+          </a:bodyPr>
+          <a:lstStyle/>
+          <a:p>
+            <a:pPr indent="0" marL="0">
+              <a:buNone/>
+            </a:pPr>
+            <a:r>
+              <a:rPr lang="en-US" sz="1050" dirty="0">
+                <a:solidFill>
+                  <a:srgbClr val="96A9C2"/>
+                </a:solidFill>
+              </a:rPr>
+              <a:t>Shader 全面外置</a:t>
+            </a:r>
+            <a:endParaRPr lang="en-US" sz="1050" dirty="0"/>
+          </a:p>
+          <a:p>
+            <a:pPr indent="0" marL="0">
+              <a:buNone/>
+            </a:pPr>
+            <a:r>
+              <a:rPr lang="en-US" sz="1050" dirty="0">
+                <a:solidFill>
+                  <a:srgbClr val="96A9C2"/>
+                </a:solidFill>
+              </a:rPr>
+              <a:t>Technique / ShaderPass</a:t>
+            </a:r>
+            <a:endParaRPr lang="en-US" sz="1050" dirty="0"/>
+          </a:p>
+          <a:p>
+            <a:pPr indent="0" marL="0">
+              <a:buNone/>
+            </a:pPr>
+            <a:r>
+              <a:rPr lang="en-US" sz="1050" dirty="0">
+                <a:solidFill>
+                  <a:srgbClr val="96A9C2"/>
+                </a:solidFill>
+              </a:rPr>
+              <a:t>宏 Variant Program Cache</a:t>
+            </a:r>
+            <a:endParaRPr lang="en-US" sz="1050" dirty="0"/>
+          </a:p>
+          <a:p>
+            <a:pPr indent="0" marL="0">
+              <a:buNone/>
+            </a:pPr>
+            <a:r>
+              <a:rPr lang="en-US" sz="1050" dirty="0">
+                <a:solidFill>
+                  <a:srgbClr val="96A9C2"/>
+                </a:solidFill>
+              </a:rPr>
+              <a:t>安全热重载与失败回退</a:t>
+            </a:r>
+            <a:endParaRPr lang="en-US" sz="1050" dirty="0"/>
+          </a:p>
+        </p:txBody>
+      </p:sp>
+      <p:sp>
+        <p:nvSpPr>
+          <p:cNvPr id="12" name="Shape 10"/>
+          <p:cNvSpPr/>
+          <p:nvPr/>
+        </p:nvSpPr>
+        <p:spPr>
+          <a:xfrm>
+            <a:off x="8156448" y="2743200"/>
+            <a:ext cx="3383280" cy="1874520"/>
+          </a:xfrm>
+          <a:prstGeom prst="roundRect">
+            <a:avLst>
+              <a:gd name="adj" fmla="val 2927"/>
+            </a:avLst>
+          </a:prstGeom>
+          <a:solidFill>
+            <a:srgbClr val="0F1C2E"/>
+          </a:solidFill>
+          <a:ln w="12700">
+            <a:solidFill>
+              <a:srgbClr val="29405C"/>
+            </a:solidFill>
+            <a:prstDash val="solid"/>
+          </a:ln>
+        </p:spPr>
+      </p:sp>
+      <p:sp>
+        <p:nvSpPr>
+          <p:cNvPr id="13" name="Shape 11"/>
+          <p:cNvSpPr/>
+          <p:nvPr/>
+        </p:nvSpPr>
+        <p:spPr>
+          <a:xfrm>
+            <a:off x="8156448" y="2743200"/>
+            <a:ext cx="54864" cy="1874520"/>
+          </a:xfrm>
+          <a:prstGeom prst="rect">
+            <a:avLst/>
+          </a:prstGeom>
+          <a:solidFill>
+            <a:srgbClr val="FFB45A"/>
+          </a:solidFill>
+          <a:ln w="12700">
+            <a:solidFill>
+              <a:srgbClr val="FFB45A"/>
+            </a:solidFill>
+            <a:prstDash val="solid"/>
+          </a:ln>
+        </p:spPr>
+      </p:sp>
+      <p:sp>
+        <p:nvSpPr>
+          <p:cNvPr id="14" name="Text 12"/>
+          <p:cNvSpPr/>
+          <p:nvPr/>
+        </p:nvSpPr>
+        <p:spPr>
+          <a:xfrm>
+            <a:off x="8357616" y="2907792"/>
+            <a:ext cx="3054096" cy="274320"/>
+          </a:xfrm>
+          <a:prstGeom prst="rect">
+            <a:avLst/>
+          </a:prstGeom>
+          <a:noFill/>
+          <a:ln/>
+        </p:spPr>
+        <p:txBody>
+          <a:bodyPr wrap="square" lIns="0" tIns="0" rIns="0" bIns="0" rtlCol="0" anchor="ctr"/>
+          <a:lstStyle/>
+          <a:p>
+            <a:pPr indent="0" marL="0">
+              <a:buNone/>
+            </a:pPr>
+            <a:r>
+              <a:rPr lang="en-US" sz="1400" b="1" dirty="0">
+                <a:solidFill>
+                  <a:srgbClr val="E9F2FF"/>
+                </a:solidFill>
+              </a:rPr>
+              <a:t>下一目标</a:t>
+            </a:r>
+            <a:endParaRPr lang="en-US" sz="1400" dirty="0"/>
+          </a:p>
+        </p:txBody>
+      </p:sp>
+      <p:sp>
+        <p:nvSpPr>
+          <p:cNvPr id="15" name="Text 13"/>
+          <p:cNvSpPr/>
+          <p:nvPr/>
+        </p:nvSpPr>
+        <p:spPr>
+          <a:xfrm>
+            <a:off x="8357616" y="3310128"/>
+            <a:ext cx="3017520" cy="1179576"/>
+          </a:xfrm>
+          <a:prstGeom prst="rect">
+            <a:avLst/>
+          </a:prstGeom>
+          <a:noFill/>
+          <a:ln/>
+        </p:spPr>
+        <p:txBody>
+          <a:bodyPr wrap="square" lIns="254" tIns="254" rIns="254" bIns="254" rtlCol="0" anchor="t">
+            <a:normAutofit/>
+          </a:bodyPr>
+          <a:lstStyle/>
+          <a:p>
+            <a:pPr indent="0" marL="0">
+              <a:buNone/>
+            </a:pPr>
+            <a:r>
+              <a:rPr lang="en-US" sz="1050" dirty="0">
+                <a:solidFill>
+                  <a:srgbClr val="96A9C2"/>
+                </a:solidFill>
+              </a:rPr>
+              <a:t>RenderGraph 资源句柄</a:t>
+            </a:r>
+            <a:endParaRPr lang="en-US" sz="1050" dirty="0"/>
+          </a:p>
+          <a:p>
+            <a:pPr indent="0" marL="0">
+              <a:buNone/>
+            </a:pPr>
+            <a:r>
+              <a:rPr lang="en-US" sz="1050" dirty="0">
+                <a:solidFill>
+                  <a:srgbClr val="96A9C2"/>
+                </a:solidFill>
+              </a:rPr>
+              <a:t>Pass 读写依赖</a:t>
+            </a:r>
+            <a:endParaRPr lang="en-US" sz="1050" dirty="0"/>
+          </a:p>
+          <a:p>
+            <a:pPr indent="0" marL="0">
+              <a:buNone/>
+            </a:pPr>
+            <a:r>
+              <a:rPr lang="en-US" sz="1050" dirty="0">
+                <a:solidFill>
+                  <a:srgbClr val="96A9C2"/>
+                </a:solidFill>
+              </a:rPr>
+              <a:t>自动排序 / TargetPool</a:t>
+            </a:r>
+            <a:endParaRPr lang="en-US" sz="1050" dirty="0"/>
+          </a:p>
+          <a:p>
+            <a:pPr indent="0" marL="0">
+              <a:buNone/>
+            </a:pPr>
+            <a:r>
+              <a:rPr lang="en-US" sz="1050" dirty="0">
+                <a:solidFill>
+                  <a:srgbClr val="96A9C2"/>
+                </a:solidFill>
+              </a:rPr>
+              <a:t>CSM 与 glTF Alpha</a:t>
+            </a:r>
+            <a:endParaRPr lang="en-US" sz="1050" dirty="0"/>
+          </a:p>
+        </p:txBody>
+      </p:sp>
+      <p:sp>
+        <p:nvSpPr>
+          <p:cNvPr id="16" name="Text 14"/>
+          <p:cNvSpPr/>
+          <p:nvPr/>
+        </p:nvSpPr>
+        <p:spPr>
+          <a:xfrm>
+            <a:off x="1005840" y="5440680"/>
+            <a:ext cx="10149840" cy="384048"/>
+          </a:xfrm>
+          <a:prstGeom prst="rect">
+            <a:avLst/>
+          </a:prstGeom>
+          <a:noFill/>
+          <a:ln/>
+        </p:spPr>
+        <p:txBody>
+          <a:bodyPr wrap="square" lIns="0" tIns="0" rIns="0" bIns="0" rtlCol="0" anchor="ctr"/>
+          <a:lstStyle/>
+          <a:p>
+            <a:pPr algn="ctr" indent="0" marL="0">
+              <a:buNone/>
+            </a:pPr>
+            <a:r>
+              <a:rPr lang="en-US" sz="1500" b="1" dirty="0">
+                <a:solidFill>
+                  <a:srgbClr val="E9F2FF"/>
+                </a:solidFill>
+              </a:rPr>
+              <a:t>核心判断：架构的价值不是类更多，而是每个对象只负责一类变化。</a:t>
+            </a:r>
+            <a:endParaRPr lang="en-US" sz="1500" dirty="0"/>
+          </a:p>
+        </p:txBody>
+      </p:sp>
+      <p:sp>
+        <p:nvSpPr>
+          <p:cNvPr id="25" name="Slide Number Placeholder 0"/>
+          <p:cNvSpPr>
+            <a:spLocks noGrp="1"/>
+          </p:cNvSpPr>
+          <p:nvPr>
+            <p:ph type="sldNum" sz="quarter" idx="4294967295"/>
+          </p:nvPr>
+        </p:nvSpPr>
+        <p:spPr>
+          <a:xfrm>
+            <a:off x="11814048" y="6528816"/>
+            <a:ext cx="800000" cy="300000"/>
+          </a:xfrm>
+          <a:prstGeom prst="rect">
+            <a:avLst/>
+          </a:prstGeom>
+          <a:extLst>
+            <a:ext uri="{C572A759-6A51-4108-AA02-DFA0A04FC94B}">
+              <ma14:wrappingTextBoxFlag xmlns:ma14="http://schemas.microsoft.com/office/mac/drawingml/2011/main" val="0"/>
+            </a:ext>
+          </a:extLst>
+        </p:spPr>
+        <p:txBody>
+          <a:bodyPr/>
+          <a:lstStyle>
+            <a:lvl1pPr>
+              <a:defRPr sz="800">
+                <a:solidFill>
+                  <a:srgbClr val="60758F"/>
+                </a:solidFill>
+                <a:latin typeface="Consolas"/>
+                <a:ea typeface="Consolas"/>
+                <a:cs typeface="Consolas"/>
+              </a:defRPr>
+            </a:lvl1pPr>
+          </a:lstStyle>
+          <a:p>
+            <a:pPr algn="l"/>
+            <a:fld id="{F7021451-1387-4CA6-816F-3879F97B5CBC}" type="slidenum">
+              <a:rPr b="0" lang="en-US"/>
+              <a:t>17</a:t>
             </a:fld>
             <a:endParaRPr lang="en-US"/>
           </a:p>
